--- a/workshop_slides.pptx
+++ b/workshop_slides.pptx
@@ -4363,7 +4363,7 @@
                 <a:ea typeface="Consolas" pitchFamily="34" charset="-122"/>
                 <a:cs typeface="Consolas" pitchFamily="34" charset="-120"/>
               </a:rPr>
-              <a:t>hakanotal.github.io/workshop-develop-rag-chatbot</a:t>
+              <a:t>hakanotal.github.io/workshop-rag-chatbot</a:t>
             </a:r>
             <a:pPr indent="0" marL="0">
               <a:buNone/>

--- a/workshop_slides.pptx
+++ b/workshop_slides.pptx
@@ -4,6 +4,9 @@
   <p:sldMasterIdLst>
     <p:sldMasterId id="2147483648" r:id="rId1"/>
   </p:sldMasterIdLst>
+  <p:notesMasterIdLst>
+    <p:notesMasterId r:id="rId14"/>
+  </p:notesMasterIdLst>
   <p:sldIdLst>
     <p:sldId id="256" r:id="rId2"/>
     <p:sldId id="257" r:id="rId3"/>
@@ -18,10 +21,7 @@
     <p:sldId id="266" r:id="rId12"/>
     <p:sldId id="267" r:id="rId13"/>
   </p:sldIdLst>
-  <p:notesMasterIdLst>
-    <p:notesMasterId r:id="rId14"/>
-  </p:notesMasterIdLst>
-  <p:sldSz cx="9144000" cy="5143500"/>
+  <p:sldSz cx="9144000" cy="5143500" type="screen16x9"/>
   <p:notesSz cx="5143500" cy="9144000"/>
   <p:defaultTextStyle>
     <a:lvl1pPr marL="0" algn="l" defTabSz="914400" rtl="0" eaLnBrk="1" latinLnBrk="0" hangingPunct="1">
@@ -115,6 +115,11 @@
       </a:defRPr>
     </a:lvl9pPr>
   </p:defaultTextStyle>
+  <p:extLst>
+    <p:ext uri="{EFAFB233-063F-42B5-8137-9DF3F51BA10A}">
+      <p15:sldGuideLst xmlns:p15="http://schemas.microsoft.com/office/powerpoint/2012/main"/>
+    </p:ext>
+  </p:extLst>
 </p:presentation>
 </file>
 
@@ -140,234 +145,10 @@
           <a:chExt cx="0" cy="0"/>
         </a:xfrm>
       </p:grpSpPr>
-      <p:sp>
-        <p:nvSpPr>
-          <p:cNvPr id="2" name="Header Placeholder 1"/>
-          <p:cNvSpPr>
-            <a:spLocks noGrp="1"/>
-          </p:cNvSpPr>
-          <p:nvPr>
-            <p:ph type="hdr" sz="quarter"/>
-          </p:nvPr>
-        </p:nvSpPr>
-        <p:spPr>
-          <a:xfrm>
-            <a:off x="0" y="0"/>
-            <a:ext cx="2971800" cy="458788"/>
-          </a:xfrm>
-          <a:prstGeom prst="rect">
-            <a:avLst/>
-          </a:prstGeom>
-        </p:spPr>
-        <p:txBody>
-          <a:bodyPr vert="horz" lIns="91440" tIns="45720" rIns="91440" bIns="45720" rtlCol="0"/>
-          <a:lstStyle>
-            <a:lvl1pPr algn="l">
-              <a:defRPr sz="1200"/>
-            </a:lvl1pPr>
-          </a:lstStyle>
-          <a:p>
-            <a:endParaRPr lang="en-US"/>
-          </a:p>
-        </p:txBody>
-      </p:sp>
-      <p:sp>
-        <p:nvSpPr>
-          <p:cNvPr id="3" name="Date Placeholder 2"/>
-          <p:cNvSpPr>
-            <a:spLocks noGrp="1"/>
-          </p:cNvSpPr>
-          <p:nvPr>
-            <p:ph type="dt" idx="1"/>
-          </p:nvPr>
-        </p:nvSpPr>
-        <p:spPr>
-          <a:xfrm>
-            <a:off x="3884613" y="0"/>
-            <a:ext cx="2971800" cy="458788"/>
-          </a:xfrm>
-          <a:prstGeom prst="rect">
-            <a:avLst/>
-          </a:prstGeom>
-        </p:spPr>
-        <p:txBody>
-          <a:bodyPr vert="horz" lIns="91440" tIns="45720" rIns="91440" bIns="45720" rtlCol="0"/>
-          <a:lstStyle>
-            <a:lvl1pPr algn="r">
-              <a:defRPr sz="1200"/>
-            </a:lvl1pPr>
-          </a:lstStyle>
-          <a:p>
-            <a:fld id="{5282F153-3F37-0F45-9E97-73ACFA13230C}" type="datetimeFigureOut">
-              <a:rPr lang="en-US"/>
-              <a:t>7/23/19</a:t>
-            </a:fld>
-            <a:endParaRPr lang="en-US"/>
-          </a:p>
-        </p:txBody>
-      </p:sp>
-      <p:sp>
-        <p:nvSpPr>
-          <p:cNvPr id="4" name="Slide Image Placeholder 3"/>
-          <p:cNvSpPr>
-            <a:spLocks noGrp="1" noRot="1" noChangeAspect="1"/>
-          </p:cNvSpPr>
-          <p:nvPr>
-            <p:ph type="sldImg" idx="2"/>
-          </p:nvPr>
-        </p:nvSpPr>
-        <p:spPr>
-          <a:xfrm>
-            <a:off x="685800" y="1143000"/>
-            <a:ext cx="5486400" cy="3086100"/>
-          </a:xfrm>
-          <a:prstGeom prst="rect">
-            <a:avLst/>
-          </a:prstGeom>
-          <a:noFill/>
-          <a:ln w="12700">
-            <a:solidFill>
-              <a:prstClr val="black"/>
-            </a:solidFill>
-          </a:ln>
-        </p:spPr>
-        <p:txBody>
-          <a:bodyPr vert="horz" lIns="91440" tIns="45720" rIns="91440" bIns="45720" rtlCol="0" anchor="ctr"/>
-          <a:lstStyle/>
-          <a:p>
-            <a:endParaRPr lang="en-US"/>
-          </a:p>
-        </p:txBody>
-      </p:sp>
-      <p:sp>
-        <p:nvSpPr>
-          <p:cNvPr id="5" name="Notes Placeholder 4"/>
-          <p:cNvSpPr>
-            <a:spLocks noGrp="1"/>
-          </p:cNvSpPr>
-          <p:nvPr>
-            <p:ph type="body" sz="quarter" idx="3"/>
-          </p:nvPr>
-        </p:nvSpPr>
-        <p:spPr>
-          <a:xfrm>
-            <a:off x="685800" y="4400550"/>
-            <a:ext cx="5486400" cy="3600450"/>
-          </a:xfrm>
-          <a:prstGeom prst="rect">
-            <a:avLst/>
-          </a:prstGeom>
-        </p:spPr>
-        <p:txBody>
-          <a:bodyPr vert="horz" lIns="91440" tIns="45720" rIns="91440" bIns="45720" rtlCol="0"/>
-          <a:lstStyle/>
-          <a:p>
-            <a:pPr lvl="0"/>
-            <a:r>
-              <a:rPr lang="en-US"/>
-              <a:t>Click to edit Master text styles</a:t>
-            </a:r>
-          </a:p>
-          <a:p>
-            <a:pPr lvl="1"/>
-            <a:r>
-              <a:rPr lang="en-US"/>
-              <a:t>Second level</a:t>
-            </a:r>
-          </a:p>
-          <a:p>
-            <a:pPr lvl="2"/>
-            <a:r>
-              <a:rPr lang="en-US"/>
-              <a:t>Third level</a:t>
-            </a:r>
-          </a:p>
-          <a:p>
-            <a:pPr lvl="3"/>
-            <a:r>
-              <a:rPr lang="en-US"/>
-              <a:t>Fourth level</a:t>
-            </a:r>
-          </a:p>
-          <a:p>
-            <a:pPr lvl="4"/>
-            <a:r>
-              <a:rPr lang="en-US"/>
-              <a:t>Fifth level</a:t>
-            </a:r>
-          </a:p>
-        </p:txBody>
-      </p:sp>
-      <p:sp>
-        <p:nvSpPr>
-          <p:cNvPr id="6" name="Footer Placeholder 5"/>
-          <p:cNvSpPr>
-            <a:spLocks noGrp="1"/>
-          </p:cNvSpPr>
-          <p:nvPr>
-            <p:ph type="ftr" sz="quarter" idx="4"/>
-          </p:nvPr>
-        </p:nvSpPr>
-        <p:spPr>
-          <a:xfrm>
-            <a:off x="0" y="8685213"/>
-            <a:ext cx="2971800" cy="458787"/>
-          </a:xfrm>
-          <a:prstGeom prst="rect">
-            <a:avLst/>
-          </a:prstGeom>
-        </p:spPr>
-        <p:txBody>
-          <a:bodyPr vert="horz" lIns="91440" tIns="45720" rIns="91440" bIns="45720" rtlCol="0" anchor="b"/>
-          <a:lstStyle>
-            <a:lvl1pPr algn="l">
-              <a:defRPr sz="1200"/>
-            </a:lvl1pPr>
-          </a:lstStyle>
-          <a:p>
-            <a:endParaRPr lang="en-US"/>
-          </a:p>
-        </p:txBody>
-      </p:sp>
-      <p:sp>
-        <p:nvSpPr>
-          <p:cNvPr id="7" name="Slide Number Placeholder 6"/>
-          <p:cNvSpPr>
-            <a:spLocks noGrp="1"/>
-          </p:cNvSpPr>
-          <p:nvPr>
-            <p:ph type="sldNum" sz="quarter" idx="5"/>
-          </p:nvPr>
-        </p:nvSpPr>
-        <p:spPr>
-          <a:xfrm>
-            <a:off x="3884613" y="8685213"/>
-            <a:ext cx="2971800" cy="458787"/>
-          </a:xfrm>
-          <a:prstGeom prst="rect">
-            <a:avLst/>
-          </a:prstGeom>
-        </p:spPr>
-        <p:txBody>
-          <a:bodyPr vert="horz" lIns="91440" tIns="45720" rIns="91440" bIns="45720" rtlCol="0" anchor="b"/>
-          <a:lstStyle>
-            <a:lvl1pPr algn="r">
-              <a:defRPr sz="1200"/>
-            </a:lvl1pPr>
-          </a:lstStyle>
-          <a:p>
-            <a:fld id="{CE5E9CC1-C706-0F49-92D6-E571CC5EEA8F}" type="slidenum">
-              <a:rPr lang="en-US"/>
-              <a:t>‹#›</a:t>
-            </a:fld>
-            <a:endParaRPr lang="en-US"/>
-          </a:p>
-        </p:txBody>
-      </p:sp>
     </p:spTree>
     <p:extLst>
       <p:ext uri="{BB962C8B-B14F-4D97-AF65-F5344CB8AC3E}">
-        <p14:creationId xmlns:p14="http://schemas.microsoft.com/office/powerpoint/2010/main" val="1024086991"/>
+        <p14:creationId xmlns:p14="http://schemas.microsoft.com/office/powerpoint/2010/main" val="3968595905"/>
       </p:ext>
     </p:extLst>
   </p:cSld>
@@ -512,9 +293,165 @@
           <a:lstStyle/>
           <a:p>
             <a:r>
-              <a:rPr lang="en-US" dirty="0"/>
-              <a:t/>
-            </a:r>
+              <a:rPr lang="en-US" sz="1200" b="0" kern="1200" dirty="0">
+                <a:solidFill>
+                  <a:schemeClr val="tx1"/>
+                </a:solidFill>
+                <a:effectLst/>
+                <a:latin typeface="+mn-lt"/>
+                <a:ea typeface="+mn-ea"/>
+                <a:cs typeface="+mn-cs"/>
+              </a:rPr>
+              <a:t>**Hook:** "Welcome. In the next 75 minutes we're going to build a chatbot that actually knows things — and can prove it."</a:t>
+            </a:r>
+          </a:p>
+          <a:p>
+            <a:br>
+              <a:rPr lang="en-US" sz="1200" b="0" kern="1200" dirty="0">
+                <a:solidFill>
+                  <a:schemeClr val="tx1"/>
+                </a:solidFill>
+                <a:effectLst/>
+                <a:latin typeface="+mn-lt"/>
+                <a:ea typeface="+mn-ea"/>
+                <a:cs typeface="+mn-cs"/>
+              </a:rPr>
+            </a:br>
+            <a:endParaRPr lang="en-US" sz="1200" b="0" kern="1200" dirty="0">
+              <a:solidFill>
+                <a:schemeClr val="tx1"/>
+              </a:solidFill>
+              <a:effectLst/>
+              <a:latin typeface="+mn-lt"/>
+              <a:ea typeface="+mn-ea"/>
+              <a:cs typeface="+mn-cs"/>
+            </a:endParaRPr>
+          </a:p>
+          <a:p>
+            <a:r>
+              <a:rPr lang="en-US" sz="1200" b="0" kern="1200" dirty="0">
+                <a:solidFill>
+                  <a:schemeClr val="tx1"/>
+                </a:solidFill>
+                <a:effectLst/>
+                <a:latin typeface="+mn-lt"/>
+                <a:ea typeface="+mn-ea"/>
+                <a:cs typeface="+mn-cs"/>
+              </a:rPr>
+              <a:t>- Introduce yourself briefly: Hakan, PhD student at UAlbany SUNY, Info Sciences &amp; Technology.</a:t>
+            </a:r>
+          </a:p>
+          <a:p>
+            <a:r>
+              <a:rPr lang="en-US" sz="1200" b="0" kern="1200" dirty="0">
+                <a:solidFill>
+                  <a:schemeClr val="tx1"/>
+                </a:solidFill>
+                <a:effectLst/>
+                <a:latin typeface="+mn-lt"/>
+                <a:ea typeface="+mn-ea"/>
+                <a:cs typeface="+mn-cs"/>
+              </a:rPr>
+              <a:t>- Workshop is fully hands-on. Everything runs in </a:t>
+            </a:r>
+            <a:r>
+              <a:rPr lang="en-US" sz="1200" b="0" kern="1200" dirty="0" err="1">
+                <a:solidFill>
+                  <a:schemeClr val="tx1"/>
+                </a:solidFill>
+                <a:effectLst/>
+                <a:latin typeface="+mn-lt"/>
+                <a:ea typeface="+mn-ea"/>
+                <a:cs typeface="+mn-cs"/>
+              </a:rPr>
+              <a:t>Colab</a:t>
+            </a:r>
+            <a:r>
+              <a:rPr lang="en-US" sz="1200" b="0" kern="1200" dirty="0">
+                <a:solidFill>
+                  <a:schemeClr val="tx1"/>
+                </a:solidFill>
+                <a:effectLst/>
+                <a:latin typeface="+mn-lt"/>
+                <a:ea typeface="+mn-ea"/>
+                <a:cs typeface="+mn-cs"/>
+              </a:rPr>
+              <a:t> — no install, no GPU required.</a:t>
+            </a:r>
+          </a:p>
+          <a:p>
+            <a:r>
+              <a:rPr lang="en-US" sz="1200" b="0" kern="1200" dirty="0">
+                <a:solidFill>
+                  <a:schemeClr val="tx1"/>
+                </a:solidFill>
+                <a:effectLst/>
+                <a:latin typeface="+mn-lt"/>
+                <a:ea typeface="+mn-ea"/>
+                <a:cs typeface="+mn-cs"/>
+              </a:rPr>
+              <a:t>- Goal: by the end, you'll have a working **Agentic RAG** chatbot running in your browser.</a:t>
+            </a:r>
+          </a:p>
+          <a:p>
+            <a:br>
+              <a:rPr lang="en-US" sz="1200" b="0" kern="1200" dirty="0">
+                <a:solidFill>
+                  <a:schemeClr val="tx1"/>
+                </a:solidFill>
+                <a:effectLst/>
+                <a:latin typeface="+mn-lt"/>
+                <a:ea typeface="+mn-ea"/>
+                <a:cs typeface="+mn-cs"/>
+              </a:rPr>
+            </a:br>
+            <a:endParaRPr lang="en-US" sz="1200" b="0" kern="1200" dirty="0">
+              <a:solidFill>
+                <a:schemeClr val="tx1"/>
+              </a:solidFill>
+              <a:effectLst/>
+              <a:latin typeface="+mn-lt"/>
+              <a:ea typeface="+mn-ea"/>
+              <a:cs typeface="+mn-cs"/>
+            </a:endParaRPr>
+          </a:p>
+          <a:p>
+            <a:r>
+              <a:rPr lang="en-US" sz="1200" b="0" kern="1200" dirty="0">
+                <a:solidFill>
+                  <a:schemeClr val="tx1"/>
+                </a:solidFill>
+                <a:effectLst/>
+                <a:latin typeface="+mn-lt"/>
+                <a:ea typeface="+mn-ea"/>
+                <a:cs typeface="+mn-cs"/>
+              </a:rPr>
+              <a:t>**Transition:** "Here's how the next hour is going to flow."</a:t>
+            </a:r>
+          </a:p>
+          <a:p>
+            <a:br>
+              <a:rPr lang="en-US" sz="1200" b="0" kern="1200" dirty="0">
+                <a:solidFill>
+                  <a:schemeClr val="tx1"/>
+                </a:solidFill>
+                <a:effectLst/>
+                <a:latin typeface="+mn-lt"/>
+                <a:ea typeface="+mn-ea"/>
+                <a:cs typeface="+mn-cs"/>
+              </a:rPr>
+            </a:br>
+            <a:endParaRPr lang="en-US" sz="1200" b="0" kern="1200" dirty="0">
+              <a:solidFill>
+                <a:schemeClr val="tx1"/>
+              </a:solidFill>
+              <a:effectLst/>
+              <a:latin typeface="+mn-lt"/>
+              <a:ea typeface="+mn-ea"/>
+              <a:cs typeface="+mn-cs"/>
+            </a:endParaRPr>
+          </a:p>
+          <a:p>
             <a:endParaRPr lang="en-US" dirty="0"/>
           </a:p>
         </p:txBody>
@@ -599,10 +536,290 @@
           <a:bodyPr/>
           <a:lstStyle/>
           <a:p>
-            <a:r>
-              <a:rPr lang="en-US" dirty="0"/>
-              <a:t/>
-            </a:r>
+            <a:br>
+              <a:rPr lang="en-US" sz="1200" b="0" kern="1200" dirty="0">
+                <a:solidFill>
+                  <a:schemeClr val="tx1"/>
+                </a:solidFill>
+                <a:effectLst/>
+                <a:latin typeface="+mn-lt"/>
+                <a:ea typeface="+mn-ea"/>
+                <a:cs typeface="+mn-cs"/>
+              </a:rPr>
+            </a:br>
+            <a:endParaRPr lang="en-US" sz="1200" b="0" kern="1200" dirty="0">
+              <a:solidFill>
+                <a:schemeClr val="tx1"/>
+              </a:solidFill>
+              <a:effectLst/>
+              <a:latin typeface="+mn-lt"/>
+              <a:ea typeface="+mn-ea"/>
+              <a:cs typeface="+mn-cs"/>
+            </a:endParaRPr>
+          </a:p>
+          <a:p>
+            <a:r>
+              <a:rPr lang="en-US" sz="1200" b="0" kern="1200" dirty="0">
+                <a:solidFill>
+                  <a:schemeClr val="tx1"/>
+                </a:solidFill>
+                <a:effectLst/>
+                <a:latin typeface="+mn-lt"/>
+                <a:ea typeface="+mn-ea"/>
+                <a:cs typeface="+mn-cs"/>
+              </a:rPr>
+              <a:t>**Hook:** "You can't just eyeball a RAG system. You need metrics, and you need defenses."</a:t>
+            </a:r>
+          </a:p>
+          <a:p>
+            <a:br>
+              <a:rPr lang="en-US" sz="1200" b="0" kern="1200" dirty="0">
+                <a:solidFill>
+                  <a:schemeClr val="tx1"/>
+                </a:solidFill>
+                <a:effectLst/>
+                <a:latin typeface="+mn-lt"/>
+                <a:ea typeface="+mn-ea"/>
+                <a:cs typeface="+mn-cs"/>
+              </a:rPr>
+            </a:br>
+            <a:endParaRPr lang="en-US" sz="1200" b="0" kern="1200" dirty="0">
+              <a:solidFill>
+                <a:schemeClr val="tx1"/>
+              </a:solidFill>
+              <a:effectLst/>
+              <a:latin typeface="+mn-lt"/>
+              <a:ea typeface="+mn-ea"/>
+              <a:cs typeface="+mn-cs"/>
+            </a:endParaRPr>
+          </a:p>
+          <a:p>
+            <a:r>
+              <a:rPr lang="en-US" sz="1200" b="0" kern="1200" dirty="0">
+                <a:solidFill>
+                  <a:schemeClr val="tx1"/>
+                </a:solidFill>
+                <a:effectLst/>
+                <a:latin typeface="+mn-lt"/>
+                <a:ea typeface="+mn-ea"/>
+                <a:cs typeface="+mn-cs"/>
+              </a:rPr>
+              <a:t>- **Four core Ragas metrics:**</a:t>
+            </a:r>
+          </a:p>
+          <a:p>
+            <a:r>
+              <a:rPr lang="en-US" sz="1200" b="0" kern="1200" dirty="0">
+                <a:solidFill>
+                  <a:schemeClr val="tx1"/>
+                </a:solidFill>
+                <a:effectLst/>
+                <a:latin typeface="+mn-lt"/>
+                <a:ea typeface="+mn-ea"/>
+                <a:cs typeface="+mn-cs"/>
+              </a:rPr>
+              <a:t>- **Faithfulness** — is every claim in the answer supported by the retrieved context?</a:t>
+            </a:r>
+          </a:p>
+          <a:p>
+            <a:r>
+              <a:rPr lang="en-US" sz="1200" b="0" kern="1200" dirty="0">
+                <a:solidFill>
+                  <a:schemeClr val="tx1"/>
+                </a:solidFill>
+                <a:effectLst/>
+                <a:latin typeface="+mn-lt"/>
+                <a:ea typeface="+mn-ea"/>
+                <a:cs typeface="+mn-cs"/>
+              </a:rPr>
+              <a:t>- **Answer Relevancy** — does the answer actually address the question?</a:t>
+            </a:r>
+          </a:p>
+          <a:p>
+            <a:r>
+              <a:rPr lang="en-US" sz="1200" b="0" kern="1200" dirty="0">
+                <a:solidFill>
+                  <a:schemeClr val="tx1"/>
+                </a:solidFill>
+                <a:effectLst/>
+                <a:latin typeface="+mn-lt"/>
+                <a:ea typeface="+mn-ea"/>
+                <a:cs typeface="+mn-cs"/>
+              </a:rPr>
+              <a:t>- **Context Precision** — are the retrieved chunks useful?</a:t>
+            </a:r>
+          </a:p>
+          <a:p>
+            <a:r>
+              <a:rPr lang="en-US" sz="1200" b="0" kern="1200" dirty="0">
+                <a:solidFill>
+                  <a:schemeClr val="tx1"/>
+                </a:solidFill>
+                <a:effectLst/>
+                <a:latin typeface="+mn-lt"/>
+                <a:ea typeface="+mn-ea"/>
+                <a:cs typeface="+mn-cs"/>
+              </a:rPr>
+              <a:t>- **Context Recall** — did we retrieve everything we needed?</a:t>
+            </a:r>
+          </a:p>
+          <a:p>
+            <a:r>
+              <a:rPr lang="en-US" sz="1200" b="0" kern="1200" dirty="0">
+                <a:solidFill>
+                  <a:schemeClr val="tx1"/>
+                </a:solidFill>
+                <a:effectLst/>
+                <a:latin typeface="+mn-lt"/>
+                <a:ea typeface="+mn-ea"/>
+                <a:cs typeface="+mn-cs"/>
+              </a:rPr>
+              <a:t>- **Defense stack** (in order of ROI):</a:t>
+            </a:r>
+          </a:p>
+          <a:p>
+            <a:r>
+              <a:rPr lang="en-US" sz="1200" b="0" kern="1200" dirty="0">
+                <a:solidFill>
+                  <a:schemeClr val="tx1"/>
+                </a:solidFill>
+                <a:effectLst/>
+                <a:latin typeface="+mn-lt"/>
+                <a:ea typeface="+mn-ea"/>
+                <a:cs typeface="+mn-cs"/>
+              </a:rPr>
+              <a:t>- Strict grounding prompt ("answer only from context").</a:t>
+            </a:r>
+          </a:p>
+          <a:p>
+            <a:r>
+              <a:rPr lang="en-US" sz="1200" b="0" kern="1200" dirty="0">
+                <a:solidFill>
+                  <a:schemeClr val="tx1"/>
+                </a:solidFill>
+                <a:effectLst/>
+                <a:latin typeface="+mn-lt"/>
+                <a:ea typeface="+mn-ea"/>
+                <a:cs typeface="+mn-cs"/>
+              </a:rPr>
+              <a:t>- Explicit "I don't know" escape hatch.</a:t>
+            </a:r>
+          </a:p>
+          <a:p>
+            <a:r>
+              <a:rPr lang="en-US" sz="1200" b="0" kern="1200" dirty="0">
+                <a:solidFill>
+                  <a:schemeClr val="tx1"/>
+                </a:solidFill>
+                <a:effectLst/>
+                <a:latin typeface="+mn-lt"/>
+                <a:ea typeface="+mn-ea"/>
+                <a:cs typeface="+mn-cs"/>
+              </a:rPr>
+              <a:t>- Require citations / direct quotes.</a:t>
+            </a:r>
+          </a:p>
+          <a:p>
+            <a:r>
+              <a:rPr lang="en-US" sz="1200" b="0" kern="1200" dirty="0">
+                <a:solidFill>
+                  <a:schemeClr val="tx1"/>
+                </a:solidFill>
+                <a:effectLst/>
+                <a:latin typeface="+mn-lt"/>
+                <a:ea typeface="+mn-ea"/>
+                <a:cs typeface="+mn-cs"/>
+              </a:rPr>
+              <a:t>- Verifier agent (second LLM pass).</a:t>
+            </a:r>
+          </a:p>
+          <a:p>
+            <a:r>
+              <a:rPr lang="en-US" sz="1200" b="0" kern="1200" dirty="0">
+                <a:solidFill>
+                  <a:schemeClr val="tx1"/>
+                </a:solidFill>
+                <a:effectLst/>
+                <a:latin typeface="+mn-lt"/>
+                <a:ea typeface="+mn-ea"/>
+                <a:cs typeface="+mn-cs"/>
+              </a:rPr>
+              <a:t>- Guardrails: structured output, PII scrubbing.</a:t>
+            </a:r>
+          </a:p>
+          <a:p>
+            <a:r>
+              <a:rPr lang="en-US" sz="1200" b="0" kern="1200" dirty="0">
+                <a:solidFill>
+                  <a:schemeClr val="tx1"/>
+                </a:solidFill>
+                <a:effectLst/>
+                <a:latin typeface="+mn-lt"/>
+                <a:ea typeface="+mn-ea"/>
+                <a:cs typeface="+mn-cs"/>
+              </a:rPr>
+              <a:t>- **Rule of thumb:** prompting gets you 80%. The rest is verification, eval, and ops.</a:t>
+            </a:r>
+          </a:p>
+          <a:p>
+            <a:br>
+              <a:rPr lang="en-US" sz="1200" b="0" kern="1200" dirty="0">
+                <a:solidFill>
+                  <a:schemeClr val="tx1"/>
+                </a:solidFill>
+                <a:effectLst/>
+                <a:latin typeface="+mn-lt"/>
+                <a:ea typeface="+mn-ea"/>
+                <a:cs typeface="+mn-cs"/>
+              </a:rPr>
+            </a:br>
+            <a:endParaRPr lang="en-US" sz="1200" b="0" kern="1200" dirty="0">
+              <a:solidFill>
+                <a:schemeClr val="tx1"/>
+              </a:solidFill>
+              <a:effectLst/>
+              <a:latin typeface="+mn-lt"/>
+              <a:ea typeface="+mn-ea"/>
+              <a:cs typeface="+mn-cs"/>
+            </a:endParaRPr>
+          </a:p>
+          <a:p>
+            <a:r>
+              <a:rPr lang="en-US" sz="1200" b="0" kern="1200" dirty="0">
+                <a:solidFill>
+                  <a:schemeClr val="tx1"/>
+                </a:solidFill>
+                <a:effectLst/>
+                <a:latin typeface="+mn-lt"/>
+                <a:ea typeface="+mn-ea"/>
+                <a:cs typeface="+mn-cs"/>
+              </a:rPr>
+              <a:t>**Transition:** "OK — enough theory. Here's exactly what we're about to build, step by step."</a:t>
+            </a:r>
+          </a:p>
+          <a:p>
+            <a:br>
+              <a:rPr lang="en-US" sz="1200" b="0" kern="1200" dirty="0">
+                <a:solidFill>
+                  <a:schemeClr val="tx1"/>
+                </a:solidFill>
+                <a:effectLst/>
+                <a:latin typeface="+mn-lt"/>
+                <a:ea typeface="+mn-ea"/>
+                <a:cs typeface="+mn-cs"/>
+              </a:rPr>
+            </a:br>
+            <a:endParaRPr lang="en-US" sz="1200" b="0" kern="1200" dirty="0">
+              <a:solidFill>
+                <a:schemeClr val="tx1"/>
+              </a:solidFill>
+              <a:effectLst/>
+              <a:latin typeface="+mn-lt"/>
+              <a:ea typeface="+mn-ea"/>
+              <a:cs typeface="+mn-cs"/>
+            </a:endParaRPr>
+          </a:p>
+          <a:p>
             <a:endParaRPr lang="en-US" dirty="0"/>
           </a:p>
         </p:txBody>
@@ -687,10 +904,428 @@
           <a:bodyPr/>
           <a:lstStyle/>
           <a:p>
-            <a:r>
-              <a:rPr lang="en-US" dirty="0"/>
-              <a:t/>
-            </a:r>
+            <a:br>
+              <a:rPr lang="en-US" sz="1200" b="0" kern="1200" dirty="0">
+                <a:solidFill>
+                  <a:schemeClr val="tx1"/>
+                </a:solidFill>
+                <a:effectLst/>
+                <a:latin typeface="+mn-lt"/>
+                <a:ea typeface="+mn-ea"/>
+                <a:cs typeface="+mn-cs"/>
+              </a:rPr>
+            </a:br>
+            <a:endParaRPr lang="en-US" sz="1200" b="0" kern="1200" dirty="0">
+              <a:solidFill>
+                <a:schemeClr val="tx1"/>
+              </a:solidFill>
+              <a:effectLst/>
+              <a:latin typeface="+mn-lt"/>
+              <a:ea typeface="+mn-ea"/>
+              <a:cs typeface="+mn-cs"/>
+            </a:endParaRPr>
+          </a:p>
+          <a:p>
+            <a:r>
+              <a:rPr lang="en-US" sz="1200" b="0" kern="1200" dirty="0">
+                <a:solidFill>
+                  <a:schemeClr val="tx1"/>
+                </a:solidFill>
+                <a:effectLst/>
+                <a:latin typeface="+mn-lt"/>
+                <a:ea typeface="+mn-ea"/>
+                <a:cs typeface="+mn-cs"/>
+              </a:rPr>
+              <a:t>**Hook:** "Eight numbered sections in the notebook. We'll work through them together."</a:t>
+            </a:r>
+          </a:p>
+          <a:p>
+            <a:br>
+              <a:rPr lang="en-US" sz="1200" b="0" kern="1200" dirty="0">
+                <a:solidFill>
+                  <a:schemeClr val="tx1"/>
+                </a:solidFill>
+                <a:effectLst/>
+                <a:latin typeface="+mn-lt"/>
+                <a:ea typeface="+mn-ea"/>
+                <a:cs typeface="+mn-cs"/>
+              </a:rPr>
+            </a:br>
+            <a:endParaRPr lang="en-US" sz="1200" b="0" kern="1200" dirty="0">
+              <a:solidFill>
+                <a:schemeClr val="tx1"/>
+              </a:solidFill>
+              <a:effectLst/>
+              <a:latin typeface="+mn-lt"/>
+              <a:ea typeface="+mn-ea"/>
+              <a:cs typeface="+mn-cs"/>
+            </a:endParaRPr>
+          </a:p>
+          <a:p>
+            <a:r>
+              <a:rPr lang="en-US" sz="1200" b="0" kern="1200" dirty="0">
+                <a:solidFill>
+                  <a:schemeClr val="tx1"/>
+                </a:solidFill>
+                <a:effectLst/>
+                <a:latin typeface="+mn-lt"/>
+                <a:ea typeface="+mn-ea"/>
+                <a:cs typeface="+mn-cs"/>
+              </a:rPr>
+              <a:t>Walk the grid quickly — don't dwell:</a:t>
+            </a:r>
+          </a:p>
+          <a:p>
+            <a:br>
+              <a:rPr lang="en-US" sz="1200" b="0" kern="1200" dirty="0">
+                <a:solidFill>
+                  <a:schemeClr val="tx1"/>
+                </a:solidFill>
+                <a:effectLst/>
+                <a:latin typeface="+mn-lt"/>
+                <a:ea typeface="+mn-ea"/>
+                <a:cs typeface="+mn-cs"/>
+              </a:rPr>
+            </a:br>
+            <a:endParaRPr lang="en-US" sz="1200" b="0" kern="1200" dirty="0">
+              <a:solidFill>
+                <a:schemeClr val="tx1"/>
+              </a:solidFill>
+              <a:effectLst/>
+              <a:latin typeface="+mn-lt"/>
+              <a:ea typeface="+mn-ea"/>
+              <a:cs typeface="+mn-cs"/>
+            </a:endParaRPr>
+          </a:p>
+          <a:p>
+            <a:r>
+              <a:rPr lang="en-US" sz="1200" b="0" kern="1200" dirty="0">
+                <a:solidFill>
+                  <a:schemeClr val="tx1"/>
+                </a:solidFill>
+                <a:effectLst/>
+                <a:latin typeface="+mn-lt"/>
+                <a:ea typeface="+mn-ea"/>
+                <a:cs typeface="+mn-cs"/>
+              </a:rPr>
+              <a:t>- **§0 Setup** — </a:t>
+            </a:r>
+            <a:r>
+              <a:rPr lang="en-US" sz="1200" b="0" kern="1200" dirty="0" err="1">
+                <a:solidFill>
+                  <a:schemeClr val="tx1"/>
+                </a:solidFill>
+                <a:effectLst/>
+                <a:latin typeface="+mn-lt"/>
+                <a:ea typeface="+mn-ea"/>
+                <a:cs typeface="+mn-cs"/>
+              </a:rPr>
+              <a:t>Ollama</a:t>
+            </a:r>
+            <a:r>
+              <a:rPr lang="en-US" sz="1200" b="0" kern="1200" dirty="0">
+                <a:solidFill>
+                  <a:schemeClr val="tx1"/>
+                </a:solidFill>
+                <a:effectLst/>
+                <a:latin typeface="+mn-lt"/>
+                <a:ea typeface="+mn-ea"/>
+                <a:cs typeface="+mn-cs"/>
+              </a:rPr>
+              <a:t> on </a:t>
+            </a:r>
+            <a:r>
+              <a:rPr lang="en-US" sz="1200" b="0" kern="1200" dirty="0" err="1">
+                <a:solidFill>
+                  <a:schemeClr val="tx1"/>
+                </a:solidFill>
+                <a:effectLst/>
+                <a:latin typeface="+mn-lt"/>
+                <a:ea typeface="+mn-ea"/>
+                <a:cs typeface="+mn-cs"/>
+              </a:rPr>
+              <a:t>Colab</a:t>
+            </a:r>
+            <a:r>
+              <a:rPr lang="en-US" sz="1200" b="0" kern="1200" dirty="0">
+                <a:solidFill>
+                  <a:schemeClr val="tx1"/>
+                </a:solidFill>
+                <a:effectLst/>
+                <a:latin typeface="+mn-lt"/>
+                <a:ea typeface="+mn-ea"/>
+                <a:cs typeface="+mn-cs"/>
+              </a:rPr>
+              <a:t> + deps.</a:t>
+            </a:r>
+          </a:p>
+          <a:p>
+            <a:r>
+              <a:rPr lang="en-US" sz="1200" b="0" kern="1200" dirty="0">
+                <a:solidFill>
+                  <a:schemeClr val="tx1"/>
+                </a:solidFill>
+                <a:effectLst/>
+                <a:latin typeface="+mn-lt"/>
+                <a:ea typeface="+mn-ea"/>
+                <a:cs typeface="+mn-cs"/>
+              </a:rPr>
+              <a:t>- **§1 Plain LLM chat** — show the hallucination live.</a:t>
+            </a:r>
+          </a:p>
+          <a:p>
+            <a:r>
+              <a:rPr lang="en-US" sz="1200" b="0" kern="1200" dirty="0">
+                <a:solidFill>
+                  <a:schemeClr val="tx1"/>
+                </a:solidFill>
+                <a:effectLst/>
+                <a:latin typeface="+mn-lt"/>
+                <a:ea typeface="+mn-ea"/>
+                <a:cs typeface="+mn-cs"/>
+              </a:rPr>
+              <a:t>- **§2 Chunk Frankenstein** — </a:t>
+            </a:r>
+            <a:r>
+              <a:rPr lang="en-US" sz="1200" b="0" kern="1200" dirty="0" err="1">
+                <a:solidFill>
+                  <a:schemeClr val="tx1"/>
+                </a:solidFill>
+                <a:effectLst/>
+                <a:latin typeface="+mn-lt"/>
+                <a:ea typeface="+mn-ea"/>
+                <a:cs typeface="+mn-cs"/>
+              </a:rPr>
+              <a:t>LangChain</a:t>
+            </a:r>
+            <a:r>
+              <a:rPr lang="en-US" sz="1200" b="0" kern="1200" dirty="0">
+                <a:solidFill>
+                  <a:schemeClr val="tx1"/>
+                </a:solidFill>
+                <a:effectLst/>
+                <a:latin typeface="+mn-lt"/>
+                <a:ea typeface="+mn-ea"/>
+                <a:cs typeface="+mn-cs"/>
+              </a:rPr>
+              <a:t> recursive splitter.</a:t>
+            </a:r>
+          </a:p>
+          <a:p>
+            <a:r>
+              <a:rPr lang="en-US" sz="1200" b="0" kern="1200" dirty="0">
+                <a:solidFill>
+                  <a:schemeClr val="tx1"/>
+                </a:solidFill>
+                <a:effectLst/>
+                <a:latin typeface="+mn-lt"/>
+                <a:ea typeface="+mn-ea"/>
+                <a:cs typeface="+mn-cs"/>
+              </a:rPr>
+              <a:t>- **§3 Embed &amp; store** — Nomic embeddings + </a:t>
+            </a:r>
+            <a:r>
+              <a:rPr lang="en-US" sz="1200" b="0" kern="1200" dirty="0" err="1">
+                <a:solidFill>
+                  <a:schemeClr val="tx1"/>
+                </a:solidFill>
+                <a:effectLst/>
+                <a:latin typeface="+mn-lt"/>
+                <a:ea typeface="+mn-ea"/>
+                <a:cs typeface="+mn-cs"/>
+              </a:rPr>
+              <a:t>ChromaDB</a:t>
+            </a:r>
+            <a:r>
+              <a:rPr lang="en-US" sz="1200" b="0" kern="1200" dirty="0">
+                <a:solidFill>
+                  <a:schemeClr val="tx1"/>
+                </a:solidFill>
+                <a:effectLst/>
+                <a:latin typeface="+mn-lt"/>
+                <a:ea typeface="+mn-ea"/>
+                <a:cs typeface="+mn-cs"/>
+              </a:rPr>
+              <a:t>.</a:t>
+            </a:r>
+          </a:p>
+          <a:p>
+            <a:r>
+              <a:rPr lang="en-US" sz="1200" b="0" kern="1200" dirty="0">
+                <a:solidFill>
+                  <a:schemeClr val="tx1"/>
+                </a:solidFill>
+                <a:effectLst/>
+                <a:latin typeface="+mn-lt"/>
+                <a:ea typeface="+mn-ea"/>
+                <a:cs typeface="+mn-cs"/>
+              </a:rPr>
+              <a:t>- **§4 Simple RAG chain** — LCEL with strict grounding.</a:t>
+            </a:r>
+          </a:p>
+          <a:p>
+            <a:r>
+              <a:rPr lang="en-US" sz="1200" b="0" kern="1200" dirty="0">
+                <a:solidFill>
+                  <a:schemeClr val="tx1"/>
+                </a:solidFill>
+                <a:effectLst/>
+                <a:latin typeface="+mn-lt"/>
+                <a:ea typeface="+mn-ea"/>
+                <a:cs typeface="+mn-cs"/>
+              </a:rPr>
+              <a:t>- **§5 Agentic RAG** — </a:t>
+            </a:r>
+            <a:r>
+              <a:rPr lang="en-US" sz="1200" b="0" kern="1200" dirty="0" err="1">
+                <a:solidFill>
+                  <a:schemeClr val="tx1"/>
+                </a:solidFill>
+                <a:effectLst/>
+                <a:latin typeface="+mn-lt"/>
+                <a:ea typeface="+mn-ea"/>
+                <a:cs typeface="+mn-cs"/>
+              </a:rPr>
+              <a:t>CrewAI</a:t>
+            </a:r>
+            <a:r>
+              <a:rPr lang="en-US" sz="1200" b="0" kern="1200" dirty="0">
+                <a:solidFill>
+                  <a:schemeClr val="tx1"/>
+                </a:solidFill>
+                <a:effectLst/>
+                <a:latin typeface="+mn-lt"/>
+                <a:ea typeface="+mn-ea"/>
+                <a:cs typeface="+mn-cs"/>
+              </a:rPr>
+              <a:t> with Retriever + Verifier.</a:t>
+            </a:r>
+          </a:p>
+          <a:p>
+            <a:r>
+              <a:rPr lang="en-US" sz="1200" b="0" kern="1200" dirty="0">
+                <a:solidFill>
+                  <a:schemeClr val="tx1"/>
+                </a:solidFill>
+                <a:effectLst/>
+                <a:latin typeface="+mn-lt"/>
+                <a:ea typeface="+mn-ea"/>
+                <a:cs typeface="+mn-cs"/>
+              </a:rPr>
+              <a:t>- **§6 </a:t>
+            </a:r>
+            <a:r>
+              <a:rPr lang="en-US" sz="1200" b="0" kern="1200" dirty="0" err="1">
+                <a:solidFill>
+                  <a:schemeClr val="tx1"/>
+                </a:solidFill>
+                <a:effectLst/>
+                <a:latin typeface="+mn-lt"/>
+                <a:ea typeface="+mn-ea"/>
+                <a:cs typeface="+mn-cs"/>
+              </a:rPr>
+              <a:t>Gradio</a:t>
+            </a:r>
+            <a:r>
+              <a:rPr lang="en-US" sz="1200" b="0" kern="1200" dirty="0">
+                <a:solidFill>
+                  <a:schemeClr val="tx1"/>
+                </a:solidFill>
+                <a:effectLst/>
+                <a:latin typeface="+mn-lt"/>
+                <a:ea typeface="+mn-ea"/>
+                <a:cs typeface="+mn-cs"/>
+              </a:rPr>
+              <a:t> chat UI** — public shareable link.</a:t>
+            </a:r>
+          </a:p>
+          <a:p>
+            <a:r>
+              <a:rPr lang="en-US" sz="1200" b="0" kern="1200" dirty="0">
+                <a:solidFill>
+                  <a:schemeClr val="tx1"/>
+                </a:solidFill>
+                <a:effectLst/>
+                <a:latin typeface="+mn-lt"/>
+                <a:ea typeface="+mn-ea"/>
+                <a:cs typeface="+mn-cs"/>
+              </a:rPr>
+              <a:t>- **§7 Head-to-head compare** — Plain vs Simple vs Agentic on the same questions.</a:t>
+            </a:r>
+          </a:p>
+          <a:p>
+            <a:r>
+              <a:rPr lang="en-US" sz="1200" b="0" kern="1200" dirty="0">
+                <a:solidFill>
+                  <a:schemeClr val="tx1"/>
+                </a:solidFill>
+                <a:effectLst/>
+                <a:latin typeface="+mn-lt"/>
+                <a:ea typeface="+mn-ea"/>
+                <a:cs typeface="+mn-cs"/>
+              </a:rPr>
+              <a:t>- **The finale:** the famous hallucination question — *"What is the monster's name?"* — and we watch the three systems handle it very differently.</a:t>
+            </a:r>
+          </a:p>
+          <a:p>
+            <a:br>
+              <a:rPr lang="en-US" sz="1200" b="0" kern="1200" dirty="0">
+                <a:solidFill>
+                  <a:schemeClr val="tx1"/>
+                </a:solidFill>
+                <a:effectLst/>
+                <a:latin typeface="+mn-lt"/>
+                <a:ea typeface="+mn-ea"/>
+                <a:cs typeface="+mn-cs"/>
+              </a:rPr>
+            </a:br>
+            <a:endParaRPr lang="en-US" sz="1200" b="0" kern="1200" dirty="0">
+              <a:solidFill>
+                <a:schemeClr val="tx1"/>
+              </a:solidFill>
+              <a:effectLst/>
+              <a:latin typeface="+mn-lt"/>
+              <a:ea typeface="+mn-ea"/>
+              <a:cs typeface="+mn-cs"/>
+            </a:endParaRPr>
+          </a:p>
+          <a:p>
+            <a:r>
+              <a:rPr lang="en-US" sz="1200" b="0" kern="1200" dirty="0">
+                <a:solidFill>
+                  <a:schemeClr val="tx1"/>
+                </a:solidFill>
+                <a:effectLst/>
+                <a:latin typeface="+mn-lt"/>
+                <a:ea typeface="+mn-ea"/>
+                <a:cs typeface="+mn-cs"/>
+              </a:rPr>
+              <a:t>**Transition:** "Open the workshop page and let's go."</a:t>
+            </a:r>
+          </a:p>
+          <a:p>
+            <a:br>
+              <a:rPr lang="en-US" sz="1200" b="0" kern="1200" dirty="0">
+                <a:solidFill>
+                  <a:schemeClr val="tx1"/>
+                </a:solidFill>
+                <a:effectLst/>
+                <a:latin typeface="+mn-lt"/>
+                <a:ea typeface="+mn-ea"/>
+                <a:cs typeface="+mn-cs"/>
+              </a:rPr>
+            </a:br>
+            <a:endParaRPr lang="en-US" sz="1200" b="0" kern="1200" dirty="0">
+              <a:solidFill>
+                <a:schemeClr val="tx1"/>
+              </a:solidFill>
+              <a:effectLst/>
+              <a:latin typeface="+mn-lt"/>
+              <a:ea typeface="+mn-ea"/>
+              <a:cs typeface="+mn-cs"/>
+            </a:endParaRPr>
+          </a:p>
+          <a:p>
             <a:endParaRPr lang="en-US" dirty="0"/>
           </a:p>
         </p:txBody>
@@ -775,10 +1410,250 @@
           <a:bodyPr/>
           <a:lstStyle/>
           <a:p>
-            <a:r>
-              <a:rPr lang="en-US" dirty="0"/>
-              <a:t/>
-            </a:r>
+            <a:br>
+              <a:rPr lang="en-US" sz="1200" b="0" kern="1200" dirty="0">
+                <a:solidFill>
+                  <a:schemeClr val="tx1"/>
+                </a:solidFill>
+                <a:effectLst/>
+                <a:latin typeface="+mn-lt"/>
+                <a:ea typeface="+mn-ea"/>
+                <a:cs typeface="+mn-cs"/>
+              </a:rPr>
+            </a:br>
+            <a:endParaRPr lang="en-US" sz="1200" b="0" kern="1200" dirty="0">
+              <a:solidFill>
+                <a:schemeClr val="tx1"/>
+              </a:solidFill>
+              <a:effectLst/>
+              <a:latin typeface="+mn-lt"/>
+              <a:ea typeface="+mn-ea"/>
+              <a:cs typeface="+mn-cs"/>
+            </a:endParaRPr>
+          </a:p>
+          <a:p>
+            <a:r>
+              <a:rPr lang="en-US" sz="1200" b="0" kern="1200" dirty="0">
+                <a:solidFill>
+                  <a:schemeClr val="tx1"/>
+                </a:solidFill>
+                <a:effectLst/>
+                <a:latin typeface="+mn-lt"/>
+                <a:ea typeface="+mn-ea"/>
+                <a:cs typeface="+mn-cs"/>
+              </a:rPr>
+              <a:t>**Hook:** "Three steps to get running."</a:t>
+            </a:r>
+          </a:p>
+          <a:p>
+            <a:br>
+              <a:rPr lang="en-US" sz="1200" b="0" kern="1200" dirty="0">
+                <a:solidFill>
+                  <a:schemeClr val="tx1"/>
+                </a:solidFill>
+                <a:effectLst/>
+                <a:latin typeface="+mn-lt"/>
+                <a:ea typeface="+mn-ea"/>
+                <a:cs typeface="+mn-cs"/>
+              </a:rPr>
+            </a:br>
+            <a:endParaRPr lang="en-US" sz="1200" b="0" kern="1200" dirty="0">
+              <a:solidFill>
+                <a:schemeClr val="tx1"/>
+              </a:solidFill>
+              <a:effectLst/>
+              <a:latin typeface="+mn-lt"/>
+              <a:ea typeface="+mn-ea"/>
+              <a:cs typeface="+mn-cs"/>
+            </a:endParaRPr>
+          </a:p>
+          <a:p>
+            <a:r>
+              <a:rPr lang="en-US" sz="1200" b="0" kern="1200" dirty="0">
+                <a:solidFill>
+                  <a:schemeClr val="tx1"/>
+                </a:solidFill>
+                <a:effectLst/>
+                <a:latin typeface="+mn-lt"/>
+                <a:ea typeface="+mn-ea"/>
+                <a:cs typeface="+mn-cs"/>
+              </a:rPr>
+              <a:t>- Open **`</a:t>
+            </a:r>
+            <a:r>
+              <a:rPr lang="en-US" sz="1200" b="0" kern="1200" dirty="0" err="1">
+                <a:solidFill>
+                  <a:schemeClr val="tx1"/>
+                </a:solidFill>
+                <a:effectLst/>
+                <a:latin typeface="+mn-lt"/>
+                <a:ea typeface="+mn-ea"/>
+                <a:cs typeface="+mn-cs"/>
+              </a:rPr>
+              <a:t>hakanotal.github.io</a:t>
+            </a:r>
+            <a:r>
+              <a:rPr lang="en-US" sz="1200" b="0" kern="1200" dirty="0">
+                <a:solidFill>
+                  <a:schemeClr val="tx1"/>
+                </a:solidFill>
+                <a:effectLst/>
+                <a:latin typeface="+mn-lt"/>
+                <a:ea typeface="+mn-ea"/>
+                <a:cs typeface="+mn-cs"/>
+              </a:rPr>
+              <a:t>/workshop-rag-chatbot`** in your browser.</a:t>
+            </a:r>
+          </a:p>
+          <a:p>
+            <a:r>
+              <a:rPr lang="en-US" sz="1200" b="0" kern="1200" dirty="0">
+                <a:solidFill>
+                  <a:schemeClr val="tx1"/>
+                </a:solidFill>
+                <a:effectLst/>
+                <a:latin typeface="+mn-lt"/>
+                <a:ea typeface="+mn-ea"/>
+                <a:cs typeface="+mn-cs"/>
+              </a:rPr>
+              <a:t>- Click **"Open notebook in </a:t>
+            </a:r>
+            <a:r>
+              <a:rPr lang="en-US" sz="1200" b="0" kern="1200" dirty="0" err="1">
+                <a:solidFill>
+                  <a:schemeClr val="tx1"/>
+                </a:solidFill>
+                <a:effectLst/>
+                <a:latin typeface="+mn-lt"/>
+                <a:ea typeface="+mn-ea"/>
+                <a:cs typeface="+mn-cs"/>
+              </a:rPr>
+              <a:t>Colab</a:t>
+            </a:r>
+            <a:r>
+              <a:rPr lang="en-US" sz="1200" b="0" kern="1200" dirty="0">
+                <a:solidFill>
+                  <a:schemeClr val="tx1"/>
+                </a:solidFill>
+                <a:effectLst/>
+                <a:latin typeface="+mn-lt"/>
+                <a:ea typeface="+mn-ea"/>
+                <a:cs typeface="+mn-cs"/>
+              </a:rPr>
+              <a:t>"**.</a:t>
+            </a:r>
+          </a:p>
+          <a:p>
+            <a:r>
+              <a:rPr lang="en-US" sz="1200" b="0" kern="1200" dirty="0">
+                <a:solidFill>
+                  <a:schemeClr val="tx1"/>
+                </a:solidFill>
+                <a:effectLst/>
+                <a:latin typeface="+mn-lt"/>
+                <a:ea typeface="+mn-ea"/>
+                <a:cs typeface="+mn-cs"/>
+              </a:rPr>
+              <a:t>- In </a:t>
+            </a:r>
+            <a:r>
+              <a:rPr lang="en-US" sz="1200" b="0" kern="1200" dirty="0" err="1">
+                <a:solidFill>
+                  <a:schemeClr val="tx1"/>
+                </a:solidFill>
+                <a:effectLst/>
+                <a:latin typeface="+mn-lt"/>
+                <a:ea typeface="+mn-ea"/>
+                <a:cs typeface="+mn-cs"/>
+              </a:rPr>
+              <a:t>Colab</a:t>
+            </a:r>
+            <a:r>
+              <a:rPr lang="en-US" sz="1200" b="0" kern="1200" dirty="0">
+                <a:solidFill>
+                  <a:schemeClr val="tx1"/>
+                </a:solidFill>
+                <a:effectLst/>
+                <a:latin typeface="+mn-lt"/>
+                <a:ea typeface="+mn-ea"/>
+                <a:cs typeface="+mn-cs"/>
+              </a:rPr>
+              <a:t>: **Runtime → Run all**. Takes about 2-3 minutes to install everything.</a:t>
+            </a:r>
+          </a:p>
+          <a:p>
+            <a:r>
+              <a:rPr lang="en-US" sz="1200" b="0" kern="1200" dirty="0">
+                <a:solidFill>
+                  <a:schemeClr val="tx1"/>
+                </a:solidFill>
+                <a:effectLst/>
+                <a:latin typeface="+mn-lt"/>
+                <a:ea typeface="+mn-ea"/>
+                <a:cs typeface="+mn-cs"/>
+              </a:rPr>
+              <a:t>- While that's running, stretch. Grab water. We're building for the next hour.</a:t>
+            </a:r>
+          </a:p>
+          <a:p>
+            <a:br>
+              <a:rPr lang="en-US" sz="1200" b="0" kern="1200" dirty="0">
+                <a:solidFill>
+                  <a:schemeClr val="tx1"/>
+                </a:solidFill>
+                <a:effectLst/>
+                <a:latin typeface="+mn-lt"/>
+                <a:ea typeface="+mn-ea"/>
+                <a:cs typeface="+mn-cs"/>
+              </a:rPr>
+            </a:br>
+            <a:endParaRPr lang="en-US" sz="1200" b="0" kern="1200" dirty="0">
+              <a:solidFill>
+                <a:schemeClr val="tx1"/>
+              </a:solidFill>
+              <a:effectLst/>
+              <a:latin typeface="+mn-lt"/>
+              <a:ea typeface="+mn-ea"/>
+              <a:cs typeface="+mn-cs"/>
+            </a:endParaRPr>
+          </a:p>
+          <a:p>
+            <a:r>
+              <a:rPr lang="en-US" sz="1200" b="0" kern="1200" dirty="0">
+                <a:solidFill>
+                  <a:schemeClr val="tx1"/>
+                </a:solidFill>
+                <a:effectLst/>
+                <a:latin typeface="+mn-lt"/>
+                <a:ea typeface="+mn-ea"/>
+                <a:cs typeface="+mn-cs"/>
+              </a:rPr>
+              <a:t>**Handoff:** "Any questions before we dive in?"</a:t>
+            </a:r>
+          </a:p>
+          <a:p>
+            <a:br>
+              <a:rPr lang="en-US" sz="1200" b="0" kern="1200">
+                <a:solidFill>
+                  <a:schemeClr val="tx1"/>
+                </a:solidFill>
+                <a:effectLst/>
+                <a:latin typeface="+mn-lt"/>
+                <a:ea typeface="+mn-ea"/>
+                <a:cs typeface="+mn-cs"/>
+              </a:rPr>
+            </a:br>
+            <a:endParaRPr lang="en-US" sz="1200" b="0" kern="1200">
+              <a:solidFill>
+                <a:schemeClr val="tx1"/>
+              </a:solidFill>
+              <a:effectLst/>
+              <a:latin typeface="+mn-lt"/>
+              <a:ea typeface="+mn-ea"/>
+              <a:cs typeface="+mn-cs"/>
+            </a:endParaRPr>
+          </a:p>
+          <a:p>
             <a:endParaRPr lang="en-US" dirty="0"/>
           </a:p>
         </p:txBody>
@@ -864,10 +1739,169 @@
           <a:lstStyle/>
           <a:p>
             <a:r>
-              <a:rPr lang="en-US" dirty="0"/>
-              <a:t/>
-            </a:r>
-            <a:endParaRPr lang="en-US" dirty="0"/>
+              <a:rPr lang="en-US" sz="1200" b="0" kern="1200" dirty="0">
+                <a:solidFill>
+                  <a:schemeClr val="tx1"/>
+                </a:solidFill>
+                <a:effectLst/>
+                <a:latin typeface="+mn-lt"/>
+                <a:ea typeface="+mn-ea"/>
+                <a:cs typeface="+mn-cs"/>
+              </a:rPr>
+              <a:t>**Hook:** "Four beats: the problem, the fix, the upgrade, and then we build it."</a:t>
+            </a:r>
+          </a:p>
+          <a:p>
+            <a:br>
+              <a:rPr lang="en-US" sz="1200" b="0" kern="1200" dirty="0">
+                <a:solidFill>
+                  <a:schemeClr val="tx1"/>
+                </a:solidFill>
+                <a:effectLst/>
+                <a:latin typeface="+mn-lt"/>
+                <a:ea typeface="+mn-ea"/>
+                <a:cs typeface="+mn-cs"/>
+              </a:rPr>
+            </a:br>
+            <a:endParaRPr lang="en-US" sz="1200" b="0" kern="1200" dirty="0">
+              <a:solidFill>
+                <a:schemeClr val="tx1"/>
+              </a:solidFill>
+              <a:effectLst/>
+              <a:latin typeface="+mn-lt"/>
+              <a:ea typeface="+mn-ea"/>
+              <a:cs typeface="+mn-cs"/>
+            </a:endParaRPr>
+          </a:p>
+          <a:p>
+            <a:r>
+              <a:rPr lang="en-US" sz="1200" b="0" kern="1200" dirty="0">
+                <a:solidFill>
+                  <a:schemeClr val="tx1"/>
+                </a:solidFill>
+                <a:effectLst/>
+                <a:latin typeface="+mn-lt"/>
+                <a:ea typeface="+mn-ea"/>
+                <a:cs typeface="+mn-cs"/>
+              </a:rPr>
+              <a:t>- **Problem:** LLMs hallucinate — and it matters in the real world.</a:t>
+            </a:r>
+          </a:p>
+          <a:p>
+            <a:r>
+              <a:rPr lang="en-US" sz="1200" b="0" kern="1200" dirty="0">
+                <a:solidFill>
+                  <a:schemeClr val="tx1"/>
+                </a:solidFill>
+                <a:effectLst/>
+                <a:latin typeface="+mn-lt"/>
+                <a:ea typeface="+mn-ea"/>
+                <a:cs typeface="+mn-cs"/>
+              </a:rPr>
+              <a:t>- **Fix:** RAG — Retrieve, Augment, Generate. The core pipeline.</a:t>
+            </a:r>
+          </a:p>
+          <a:p>
+            <a:r>
+              <a:rPr lang="en-US" sz="1200" b="0" kern="1200" dirty="0">
+                <a:solidFill>
+                  <a:schemeClr val="tx1"/>
+                </a:solidFill>
+                <a:effectLst/>
+                <a:latin typeface="+mn-lt"/>
+                <a:ea typeface="+mn-ea"/>
+                <a:cs typeface="+mn-cs"/>
+              </a:rPr>
+              <a:t>- **Upgrade:** Agentic RAG — multi-step reasoning + verification.</a:t>
+            </a:r>
+          </a:p>
+          <a:p>
+            <a:r>
+              <a:rPr lang="en-US" sz="1200" b="0" kern="1200" dirty="0">
+                <a:solidFill>
+                  <a:schemeClr val="tx1"/>
+                </a:solidFill>
+                <a:effectLst/>
+                <a:latin typeface="+mn-lt"/>
+                <a:ea typeface="+mn-ea"/>
+                <a:cs typeface="+mn-cs"/>
+              </a:rPr>
+              <a:t>- **Build:** we do it live in </a:t>
+            </a:r>
+            <a:r>
+              <a:rPr lang="en-US" sz="1200" b="0" kern="1200" dirty="0" err="1">
+                <a:solidFill>
+                  <a:schemeClr val="tx1"/>
+                </a:solidFill>
+                <a:effectLst/>
+                <a:latin typeface="+mn-lt"/>
+                <a:ea typeface="+mn-ea"/>
+                <a:cs typeface="+mn-cs"/>
+              </a:rPr>
+              <a:t>Colab</a:t>
+            </a:r>
+            <a:r>
+              <a:rPr lang="en-US" sz="1200" b="0" kern="1200" dirty="0">
+                <a:solidFill>
+                  <a:schemeClr val="tx1"/>
+                </a:solidFill>
+                <a:effectLst/>
+                <a:latin typeface="+mn-lt"/>
+                <a:ea typeface="+mn-ea"/>
+                <a:cs typeface="+mn-cs"/>
+              </a:rPr>
+              <a:t> over Mary Shelley's *Frankenstein*.</a:t>
+            </a:r>
+          </a:p>
+          <a:p>
+            <a:r>
+              <a:rPr lang="en-US" sz="1200" b="0" kern="1200" dirty="0">
+                <a:solidFill>
+                  <a:schemeClr val="tx1"/>
+                </a:solidFill>
+                <a:effectLst/>
+                <a:latin typeface="+mn-lt"/>
+                <a:ea typeface="+mn-ea"/>
+                <a:cs typeface="+mn-cs"/>
+              </a:rPr>
+              <a:t>- You can follow along or just watch — either is fine.</a:t>
+            </a:r>
+          </a:p>
+          <a:p>
+            <a:br>
+              <a:rPr lang="en-US" sz="1200" b="0" kern="1200" dirty="0">
+                <a:solidFill>
+                  <a:schemeClr val="tx1"/>
+                </a:solidFill>
+                <a:effectLst/>
+                <a:latin typeface="+mn-lt"/>
+                <a:ea typeface="+mn-ea"/>
+                <a:cs typeface="+mn-cs"/>
+              </a:rPr>
+            </a:br>
+            <a:endParaRPr lang="en-US" sz="1200" b="0" kern="1200" dirty="0">
+              <a:solidFill>
+                <a:schemeClr val="tx1"/>
+              </a:solidFill>
+              <a:effectLst/>
+              <a:latin typeface="+mn-lt"/>
+              <a:ea typeface="+mn-ea"/>
+              <a:cs typeface="+mn-cs"/>
+            </a:endParaRPr>
+          </a:p>
+          <a:p>
+            <a:r>
+              <a:rPr lang="en-US" sz="1200" b="0" kern="1200" dirty="0">
+                <a:solidFill>
+                  <a:schemeClr val="tx1"/>
+                </a:solidFill>
+                <a:effectLst/>
+                <a:latin typeface="+mn-lt"/>
+                <a:ea typeface="+mn-ea"/>
+                <a:cs typeface="+mn-cs"/>
+              </a:rPr>
+              <a:t>**Transition:** "Let's start with the problem — why do we even need RAG?"</a:t>
+            </a:r>
           </a:p>
         </p:txBody>
       </p:sp>
@@ -952,10 +1986,217 @@
           <a:lstStyle/>
           <a:p>
             <a:r>
-              <a:rPr lang="en-US" dirty="0"/>
-              <a:t/>
-            </a:r>
-            <a:endParaRPr lang="en-US" dirty="0"/>
+              <a:rPr lang="en-US" sz="1200" b="0" kern="1200" dirty="0">
+                <a:solidFill>
+                  <a:schemeClr val="tx1"/>
+                </a:solidFill>
+                <a:effectLst/>
+                <a:latin typeface="+mn-lt"/>
+                <a:ea typeface="+mn-ea"/>
+                <a:cs typeface="+mn-cs"/>
+              </a:rPr>
+              <a:t>**Hook:** "In 2023, a lawyer in New York used ChatGPT to write a legal brief. The brief cited six cases — every single one was fabricated. He was fined $5,000."</a:t>
+            </a:r>
+          </a:p>
+          <a:p>
+            <a:br>
+              <a:rPr lang="en-US" sz="1200" b="0" kern="1200" dirty="0">
+                <a:solidFill>
+                  <a:schemeClr val="tx1"/>
+                </a:solidFill>
+                <a:effectLst/>
+                <a:latin typeface="+mn-lt"/>
+                <a:ea typeface="+mn-ea"/>
+                <a:cs typeface="+mn-cs"/>
+              </a:rPr>
+            </a:br>
+            <a:endParaRPr lang="en-US" sz="1200" b="0" kern="1200" dirty="0">
+              <a:solidFill>
+                <a:schemeClr val="tx1"/>
+              </a:solidFill>
+              <a:effectLst/>
+              <a:latin typeface="+mn-lt"/>
+              <a:ea typeface="+mn-ea"/>
+              <a:cs typeface="+mn-cs"/>
+            </a:endParaRPr>
+          </a:p>
+          <a:p>
+            <a:r>
+              <a:rPr lang="en-US" sz="1200" b="0" kern="1200" dirty="0">
+                <a:solidFill>
+                  <a:schemeClr val="tx1"/>
+                </a:solidFill>
+                <a:effectLst/>
+                <a:latin typeface="+mn-lt"/>
+                <a:ea typeface="+mn-ea"/>
+                <a:cs typeface="+mn-cs"/>
+              </a:rPr>
+              <a:t>- This is *Mata v. Avianca*. Real case. Google it later.</a:t>
+            </a:r>
+          </a:p>
+          <a:p>
+            <a:r>
+              <a:rPr lang="en-US" sz="1200" b="0" kern="1200" dirty="0">
+                <a:solidFill>
+                  <a:schemeClr val="tx1"/>
+                </a:solidFill>
+                <a:effectLst/>
+                <a:latin typeface="+mn-lt"/>
+                <a:ea typeface="+mn-ea"/>
+                <a:cs typeface="+mn-cs"/>
+              </a:rPr>
+              <a:t>- Not a ChatGPT-specific bug — it's how every LLM works by default.</a:t>
+            </a:r>
+          </a:p>
+          <a:p>
+            <a:r>
+              <a:rPr lang="en-US" sz="1200" b="0" kern="1200" dirty="0">
+                <a:solidFill>
+                  <a:schemeClr val="tx1"/>
+                </a:solidFill>
+                <a:effectLst/>
+                <a:latin typeface="+mn-lt"/>
+                <a:ea typeface="+mn-ea"/>
+                <a:cs typeface="+mn-cs"/>
+              </a:rPr>
+              <a:t>- Key line: **LLMs predict plausible text, not true text.**</a:t>
+            </a:r>
+          </a:p>
+          <a:p>
+            <a:r>
+              <a:rPr lang="en-US" sz="1200" b="0" kern="1200" dirty="0">
+                <a:solidFill>
+                  <a:schemeClr val="tx1"/>
+                </a:solidFill>
+                <a:effectLst/>
+                <a:latin typeface="+mn-lt"/>
+                <a:ea typeface="+mn-ea"/>
+                <a:cs typeface="+mn-cs"/>
+              </a:rPr>
+              <a:t>- No internal notion of "evidence" or "source" — they just continue the pattern.</a:t>
+            </a:r>
+          </a:p>
+          <a:p>
+            <a:r>
+              <a:rPr lang="en-US" sz="1200" b="0" kern="1200" dirty="0">
+                <a:solidFill>
+                  <a:schemeClr val="tx1"/>
+                </a:solidFill>
+                <a:effectLst/>
+                <a:latin typeface="+mn-lt"/>
+                <a:ea typeface="+mn-ea"/>
+                <a:cs typeface="+mn-cs"/>
+              </a:rPr>
+              <a:t>- When training data doesn't have the answer, the model doesn't say "I don't know" — it invents something that *sounds* right.</a:t>
+            </a:r>
+          </a:p>
+          <a:p>
+            <a:r>
+              <a:rPr lang="en-US" sz="1200" b="0" kern="1200" dirty="0">
+                <a:solidFill>
+                  <a:schemeClr val="tx1"/>
+                </a:solidFill>
+                <a:effectLst/>
+                <a:latin typeface="+mn-lt"/>
+                <a:ea typeface="+mn-ea"/>
+                <a:cs typeface="+mn-cs"/>
+              </a:rPr>
+              <a:t>- This is called **hallucination**. It's the #1 reason LLMs aren't trusted in production.</a:t>
+            </a:r>
+          </a:p>
+          <a:p>
+            <a:br>
+              <a:rPr lang="en-US" sz="1200" b="0" kern="1200" dirty="0">
+                <a:solidFill>
+                  <a:schemeClr val="tx1"/>
+                </a:solidFill>
+                <a:effectLst/>
+                <a:latin typeface="+mn-lt"/>
+                <a:ea typeface="+mn-ea"/>
+                <a:cs typeface="+mn-cs"/>
+              </a:rPr>
+            </a:br>
+            <a:endParaRPr lang="en-US" sz="1200" b="0" kern="1200" dirty="0">
+              <a:solidFill>
+                <a:schemeClr val="tx1"/>
+              </a:solidFill>
+              <a:effectLst/>
+              <a:latin typeface="+mn-lt"/>
+              <a:ea typeface="+mn-ea"/>
+              <a:cs typeface="+mn-cs"/>
+            </a:endParaRPr>
+          </a:p>
+          <a:p>
+            <a:r>
+              <a:rPr lang="en-US" sz="1200" b="0" kern="1200" dirty="0">
+                <a:solidFill>
+                  <a:schemeClr val="tx1"/>
+                </a:solidFill>
+                <a:effectLst/>
+                <a:latin typeface="+mn-lt"/>
+                <a:ea typeface="+mn-ea"/>
+                <a:cs typeface="+mn-cs"/>
+              </a:rPr>
+              <a:t>**Ask the room:** *"Who here has seen an LLM confidently give them a wrong answer?"* (hands will go up)</a:t>
+            </a:r>
+          </a:p>
+          <a:p>
+            <a:br>
+              <a:rPr lang="en-US" sz="1200" b="0" kern="1200" dirty="0">
+                <a:solidFill>
+                  <a:schemeClr val="tx1"/>
+                </a:solidFill>
+                <a:effectLst/>
+                <a:latin typeface="+mn-lt"/>
+                <a:ea typeface="+mn-ea"/>
+                <a:cs typeface="+mn-cs"/>
+              </a:rPr>
+            </a:br>
+            <a:endParaRPr lang="en-US" sz="1200" b="0" kern="1200" dirty="0">
+              <a:solidFill>
+                <a:schemeClr val="tx1"/>
+              </a:solidFill>
+              <a:effectLst/>
+              <a:latin typeface="+mn-lt"/>
+              <a:ea typeface="+mn-ea"/>
+              <a:cs typeface="+mn-cs"/>
+            </a:endParaRPr>
+          </a:p>
+          <a:p>
+            <a:r>
+              <a:rPr lang="en-US" sz="1200" b="0" kern="1200" dirty="0">
+                <a:solidFill>
+                  <a:schemeClr val="tx1"/>
+                </a:solidFill>
+                <a:effectLst/>
+                <a:latin typeface="+mn-lt"/>
+                <a:ea typeface="+mn-ea"/>
+                <a:cs typeface="+mn-cs"/>
+              </a:rPr>
+              <a:t>**Transition:** "So how do we fix it? Turns out there are three options, with very different cost profiles."</a:t>
+            </a:r>
+          </a:p>
+          <a:p>
+            <a:br>
+              <a:rPr lang="en-US" sz="1200" b="0" kern="1200" dirty="0">
+                <a:solidFill>
+                  <a:schemeClr val="tx1"/>
+                </a:solidFill>
+                <a:effectLst/>
+                <a:latin typeface="+mn-lt"/>
+                <a:ea typeface="+mn-ea"/>
+                <a:cs typeface="+mn-cs"/>
+              </a:rPr>
+            </a:br>
+            <a:endParaRPr lang="en-US" sz="1200" b="0" kern="1200" dirty="0">
+              <a:solidFill>
+                <a:schemeClr val="tx1"/>
+              </a:solidFill>
+              <a:effectLst/>
+              <a:latin typeface="+mn-lt"/>
+              <a:ea typeface="+mn-ea"/>
+              <a:cs typeface="+mn-cs"/>
+            </a:endParaRPr>
           </a:p>
         </p:txBody>
       </p:sp>
@@ -1040,9 +2281,155 @@
           <a:lstStyle/>
           <a:p>
             <a:r>
-              <a:rPr lang="en-US" dirty="0"/>
-              <a:t/>
-            </a:r>
+              <a:rPr lang="en-US" sz="1200" b="0" kern="1200" dirty="0">
+                <a:solidFill>
+                  <a:schemeClr val="tx1"/>
+                </a:solidFill>
+                <a:effectLst/>
+                <a:latin typeface="+mn-lt"/>
+                <a:ea typeface="+mn-ea"/>
+                <a:cs typeface="+mn-cs"/>
+              </a:rPr>
+              <a:t>**Hook:** "You've got three dials to turn, and they don't cost the same."</a:t>
+            </a:r>
+          </a:p>
+          <a:p>
+            <a:br>
+              <a:rPr lang="en-US" sz="1200" b="0" kern="1200" dirty="0">
+                <a:solidFill>
+                  <a:schemeClr val="tx1"/>
+                </a:solidFill>
+                <a:effectLst/>
+                <a:latin typeface="+mn-lt"/>
+                <a:ea typeface="+mn-ea"/>
+                <a:cs typeface="+mn-cs"/>
+              </a:rPr>
+            </a:br>
+            <a:endParaRPr lang="en-US" sz="1200" b="0" kern="1200" dirty="0">
+              <a:solidFill>
+                <a:schemeClr val="tx1"/>
+              </a:solidFill>
+              <a:effectLst/>
+              <a:latin typeface="+mn-lt"/>
+              <a:ea typeface="+mn-ea"/>
+              <a:cs typeface="+mn-cs"/>
+            </a:endParaRPr>
+          </a:p>
+          <a:p>
+            <a:r>
+              <a:rPr lang="en-US" sz="1200" b="0" kern="1200" dirty="0">
+                <a:solidFill>
+                  <a:schemeClr val="tx1"/>
+                </a:solidFill>
+                <a:effectLst/>
+                <a:latin typeface="+mn-lt"/>
+                <a:ea typeface="+mn-ea"/>
+                <a:cs typeface="+mn-cs"/>
+              </a:rPr>
+              <a:t>- **Prompt engineering ($)** — stuff facts directly into the prompt. Fast, cheap. Breaks when context grows. Good for a handful of facts, not a whole knowledge base.</a:t>
+            </a:r>
+          </a:p>
+          <a:p>
+            <a:r>
+              <a:rPr lang="en-US" sz="1200" b="0" kern="1200" dirty="0">
+                <a:solidFill>
+                  <a:schemeClr val="tx1"/>
+                </a:solidFill>
+                <a:effectLst/>
+                <a:latin typeface="+mn-lt"/>
+                <a:ea typeface="+mn-ea"/>
+                <a:cs typeface="+mn-cs"/>
+              </a:rPr>
+              <a:t>- **Fine-tuning ($$$)** — retrain the model on your data. Great for *style and tone*. Terrible for *facts that change* — you'd have to retrain every time your data updates.</a:t>
+            </a:r>
+          </a:p>
+          <a:p>
+            <a:r>
+              <a:rPr lang="en-US" sz="1200" b="0" kern="1200" dirty="0">
+                <a:solidFill>
+                  <a:schemeClr val="tx1"/>
+                </a:solidFill>
+                <a:effectLst/>
+                <a:latin typeface="+mn-lt"/>
+                <a:ea typeface="+mn-ea"/>
+                <a:cs typeface="+mn-cs"/>
+              </a:rPr>
+              <a:t>- **RAG ($$)** — retrieve relevant docs at query time, pass them in as context. **Factual. Updatable. Auditable.**</a:t>
+            </a:r>
+          </a:p>
+          <a:p>
+            <a:r>
+              <a:rPr lang="en-US" sz="1200" b="0" kern="1200" dirty="0">
+                <a:solidFill>
+                  <a:schemeClr val="tx1"/>
+                </a:solidFill>
+                <a:effectLst/>
+                <a:latin typeface="+mn-lt"/>
+                <a:ea typeface="+mn-ea"/>
+                <a:cs typeface="+mn-cs"/>
+              </a:rPr>
+              <a:t>- One-liner to remember: **RAG gives the model an open-book exam instead of making it memorize.**</a:t>
+            </a:r>
+          </a:p>
+          <a:p>
+            <a:br>
+              <a:rPr lang="en-US" sz="1200" b="0" kern="1200" dirty="0">
+                <a:solidFill>
+                  <a:schemeClr val="tx1"/>
+                </a:solidFill>
+                <a:effectLst/>
+                <a:latin typeface="+mn-lt"/>
+                <a:ea typeface="+mn-ea"/>
+                <a:cs typeface="+mn-cs"/>
+              </a:rPr>
+            </a:br>
+            <a:endParaRPr lang="en-US" sz="1200" b="0" kern="1200" dirty="0">
+              <a:solidFill>
+                <a:schemeClr val="tx1"/>
+              </a:solidFill>
+              <a:effectLst/>
+              <a:latin typeface="+mn-lt"/>
+              <a:ea typeface="+mn-ea"/>
+              <a:cs typeface="+mn-cs"/>
+            </a:endParaRPr>
+          </a:p>
+          <a:p>
+            <a:r>
+              <a:rPr lang="en-US" sz="1200" b="0" kern="1200" dirty="0">
+                <a:solidFill>
+                  <a:schemeClr val="tx1"/>
+                </a:solidFill>
+                <a:effectLst/>
+                <a:latin typeface="+mn-lt"/>
+                <a:ea typeface="+mn-ea"/>
+                <a:cs typeface="+mn-cs"/>
+              </a:rPr>
+              <a:t>**Transition:** "This next slide is the single most important one in the deck. If you take a photo of anything, take it of this."</a:t>
+            </a:r>
+          </a:p>
+          <a:p>
+            <a:br>
+              <a:rPr lang="en-US" sz="1200" b="0" kern="1200" dirty="0">
+                <a:solidFill>
+                  <a:schemeClr val="tx1"/>
+                </a:solidFill>
+                <a:effectLst/>
+                <a:latin typeface="+mn-lt"/>
+                <a:ea typeface="+mn-ea"/>
+                <a:cs typeface="+mn-cs"/>
+              </a:rPr>
+            </a:br>
+            <a:endParaRPr lang="en-US" sz="1200" b="0" kern="1200" dirty="0">
+              <a:solidFill>
+                <a:schemeClr val="tx1"/>
+              </a:solidFill>
+              <a:effectLst/>
+              <a:latin typeface="+mn-lt"/>
+              <a:ea typeface="+mn-ea"/>
+              <a:cs typeface="+mn-cs"/>
+            </a:endParaRPr>
+          </a:p>
+          <a:p>
             <a:endParaRPr lang="en-US" dirty="0"/>
           </a:p>
         </p:txBody>
@@ -1128,10 +2515,281 @@
           <a:lstStyle/>
           <a:p>
             <a:r>
-              <a:rPr lang="en-US" dirty="0"/>
-              <a:t/>
-            </a:r>
-            <a:endParaRPr lang="en-US" dirty="0"/>
+              <a:rPr lang="en-US" sz="1200" b="0" kern="1200" dirty="0">
+                <a:solidFill>
+                  <a:schemeClr val="tx1"/>
+                </a:solidFill>
+                <a:effectLst/>
+                <a:latin typeface="+mn-lt"/>
+                <a:ea typeface="+mn-ea"/>
+                <a:cs typeface="+mn-cs"/>
+              </a:rPr>
+              <a:t>**Hook:** "RAG is really two separate pipelines sharing one piece of infrastructure."</a:t>
+            </a:r>
+          </a:p>
+          <a:p>
+            <a:br>
+              <a:rPr lang="en-US" sz="1200" b="0" kern="1200" dirty="0">
+                <a:solidFill>
+                  <a:schemeClr val="tx1"/>
+                </a:solidFill>
+                <a:effectLst/>
+                <a:latin typeface="+mn-lt"/>
+                <a:ea typeface="+mn-ea"/>
+                <a:cs typeface="+mn-cs"/>
+              </a:rPr>
+            </a:br>
+            <a:endParaRPr lang="en-US" sz="1200" b="0" kern="1200" dirty="0">
+              <a:solidFill>
+                <a:schemeClr val="tx1"/>
+              </a:solidFill>
+              <a:effectLst/>
+              <a:latin typeface="+mn-lt"/>
+              <a:ea typeface="+mn-ea"/>
+              <a:cs typeface="+mn-cs"/>
+            </a:endParaRPr>
+          </a:p>
+          <a:p>
+            <a:r>
+              <a:rPr lang="en-US" sz="1200" b="0" kern="1200" dirty="0">
+                <a:solidFill>
+                  <a:schemeClr val="tx1"/>
+                </a:solidFill>
+                <a:effectLst/>
+                <a:latin typeface="+mn-lt"/>
+                <a:ea typeface="+mn-ea"/>
+                <a:cs typeface="+mn-cs"/>
+              </a:rPr>
+              <a:t>Walk the diagram left-to-right, top-to-bottom:</a:t>
+            </a:r>
+          </a:p>
+          <a:p>
+            <a:br>
+              <a:rPr lang="en-US" sz="1200" b="0" kern="1200" dirty="0">
+                <a:solidFill>
+                  <a:schemeClr val="tx1"/>
+                </a:solidFill>
+                <a:effectLst/>
+                <a:latin typeface="+mn-lt"/>
+                <a:ea typeface="+mn-ea"/>
+                <a:cs typeface="+mn-cs"/>
+              </a:rPr>
+            </a:br>
+            <a:endParaRPr lang="en-US" sz="1200" b="0" kern="1200" dirty="0">
+              <a:solidFill>
+                <a:schemeClr val="tx1"/>
+              </a:solidFill>
+              <a:effectLst/>
+              <a:latin typeface="+mn-lt"/>
+              <a:ea typeface="+mn-ea"/>
+              <a:cs typeface="+mn-cs"/>
+            </a:endParaRPr>
+          </a:p>
+          <a:p>
+            <a:r>
+              <a:rPr lang="en-US" sz="1200" b="0" kern="1200" dirty="0">
+                <a:solidFill>
+                  <a:schemeClr val="tx1"/>
+                </a:solidFill>
+                <a:effectLst/>
+                <a:latin typeface="+mn-lt"/>
+                <a:ea typeface="+mn-ea"/>
+                <a:cs typeface="+mn-cs"/>
+              </a:rPr>
+              <a:t>- **Phase 1 — Indexing (top lane, blue).** Run **once**, offline.</a:t>
+            </a:r>
+          </a:p>
+          <a:p>
+            <a:r>
+              <a:rPr lang="en-US" sz="1200" b="0" kern="1200" dirty="0">
+                <a:solidFill>
+                  <a:schemeClr val="tx1"/>
+                </a:solidFill>
+                <a:effectLst/>
+                <a:latin typeface="+mn-lt"/>
+                <a:ea typeface="+mn-ea"/>
+                <a:cs typeface="+mn-cs"/>
+              </a:rPr>
+              <a:t>- **Documents** → break into **chunks** (~800 chars) → **embed** each chunk into a vector → store in **Vector DB**.</a:t>
+            </a:r>
+          </a:p>
+          <a:p>
+            <a:r>
+              <a:rPr lang="en-US" sz="1200" b="0" kern="1200" dirty="0">
+                <a:solidFill>
+                  <a:schemeClr val="tx1"/>
+                </a:solidFill>
+                <a:effectLst/>
+                <a:latin typeface="+mn-lt"/>
+                <a:ea typeface="+mn-ea"/>
+                <a:cs typeface="+mn-cs"/>
+              </a:rPr>
+              <a:t>- **Phase 2 — Query-time (bottom lane, amber).** Run **every single question**.</a:t>
+            </a:r>
+          </a:p>
+          <a:p>
+            <a:r>
+              <a:rPr lang="en-US" sz="1200" b="0" kern="1200" dirty="0">
+                <a:solidFill>
+                  <a:schemeClr val="tx1"/>
+                </a:solidFill>
+                <a:effectLst/>
+                <a:latin typeface="+mn-lt"/>
+                <a:ea typeface="+mn-ea"/>
+                <a:cs typeface="+mn-cs"/>
+              </a:rPr>
+              <a:t>- **Question** → embed with the **same model** → **similarity search** against the Vector DB → pull the **top-K chunks** back.</a:t>
+            </a:r>
+          </a:p>
+          <a:p>
+            <a:r>
+              <a:rPr lang="en-US" sz="1200" b="0" kern="1200" dirty="0">
+                <a:solidFill>
+                  <a:schemeClr val="tx1"/>
+                </a:solidFill>
+                <a:effectLst/>
+                <a:latin typeface="+mn-lt"/>
+                <a:ea typeface="+mn-ea"/>
+                <a:cs typeface="+mn-cs"/>
+              </a:rPr>
+              <a:t>- Stuff those chunks into an **Augmented Prompt** together with the original question and grounding instructions.</a:t>
+            </a:r>
+          </a:p>
+          <a:p>
+            <a:r>
+              <a:rPr lang="en-US" sz="1200" b="0" kern="1200" dirty="0">
+                <a:solidFill>
+                  <a:schemeClr val="tx1"/>
+                </a:solidFill>
+                <a:effectLst/>
+                <a:latin typeface="+mn-lt"/>
+                <a:ea typeface="+mn-ea"/>
+                <a:cs typeface="+mn-cs"/>
+              </a:rPr>
+              <a:t>- Send to the **LLM** → get a **grounded Answer**.</a:t>
+            </a:r>
+          </a:p>
+          <a:p>
+            <a:r>
+              <a:rPr lang="en-US" sz="1200" b="0" kern="1200" dirty="0">
+                <a:solidFill>
+                  <a:schemeClr val="tx1"/>
+                </a:solidFill>
+                <a:effectLst/>
+                <a:latin typeface="+mn-lt"/>
+                <a:ea typeface="+mn-ea"/>
+                <a:cs typeface="+mn-cs"/>
+              </a:rPr>
+              <a:t>- The **Vector DB in the middle is the shared pivot** — indexing writes to it, querying reads from it.</a:t>
+            </a:r>
+          </a:p>
+          <a:p>
+            <a:r>
+              <a:rPr lang="en-US" sz="1200" b="0" kern="1200" dirty="0">
+                <a:solidFill>
+                  <a:schemeClr val="tx1"/>
+                </a:solidFill>
+                <a:effectLst/>
+                <a:latin typeface="+mn-lt"/>
+                <a:ea typeface="+mn-ea"/>
+                <a:cs typeface="+mn-cs"/>
+              </a:rPr>
+              <a:t>- The embedding model is used *twice* — same model, both times. Critical.</a:t>
+            </a:r>
+          </a:p>
+          <a:p>
+            <a:br>
+              <a:rPr lang="en-US" sz="1200" b="0" kern="1200" dirty="0">
+                <a:solidFill>
+                  <a:schemeClr val="tx1"/>
+                </a:solidFill>
+                <a:effectLst/>
+                <a:latin typeface="+mn-lt"/>
+                <a:ea typeface="+mn-ea"/>
+                <a:cs typeface="+mn-cs"/>
+              </a:rPr>
+            </a:br>
+            <a:endParaRPr lang="en-US" sz="1200" b="0" kern="1200" dirty="0">
+              <a:solidFill>
+                <a:schemeClr val="tx1"/>
+              </a:solidFill>
+              <a:effectLst/>
+              <a:latin typeface="+mn-lt"/>
+              <a:ea typeface="+mn-ea"/>
+              <a:cs typeface="+mn-cs"/>
+            </a:endParaRPr>
+          </a:p>
+          <a:p>
+            <a:r>
+              <a:rPr lang="en-US" sz="1200" b="0" kern="1200" dirty="0">
+                <a:solidFill>
+                  <a:schemeClr val="tx1"/>
+                </a:solidFill>
+                <a:effectLst/>
+                <a:latin typeface="+mn-lt"/>
+                <a:ea typeface="+mn-ea"/>
+                <a:cs typeface="+mn-cs"/>
+              </a:rPr>
+              <a:t>**Callout:** "If you only remember one slide from today, remember this one. Every RAG paper, every RAG system, every framework — they're all variations on this diagram."</a:t>
+            </a:r>
+          </a:p>
+          <a:p>
+            <a:br>
+              <a:rPr lang="en-US" sz="1200" b="0" kern="1200" dirty="0">
+                <a:solidFill>
+                  <a:schemeClr val="tx1"/>
+                </a:solidFill>
+                <a:effectLst/>
+                <a:latin typeface="+mn-lt"/>
+                <a:ea typeface="+mn-ea"/>
+                <a:cs typeface="+mn-cs"/>
+              </a:rPr>
+            </a:br>
+            <a:endParaRPr lang="en-US" sz="1200" b="0" kern="1200" dirty="0">
+              <a:solidFill>
+                <a:schemeClr val="tx1"/>
+              </a:solidFill>
+              <a:effectLst/>
+              <a:latin typeface="+mn-lt"/>
+              <a:ea typeface="+mn-ea"/>
+              <a:cs typeface="+mn-cs"/>
+            </a:endParaRPr>
+          </a:p>
+          <a:p>
+            <a:r>
+              <a:rPr lang="en-US" sz="1200" b="0" kern="1200" dirty="0">
+                <a:solidFill>
+                  <a:schemeClr val="tx1"/>
+                </a:solidFill>
+                <a:effectLst/>
+                <a:latin typeface="+mn-lt"/>
+                <a:ea typeface="+mn-ea"/>
+                <a:cs typeface="+mn-cs"/>
+              </a:rPr>
+              <a:t>**Transition:** "Let's zoom into the weird part — what does it mean to 'embed' text?"</a:t>
+            </a:r>
+          </a:p>
+          <a:p>
+            <a:br>
+              <a:rPr lang="en-US" sz="1200" b="0" kern="1200" dirty="0">
+                <a:solidFill>
+                  <a:schemeClr val="tx1"/>
+                </a:solidFill>
+                <a:effectLst/>
+                <a:latin typeface="+mn-lt"/>
+                <a:ea typeface="+mn-ea"/>
+                <a:cs typeface="+mn-cs"/>
+              </a:rPr>
+            </a:br>
+            <a:endParaRPr lang="en-US" sz="1200" b="0" kern="1200" dirty="0">
+              <a:solidFill>
+                <a:schemeClr val="tx1"/>
+              </a:solidFill>
+              <a:effectLst/>
+              <a:latin typeface="+mn-lt"/>
+              <a:ea typeface="+mn-ea"/>
+              <a:cs typeface="+mn-cs"/>
+            </a:endParaRPr>
           </a:p>
         </p:txBody>
       </p:sp>
@@ -1215,11 +2873,228 @@
           <a:bodyPr/>
           <a:lstStyle/>
           <a:p>
-            <a:r>
-              <a:rPr lang="en-US" dirty="0"/>
-              <a:t/>
-            </a:r>
-            <a:endParaRPr lang="en-US" dirty="0"/>
+            <a:br>
+              <a:rPr lang="en-US" sz="1200" b="0" kern="1200" dirty="0">
+                <a:solidFill>
+                  <a:schemeClr val="tx1"/>
+                </a:solidFill>
+                <a:effectLst/>
+                <a:latin typeface="+mn-lt"/>
+                <a:ea typeface="+mn-ea"/>
+                <a:cs typeface="+mn-cs"/>
+              </a:rPr>
+            </a:br>
+            <a:endParaRPr lang="en-US" sz="1200" b="0" kern="1200" dirty="0">
+              <a:solidFill>
+                <a:schemeClr val="tx1"/>
+              </a:solidFill>
+              <a:effectLst/>
+              <a:latin typeface="+mn-lt"/>
+              <a:ea typeface="+mn-ea"/>
+              <a:cs typeface="+mn-cs"/>
+            </a:endParaRPr>
+          </a:p>
+          <a:p>
+            <a:r>
+              <a:rPr lang="en-US" sz="1200" b="0" kern="1200" dirty="0">
+                <a:solidFill>
+                  <a:schemeClr val="tx1"/>
+                </a:solidFill>
+                <a:effectLst/>
+                <a:latin typeface="+mn-lt"/>
+                <a:ea typeface="+mn-ea"/>
+                <a:cs typeface="+mn-cs"/>
+              </a:rPr>
+              <a:t>**Hook:** "An embedding is a way to convert *meaning* into *coordinates*."</a:t>
+            </a:r>
+          </a:p>
+          <a:p>
+            <a:br>
+              <a:rPr lang="en-US" sz="1200" b="0" kern="1200" dirty="0">
+                <a:solidFill>
+                  <a:schemeClr val="tx1"/>
+                </a:solidFill>
+                <a:effectLst/>
+                <a:latin typeface="+mn-lt"/>
+                <a:ea typeface="+mn-ea"/>
+                <a:cs typeface="+mn-cs"/>
+              </a:rPr>
+            </a:br>
+            <a:endParaRPr lang="en-US" sz="1200" b="0" kern="1200" dirty="0">
+              <a:solidFill>
+                <a:schemeClr val="tx1"/>
+              </a:solidFill>
+              <a:effectLst/>
+              <a:latin typeface="+mn-lt"/>
+              <a:ea typeface="+mn-ea"/>
+              <a:cs typeface="+mn-cs"/>
+            </a:endParaRPr>
+          </a:p>
+          <a:p>
+            <a:r>
+              <a:rPr lang="en-US" sz="1200" b="0" kern="1200" dirty="0">
+                <a:solidFill>
+                  <a:schemeClr val="tx1"/>
+                </a:solidFill>
+                <a:effectLst/>
+                <a:latin typeface="+mn-lt"/>
+                <a:ea typeface="+mn-ea"/>
+                <a:cs typeface="+mn-cs"/>
+              </a:rPr>
+              <a:t>- Embedding model = takes text, spits out a vector (typically 384, 768, or 1536 dimensions).</a:t>
+            </a:r>
+          </a:p>
+          <a:p>
+            <a:r>
+              <a:rPr lang="en-US" sz="1200" b="0" kern="1200" dirty="0">
+                <a:solidFill>
+                  <a:schemeClr val="tx1"/>
+                </a:solidFill>
+                <a:effectLst/>
+                <a:latin typeface="+mn-lt"/>
+                <a:ea typeface="+mn-ea"/>
+                <a:cs typeface="+mn-cs"/>
+              </a:rPr>
+              <a:t>- **The trick:** similar meaning → similar vectors.</a:t>
+            </a:r>
+          </a:p>
+          <a:p>
+            <a:r>
+              <a:rPr lang="en-US" sz="1200" b="0" kern="1200" dirty="0">
+                <a:solidFill>
+                  <a:schemeClr val="tx1"/>
+                </a:solidFill>
+                <a:effectLst/>
+                <a:latin typeface="+mn-lt"/>
+                <a:ea typeface="+mn-ea"/>
+                <a:cs typeface="+mn-cs"/>
+              </a:rPr>
+              <a:t>- "Cat" and "kitten" land next to each other. "Cat" and "airplane" land far apart.</a:t>
+            </a:r>
+          </a:p>
+          <a:p>
+            <a:r>
+              <a:rPr lang="en-US" sz="1200" b="0" kern="1200" dirty="0">
+                <a:solidFill>
+                  <a:schemeClr val="tx1"/>
+                </a:solidFill>
+                <a:effectLst/>
+                <a:latin typeface="+mn-lt"/>
+                <a:ea typeface="+mn-ea"/>
+                <a:cs typeface="+mn-cs"/>
+              </a:rPr>
+              <a:t>- Similarity is measured by **cosine of the angle** between two vectors.</a:t>
+            </a:r>
+          </a:p>
+          <a:p>
+            <a:r>
+              <a:rPr lang="en-US" sz="1200" b="0" kern="1200" dirty="0">
+                <a:solidFill>
+                  <a:schemeClr val="tx1"/>
+                </a:solidFill>
+                <a:effectLst/>
+                <a:latin typeface="+mn-lt"/>
+                <a:ea typeface="+mn-ea"/>
+                <a:cs typeface="+mn-cs"/>
+              </a:rPr>
+              <a:t>- In the diagram here — cats/kittens/dogs cluster in one region, cars/trucks/airplanes in another.</a:t>
+            </a:r>
+          </a:p>
+          <a:p>
+            <a:r>
+              <a:rPr lang="en-US" sz="1200" b="0" kern="1200" dirty="0">
+                <a:solidFill>
+                  <a:schemeClr val="tx1"/>
+                </a:solidFill>
+                <a:effectLst/>
+                <a:latin typeface="+mn-lt"/>
+                <a:ea typeface="+mn-ea"/>
+                <a:cs typeface="+mn-cs"/>
+              </a:rPr>
+              <a:t>- **Our choice:** `nomic-embed-text` (768-dim), runs locally via </a:t>
+            </a:r>
+            <a:r>
+              <a:rPr lang="en-US" sz="1200" b="0" kern="1200" dirty="0" err="1">
+                <a:solidFill>
+                  <a:schemeClr val="tx1"/>
+                </a:solidFill>
+                <a:effectLst/>
+                <a:latin typeface="+mn-lt"/>
+                <a:ea typeface="+mn-ea"/>
+                <a:cs typeface="+mn-cs"/>
+              </a:rPr>
+              <a:t>Ollama</a:t>
+            </a:r>
+            <a:r>
+              <a:rPr lang="en-US" sz="1200" b="0" kern="1200" dirty="0">
+                <a:solidFill>
+                  <a:schemeClr val="tx1"/>
+                </a:solidFill>
+                <a:effectLst/>
+                <a:latin typeface="+mn-lt"/>
+                <a:ea typeface="+mn-ea"/>
+                <a:cs typeface="+mn-cs"/>
+              </a:rPr>
+              <a:t>.</a:t>
+            </a:r>
+          </a:p>
+          <a:p>
+            <a:br>
+              <a:rPr lang="en-US" sz="1200" b="0" kern="1200" dirty="0">
+                <a:solidFill>
+                  <a:schemeClr val="tx1"/>
+                </a:solidFill>
+                <a:effectLst/>
+                <a:latin typeface="+mn-lt"/>
+                <a:ea typeface="+mn-ea"/>
+                <a:cs typeface="+mn-cs"/>
+              </a:rPr>
+            </a:br>
+            <a:endParaRPr lang="en-US" sz="1200" b="0" kern="1200" dirty="0">
+              <a:solidFill>
+                <a:schemeClr val="tx1"/>
+              </a:solidFill>
+              <a:effectLst/>
+              <a:latin typeface="+mn-lt"/>
+              <a:ea typeface="+mn-ea"/>
+              <a:cs typeface="+mn-cs"/>
+            </a:endParaRPr>
+          </a:p>
+          <a:p>
+            <a:r>
+              <a:rPr lang="en-US" sz="1200" b="0" kern="1200" dirty="0">
+                <a:solidFill>
+                  <a:schemeClr val="tx1"/>
+                </a:solidFill>
+                <a:effectLst/>
+                <a:latin typeface="+mn-lt"/>
+                <a:ea typeface="+mn-ea"/>
+                <a:cs typeface="+mn-cs"/>
+              </a:rPr>
+              <a:t>**Transition:** "OK, embeddings sound magical. But the step *before* embedding is the one that silently kills most RAG systems."</a:t>
+            </a:r>
+          </a:p>
+          <a:p>
+            <a:br>
+              <a:rPr lang="en-US" sz="1200" b="0" kern="1200" dirty="0">
+                <a:solidFill>
+                  <a:schemeClr val="tx1"/>
+                </a:solidFill>
+                <a:effectLst/>
+                <a:latin typeface="+mn-lt"/>
+                <a:ea typeface="+mn-ea"/>
+                <a:cs typeface="+mn-cs"/>
+              </a:rPr>
+            </a:br>
+            <a:endParaRPr lang="en-US" sz="1200" b="0" kern="1200" dirty="0">
+              <a:solidFill>
+                <a:schemeClr val="tx1"/>
+              </a:solidFill>
+              <a:effectLst/>
+              <a:latin typeface="+mn-lt"/>
+              <a:ea typeface="+mn-ea"/>
+              <a:cs typeface="+mn-cs"/>
+            </a:endParaRPr>
           </a:p>
         </p:txBody>
       </p:sp>
@@ -1303,10 +3178,206 @@
           <a:bodyPr/>
           <a:lstStyle/>
           <a:p>
-            <a:r>
-              <a:rPr lang="en-US" dirty="0"/>
-              <a:t/>
-            </a:r>
+            <a:br>
+              <a:rPr lang="en-US" sz="1200" b="0" kern="1200" dirty="0">
+                <a:solidFill>
+                  <a:schemeClr val="tx1"/>
+                </a:solidFill>
+                <a:effectLst/>
+                <a:latin typeface="+mn-lt"/>
+                <a:ea typeface="+mn-ea"/>
+                <a:cs typeface="+mn-cs"/>
+              </a:rPr>
+            </a:br>
+            <a:endParaRPr lang="en-US" sz="1200" b="0" kern="1200" dirty="0">
+              <a:solidFill>
+                <a:schemeClr val="tx1"/>
+              </a:solidFill>
+              <a:effectLst/>
+              <a:latin typeface="+mn-lt"/>
+              <a:ea typeface="+mn-ea"/>
+              <a:cs typeface="+mn-cs"/>
+            </a:endParaRPr>
+          </a:p>
+          <a:p>
+            <a:r>
+              <a:rPr lang="en-US" sz="1200" b="0" kern="1200" dirty="0">
+                <a:solidFill>
+                  <a:schemeClr val="tx1"/>
+                </a:solidFill>
+                <a:effectLst/>
+                <a:latin typeface="+mn-lt"/>
+                <a:ea typeface="+mn-ea"/>
+                <a:cs typeface="+mn-cs"/>
+              </a:rPr>
+              <a:t>**Hook:** "Bad chunks → bad retrieval → bad answers. Doesn't matter how smart your LLM is."</a:t>
+            </a:r>
+          </a:p>
+          <a:p>
+            <a:br>
+              <a:rPr lang="en-US" sz="1200" b="0" kern="1200" dirty="0">
+                <a:solidFill>
+                  <a:schemeClr val="tx1"/>
+                </a:solidFill>
+                <a:effectLst/>
+                <a:latin typeface="+mn-lt"/>
+                <a:ea typeface="+mn-ea"/>
+                <a:cs typeface="+mn-cs"/>
+              </a:rPr>
+            </a:br>
+            <a:endParaRPr lang="en-US" sz="1200" b="0" kern="1200" dirty="0">
+              <a:solidFill>
+                <a:schemeClr val="tx1"/>
+              </a:solidFill>
+              <a:effectLst/>
+              <a:latin typeface="+mn-lt"/>
+              <a:ea typeface="+mn-ea"/>
+              <a:cs typeface="+mn-cs"/>
+            </a:endParaRPr>
+          </a:p>
+          <a:p>
+            <a:r>
+              <a:rPr lang="en-US" sz="1200" b="0" kern="1200" dirty="0">
+                <a:solidFill>
+                  <a:schemeClr val="tx1"/>
+                </a:solidFill>
+                <a:effectLst/>
+                <a:latin typeface="+mn-lt"/>
+                <a:ea typeface="+mn-ea"/>
+                <a:cs typeface="+mn-cs"/>
+              </a:rPr>
+              <a:t>- **Fixed-length:** split every N chars. Fast, dumb, breaks words mid-sentence.</a:t>
+            </a:r>
+          </a:p>
+          <a:p>
+            <a:r>
+              <a:rPr lang="en-US" sz="1200" b="0" kern="1200" dirty="0">
+                <a:solidFill>
+                  <a:schemeClr val="tx1"/>
+                </a:solidFill>
+                <a:effectLst/>
+                <a:latin typeface="+mn-lt"/>
+                <a:ea typeface="+mn-ea"/>
+                <a:cs typeface="+mn-cs"/>
+              </a:rPr>
+              <a:t>- **Sentence-based:** split at sentence boundaries. Better, but loses paragraph context.</a:t>
+            </a:r>
+          </a:p>
+          <a:p>
+            <a:r>
+              <a:rPr lang="en-US" sz="1200" b="0" kern="1200" dirty="0">
+                <a:solidFill>
+                  <a:schemeClr val="tx1"/>
+                </a:solidFill>
+                <a:effectLst/>
+                <a:latin typeface="+mn-lt"/>
+                <a:ea typeface="+mn-ea"/>
+                <a:cs typeface="+mn-cs"/>
+              </a:rPr>
+              <a:t>- **Recursive (our pick):** try paragraphs → sentences → words, with overlap. Balanced default.</a:t>
+            </a:r>
+          </a:p>
+          <a:p>
+            <a:r>
+              <a:rPr lang="en-US" sz="1200" b="0" kern="1200" dirty="0">
+                <a:solidFill>
+                  <a:schemeClr val="tx1"/>
+                </a:solidFill>
+                <a:effectLst/>
+                <a:latin typeface="+mn-lt"/>
+                <a:ea typeface="+mn-ea"/>
+                <a:cs typeface="+mn-cs"/>
+              </a:rPr>
+              <a:t>- **Semantic:** split where *meaning* shifts (embedding similarity drops). Best quality, slowest.</a:t>
+            </a:r>
+          </a:p>
+          <a:p>
+            <a:r>
+              <a:rPr lang="en-US" sz="1200" b="0" kern="1200" dirty="0">
+                <a:solidFill>
+                  <a:schemeClr val="tx1"/>
+                </a:solidFill>
+                <a:effectLst/>
+                <a:latin typeface="+mn-lt"/>
+                <a:ea typeface="+mn-ea"/>
+                <a:cs typeface="+mn-cs"/>
+              </a:rPr>
+              <a:t>- Two knobs matter: **chunk size** (we use 800 chars) and **overlap** (we use 100 chars, ~12%).</a:t>
+            </a:r>
+          </a:p>
+          <a:p>
+            <a:r>
+              <a:rPr lang="en-US" sz="1200" b="0" kern="1200" dirty="0">
+                <a:solidFill>
+                  <a:schemeClr val="tx1"/>
+                </a:solidFill>
+                <a:effectLst/>
+                <a:latin typeface="+mn-lt"/>
+                <a:ea typeface="+mn-ea"/>
+                <a:cs typeface="+mn-cs"/>
+              </a:rPr>
+              <a:t>- Overlap matters — it keeps context from getting sliced across boundaries.</a:t>
+            </a:r>
+          </a:p>
+          <a:p>
+            <a:br>
+              <a:rPr lang="en-US" sz="1200" b="0" kern="1200" dirty="0">
+                <a:solidFill>
+                  <a:schemeClr val="tx1"/>
+                </a:solidFill>
+                <a:effectLst/>
+                <a:latin typeface="+mn-lt"/>
+                <a:ea typeface="+mn-ea"/>
+                <a:cs typeface="+mn-cs"/>
+              </a:rPr>
+            </a:br>
+            <a:endParaRPr lang="en-US" sz="1200" b="0" kern="1200" dirty="0">
+              <a:solidFill>
+                <a:schemeClr val="tx1"/>
+              </a:solidFill>
+              <a:effectLst/>
+              <a:latin typeface="+mn-lt"/>
+              <a:ea typeface="+mn-ea"/>
+              <a:cs typeface="+mn-cs"/>
+            </a:endParaRPr>
+          </a:p>
+          <a:p>
+            <a:r>
+              <a:rPr lang="en-US" sz="1200" b="0" kern="1200" dirty="0">
+                <a:solidFill>
+                  <a:schemeClr val="tx1"/>
+                </a:solidFill>
+                <a:effectLst/>
+                <a:latin typeface="+mn-lt"/>
+                <a:ea typeface="+mn-ea"/>
+                <a:cs typeface="+mn-cs"/>
+              </a:rPr>
+              <a:t>**Transition:** "So that's Simple RAG: chunk, embed, retrieve, generate. Now let's make it smarter."</a:t>
+            </a:r>
+          </a:p>
+          <a:p>
+            <a:br>
+              <a:rPr lang="en-US" sz="1200" b="0" kern="1200" dirty="0">
+                <a:solidFill>
+                  <a:schemeClr val="tx1"/>
+                </a:solidFill>
+                <a:effectLst/>
+                <a:latin typeface="+mn-lt"/>
+                <a:ea typeface="+mn-ea"/>
+                <a:cs typeface="+mn-cs"/>
+              </a:rPr>
+            </a:br>
+            <a:endParaRPr lang="en-US" sz="1200" b="0" kern="1200" dirty="0">
+              <a:solidFill>
+                <a:schemeClr val="tx1"/>
+              </a:solidFill>
+              <a:effectLst/>
+              <a:latin typeface="+mn-lt"/>
+              <a:ea typeface="+mn-ea"/>
+              <a:cs typeface="+mn-cs"/>
+            </a:endParaRPr>
+          </a:p>
+          <a:p>
             <a:endParaRPr lang="en-US" dirty="0"/>
           </a:p>
         </p:txBody>
@@ -1391,10 +3462,220 @@
           <a:bodyPr/>
           <a:lstStyle/>
           <a:p>
-            <a:r>
-              <a:rPr lang="en-US" dirty="0"/>
-              <a:t/>
-            </a:r>
+            <a:br>
+              <a:rPr lang="en-US" sz="1200" b="0" kern="1200" dirty="0">
+                <a:solidFill>
+                  <a:schemeClr val="tx1"/>
+                </a:solidFill>
+                <a:effectLst/>
+                <a:latin typeface="+mn-lt"/>
+                <a:ea typeface="+mn-ea"/>
+                <a:cs typeface="+mn-cs"/>
+              </a:rPr>
+            </a:br>
+            <a:endParaRPr lang="en-US" sz="1200" b="0" kern="1200" dirty="0">
+              <a:solidFill>
+                <a:schemeClr val="tx1"/>
+              </a:solidFill>
+              <a:effectLst/>
+              <a:latin typeface="+mn-lt"/>
+              <a:ea typeface="+mn-ea"/>
+              <a:cs typeface="+mn-cs"/>
+            </a:endParaRPr>
+          </a:p>
+          <a:p>
+            <a:r>
+              <a:rPr lang="en-US" sz="1200" b="0" kern="1200" dirty="0">
+                <a:solidFill>
+                  <a:schemeClr val="tx1"/>
+                </a:solidFill>
+                <a:effectLst/>
+                <a:latin typeface="+mn-lt"/>
+                <a:ea typeface="+mn-ea"/>
+                <a:cs typeface="+mn-cs"/>
+              </a:rPr>
+              <a:t>**Hook:** "Simple RAG is one shot. Agentic RAG gives the system a second opinion."</a:t>
+            </a:r>
+          </a:p>
+          <a:p>
+            <a:br>
+              <a:rPr lang="en-US" sz="1200" b="0" kern="1200" dirty="0">
+                <a:solidFill>
+                  <a:schemeClr val="tx1"/>
+                </a:solidFill>
+                <a:effectLst/>
+                <a:latin typeface="+mn-lt"/>
+                <a:ea typeface="+mn-ea"/>
+                <a:cs typeface="+mn-cs"/>
+              </a:rPr>
+            </a:br>
+            <a:endParaRPr lang="en-US" sz="1200" b="0" kern="1200" dirty="0">
+              <a:solidFill>
+                <a:schemeClr val="tx1"/>
+              </a:solidFill>
+              <a:effectLst/>
+              <a:latin typeface="+mn-lt"/>
+              <a:ea typeface="+mn-ea"/>
+              <a:cs typeface="+mn-cs"/>
+            </a:endParaRPr>
+          </a:p>
+          <a:p>
+            <a:r>
+              <a:rPr lang="en-US" sz="1200" b="0" kern="1200" dirty="0">
+                <a:solidFill>
+                  <a:schemeClr val="tx1"/>
+                </a:solidFill>
+                <a:effectLst/>
+                <a:latin typeface="+mn-lt"/>
+                <a:ea typeface="+mn-ea"/>
+                <a:cs typeface="+mn-cs"/>
+              </a:rPr>
+              <a:t>- **Simple RAG:** Question → Retrieve → Generate → Answer. Fast. Single pass. Can still hallucinate if retrieval is noisy.</a:t>
+            </a:r>
+          </a:p>
+          <a:p>
+            <a:r>
+              <a:rPr lang="en-US" sz="1200" b="0" kern="1200" dirty="0">
+                <a:solidFill>
+                  <a:schemeClr val="tx1"/>
+                </a:solidFill>
+                <a:effectLst/>
+                <a:latin typeface="+mn-lt"/>
+                <a:ea typeface="+mn-ea"/>
+                <a:cs typeface="+mn-cs"/>
+              </a:rPr>
+              <a:t>- **Agentic RAG** — what we'll actually build today:</a:t>
+            </a:r>
+          </a:p>
+          <a:p>
+            <a:r>
+              <a:rPr lang="en-US" sz="1200" b="0" kern="1200" dirty="0">
+                <a:solidFill>
+                  <a:schemeClr val="tx1"/>
+                </a:solidFill>
+                <a:effectLst/>
+                <a:latin typeface="+mn-lt"/>
+                <a:ea typeface="+mn-ea"/>
+                <a:cs typeface="+mn-cs"/>
+              </a:rPr>
+              <a:t>- **Retriever Agent** searches the vector DB and drafts an answer.</a:t>
+            </a:r>
+          </a:p>
+          <a:p>
+            <a:r>
+              <a:rPr lang="en-US" sz="1200" b="0" kern="1200" dirty="0">
+                <a:solidFill>
+                  <a:schemeClr val="tx1"/>
+                </a:solidFill>
+                <a:effectLst/>
+                <a:latin typeface="+mn-lt"/>
+                <a:ea typeface="+mn-ea"/>
+                <a:cs typeface="+mn-cs"/>
+              </a:rPr>
+              <a:t>- **Verifier Agent** reads the draft and checks every claim against the retrieved context.</a:t>
+            </a:r>
+          </a:p>
+          <a:p>
+            <a:r>
+              <a:rPr lang="en-US" sz="1200" b="0" kern="1200" dirty="0">
+                <a:solidFill>
+                  <a:schemeClr val="tx1"/>
+                </a:solidFill>
+                <a:effectLst/>
+                <a:latin typeface="+mn-lt"/>
+                <a:ea typeface="+mn-ea"/>
+                <a:cs typeface="+mn-cs"/>
+              </a:rPr>
+              <a:t>- If something doesn't check out, it flags it or rewrites.</a:t>
+            </a:r>
+          </a:p>
+          <a:p>
+            <a:r>
+              <a:rPr lang="en-US" sz="1200" b="0" kern="1200" dirty="0">
+                <a:solidFill>
+                  <a:schemeClr val="tx1"/>
+                </a:solidFill>
+                <a:effectLst/>
+                <a:latin typeface="+mn-lt"/>
+                <a:ea typeface="+mn-ea"/>
+                <a:cs typeface="+mn-cs"/>
+              </a:rPr>
+              <a:t>- Tradeoff: **slower, but much more robust.** 2-3x the latency, far fewer hallucinations.</a:t>
+            </a:r>
+          </a:p>
+          <a:p>
+            <a:r>
+              <a:rPr lang="en-US" sz="1200" b="0" kern="1200" dirty="0">
+                <a:solidFill>
+                  <a:schemeClr val="tx1"/>
+                </a:solidFill>
+                <a:effectLst/>
+                <a:latin typeface="+mn-lt"/>
+                <a:ea typeface="+mn-ea"/>
+                <a:cs typeface="+mn-cs"/>
+              </a:rPr>
+              <a:t>- This is the pattern in recent papers like Self-RAG and CRAG (corrective RAG).</a:t>
+            </a:r>
+          </a:p>
+          <a:p>
+            <a:br>
+              <a:rPr lang="en-US" sz="1200" b="0" kern="1200" dirty="0">
+                <a:solidFill>
+                  <a:schemeClr val="tx1"/>
+                </a:solidFill>
+                <a:effectLst/>
+                <a:latin typeface="+mn-lt"/>
+                <a:ea typeface="+mn-ea"/>
+                <a:cs typeface="+mn-cs"/>
+              </a:rPr>
+            </a:br>
+            <a:endParaRPr lang="en-US" sz="1200" b="0" kern="1200" dirty="0">
+              <a:solidFill>
+                <a:schemeClr val="tx1"/>
+              </a:solidFill>
+              <a:effectLst/>
+              <a:latin typeface="+mn-lt"/>
+              <a:ea typeface="+mn-ea"/>
+              <a:cs typeface="+mn-cs"/>
+            </a:endParaRPr>
+          </a:p>
+          <a:p>
+            <a:r>
+              <a:rPr lang="en-US" sz="1200" b="0" kern="1200" dirty="0">
+                <a:solidFill>
+                  <a:schemeClr val="tx1"/>
+                </a:solidFill>
+                <a:effectLst/>
+                <a:latin typeface="+mn-lt"/>
+                <a:ea typeface="+mn-ea"/>
+                <a:cs typeface="+mn-cs"/>
+              </a:rPr>
+              <a:t>**Transition:** "Here's the stack we're going to use to build all of this."</a:t>
+            </a:r>
+          </a:p>
+          <a:p>
+            <a:br>
+              <a:rPr lang="en-US" sz="1200" b="0" kern="1200" dirty="0">
+                <a:solidFill>
+                  <a:schemeClr val="tx1"/>
+                </a:solidFill>
+                <a:effectLst/>
+                <a:latin typeface="+mn-lt"/>
+                <a:ea typeface="+mn-ea"/>
+                <a:cs typeface="+mn-cs"/>
+              </a:rPr>
+            </a:br>
+            <a:endParaRPr lang="en-US" sz="1200" b="0" kern="1200" dirty="0">
+              <a:solidFill>
+                <a:schemeClr val="tx1"/>
+              </a:solidFill>
+              <a:effectLst/>
+              <a:latin typeface="+mn-lt"/>
+              <a:ea typeface="+mn-ea"/>
+              <a:cs typeface="+mn-cs"/>
+            </a:endParaRPr>
+          </a:p>
+          <a:p>
             <a:endParaRPr lang="en-US" dirty="0"/>
           </a:p>
         </p:txBody>
@@ -1479,10 +3760,350 @@
           <a:bodyPr/>
           <a:lstStyle/>
           <a:p>
-            <a:r>
-              <a:rPr lang="en-US" dirty="0"/>
-              <a:t/>
-            </a:r>
+            <a:br>
+              <a:rPr lang="en-US" sz="1200" b="0" kern="1200" dirty="0">
+                <a:solidFill>
+                  <a:schemeClr val="tx1"/>
+                </a:solidFill>
+                <a:effectLst/>
+                <a:latin typeface="+mn-lt"/>
+                <a:ea typeface="+mn-ea"/>
+                <a:cs typeface="+mn-cs"/>
+              </a:rPr>
+            </a:br>
+            <a:endParaRPr lang="en-US" sz="1200" b="0" kern="1200" dirty="0">
+              <a:solidFill>
+                <a:schemeClr val="tx1"/>
+              </a:solidFill>
+              <a:effectLst/>
+              <a:latin typeface="+mn-lt"/>
+              <a:ea typeface="+mn-ea"/>
+              <a:cs typeface="+mn-cs"/>
+            </a:endParaRPr>
+          </a:p>
+          <a:p>
+            <a:r>
+              <a:rPr lang="en-US" sz="1200" b="0" kern="1200" dirty="0">
+                <a:solidFill>
+                  <a:schemeClr val="tx1"/>
+                </a:solidFill>
+                <a:effectLst/>
+                <a:latin typeface="+mn-lt"/>
+                <a:ea typeface="+mn-ea"/>
+                <a:cs typeface="+mn-cs"/>
+              </a:rPr>
+              <a:t>**Hook:** "Six tools. All open-source. All free. All runs on </a:t>
+            </a:r>
+            <a:r>
+              <a:rPr lang="en-US" sz="1200" b="0" kern="1200" dirty="0" err="1">
+                <a:solidFill>
+                  <a:schemeClr val="tx1"/>
+                </a:solidFill>
+                <a:effectLst/>
+                <a:latin typeface="+mn-lt"/>
+                <a:ea typeface="+mn-ea"/>
+                <a:cs typeface="+mn-cs"/>
+              </a:rPr>
+              <a:t>Colab's</a:t>
+            </a:r>
+            <a:r>
+              <a:rPr lang="en-US" sz="1200" b="0" kern="1200" dirty="0">
+                <a:solidFill>
+                  <a:schemeClr val="tx1"/>
+                </a:solidFill>
+                <a:effectLst/>
+                <a:latin typeface="+mn-lt"/>
+                <a:ea typeface="+mn-ea"/>
+                <a:cs typeface="+mn-cs"/>
+              </a:rPr>
+              <a:t> free tier."</a:t>
+            </a:r>
+          </a:p>
+          <a:p>
+            <a:br>
+              <a:rPr lang="en-US" sz="1200" b="0" kern="1200" dirty="0">
+                <a:solidFill>
+                  <a:schemeClr val="tx1"/>
+                </a:solidFill>
+                <a:effectLst/>
+                <a:latin typeface="+mn-lt"/>
+                <a:ea typeface="+mn-ea"/>
+                <a:cs typeface="+mn-cs"/>
+              </a:rPr>
+            </a:br>
+            <a:endParaRPr lang="en-US" sz="1200" b="0" kern="1200" dirty="0">
+              <a:solidFill>
+                <a:schemeClr val="tx1"/>
+              </a:solidFill>
+              <a:effectLst/>
+              <a:latin typeface="+mn-lt"/>
+              <a:ea typeface="+mn-ea"/>
+              <a:cs typeface="+mn-cs"/>
+            </a:endParaRPr>
+          </a:p>
+          <a:p>
+            <a:r>
+              <a:rPr lang="en-US" sz="1200" b="0" kern="1200" dirty="0">
+                <a:solidFill>
+                  <a:schemeClr val="tx1"/>
+                </a:solidFill>
+                <a:effectLst/>
+                <a:latin typeface="+mn-lt"/>
+                <a:ea typeface="+mn-ea"/>
+                <a:cs typeface="+mn-cs"/>
+              </a:rPr>
+              <a:t>- **</a:t>
+            </a:r>
+            <a:r>
+              <a:rPr lang="en-US" sz="1200" b="0" kern="1200" dirty="0" err="1">
+                <a:solidFill>
+                  <a:schemeClr val="tx1"/>
+                </a:solidFill>
+                <a:effectLst/>
+                <a:latin typeface="+mn-lt"/>
+                <a:ea typeface="+mn-ea"/>
+                <a:cs typeface="+mn-cs"/>
+              </a:rPr>
+              <a:t>Ollama</a:t>
+            </a:r>
+            <a:r>
+              <a:rPr lang="en-US" sz="1200" b="0" kern="1200" dirty="0">
+                <a:solidFill>
+                  <a:schemeClr val="tx1"/>
+                </a:solidFill>
+                <a:effectLst/>
+                <a:latin typeface="+mn-lt"/>
+                <a:ea typeface="+mn-ea"/>
+                <a:cs typeface="+mn-cs"/>
+              </a:rPr>
+              <a:t>** — local LLM runtime (serves `llama3.2:3b`).</a:t>
+            </a:r>
+          </a:p>
+          <a:p>
+            <a:r>
+              <a:rPr lang="en-US" sz="1200" b="0" kern="1200" dirty="0">
+                <a:solidFill>
+                  <a:schemeClr val="tx1"/>
+                </a:solidFill>
+                <a:effectLst/>
+                <a:latin typeface="+mn-lt"/>
+                <a:ea typeface="+mn-ea"/>
+                <a:cs typeface="+mn-cs"/>
+              </a:rPr>
+              <a:t>- **</a:t>
+            </a:r>
+            <a:r>
+              <a:rPr lang="en-US" sz="1200" b="0" kern="1200" dirty="0" err="1">
+                <a:solidFill>
+                  <a:schemeClr val="tx1"/>
+                </a:solidFill>
+                <a:effectLst/>
+                <a:latin typeface="+mn-lt"/>
+                <a:ea typeface="+mn-ea"/>
+                <a:cs typeface="+mn-cs"/>
+              </a:rPr>
+              <a:t>LangChain</a:t>
+            </a:r>
+            <a:r>
+              <a:rPr lang="en-US" sz="1200" b="0" kern="1200" dirty="0">
+                <a:solidFill>
+                  <a:schemeClr val="tx1"/>
+                </a:solidFill>
+                <a:effectLst/>
+                <a:latin typeface="+mn-lt"/>
+                <a:ea typeface="+mn-ea"/>
+                <a:cs typeface="+mn-cs"/>
+              </a:rPr>
+              <a:t>** — RAG primitives: loaders, splitters, retrievers.</a:t>
+            </a:r>
+          </a:p>
+          <a:p>
+            <a:r>
+              <a:rPr lang="en-US" sz="1200" b="0" kern="1200" dirty="0">
+                <a:solidFill>
+                  <a:schemeClr val="tx1"/>
+                </a:solidFill>
+                <a:effectLst/>
+                <a:latin typeface="+mn-lt"/>
+                <a:ea typeface="+mn-ea"/>
+                <a:cs typeface="+mn-cs"/>
+              </a:rPr>
+              <a:t>- **</a:t>
+            </a:r>
+            <a:r>
+              <a:rPr lang="en-US" sz="1200" b="0" kern="1200" dirty="0" err="1">
+                <a:solidFill>
+                  <a:schemeClr val="tx1"/>
+                </a:solidFill>
+                <a:effectLst/>
+                <a:latin typeface="+mn-lt"/>
+                <a:ea typeface="+mn-ea"/>
+                <a:cs typeface="+mn-cs"/>
+              </a:rPr>
+              <a:t>ChromaDB</a:t>
+            </a:r>
+            <a:r>
+              <a:rPr lang="en-US" sz="1200" b="0" kern="1200" dirty="0">
+                <a:solidFill>
+                  <a:schemeClr val="tx1"/>
+                </a:solidFill>
+                <a:effectLst/>
+                <a:latin typeface="+mn-lt"/>
+                <a:ea typeface="+mn-ea"/>
+                <a:cs typeface="+mn-cs"/>
+              </a:rPr>
+              <a:t>** — lightweight vector database.</a:t>
+            </a:r>
+          </a:p>
+          <a:p>
+            <a:r>
+              <a:rPr lang="en-US" sz="1200" b="0" kern="1200" dirty="0">
+                <a:solidFill>
+                  <a:schemeClr val="tx1"/>
+                </a:solidFill>
+                <a:effectLst/>
+                <a:latin typeface="+mn-lt"/>
+                <a:ea typeface="+mn-ea"/>
+                <a:cs typeface="+mn-cs"/>
+              </a:rPr>
+              <a:t>- **</a:t>
+            </a:r>
+            <a:r>
+              <a:rPr lang="en-US" sz="1200" b="0" kern="1200" dirty="0" err="1">
+                <a:solidFill>
+                  <a:schemeClr val="tx1"/>
+                </a:solidFill>
+                <a:effectLst/>
+                <a:latin typeface="+mn-lt"/>
+                <a:ea typeface="+mn-ea"/>
+                <a:cs typeface="+mn-cs"/>
+              </a:rPr>
+              <a:t>CrewAI</a:t>
+            </a:r>
+            <a:r>
+              <a:rPr lang="en-US" sz="1200" b="0" kern="1200" dirty="0">
+                <a:solidFill>
+                  <a:schemeClr val="tx1"/>
+                </a:solidFill>
+                <a:effectLst/>
+                <a:latin typeface="+mn-lt"/>
+                <a:ea typeface="+mn-ea"/>
+                <a:cs typeface="+mn-cs"/>
+              </a:rPr>
+              <a:t>** — multi-agent orchestration (Retriever + Verifier).</a:t>
+            </a:r>
+          </a:p>
+          <a:p>
+            <a:r>
+              <a:rPr lang="en-US" sz="1200" b="0" kern="1200" dirty="0">
+                <a:solidFill>
+                  <a:schemeClr val="tx1"/>
+                </a:solidFill>
+                <a:effectLst/>
+                <a:latin typeface="+mn-lt"/>
+                <a:ea typeface="+mn-ea"/>
+                <a:cs typeface="+mn-cs"/>
+              </a:rPr>
+              <a:t>- **</a:t>
+            </a:r>
+            <a:r>
+              <a:rPr lang="en-US" sz="1200" b="0" kern="1200" dirty="0" err="1">
+                <a:solidFill>
+                  <a:schemeClr val="tx1"/>
+                </a:solidFill>
+                <a:effectLst/>
+                <a:latin typeface="+mn-lt"/>
+                <a:ea typeface="+mn-ea"/>
+                <a:cs typeface="+mn-cs"/>
+              </a:rPr>
+              <a:t>Gradio</a:t>
+            </a:r>
+            <a:r>
+              <a:rPr lang="en-US" sz="1200" b="0" kern="1200" dirty="0">
+                <a:solidFill>
+                  <a:schemeClr val="tx1"/>
+                </a:solidFill>
+                <a:effectLst/>
+                <a:latin typeface="+mn-lt"/>
+                <a:ea typeface="+mn-ea"/>
+                <a:cs typeface="+mn-cs"/>
+              </a:rPr>
+              <a:t>** — chat UI in ~3 lines of code.</a:t>
+            </a:r>
+          </a:p>
+          <a:p>
+            <a:r>
+              <a:rPr lang="en-US" sz="1200" b="0" kern="1200" dirty="0">
+                <a:solidFill>
+                  <a:schemeClr val="tx1"/>
+                </a:solidFill>
+                <a:effectLst/>
+                <a:latin typeface="+mn-lt"/>
+                <a:ea typeface="+mn-ea"/>
+                <a:cs typeface="+mn-cs"/>
+              </a:rPr>
+              <a:t>- **Ragas** — evaluation metrics for RAG systems.</a:t>
+            </a:r>
+          </a:p>
+          <a:p>
+            <a:br>
+              <a:rPr lang="en-US" sz="1200" b="0" kern="1200" dirty="0">
+                <a:solidFill>
+                  <a:schemeClr val="tx1"/>
+                </a:solidFill>
+                <a:effectLst/>
+                <a:latin typeface="+mn-lt"/>
+                <a:ea typeface="+mn-ea"/>
+                <a:cs typeface="+mn-cs"/>
+              </a:rPr>
+            </a:br>
+            <a:endParaRPr lang="en-US" sz="1200" b="0" kern="1200" dirty="0">
+              <a:solidFill>
+                <a:schemeClr val="tx1"/>
+              </a:solidFill>
+              <a:effectLst/>
+              <a:latin typeface="+mn-lt"/>
+              <a:ea typeface="+mn-ea"/>
+              <a:cs typeface="+mn-cs"/>
+            </a:endParaRPr>
+          </a:p>
+          <a:p>
+            <a:r>
+              <a:rPr lang="en-US" sz="1200" b="0" kern="1200" dirty="0">
+                <a:solidFill>
+                  <a:schemeClr val="tx1"/>
+                </a:solidFill>
+                <a:effectLst/>
+                <a:latin typeface="+mn-lt"/>
+                <a:ea typeface="+mn-ea"/>
+                <a:cs typeface="+mn-cs"/>
+              </a:rPr>
+              <a:t>**Transition:** "Before we build — one slide on how we know the system is actually working."</a:t>
+            </a:r>
+          </a:p>
+          <a:p>
+            <a:br>
+              <a:rPr lang="en-US" sz="1200" b="0" kern="1200" dirty="0">
+                <a:solidFill>
+                  <a:schemeClr val="tx1"/>
+                </a:solidFill>
+                <a:effectLst/>
+                <a:latin typeface="+mn-lt"/>
+                <a:ea typeface="+mn-ea"/>
+                <a:cs typeface="+mn-cs"/>
+              </a:rPr>
+            </a:br>
+            <a:endParaRPr lang="en-US" sz="1200" b="0" kern="1200" dirty="0">
+              <a:solidFill>
+                <a:schemeClr val="tx1"/>
+              </a:solidFill>
+              <a:effectLst/>
+              <a:latin typeface="+mn-lt"/>
+              <a:ea typeface="+mn-ea"/>
+              <a:cs typeface="+mn-cs"/>
+            </a:endParaRPr>
+          </a:p>
+          <a:p>
             <a:endParaRPr lang="en-US" dirty="0"/>
           </a:p>
         </p:txBody>
@@ -1556,6 +4177,11 @@
 <file path=ppt/slideMasters/slideMaster1.xml><?xml version="1.0" encoding="utf-8"?>
 <p:sldMaster xmlns:a="http://schemas.openxmlformats.org/drawingml/2006/main" xmlns:r="http://schemas.openxmlformats.org/officeDocument/2006/relationships" xmlns:p="http://schemas.openxmlformats.org/presentationml/2006/main">
   <p:cSld>
+    <p:bg>
+      <p:bgRef idx="1001">
+        <a:schemeClr val="bg1"/>
+      </p:bgRef>
+    </p:bg>
     <p:spTree>
       <p:nvGrpSpPr>
         <p:cNvPr id="1" name=""/>
@@ -1838,6 +4464,7 @@
         <a:solidFill>
           <a:srgbClr val="1A1A2E"/>
         </a:solidFill>
+        <a:effectLst/>
       </p:bgPr>
     </p:bg>
     <p:spTree>
@@ -1878,6 +4505,13 @@
             <a:prstDash val="solid"/>
           </a:ln>
         </p:spPr>
+        <p:txBody>
+          <a:bodyPr/>
+          <a:lstStyle/>
+          <a:p>
+            <a:endParaRPr lang="en-US"/>
+          </a:p>
+        </p:txBody>
       </p:sp>
       <p:sp>
         <p:nvSpPr>
@@ -1900,11 +4534,11 @@
           <a:bodyPr wrap="square" lIns="0" tIns="0" rIns="0" bIns="0" rtlCol="0" anchor="ctr"/>
           <a:lstStyle/>
           <a:p>
-            <a:pPr indent="0" marL="0">
-              <a:buNone/>
-            </a:pPr>
-            <a:r>
-              <a:rPr lang="en-US" sz="1100" b="1" spc="400" kern="0" dirty="0">
+            <a:pPr marL="0" indent="0">
+              <a:buNone/>
+            </a:pPr>
+            <a:r>
+              <a:rPr lang="en-US" sz="1100" b="1" kern="0" spc="400" dirty="0">
                 <a:solidFill>
                   <a:srgbClr val="C9184A"/>
                 </a:solidFill>
@@ -1912,7 +4546,7 @@
                 <a:ea typeface="Calibri" pitchFamily="34" charset="-122"/>
                 <a:cs typeface="Calibri" pitchFamily="34" charset="-120"/>
               </a:rPr>
-              <a:t>NTIR WORKSHOP  ·  HANDS-ON</a:t>
+              <a:t>NTIR 2026 WORKSHOP  ·  HANDS-ON</a:t>
             </a:r>
             <a:endParaRPr lang="en-US" sz="1100" dirty="0"/>
           </a:p>
@@ -1939,7 +4573,7 @@
           <a:bodyPr wrap="square" lIns="0" tIns="0" rIns="0" bIns="0" rtlCol="0" anchor="t"/>
           <a:lstStyle/>
           <a:p>
-            <a:pPr indent="0" marL="0">
+            <a:pPr marL="0" indent="0">
               <a:buNone/>
             </a:pPr>
             <a:r>
@@ -1978,7 +4612,7 @@
           <a:bodyPr wrap="square" lIns="0" tIns="0" rIns="0" bIns="0" rtlCol="0" anchor="t"/>
           <a:lstStyle/>
           <a:p>
-            <a:pPr indent="0" marL="0">
+            <a:pPr marL="0" indent="0">
               <a:buNone/>
             </a:pPr>
             <a:r>
@@ -1995,7 +4629,7 @@
             <a:endParaRPr lang="en-US" sz="1600" dirty="0"/>
           </a:p>
           <a:p>
-            <a:pPr indent="0" marL="0">
+            <a:pPr marL="0" indent="0">
               <a:buNone/>
             </a:pPr>
             <a:r>
@@ -2035,6 +4669,13 @@
             <a:prstDash val="solid"/>
           </a:ln>
         </p:spPr>
+        <p:txBody>
+          <a:bodyPr/>
+          <a:lstStyle/>
+          <a:p>
+            <a:endParaRPr lang="en-US"/>
+          </a:p>
+        </p:txBody>
       </p:sp>
       <p:sp>
         <p:nvSpPr>
@@ -2057,7 +4698,7 @@
           <a:bodyPr wrap="square" lIns="0" tIns="0" rIns="0" bIns="0" rtlCol="0" anchor="t"/>
           <a:lstStyle/>
           <a:p>
-            <a:pPr indent="0" marL="0">
+            <a:pPr marL="0" indent="0">
               <a:buNone/>
             </a:pPr>
             <a:r>
@@ -2074,7 +4715,7 @@
             <a:endParaRPr lang="en-US" sz="1200" dirty="0"/>
           </a:p>
           <a:p>
-            <a:pPr indent="0" marL="0">
+            <a:pPr marL="0" indent="0">
               <a:buNone/>
             </a:pPr>
             <a:r>
@@ -2091,7 +4732,7 @@
             <a:endParaRPr lang="en-US" sz="1200" dirty="0"/>
           </a:p>
           <a:p>
-            <a:pPr indent="0" marL="0">
+            <a:pPr marL="0" indent="0">
               <a:buNone/>
             </a:pPr>
             <a:r>
@@ -2125,6 +4766,7 @@
         <a:solidFill>
           <a:srgbClr val="FFFFFF"/>
         </a:solidFill>
+        <a:effectLst/>
       </p:bgPr>
     </p:bg>
     <p:spTree>
@@ -2162,11 +4804,11 @@
           <a:bodyPr wrap="square" lIns="0" tIns="0" rIns="0" bIns="0" rtlCol="0" anchor="ctr"/>
           <a:lstStyle/>
           <a:p>
-            <a:pPr indent="0" marL="0">
-              <a:buNone/>
-            </a:pPr>
-            <a:r>
-              <a:rPr lang="en-US" sz="1000" b="1" spc="200" kern="0" dirty="0">
+            <a:pPr marL="0" indent="0">
+              <a:buNone/>
+            </a:pPr>
+            <a:r>
+              <a:rPr lang="en-US" sz="1000" b="1" kern="0" spc="200" dirty="0">
                 <a:solidFill>
                   <a:srgbClr val="C9184A"/>
                 </a:solidFill>
@@ -2176,11 +4818,8 @@
               </a:rPr>
               <a:t>10</a:t>
             </a:r>
-            <a:pPr indent="0" marL="0">
-              <a:buNone/>
-            </a:pPr>
-            <a:r>
-              <a:rPr lang="en-US" sz="1000" spc="200" kern="0" dirty="0">
+            <a:r>
+              <a:rPr lang="en-US" sz="1000" kern="0" spc="200" dirty="0">
                 <a:solidFill>
                   <a:srgbClr val="6B7280"/>
                 </a:solidFill>
@@ -2215,7 +4854,7 @@
           <a:bodyPr wrap="square" lIns="0" tIns="0" rIns="0" bIns="0" rtlCol="0" anchor="ctr"/>
           <a:lstStyle/>
           <a:p>
-            <a:pPr algn="l" indent="0" marL="0">
+            <a:pPr marL="0" indent="0" algn="l">
               <a:buNone/>
             </a:pPr>
             <a:r>
@@ -2254,11 +4893,11 @@
           <a:bodyPr wrap="square" lIns="0" tIns="0" rIns="0" bIns="0" rtlCol="0" anchor="ctr"/>
           <a:lstStyle/>
           <a:p>
-            <a:pPr indent="0" marL="0">
-              <a:buNone/>
-            </a:pPr>
-            <a:r>
-              <a:rPr lang="en-US" sz="1000" b="1" spc="300" kern="0" dirty="0">
+            <a:pPr marL="0" indent="0">
+              <a:buNone/>
+            </a:pPr>
+            <a:r>
+              <a:rPr lang="en-US" sz="1000" b="1" kern="0" spc="300" dirty="0">
                 <a:solidFill>
                   <a:srgbClr val="C9184A"/>
                 </a:solidFill>
@@ -2291,6 +4930,13 @@
           </a:solidFill>
           <a:ln/>
         </p:spPr>
+        <p:txBody>
+          <a:bodyPr/>
+          <a:lstStyle/>
+          <a:p>
+            <a:endParaRPr lang="en-US"/>
+          </a:p>
+        </p:txBody>
       </p:sp>
       <p:sp>
         <p:nvSpPr>
@@ -2313,7 +4959,7 @@
           <a:bodyPr wrap="square" lIns="0" tIns="0" rIns="0" bIns="0" rtlCol="0" anchor="ctr"/>
           <a:lstStyle/>
           <a:p>
-            <a:pPr indent="0" marL="0">
+            <a:pPr marL="0" indent="0">
               <a:buNone/>
             </a:pPr>
             <a:r>
@@ -2352,7 +4998,7 @@
           <a:bodyPr wrap="square" lIns="0" tIns="0" rIns="0" bIns="0" rtlCol="0" anchor="t"/>
           <a:lstStyle/>
           <a:p>
-            <a:pPr indent="0" marL="0">
+            <a:pPr marL="0" indent="0">
               <a:buNone/>
             </a:pPr>
             <a:r>
@@ -2389,6 +5035,13 @@
           </a:solidFill>
           <a:ln/>
         </p:spPr>
+        <p:txBody>
+          <a:bodyPr/>
+          <a:lstStyle/>
+          <a:p>
+            <a:endParaRPr lang="en-US"/>
+          </a:p>
+        </p:txBody>
       </p:sp>
       <p:sp>
         <p:nvSpPr>
@@ -2411,7 +5064,7 @@
           <a:bodyPr wrap="square" lIns="0" tIns="0" rIns="0" bIns="0" rtlCol="0" anchor="ctr"/>
           <a:lstStyle/>
           <a:p>
-            <a:pPr indent="0" marL="0">
+            <a:pPr marL="0" indent="0">
               <a:buNone/>
             </a:pPr>
             <a:r>
@@ -2450,7 +5103,7 @@
           <a:bodyPr wrap="square" lIns="0" tIns="0" rIns="0" bIns="0" rtlCol="0" anchor="t"/>
           <a:lstStyle/>
           <a:p>
-            <a:pPr indent="0" marL="0">
+            <a:pPr marL="0" indent="0">
               <a:buNone/>
             </a:pPr>
             <a:r>
@@ -2487,6 +5140,13 @@
           </a:solidFill>
           <a:ln/>
         </p:spPr>
+        <p:txBody>
+          <a:bodyPr/>
+          <a:lstStyle/>
+          <a:p>
+            <a:endParaRPr lang="en-US"/>
+          </a:p>
+        </p:txBody>
       </p:sp>
       <p:sp>
         <p:nvSpPr>
@@ -2509,7 +5169,7 @@
           <a:bodyPr wrap="square" lIns="0" tIns="0" rIns="0" bIns="0" rtlCol="0" anchor="ctr"/>
           <a:lstStyle/>
           <a:p>
-            <a:pPr indent="0" marL="0">
+            <a:pPr marL="0" indent="0">
               <a:buNone/>
             </a:pPr>
             <a:r>
@@ -2548,7 +5208,7 @@
           <a:bodyPr wrap="square" lIns="0" tIns="0" rIns="0" bIns="0" rtlCol="0" anchor="t"/>
           <a:lstStyle/>
           <a:p>
-            <a:pPr indent="0" marL="0">
+            <a:pPr marL="0" indent="0">
               <a:buNone/>
             </a:pPr>
             <a:r>
@@ -2585,6 +5245,13 @@
           </a:solidFill>
           <a:ln/>
         </p:spPr>
+        <p:txBody>
+          <a:bodyPr/>
+          <a:lstStyle/>
+          <a:p>
+            <a:endParaRPr lang="en-US"/>
+          </a:p>
+        </p:txBody>
       </p:sp>
       <p:sp>
         <p:nvSpPr>
@@ -2607,7 +5274,7 @@
           <a:bodyPr wrap="square" lIns="0" tIns="0" rIns="0" bIns="0" rtlCol="0" anchor="ctr"/>
           <a:lstStyle/>
           <a:p>
-            <a:pPr indent="0" marL="0">
+            <a:pPr marL="0" indent="0">
               <a:buNone/>
             </a:pPr>
             <a:r>
@@ -2646,7 +5313,7 @@
           <a:bodyPr wrap="square" lIns="0" tIns="0" rIns="0" bIns="0" rtlCol="0" anchor="t"/>
           <a:lstStyle/>
           <a:p>
-            <a:pPr indent="0" marL="0">
+            <a:pPr marL="0" indent="0">
               <a:buNone/>
             </a:pPr>
             <a:r>
@@ -2686,6 +5353,13 @@
             <a:prstDash val="solid"/>
           </a:ln>
         </p:spPr>
+        <p:txBody>
+          <a:bodyPr/>
+          <a:lstStyle/>
+          <a:p>
+            <a:endParaRPr lang="en-US"/>
+          </a:p>
+        </p:txBody>
       </p:sp>
       <p:sp>
         <p:nvSpPr>
@@ -2708,11 +5382,11 @@
           <a:bodyPr wrap="square" lIns="0" tIns="0" rIns="0" bIns="0" rtlCol="0" anchor="ctr"/>
           <a:lstStyle/>
           <a:p>
-            <a:pPr indent="0" marL="0">
-              <a:buNone/>
-            </a:pPr>
-            <a:r>
-              <a:rPr lang="en-US" sz="1000" b="1" spc="300" kern="0" dirty="0">
+            <a:pPr marL="0" indent="0">
+              <a:buNone/>
+            </a:pPr>
+            <a:r>
+              <a:rPr lang="en-US" sz="1000" b="1" kern="0" spc="300" dirty="0">
                 <a:solidFill>
                   <a:srgbClr val="C9184A"/>
                 </a:solidFill>
@@ -2874,7 +5548,7 @@
           <a:bodyPr wrap="square" lIns="0" tIns="0" rIns="0" bIns="0" rtlCol="0" anchor="ctr"/>
           <a:lstStyle/>
           <a:p>
-            <a:pPr algn="l" indent="0" marL="0">
+            <a:pPr marL="0" indent="0" algn="l">
               <a:buNone/>
             </a:pPr>
             <a:r>
@@ -2908,6 +5582,7 @@
         <a:solidFill>
           <a:srgbClr val="FFFFFF"/>
         </a:solidFill>
+        <a:effectLst/>
       </p:bgPr>
     </p:bg>
     <p:spTree>
@@ -2945,11 +5620,11 @@
           <a:bodyPr wrap="square" lIns="0" tIns="0" rIns="0" bIns="0" rtlCol="0" anchor="ctr"/>
           <a:lstStyle/>
           <a:p>
-            <a:pPr indent="0" marL="0">
-              <a:buNone/>
-            </a:pPr>
-            <a:r>
-              <a:rPr lang="en-US" sz="1000" b="1" spc="200" kern="0" dirty="0">
+            <a:pPr marL="0" indent="0">
+              <a:buNone/>
+            </a:pPr>
+            <a:r>
+              <a:rPr lang="en-US" sz="1000" b="1" kern="0" spc="200" dirty="0">
                 <a:solidFill>
                   <a:srgbClr val="C9184A"/>
                 </a:solidFill>
@@ -2959,11 +5634,8 @@
               </a:rPr>
               <a:t>11</a:t>
             </a:r>
-            <a:pPr indent="0" marL="0">
-              <a:buNone/>
-            </a:pPr>
-            <a:r>
-              <a:rPr lang="en-US" sz="1000" spc="200" kern="0" dirty="0">
+            <a:r>
+              <a:rPr lang="en-US" sz="1000" kern="0" spc="200" dirty="0">
                 <a:solidFill>
                   <a:srgbClr val="6B7280"/>
                 </a:solidFill>
@@ -2998,7 +5670,7 @@
           <a:bodyPr wrap="square" lIns="0" tIns="0" rIns="0" bIns="0" rtlCol="0" anchor="ctr"/>
           <a:lstStyle/>
           <a:p>
-            <a:pPr algn="l" indent="0" marL="0">
+            <a:pPr marL="0" indent="0" algn="l">
               <a:buNone/>
             </a:pPr>
             <a:r>
@@ -3010,7 +5682,7 @@
                 <a:ea typeface="Georgia" pitchFamily="34" charset="-122"/>
                 <a:cs typeface="Georgia" pitchFamily="34" charset="-120"/>
               </a:rPr>
-              <a:t>What we'll build — next 60 minutes</a:t>
+              <a:t>What we'll build</a:t>
             </a:r>
             <a:endParaRPr lang="en-US" sz="3200" dirty="0"/>
           </a:p>
@@ -3040,6 +5712,13 @@
             <a:prstDash val="solid"/>
           </a:ln>
         </p:spPr>
+        <p:txBody>
+          <a:bodyPr/>
+          <a:lstStyle/>
+          <a:p>
+            <a:endParaRPr lang="en-US"/>
+          </a:p>
+        </p:txBody>
       </p:sp>
       <p:sp>
         <p:nvSpPr>
@@ -3062,7 +5741,7 @@
           <a:bodyPr wrap="square" lIns="0" tIns="0" rIns="0" bIns="0" rtlCol="0" anchor="ctr"/>
           <a:lstStyle/>
           <a:p>
-            <a:pPr indent="0" marL="0">
+            <a:pPr marL="0" indent="0">
               <a:buNone/>
             </a:pPr>
             <a:r>
@@ -3101,7 +5780,7 @@
           <a:bodyPr wrap="square" lIns="0" tIns="0" rIns="0" bIns="0" rtlCol="0" anchor="ctr"/>
           <a:lstStyle/>
           <a:p>
-            <a:pPr indent="0" marL="0">
+            <a:pPr marL="0" indent="0">
               <a:buNone/>
             </a:pPr>
             <a:r>
@@ -3140,7 +5819,7 @@
           <a:bodyPr wrap="square" lIns="0" tIns="0" rIns="0" bIns="0" rtlCol="0" anchor="ctr"/>
           <a:lstStyle/>
           <a:p>
-            <a:pPr indent="0" marL="0">
+            <a:pPr marL="0" indent="0">
               <a:buNone/>
             </a:pPr>
             <a:r>
@@ -3182,6 +5861,13 @@
             <a:prstDash val="solid"/>
           </a:ln>
         </p:spPr>
+        <p:txBody>
+          <a:bodyPr/>
+          <a:lstStyle/>
+          <a:p>
+            <a:endParaRPr lang="en-US"/>
+          </a:p>
+        </p:txBody>
       </p:sp>
       <p:sp>
         <p:nvSpPr>
@@ -3204,7 +5890,7 @@
           <a:bodyPr wrap="square" lIns="0" tIns="0" rIns="0" bIns="0" rtlCol="0" anchor="ctr"/>
           <a:lstStyle/>
           <a:p>
-            <a:pPr indent="0" marL="0">
+            <a:pPr marL="0" indent="0">
               <a:buNone/>
             </a:pPr>
             <a:r>
@@ -3243,7 +5929,7 @@
           <a:bodyPr wrap="square" lIns="0" tIns="0" rIns="0" bIns="0" rtlCol="0" anchor="ctr"/>
           <a:lstStyle/>
           <a:p>
-            <a:pPr indent="0" marL="0">
+            <a:pPr marL="0" indent="0">
               <a:buNone/>
             </a:pPr>
             <a:r>
@@ -3282,7 +5968,7 @@
           <a:bodyPr wrap="square" lIns="0" tIns="0" rIns="0" bIns="0" rtlCol="0" anchor="ctr"/>
           <a:lstStyle/>
           <a:p>
-            <a:pPr indent="0" marL="0">
+            <a:pPr marL="0" indent="0">
               <a:buNone/>
             </a:pPr>
             <a:r>
@@ -3324,6 +6010,13 @@
             <a:prstDash val="solid"/>
           </a:ln>
         </p:spPr>
+        <p:txBody>
+          <a:bodyPr/>
+          <a:lstStyle/>
+          <a:p>
+            <a:endParaRPr lang="en-US"/>
+          </a:p>
+        </p:txBody>
       </p:sp>
       <p:sp>
         <p:nvSpPr>
@@ -3346,7 +6039,7 @@
           <a:bodyPr wrap="square" lIns="0" tIns="0" rIns="0" bIns="0" rtlCol="0" anchor="ctr"/>
           <a:lstStyle/>
           <a:p>
-            <a:pPr indent="0" marL="0">
+            <a:pPr marL="0" indent="0">
               <a:buNone/>
             </a:pPr>
             <a:r>
@@ -3385,7 +6078,7 @@
           <a:bodyPr wrap="square" lIns="0" tIns="0" rIns="0" bIns="0" rtlCol="0" anchor="ctr"/>
           <a:lstStyle/>
           <a:p>
-            <a:pPr indent="0" marL="0">
+            <a:pPr marL="0" indent="0">
               <a:buNone/>
             </a:pPr>
             <a:r>
@@ -3424,7 +6117,7 @@
           <a:bodyPr wrap="square" lIns="0" tIns="0" rIns="0" bIns="0" rtlCol="0" anchor="ctr"/>
           <a:lstStyle/>
           <a:p>
-            <a:pPr indent="0" marL="0">
+            <a:pPr marL="0" indent="0">
               <a:buNone/>
             </a:pPr>
             <a:r>
@@ -3466,6 +6159,13 @@
             <a:prstDash val="solid"/>
           </a:ln>
         </p:spPr>
+        <p:txBody>
+          <a:bodyPr/>
+          <a:lstStyle/>
+          <a:p>
+            <a:endParaRPr lang="en-US"/>
+          </a:p>
+        </p:txBody>
       </p:sp>
       <p:sp>
         <p:nvSpPr>
@@ -3488,7 +6188,7 @@
           <a:bodyPr wrap="square" lIns="0" tIns="0" rIns="0" bIns="0" rtlCol="0" anchor="ctr"/>
           <a:lstStyle/>
           <a:p>
-            <a:pPr indent="0" marL="0">
+            <a:pPr marL="0" indent="0">
               <a:buNone/>
             </a:pPr>
             <a:r>
@@ -3527,7 +6227,7 @@
           <a:bodyPr wrap="square" lIns="0" tIns="0" rIns="0" bIns="0" rtlCol="0" anchor="ctr"/>
           <a:lstStyle/>
           <a:p>
-            <a:pPr indent="0" marL="0">
+            <a:pPr marL="0" indent="0">
               <a:buNone/>
             </a:pPr>
             <a:r>
@@ -3566,7 +6266,7 @@
           <a:bodyPr wrap="square" lIns="0" tIns="0" rIns="0" bIns="0" rtlCol="0" anchor="ctr"/>
           <a:lstStyle/>
           <a:p>
-            <a:pPr indent="0" marL="0">
+            <a:pPr marL="0" indent="0">
               <a:buNone/>
             </a:pPr>
             <a:r>
@@ -3608,6 +6308,13 @@
             <a:prstDash val="solid"/>
           </a:ln>
         </p:spPr>
+        <p:txBody>
+          <a:bodyPr/>
+          <a:lstStyle/>
+          <a:p>
+            <a:endParaRPr lang="en-US"/>
+          </a:p>
+        </p:txBody>
       </p:sp>
       <p:sp>
         <p:nvSpPr>
@@ -3630,7 +6337,7 @@
           <a:bodyPr wrap="square" lIns="0" tIns="0" rIns="0" bIns="0" rtlCol="0" anchor="ctr"/>
           <a:lstStyle/>
           <a:p>
-            <a:pPr indent="0" marL="0">
+            <a:pPr marL="0" indent="0">
               <a:buNone/>
             </a:pPr>
             <a:r>
@@ -3669,7 +6376,7 @@
           <a:bodyPr wrap="square" lIns="0" tIns="0" rIns="0" bIns="0" rtlCol="0" anchor="ctr"/>
           <a:lstStyle/>
           <a:p>
-            <a:pPr indent="0" marL="0">
+            <a:pPr marL="0" indent="0">
               <a:buNone/>
             </a:pPr>
             <a:r>
@@ -3708,7 +6415,7 @@
           <a:bodyPr wrap="square" lIns="0" tIns="0" rIns="0" bIns="0" rtlCol="0" anchor="ctr"/>
           <a:lstStyle/>
           <a:p>
-            <a:pPr indent="0" marL="0">
+            <a:pPr marL="0" indent="0">
               <a:buNone/>
             </a:pPr>
             <a:r>
@@ -3750,6 +6457,13 @@
             <a:prstDash val="solid"/>
           </a:ln>
         </p:spPr>
+        <p:txBody>
+          <a:bodyPr/>
+          <a:lstStyle/>
+          <a:p>
+            <a:endParaRPr lang="en-US"/>
+          </a:p>
+        </p:txBody>
       </p:sp>
       <p:sp>
         <p:nvSpPr>
@@ -3772,7 +6486,7 @@
           <a:bodyPr wrap="square" lIns="0" tIns="0" rIns="0" bIns="0" rtlCol="0" anchor="ctr"/>
           <a:lstStyle/>
           <a:p>
-            <a:pPr indent="0" marL="0">
+            <a:pPr marL="0" indent="0">
               <a:buNone/>
             </a:pPr>
             <a:r>
@@ -3811,7 +6525,7 @@
           <a:bodyPr wrap="square" lIns="0" tIns="0" rIns="0" bIns="0" rtlCol="0" anchor="ctr"/>
           <a:lstStyle/>
           <a:p>
-            <a:pPr indent="0" marL="0">
+            <a:pPr marL="0" indent="0">
               <a:buNone/>
             </a:pPr>
             <a:r>
@@ -3850,7 +6564,7 @@
           <a:bodyPr wrap="square" lIns="0" tIns="0" rIns="0" bIns="0" rtlCol="0" anchor="ctr"/>
           <a:lstStyle/>
           <a:p>
-            <a:pPr indent="0" marL="0">
+            <a:pPr marL="0" indent="0">
               <a:buNone/>
             </a:pPr>
             <a:r>
@@ -3892,6 +6606,13 @@
             <a:prstDash val="solid"/>
           </a:ln>
         </p:spPr>
+        <p:txBody>
+          <a:bodyPr/>
+          <a:lstStyle/>
+          <a:p>
+            <a:endParaRPr lang="en-US"/>
+          </a:p>
+        </p:txBody>
       </p:sp>
       <p:sp>
         <p:nvSpPr>
@@ -3914,7 +6635,7 @@
           <a:bodyPr wrap="square" lIns="0" tIns="0" rIns="0" bIns="0" rtlCol="0" anchor="ctr"/>
           <a:lstStyle/>
           <a:p>
-            <a:pPr indent="0" marL="0">
+            <a:pPr marL="0" indent="0">
               <a:buNone/>
             </a:pPr>
             <a:r>
@@ -3953,7 +6674,7 @@
           <a:bodyPr wrap="square" lIns="0" tIns="0" rIns="0" bIns="0" rtlCol="0" anchor="ctr"/>
           <a:lstStyle/>
           <a:p>
-            <a:pPr indent="0" marL="0">
+            <a:pPr marL="0" indent="0">
               <a:buNone/>
             </a:pPr>
             <a:r>
@@ -3992,7 +6713,7 @@
           <a:bodyPr wrap="square" lIns="0" tIns="0" rIns="0" bIns="0" rtlCol="0" anchor="ctr"/>
           <a:lstStyle/>
           <a:p>
-            <a:pPr indent="0" marL="0">
+            <a:pPr marL="0" indent="0">
               <a:buNone/>
             </a:pPr>
             <a:r>
@@ -4034,6 +6755,13 @@
             <a:prstDash val="solid"/>
           </a:ln>
         </p:spPr>
+        <p:txBody>
+          <a:bodyPr/>
+          <a:lstStyle/>
+          <a:p>
+            <a:endParaRPr lang="en-US"/>
+          </a:p>
+        </p:txBody>
       </p:sp>
       <p:sp>
         <p:nvSpPr>
@@ -4056,7 +6784,7 @@
           <a:bodyPr wrap="square" lIns="0" tIns="0" rIns="0" bIns="0" rtlCol="0" anchor="ctr"/>
           <a:lstStyle/>
           <a:p>
-            <a:pPr indent="0" marL="0">
+            <a:pPr marL="0" indent="0">
               <a:buNone/>
             </a:pPr>
             <a:r>
@@ -4095,7 +6823,7 @@
           <a:bodyPr wrap="square" lIns="0" tIns="0" rIns="0" bIns="0" rtlCol="0" anchor="ctr"/>
           <a:lstStyle/>
           <a:p>
-            <a:pPr indent="0" marL="0">
+            <a:pPr marL="0" indent="0">
               <a:buNone/>
             </a:pPr>
             <a:r>
@@ -4134,7 +6862,7 @@
           <a:bodyPr wrap="square" lIns="0" tIns="0" rIns="0" bIns="0" rtlCol="0" anchor="ctr"/>
           <a:lstStyle/>
           <a:p>
-            <a:pPr indent="0" marL="0">
+            <a:pPr marL="0" indent="0">
               <a:buNone/>
             </a:pPr>
             <a:r>
@@ -4173,7 +6901,7 @@
           <a:bodyPr wrap="square" lIns="0" tIns="0" rIns="0" bIns="0" rtlCol="0" anchor="ctr"/>
           <a:lstStyle/>
           <a:p>
-            <a:pPr algn="l" indent="0" marL="0">
+            <a:pPr marL="0" indent="0" algn="l">
               <a:buNone/>
             </a:pPr>
             <a:r>
@@ -4207,6 +6935,7 @@
         <a:solidFill>
           <a:srgbClr val="1A1A2E"/>
         </a:solidFill>
+        <a:effectLst/>
       </p:bgPr>
     </p:bg>
     <p:spTree>
@@ -4249,7 +6978,10 @@
         </p:spPr>
         <p:txBody>
           <a:bodyPr/>
-          <a:p/>
+          <a:lstStyle/>
+          <a:p>
+            <a:endParaRPr/>
+          </a:p>
         </p:txBody>
       </p:sp>
       <p:sp>
@@ -4273,7 +7005,7 @@
           <a:bodyPr wrap="square" lIns="0" tIns="0" rIns="0" bIns="0" rtlCol="0" anchor="ctr"/>
           <a:lstStyle/>
           <a:p>
-            <a:pPr indent="0" marL="0">
+            <a:pPr marL="0" indent="0">
               <a:buNone/>
             </a:pPr>
             <a:r>
@@ -4312,11 +7044,11 @@
           <a:bodyPr wrap="square" lIns="0" tIns="0" rIns="0" bIns="0" rtlCol="0" anchor="ctr"/>
           <a:lstStyle/>
           <a:p>
-            <a:pPr indent="0" marL="0">
-              <a:buNone/>
-            </a:pPr>
-            <a:r>
-              <a:rPr lang="en-US" sz="1200" b="1" spc="400" kern="0" dirty="0">
+            <a:pPr marL="0" indent="0">
+              <a:buNone/>
+            </a:pPr>
+            <a:r>
+              <a:rPr lang="en-US" sz="1200" b="1" kern="0" spc="400" dirty="0">
                 <a:solidFill>
                   <a:srgbClr val="C9184A"/>
                 </a:solidFill>
@@ -4351,7 +7083,7 @@
           <a:bodyPr wrap="square" lIns="0" tIns="0" rIns="0" bIns="0" rtlCol="0" anchor="ctr"/>
           <a:lstStyle/>
           <a:p>
-            <a:pPr indent="0" marL="0">
+            <a:pPr marL="0" indent="0">
               <a:buNone/>
             </a:pPr>
             <a:r>
@@ -4364,20 +7096,6 @@
                 <a:cs typeface="Consolas" pitchFamily="34" charset="-120"/>
               </a:rPr>
               <a:t>hakanotal.github.io/workshop-rag-chatbot</a:t>
-            </a:r>
-            <a:pPr indent="0" marL="0">
-              <a:buNone/>
-            </a:pPr>
-            <a:r>
-              <a:rPr lang="en-US" sz="2200" b="1" dirty="0">
-                <a:solidFill>
-                  <a:srgbClr val="FFFFFF"/>
-                </a:solidFill>
-                <a:latin typeface="Consolas" pitchFamily="34" charset="0"/>
-                <a:ea typeface="Consolas" pitchFamily="34" charset="-122"/>
-                <a:cs typeface="Consolas" pitchFamily="34" charset="-120"/>
-              </a:rPr>
-              <a:t/>
             </a:r>
             <a:endParaRPr lang="en-US" sz="2200" dirty="0"/>
           </a:p>
@@ -4407,7 +7125,10 @@
         </p:spPr>
         <p:txBody>
           <a:bodyPr/>
-          <a:p/>
+          <a:lstStyle/>
+          <a:p>
+            <a:endParaRPr/>
+          </a:p>
         </p:txBody>
       </p:sp>
       <p:sp>
@@ -4431,7 +7152,7 @@
           <a:bodyPr wrap="square" lIns="0" tIns="0" rIns="0" bIns="0" rtlCol="0" anchor="ctr"/>
           <a:lstStyle/>
           <a:p>
-            <a:pPr indent="0" marL="0">
+            <a:pPr marL="0" indent="0">
               <a:buNone/>
             </a:pPr>
             <a:r>
@@ -4448,7 +7169,7 @@
             <a:endParaRPr lang="en-US" sz="1400" dirty="0"/>
           </a:p>
           <a:p>
-            <a:pPr indent="0" marL="0">
+            <a:pPr marL="0" indent="0">
               <a:buNone/>
             </a:pPr>
             <a:r>
@@ -4462,9 +7183,6 @@
               </a:rPr>
               <a:t>2.  Click </a:t>
             </a:r>
-            <a:pPr indent="0" marL="0">
-              <a:buNone/>
-            </a:pPr>
             <a:r>
               <a:rPr lang="en-US" sz="1400" b="1" dirty="0">
                 <a:solidFill>
@@ -4476,24 +7194,10 @@
               </a:rPr>
               <a:t>Open notebook in Colab</a:t>
             </a:r>
-            <a:pPr indent="0" marL="0">
-              <a:buNone/>
-            </a:pPr>
-            <a:r>
-              <a:rPr lang="en-US" sz="1400" dirty="0">
-                <a:solidFill>
-                  <a:srgbClr val="CADCFC"/>
-                </a:solidFill>
-                <a:latin typeface="Calibri" pitchFamily="34" charset="0"/>
-                <a:ea typeface="Calibri" pitchFamily="34" charset="-122"/>
-                <a:cs typeface="Calibri" pitchFamily="34" charset="-120"/>
-              </a:rPr>
-              <a:t/>
-            </a:r>
             <a:endParaRPr lang="en-US" sz="1400" dirty="0"/>
           </a:p>
           <a:p>
-            <a:pPr indent="0" marL="0">
+            <a:pPr marL="0" indent="0">
               <a:buNone/>
             </a:pPr>
             <a:r>
@@ -4527,6 +7231,7 @@
         <a:solidFill>
           <a:srgbClr val="FFFFFF"/>
         </a:solidFill>
+        <a:effectLst/>
       </p:bgPr>
     </p:bg>
     <p:spTree>
@@ -4564,11 +7269,11 @@
           <a:bodyPr wrap="square" lIns="0" tIns="0" rIns="0" bIns="0" rtlCol="0" anchor="ctr"/>
           <a:lstStyle/>
           <a:p>
-            <a:pPr indent="0" marL="0">
-              <a:buNone/>
-            </a:pPr>
-            <a:r>
-              <a:rPr lang="en-US" sz="1000" b="1" spc="200" kern="0" dirty="0">
+            <a:pPr marL="0" indent="0">
+              <a:buNone/>
+            </a:pPr>
+            <a:r>
+              <a:rPr lang="en-US" sz="1000" b="1" kern="0" spc="200" dirty="0">
                 <a:solidFill>
                   <a:srgbClr val="C9184A"/>
                 </a:solidFill>
@@ -4578,11 +7283,8 @@
               </a:rPr>
               <a:t>02</a:t>
             </a:r>
-            <a:pPr indent="0" marL="0">
-              <a:buNone/>
-            </a:pPr>
-            <a:r>
-              <a:rPr lang="en-US" sz="1000" spc="200" kern="0" dirty="0">
+            <a:r>
+              <a:rPr lang="en-US" sz="1000" kern="0" spc="200" dirty="0">
                 <a:solidFill>
                   <a:srgbClr val="6B7280"/>
                 </a:solidFill>
@@ -4617,7 +7319,7 @@
           <a:bodyPr wrap="square" lIns="0" tIns="0" rIns="0" bIns="0" rtlCol="0" anchor="ctr"/>
           <a:lstStyle/>
           <a:p>
-            <a:pPr algn="l" indent="0" marL="0">
+            <a:pPr marL="0" indent="0" algn="l">
               <a:buNone/>
             </a:pPr>
             <a:r>
@@ -4656,11 +7358,11 @@
           <a:bodyPr wrap="square" lIns="0" tIns="0" rIns="0" bIns="0" rtlCol="0" anchor="ctr"/>
           <a:lstStyle/>
           <a:p>
-            <a:pPr indent="0" marL="0">
-              <a:buNone/>
-            </a:pPr>
-            <a:r>
-              <a:rPr lang="en-US" sz="1100" b="1" spc="200" kern="0" dirty="0">
+            <a:pPr marL="0" indent="0">
+              <a:buNone/>
+            </a:pPr>
+            <a:r>
+              <a:rPr lang="en-US" sz="1100" b="1" kern="0" spc="200" dirty="0">
                 <a:solidFill>
                   <a:srgbClr val="C9184A"/>
                 </a:solidFill>
@@ -4781,6 +7483,13 @@
             <a:prstDash val="solid"/>
           </a:ln>
         </p:spPr>
+        <p:txBody>
+          <a:bodyPr/>
+          <a:lstStyle/>
+          <a:p>
+            <a:endParaRPr lang="en-US"/>
+          </a:p>
+        </p:txBody>
       </p:sp>
       <p:sp>
         <p:nvSpPr>
@@ -4803,11 +7512,11 @@
           <a:bodyPr wrap="square" lIns="0" tIns="0" rIns="0" bIns="0" rtlCol="0" anchor="ctr"/>
           <a:lstStyle/>
           <a:p>
-            <a:pPr indent="0" marL="0">
-              <a:buNone/>
-            </a:pPr>
-            <a:r>
-              <a:rPr lang="en-US" sz="1100" b="1" spc="200" kern="0" dirty="0">
+            <a:pPr marL="0" indent="0">
+              <a:buNone/>
+            </a:pPr>
+            <a:r>
+              <a:rPr lang="en-US" sz="1100" b="1" kern="0" spc="200" dirty="0">
                 <a:solidFill>
                   <a:srgbClr val="C9184A"/>
                 </a:solidFill>
@@ -4845,6 +7554,13 @@
             <a:prstDash val="solid"/>
           </a:ln>
         </p:spPr>
+        <p:txBody>
+          <a:bodyPr/>
+          <a:lstStyle/>
+          <a:p>
+            <a:endParaRPr lang="en-US"/>
+          </a:p>
+        </p:txBody>
       </p:sp>
       <p:sp>
         <p:nvSpPr>
@@ -4867,7 +7583,7 @@
           <a:bodyPr wrap="square" lIns="0" tIns="0" rIns="0" bIns="0" rtlCol="0" anchor="ctr"/>
           <a:lstStyle/>
           <a:p>
-            <a:pPr algn="ctr" indent="0" marL="0">
+            <a:pPr marL="0" indent="0" algn="ctr">
               <a:buNone/>
             </a:pPr>
             <a:r>
@@ -4906,7 +7622,7 @@
           <a:bodyPr wrap="square" lIns="0" tIns="0" rIns="0" bIns="0" rtlCol="0" anchor="t"/>
           <a:lstStyle/>
           <a:p>
-            <a:pPr indent="0" marL="0">
+            <a:pPr marL="0" indent="0">
               <a:buNone/>
             </a:pPr>
             <a:r>
@@ -4923,7 +7639,7 @@
             <a:endParaRPr lang="en-US" sz="1300" dirty="0"/>
           </a:p>
           <a:p>
-            <a:pPr indent="0" marL="0">
+            <a:pPr marL="0" indent="0">
               <a:buNone/>
             </a:pPr>
             <a:r>
@@ -4965,6 +7681,13 @@
             <a:prstDash val="solid"/>
           </a:ln>
         </p:spPr>
+        <p:txBody>
+          <a:bodyPr/>
+          <a:lstStyle/>
+          <a:p>
+            <a:endParaRPr lang="en-US"/>
+          </a:p>
+        </p:txBody>
       </p:sp>
       <p:sp>
         <p:nvSpPr>
@@ -4987,7 +7710,7 @@
           <a:bodyPr wrap="square" lIns="0" tIns="0" rIns="0" bIns="0" rtlCol="0" anchor="ctr"/>
           <a:lstStyle/>
           <a:p>
-            <a:pPr algn="ctr" indent="0" marL="0">
+            <a:pPr marL="0" indent="0" algn="ctr">
               <a:buNone/>
             </a:pPr>
             <a:r>
@@ -5026,7 +7749,7 @@
           <a:bodyPr wrap="square" lIns="0" tIns="0" rIns="0" bIns="0" rtlCol="0" anchor="t"/>
           <a:lstStyle/>
           <a:p>
-            <a:pPr indent="0" marL="0">
+            <a:pPr marL="0" indent="0">
               <a:buNone/>
             </a:pPr>
             <a:r>
@@ -5043,7 +7766,7 @@
             <a:endParaRPr lang="en-US" sz="1300" dirty="0"/>
           </a:p>
           <a:p>
-            <a:pPr indent="0" marL="0">
+            <a:pPr marL="0" indent="0">
               <a:buNone/>
             </a:pPr>
             <a:r>
@@ -5085,6 +7808,13 @@
             <a:prstDash val="solid"/>
           </a:ln>
         </p:spPr>
+        <p:txBody>
+          <a:bodyPr/>
+          <a:lstStyle/>
+          <a:p>
+            <a:endParaRPr lang="en-US"/>
+          </a:p>
+        </p:txBody>
       </p:sp>
       <p:sp>
         <p:nvSpPr>
@@ -5107,7 +7837,7 @@
           <a:bodyPr wrap="square" lIns="0" tIns="0" rIns="0" bIns="0" rtlCol="0" anchor="ctr"/>
           <a:lstStyle/>
           <a:p>
-            <a:pPr algn="ctr" indent="0" marL="0">
+            <a:pPr marL="0" indent="0" algn="ctr">
               <a:buNone/>
             </a:pPr>
             <a:r>
@@ -5146,7 +7876,7 @@
           <a:bodyPr wrap="square" lIns="0" tIns="0" rIns="0" bIns="0" rtlCol="0" anchor="t"/>
           <a:lstStyle/>
           <a:p>
-            <a:pPr indent="0" marL="0">
+            <a:pPr marL="0" indent="0">
               <a:buNone/>
             </a:pPr>
             <a:r>
@@ -5163,7 +7893,7 @@
             <a:endParaRPr lang="en-US" sz="1300" dirty="0"/>
           </a:p>
           <a:p>
-            <a:pPr indent="0" marL="0">
+            <a:pPr marL="0" indent="0">
               <a:buNone/>
             </a:pPr>
             <a:r>
@@ -5205,6 +7935,13 @@
             <a:prstDash val="solid"/>
           </a:ln>
         </p:spPr>
+        <p:txBody>
+          <a:bodyPr/>
+          <a:lstStyle/>
+          <a:p>
+            <a:endParaRPr lang="en-US"/>
+          </a:p>
+        </p:txBody>
       </p:sp>
       <p:sp>
         <p:nvSpPr>
@@ -5227,7 +7964,7 @@
           <a:bodyPr wrap="square" lIns="0" tIns="0" rIns="0" bIns="0" rtlCol="0" anchor="ctr"/>
           <a:lstStyle/>
           <a:p>
-            <a:pPr algn="ctr" indent="0" marL="0">
+            <a:pPr marL="0" indent="0" algn="ctr">
               <a:buNone/>
             </a:pPr>
             <a:r>
@@ -5266,7 +8003,7 @@
           <a:bodyPr wrap="square" lIns="0" tIns="0" rIns="0" bIns="0" rtlCol="0" anchor="t"/>
           <a:lstStyle/>
           <a:p>
-            <a:pPr indent="0" marL="0">
+            <a:pPr marL="0" indent="0">
               <a:buNone/>
             </a:pPr>
             <a:r>
@@ -5283,7 +8020,7 @@
             <a:endParaRPr lang="en-US" sz="1300" dirty="0"/>
           </a:p>
           <a:p>
-            <a:pPr indent="0" marL="0">
+            <a:pPr marL="0" indent="0">
               <a:buNone/>
             </a:pPr>
             <a:r>
@@ -5322,7 +8059,7 @@
           <a:bodyPr wrap="square" lIns="0" tIns="0" rIns="0" bIns="0" rtlCol="0" anchor="ctr"/>
           <a:lstStyle/>
           <a:p>
-            <a:pPr algn="l" indent="0" marL="0">
+            <a:pPr marL="0" indent="0" algn="l">
               <a:buNone/>
             </a:pPr>
             <a:r>
@@ -5356,6 +8093,7 @@
         <a:solidFill>
           <a:srgbClr val="FFFFFF"/>
         </a:solidFill>
+        <a:effectLst/>
       </p:bgPr>
     </p:bg>
     <p:spTree>
@@ -5393,11 +8131,11 @@
           <a:bodyPr wrap="square" lIns="0" tIns="0" rIns="0" bIns="0" rtlCol="0" anchor="ctr"/>
           <a:lstStyle/>
           <a:p>
-            <a:pPr indent="0" marL="0">
-              <a:buNone/>
-            </a:pPr>
-            <a:r>
-              <a:rPr lang="en-US" sz="1000" b="1" spc="200" kern="0" dirty="0">
+            <a:pPr marL="0" indent="0">
+              <a:buNone/>
+            </a:pPr>
+            <a:r>
+              <a:rPr lang="en-US" sz="1000" b="1" kern="0" spc="200" dirty="0">
                 <a:solidFill>
                   <a:srgbClr val="C9184A"/>
                 </a:solidFill>
@@ -5407,11 +8145,8 @@
               </a:rPr>
               <a:t>03</a:t>
             </a:r>
-            <a:pPr indent="0" marL="0">
-              <a:buNone/>
-            </a:pPr>
-            <a:r>
-              <a:rPr lang="en-US" sz="1000" spc="200" kern="0" dirty="0">
+            <a:r>
+              <a:rPr lang="en-US" sz="1000" kern="0" spc="200" dirty="0">
                 <a:solidFill>
                   <a:srgbClr val="6B7280"/>
                 </a:solidFill>
@@ -5446,7 +8181,7 @@
           <a:bodyPr wrap="square" lIns="0" tIns="0" rIns="0" bIns="0" rtlCol="0" anchor="ctr"/>
           <a:lstStyle/>
           <a:p>
-            <a:pPr algn="l" indent="0" marL="0">
+            <a:pPr marL="0" indent="0" algn="l">
               <a:buNone/>
             </a:pPr>
             <a:r>
@@ -5483,6 +8218,13 @@
           </a:solidFill>
           <a:ln/>
         </p:spPr>
+        <p:txBody>
+          <a:bodyPr/>
+          <a:lstStyle/>
+          <a:p>
+            <a:endParaRPr lang="en-US"/>
+          </a:p>
+        </p:txBody>
       </p:sp>
       <p:sp>
         <p:nvSpPr>
@@ -5508,6 +8250,13 @@
             <a:prstDash val="solid"/>
           </a:ln>
         </p:spPr>
+        <p:txBody>
+          <a:bodyPr/>
+          <a:lstStyle/>
+          <a:p>
+            <a:endParaRPr lang="en-US"/>
+          </a:p>
+        </p:txBody>
       </p:sp>
       <p:sp>
         <p:nvSpPr>
@@ -5530,11 +8279,11 @@
           <a:bodyPr wrap="square" lIns="0" tIns="0" rIns="0" bIns="0" rtlCol="0" anchor="ctr"/>
           <a:lstStyle/>
           <a:p>
-            <a:pPr indent="0" marL="0">
-              <a:buNone/>
-            </a:pPr>
-            <a:r>
-              <a:rPr lang="en-US" sz="900" b="1" spc="300" kern="0" dirty="0">
+            <a:pPr marL="0" indent="0">
+              <a:buNone/>
+            </a:pPr>
+            <a:r>
+              <a:rPr lang="en-US" sz="900" b="1" kern="0" spc="300" dirty="0">
                 <a:solidFill>
                   <a:srgbClr val="C9184A"/>
                 </a:solidFill>
@@ -5569,7 +8318,7 @@
           <a:bodyPr wrap="square" lIns="0" tIns="0" rIns="0" bIns="0" rtlCol="0" anchor="t"/>
           <a:lstStyle/>
           <a:p>
-            <a:pPr indent="0" marL="0">
+            <a:pPr marL="0" indent="0">
               <a:buNone/>
             </a:pPr>
             <a:r>
@@ -5608,7 +8357,7 @@
           <a:bodyPr wrap="square" lIns="0" tIns="0" rIns="0" bIns="0" rtlCol="0" anchor="ctr"/>
           <a:lstStyle/>
           <a:p>
-            <a:pPr indent="0" marL="0">
+            <a:pPr marL="0" indent="0">
               <a:buNone/>
             </a:pPr>
             <a:r>
@@ -5647,11 +8396,11 @@
           <a:bodyPr wrap="square" lIns="0" tIns="0" rIns="0" bIns="0" rtlCol="0" anchor="ctr"/>
           <a:lstStyle/>
           <a:p>
-            <a:pPr indent="0" marL="0">
-              <a:buNone/>
-            </a:pPr>
-            <a:r>
-              <a:rPr lang="en-US" sz="1100" b="1" spc="200" kern="0" dirty="0">
+            <a:pPr marL="0" indent="0">
+              <a:buNone/>
+            </a:pPr>
+            <a:r>
+              <a:rPr lang="en-US" sz="1100" b="1" kern="0" spc="200" dirty="0">
                 <a:solidFill>
                   <a:srgbClr val="C9184A"/>
                 </a:solidFill>
@@ -5686,7 +8435,7 @@
           <a:bodyPr wrap="square" lIns="0" tIns="0" rIns="0" bIns="0" rtlCol="0" anchor="ctr"/>
           <a:lstStyle/>
           <a:p>
-            <a:pPr indent="0" marL="0">
+            <a:pPr marL="0" indent="0">
               <a:buNone/>
             </a:pPr>
             <a:r>
@@ -5703,7 +8452,7 @@
             <a:endParaRPr lang="en-US" sz="2200" dirty="0"/>
           </a:p>
           <a:p>
-            <a:pPr indent="0" marL="0">
+            <a:pPr marL="0" indent="0">
               <a:buNone/>
             </a:pPr>
             <a:r>
@@ -5742,7 +8491,7 @@
           <a:bodyPr wrap="square" lIns="0" tIns="0" rIns="0" bIns="0" rtlCol="0" anchor="t"/>
           <a:lstStyle/>
           <a:p>
-            <a:pPr indent="0" marL="0">
+            <a:pPr marL="0" indent="0">
               <a:buNone/>
             </a:pPr>
             <a:r>
@@ -5759,7 +8508,7 @@
             <a:endParaRPr lang="en-US" sz="1300" dirty="0"/>
           </a:p>
           <a:p>
-            <a:pPr indent="0" marL="0">
+            <a:pPr marL="0" indent="0">
               <a:buNone/>
             </a:pPr>
             <a:r>
@@ -5776,7 +8525,7 @@
             <a:endParaRPr lang="en-US" sz="1300" dirty="0"/>
           </a:p>
           <a:p>
-            <a:pPr indent="0" marL="0">
+            <a:pPr marL="0" indent="0">
               <a:buNone/>
             </a:pPr>
             <a:r>
@@ -5815,7 +8564,7 @@
           <a:bodyPr wrap="square" lIns="0" tIns="0" rIns="0" bIns="0" rtlCol="0" anchor="ctr"/>
           <a:lstStyle/>
           <a:p>
-            <a:pPr algn="l" indent="0" marL="0">
+            <a:pPr marL="0" indent="0" algn="l">
               <a:buNone/>
             </a:pPr>
             <a:r>
@@ -5849,6 +8598,7 @@
         <a:solidFill>
           <a:srgbClr val="FFFFFF"/>
         </a:solidFill>
+        <a:effectLst/>
       </p:bgPr>
     </p:bg>
     <p:spTree>
@@ -5886,11 +8636,11 @@
           <a:bodyPr wrap="square" lIns="0" tIns="0" rIns="0" bIns="0" rtlCol="0" anchor="ctr"/>
           <a:lstStyle/>
           <a:p>
-            <a:pPr indent="0" marL="0">
-              <a:buNone/>
-            </a:pPr>
-            <a:r>
-              <a:rPr lang="en-US" sz="1000" b="1" spc="200" kern="0" dirty="0">
+            <a:pPr marL="0" indent="0">
+              <a:buNone/>
+            </a:pPr>
+            <a:r>
+              <a:rPr lang="en-US" sz="1000" b="1" kern="0" spc="200" dirty="0">
                 <a:solidFill>
                   <a:srgbClr val="C9184A"/>
                 </a:solidFill>
@@ -5900,11 +8650,8 @@
               </a:rPr>
               <a:t>04</a:t>
             </a:r>
-            <a:pPr indent="0" marL="0">
-              <a:buNone/>
-            </a:pPr>
-            <a:r>
-              <a:rPr lang="en-US" sz="1000" spc="200" kern="0" dirty="0">
+            <a:r>
+              <a:rPr lang="en-US" sz="1000" kern="0" spc="200" dirty="0">
                 <a:solidFill>
                   <a:srgbClr val="6B7280"/>
                 </a:solidFill>
@@ -5939,7 +8686,7 @@
           <a:bodyPr wrap="square" lIns="0" tIns="0" rIns="0" bIns="0" rtlCol="0" anchor="ctr"/>
           <a:lstStyle/>
           <a:p>
-            <a:pPr algn="l" indent="0" marL="0">
+            <a:pPr marL="0" indent="0" algn="l">
               <a:buNone/>
             </a:pPr>
             <a:r>
@@ -5981,6 +8728,13 @@
             <a:prstDash val="solid"/>
           </a:ln>
         </p:spPr>
+        <p:txBody>
+          <a:bodyPr/>
+          <a:lstStyle/>
+          <a:p>
+            <a:endParaRPr lang="en-US"/>
+          </a:p>
+        </p:txBody>
       </p:sp>
       <p:sp>
         <p:nvSpPr>
@@ -6006,6 +8760,13 @@
             <a:prstDash val="solid"/>
           </a:ln>
         </p:spPr>
+        <p:txBody>
+          <a:bodyPr/>
+          <a:lstStyle/>
+          <a:p>
+            <a:endParaRPr lang="en-US"/>
+          </a:p>
+        </p:txBody>
       </p:sp>
       <p:sp>
         <p:nvSpPr>
@@ -6028,11 +8789,11 @@
           <a:bodyPr wrap="square" lIns="0" tIns="0" rIns="0" bIns="0" rtlCol="0" anchor="ctr"/>
           <a:lstStyle/>
           <a:p>
-            <a:pPr algn="ctr" indent="0" marL="0">
-              <a:buNone/>
-            </a:pPr>
-            <a:r>
-              <a:rPr lang="en-US" sz="900" b="1" spc="200" kern="0" dirty="0">
+            <a:pPr marL="0" indent="0" algn="ctr">
+              <a:buNone/>
+            </a:pPr>
+            <a:r>
+              <a:rPr lang="en-US" sz="900" b="1" kern="0" spc="200" dirty="0">
                 <a:solidFill>
                   <a:srgbClr val="FFFFFF"/>
                 </a:solidFill>
@@ -6067,7 +8828,7 @@
           <a:bodyPr wrap="square" lIns="0" tIns="0" rIns="0" bIns="0" rtlCol="0" anchor="ctr"/>
           <a:lstStyle/>
           <a:p>
-            <a:pPr indent="0" marL="0">
+            <a:pPr marL="0" indent="0">
               <a:buNone/>
             </a:pPr>
             <a:r>
@@ -6106,7 +8867,7 @@
           <a:bodyPr wrap="square" lIns="0" tIns="0" rIns="0" bIns="0" rtlCol="0" anchor="ctr"/>
           <a:lstStyle/>
           <a:p>
-            <a:pPr indent="0" marL="0">
+            <a:pPr marL="0" indent="0">
               <a:buNone/>
             </a:pPr>
             <a:r>
@@ -6145,7 +8906,7 @@
           <a:bodyPr wrap="square" lIns="0" tIns="0" rIns="0" bIns="0" rtlCol="0" anchor="t"/>
           <a:lstStyle/>
           <a:p>
-            <a:pPr indent="0" marL="0">
+            <a:pPr marL="0" indent="0">
               <a:buNone/>
             </a:pPr>
             <a:r>
@@ -6187,6 +8948,13 @@
             <a:prstDash val="solid"/>
           </a:ln>
         </p:spPr>
+        <p:txBody>
+          <a:bodyPr/>
+          <a:lstStyle/>
+          <a:p>
+            <a:endParaRPr lang="en-US"/>
+          </a:p>
+        </p:txBody>
       </p:sp>
       <p:sp>
         <p:nvSpPr>
@@ -6212,6 +8980,13 @@
             <a:prstDash val="solid"/>
           </a:ln>
         </p:spPr>
+        <p:txBody>
+          <a:bodyPr/>
+          <a:lstStyle/>
+          <a:p>
+            <a:endParaRPr lang="en-US"/>
+          </a:p>
+        </p:txBody>
       </p:sp>
       <p:sp>
         <p:nvSpPr>
@@ -6234,11 +9009,11 @@
           <a:bodyPr wrap="square" lIns="0" tIns="0" rIns="0" bIns="0" rtlCol="0" anchor="ctr"/>
           <a:lstStyle/>
           <a:p>
-            <a:pPr algn="ctr" indent="0" marL="0">
-              <a:buNone/>
-            </a:pPr>
-            <a:r>
-              <a:rPr lang="en-US" sz="900" b="1" spc="200" kern="0" dirty="0">
+            <a:pPr marL="0" indent="0" algn="ctr">
+              <a:buNone/>
+            </a:pPr>
+            <a:r>
+              <a:rPr lang="en-US" sz="900" b="1" kern="0" spc="200" dirty="0">
                 <a:solidFill>
                   <a:srgbClr val="FFFFFF"/>
                 </a:solidFill>
@@ -6273,7 +9048,7 @@
           <a:bodyPr wrap="square" lIns="0" tIns="0" rIns="0" bIns="0" rtlCol="0" anchor="ctr"/>
           <a:lstStyle/>
           <a:p>
-            <a:pPr indent="0" marL="0">
+            <a:pPr marL="0" indent="0">
               <a:buNone/>
             </a:pPr>
             <a:r>
@@ -6312,7 +9087,7 @@
           <a:bodyPr wrap="square" lIns="0" tIns="0" rIns="0" bIns="0" rtlCol="0" anchor="ctr"/>
           <a:lstStyle/>
           <a:p>
-            <a:pPr indent="0" marL="0">
+            <a:pPr marL="0" indent="0">
               <a:buNone/>
             </a:pPr>
             <a:r>
@@ -6351,7 +9126,7 @@
           <a:bodyPr wrap="square" lIns="0" tIns="0" rIns="0" bIns="0" rtlCol="0" anchor="t"/>
           <a:lstStyle/>
           <a:p>
-            <a:pPr indent="0" marL="0">
+            <a:pPr marL="0" indent="0">
               <a:buNone/>
             </a:pPr>
             <a:r>
@@ -6393,6 +9168,13 @@
             <a:prstDash val="solid"/>
           </a:ln>
         </p:spPr>
+        <p:txBody>
+          <a:bodyPr/>
+          <a:lstStyle/>
+          <a:p>
+            <a:endParaRPr lang="en-US"/>
+          </a:p>
+        </p:txBody>
       </p:sp>
       <p:sp>
         <p:nvSpPr>
@@ -6418,6 +9200,13 @@
             <a:prstDash val="solid"/>
           </a:ln>
         </p:spPr>
+        <p:txBody>
+          <a:bodyPr/>
+          <a:lstStyle/>
+          <a:p>
+            <a:endParaRPr lang="en-US"/>
+          </a:p>
+        </p:txBody>
       </p:sp>
       <p:sp>
         <p:nvSpPr>
@@ -6440,11 +9229,11 @@
           <a:bodyPr wrap="square" lIns="0" tIns="0" rIns="0" bIns="0" rtlCol="0" anchor="ctr"/>
           <a:lstStyle/>
           <a:p>
-            <a:pPr algn="ctr" indent="0" marL="0">
-              <a:buNone/>
-            </a:pPr>
-            <a:r>
-              <a:rPr lang="en-US" sz="900" b="1" spc="200" kern="0" dirty="0">
+            <a:pPr marL="0" indent="0" algn="ctr">
+              <a:buNone/>
+            </a:pPr>
+            <a:r>
+              <a:rPr lang="en-US" sz="900" b="1" kern="0" spc="200" dirty="0">
                 <a:solidFill>
                   <a:srgbClr val="FFFFFF"/>
                 </a:solidFill>
@@ -6479,7 +9268,7 @@
           <a:bodyPr wrap="square" lIns="0" tIns="0" rIns="0" bIns="0" rtlCol="0" anchor="ctr"/>
           <a:lstStyle/>
           <a:p>
-            <a:pPr indent="0" marL="0">
+            <a:pPr marL="0" indent="0">
               <a:buNone/>
             </a:pPr>
             <a:r>
@@ -6518,7 +9307,7 @@
           <a:bodyPr wrap="square" lIns="0" tIns="0" rIns="0" bIns="0" rtlCol="0" anchor="ctr"/>
           <a:lstStyle/>
           <a:p>
-            <a:pPr indent="0" marL="0">
+            <a:pPr marL="0" indent="0">
               <a:buNone/>
             </a:pPr>
             <a:r>
@@ -6557,7 +9346,7 @@
           <a:bodyPr wrap="square" lIns="0" tIns="0" rIns="0" bIns="0" rtlCol="0" anchor="t"/>
           <a:lstStyle/>
           <a:p>
-            <a:pPr indent="0" marL="0">
+            <a:pPr marL="0" indent="0">
               <a:buNone/>
             </a:pPr>
             <a:r>
@@ -6596,7 +9385,7 @@
           <a:bodyPr wrap="square" lIns="0" tIns="0" rIns="0" bIns="0" rtlCol="0" anchor="ctr"/>
           <a:lstStyle/>
           <a:p>
-            <a:pPr algn="l" indent="0" marL="0">
+            <a:pPr marL="0" indent="0" algn="l">
               <a:buNone/>
             </a:pPr>
             <a:r>
@@ -6630,6 +9419,7 @@
         <a:solidFill>
           <a:srgbClr val="FFFFFF"/>
         </a:solidFill>
+        <a:effectLst/>
       </p:bgPr>
     </p:bg>
     <p:spTree>
@@ -6667,11 +9457,11 @@
           <a:bodyPr wrap="square" lIns="0" tIns="0" rIns="0" bIns="0" rtlCol="0" anchor="ctr"/>
           <a:lstStyle/>
           <a:p>
-            <a:pPr indent="0" marL="0">
-              <a:buNone/>
-            </a:pPr>
-            <a:r>
-              <a:rPr lang="en-US" sz="1000" b="1" spc="200" kern="0" dirty="0">
+            <a:pPr marL="0" indent="0">
+              <a:buNone/>
+            </a:pPr>
+            <a:r>
+              <a:rPr lang="en-US" sz="1000" b="1" kern="0" spc="200" dirty="0">
                 <a:solidFill>
                   <a:srgbClr val="C9184A"/>
                 </a:solidFill>
@@ -6681,11 +9471,8 @@
               </a:rPr>
               <a:t>05</a:t>
             </a:r>
-            <a:pPr indent="0" marL="0">
-              <a:buNone/>
-            </a:pPr>
-            <a:r>
-              <a:rPr lang="en-US" sz="1000" spc="200" kern="0" dirty="0">
+            <a:r>
+              <a:rPr lang="en-US" sz="1000" kern="0" spc="200" dirty="0">
                 <a:solidFill>
                   <a:srgbClr val="6B7280"/>
                 </a:solidFill>
@@ -6720,7 +9507,7 @@
           <a:bodyPr wrap="square" lIns="0" tIns="0" rIns="0" bIns="0" rtlCol="0" anchor="ctr"/>
           <a:lstStyle/>
           <a:p>
-            <a:pPr algn="l" indent="0" marL="0">
+            <a:pPr marL="0" indent="0" algn="l">
               <a:buNone/>
             </a:pPr>
             <a:r>
@@ -6740,1001 +9527,6 @@
       </p:sp>
       <p:sp>
         <p:nvSpPr>
-          <p:cNvPr id="4" name="Shape 2"/>
-          <p:cNvSpPr/>
-          <p:nvPr/>
-        </p:nvSpPr>
-        <p:spPr>
-          <a:xfrm>
-            <a:off x="662940" y="2103120"/>
-            <a:ext cx="1188720" cy="1188720"/>
-          </a:xfrm>
-          <a:prstGeom prst="rect">
-            <a:avLst/>
-          </a:prstGeom>
-          <a:solidFill>
-            <a:srgbClr val="FFFFFF"/>
-          </a:solidFill>
-          <a:ln w="25400">
-            <a:solidFill>
-              <a:srgbClr val="6B7280"/>
-            </a:solidFill>
-            <a:prstDash val="solid"/>
-          </a:ln>
-        </p:spPr>
-      </p:sp>
-      <p:sp>
-        <p:nvSpPr>
-          <p:cNvPr id="5" name="Shape 3"/>
-          <p:cNvSpPr/>
-          <p:nvPr/>
-        </p:nvSpPr>
-        <p:spPr>
-          <a:xfrm>
-            <a:off x="1074420" y="2286000"/>
-            <a:ext cx="365760" cy="365760"/>
-          </a:xfrm>
-          <a:prstGeom prst="ellipse">
-            <a:avLst/>
-          </a:prstGeom>
-          <a:solidFill>
-            <a:srgbClr val="6B7280"/>
-          </a:solidFill>
-          <a:ln w="12700">
-            <a:solidFill>
-              <a:srgbClr val="6B7280"/>
-            </a:solidFill>
-            <a:prstDash val="solid"/>
-          </a:ln>
-        </p:spPr>
-      </p:sp>
-      <p:sp>
-        <p:nvSpPr>
-          <p:cNvPr id="6" name="Text 4"/>
-          <p:cNvSpPr/>
-          <p:nvPr/>
-        </p:nvSpPr>
-        <p:spPr>
-          <a:xfrm>
-            <a:off x="1074420" y="2286000"/>
-            <a:ext cx="365760" cy="365760"/>
-          </a:xfrm>
-          <a:prstGeom prst="rect">
-            <a:avLst/>
-          </a:prstGeom>
-          <a:noFill/>
-          <a:ln/>
-        </p:spPr>
-        <p:txBody>
-          <a:bodyPr wrap="square" lIns="0" tIns="0" rIns="0" bIns="0" rtlCol="0" anchor="ctr"/>
-          <a:lstStyle/>
-          <a:p>
-            <a:pPr algn="ctr" indent="0" marL="0">
-              <a:buNone/>
-            </a:pPr>
-            <a:r>
-              <a:rPr lang="en-US" sz="1400" b="1" dirty="0">
-                <a:solidFill>
-                  <a:srgbClr val="FFFFFF"/>
-                </a:solidFill>
-                <a:latin typeface="Calibri" pitchFamily="34" charset="0"/>
-                <a:ea typeface="Calibri" pitchFamily="34" charset="-122"/>
-                <a:cs typeface="Calibri" pitchFamily="34" charset="-120"/>
-              </a:rPr>
-              <a:t>?</a:t>
-            </a:r>
-            <a:endParaRPr lang="en-US" sz="1400" dirty="0"/>
-          </a:p>
-        </p:txBody>
-      </p:sp>
-      <p:sp>
-        <p:nvSpPr>
-          <p:cNvPr id="7" name="Text 5"/>
-          <p:cNvSpPr/>
-          <p:nvPr/>
-        </p:nvSpPr>
-        <p:spPr>
-          <a:xfrm>
-            <a:off x="662940" y="2743200"/>
-            <a:ext cx="1188720" cy="548640"/>
-          </a:xfrm>
-          <a:prstGeom prst="rect">
-            <a:avLst/>
-          </a:prstGeom>
-          <a:noFill/>
-          <a:ln/>
-        </p:spPr>
-        <p:txBody>
-          <a:bodyPr wrap="square" lIns="0" tIns="0" rIns="0" bIns="0" rtlCol="0" anchor="ctr"/>
-          <a:lstStyle/>
-          <a:p>
-            <a:pPr algn="ctr" indent="0" marL="0">
-              <a:buNone/>
-            </a:pPr>
-            <a:r>
-              <a:rPr lang="en-US" sz="1100" b="1" dirty="0">
-                <a:solidFill>
-                  <a:srgbClr val="1A1A2E"/>
-                </a:solidFill>
-                <a:latin typeface="Calibri" pitchFamily="34" charset="0"/>
-                <a:ea typeface="Calibri" pitchFamily="34" charset="-122"/>
-                <a:cs typeface="Calibri" pitchFamily="34" charset="-120"/>
-              </a:rPr>
-              <a:t>User</a:t>
-            </a:r>
-            <a:endParaRPr lang="en-US" sz="1100" dirty="0"/>
-          </a:p>
-          <a:p>
-            <a:pPr algn="ctr" indent="0" marL="0">
-              <a:buNone/>
-            </a:pPr>
-            <a:r>
-              <a:rPr lang="en-US" sz="1100" b="1" dirty="0">
-                <a:solidFill>
-                  <a:srgbClr val="1A1A2E"/>
-                </a:solidFill>
-                <a:latin typeface="Calibri" pitchFamily="34" charset="0"/>
-                <a:ea typeface="Calibri" pitchFamily="34" charset="-122"/>
-                <a:cs typeface="Calibri" pitchFamily="34" charset="-120"/>
-              </a:rPr>
-              <a:t>Query</a:t>
-            </a:r>
-            <a:endParaRPr lang="en-US" sz="1100" dirty="0"/>
-          </a:p>
-        </p:txBody>
-      </p:sp>
-      <p:sp>
-        <p:nvSpPr>
-          <p:cNvPr id="8" name="Shape 6"/>
-          <p:cNvSpPr/>
-          <p:nvPr/>
-        </p:nvSpPr>
-        <p:spPr>
-          <a:xfrm>
-            <a:off x="1860804" y="2697480"/>
-            <a:ext cx="118872" cy="0"/>
-          </a:xfrm>
-          <a:prstGeom prst="line">
-            <a:avLst/>
-          </a:prstGeom>
-          <a:noFill/>
-          <a:ln w="19050">
-            <a:solidFill>
-              <a:srgbClr val="6B7280"/>
-            </a:solidFill>
-            <a:prstDash val="solid"/>
-            <a:tailEnd type="triangle"/>
-          </a:ln>
-        </p:spPr>
-      </p:sp>
-      <p:sp>
-        <p:nvSpPr>
-          <p:cNvPr id="9" name="Shape 7"/>
-          <p:cNvSpPr/>
-          <p:nvPr/>
-        </p:nvSpPr>
-        <p:spPr>
-          <a:xfrm>
-            <a:off x="1988820" y="2103120"/>
-            <a:ext cx="1188720" cy="1188720"/>
-          </a:xfrm>
-          <a:prstGeom prst="rect">
-            <a:avLst/>
-          </a:prstGeom>
-          <a:solidFill>
-            <a:srgbClr val="FFFFFF"/>
-          </a:solidFill>
-          <a:ln w="25400">
-            <a:solidFill>
-              <a:srgbClr val="6366F1"/>
-            </a:solidFill>
-            <a:prstDash val="solid"/>
-          </a:ln>
-        </p:spPr>
-      </p:sp>
-      <p:sp>
-        <p:nvSpPr>
-          <p:cNvPr id="10" name="Shape 8"/>
-          <p:cNvSpPr/>
-          <p:nvPr/>
-        </p:nvSpPr>
-        <p:spPr>
-          <a:xfrm>
-            <a:off x="2400300" y="2286000"/>
-            <a:ext cx="365760" cy="365760"/>
-          </a:xfrm>
-          <a:prstGeom prst="ellipse">
-            <a:avLst/>
-          </a:prstGeom>
-          <a:solidFill>
-            <a:srgbClr val="6366F1"/>
-          </a:solidFill>
-          <a:ln w="12700">
-            <a:solidFill>
-              <a:srgbClr val="6366F1"/>
-            </a:solidFill>
-            <a:prstDash val="solid"/>
-          </a:ln>
-        </p:spPr>
-      </p:sp>
-      <p:sp>
-        <p:nvSpPr>
-          <p:cNvPr id="11" name="Text 9"/>
-          <p:cNvSpPr/>
-          <p:nvPr/>
-        </p:nvSpPr>
-        <p:spPr>
-          <a:xfrm>
-            <a:off x="2400300" y="2286000"/>
-            <a:ext cx="365760" cy="365760"/>
-          </a:xfrm>
-          <a:prstGeom prst="rect">
-            <a:avLst/>
-          </a:prstGeom>
-          <a:noFill/>
-          <a:ln/>
-        </p:spPr>
-        <p:txBody>
-          <a:bodyPr wrap="square" lIns="0" tIns="0" rIns="0" bIns="0" rtlCol="0" anchor="ctr"/>
-          <a:lstStyle/>
-          <a:p>
-            <a:pPr algn="ctr" indent="0" marL="0">
-              <a:buNone/>
-            </a:pPr>
-            <a:r>
-              <a:rPr lang="en-US" sz="1400" b="1" dirty="0">
-                <a:solidFill>
-                  <a:srgbClr val="FFFFFF"/>
-                </a:solidFill>
-                <a:latin typeface="Calibri" pitchFamily="34" charset="0"/>
-                <a:ea typeface="Calibri" pitchFamily="34" charset="-122"/>
-                <a:cs typeface="Calibri" pitchFamily="34" charset="-120"/>
-              </a:rPr>
-              <a:t>→</a:t>
-            </a:r>
-            <a:endParaRPr lang="en-US" sz="1400" dirty="0"/>
-          </a:p>
-        </p:txBody>
-      </p:sp>
-      <p:sp>
-        <p:nvSpPr>
-          <p:cNvPr id="12" name="Text 10"/>
-          <p:cNvSpPr/>
-          <p:nvPr/>
-        </p:nvSpPr>
-        <p:spPr>
-          <a:xfrm>
-            <a:off x="1988820" y="2743200"/>
-            <a:ext cx="1188720" cy="548640"/>
-          </a:xfrm>
-          <a:prstGeom prst="rect">
-            <a:avLst/>
-          </a:prstGeom>
-          <a:noFill/>
-          <a:ln/>
-        </p:spPr>
-        <p:txBody>
-          <a:bodyPr wrap="square" lIns="0" tIns="0" rIns="0" bIns="0" rtlCol="0" anchor="ctr"/>
-          <a:lstStyle/>
-          <a:p>
-            <a:pPr algn="ctr" indent="0" marL="0">
-              <a:buNone/>
-            </a:pPr>
-            <a:r>
-              <a:rPr lang="en-US" sz="1100" b="1" dirty="0">
-                <a:solidFill>
-                  <a:srgbClr val="1A1A2E"/>
-                </a:solidFill>
-                <a:latin typeface="Calibri" pitchFamily="34" charset="0"/>
-                <a:ea typeface="Calibri" pitchFamily="34" charset="-122"/>
-                <a:cs typeface="Calibri" pitchFamily="34" charset="-120"/>
-              </a:rPr>
-              <a:t>Embedder</a:t>
-            </a:r>
-            <a:endParaRPr lang="en-US" sz="1100" dirty="0"/>
-          </a:p>
-        </p:txBody>
-      </p:sp>
-      <p:sp>
-        <p:nvSpPr>
-          <p:cNvPr id="13" name="Shape 11"/>
-          <p:cNvSpPr/>
-          <p:nvPr/>
-        </p:nvSpPr>
-        <p:spPr>
-          <a:xfrm>
-            <a:off x="3186684" y="2697480"/>
-            <a:ext cx="118872" cy="0"/>
-          </a:xfrm>
-          <a:prstGeom prst="line">
-            <a:avLst/>
-          </a:prstGeom>
-          <a:noFill/>
-          <a:ln w="19050">
-            <a:solidFill>
-              <a:srgbClr val="6B7280"/>
-            </a:solidFill>
-            <a:prstDash val="solid"/>
-            <a:tailEnd type="triangle"/>
-          </a:ln>
-        </p:spPr>
-      </p:sp>
-      <p:sp>
-        <p:nvSpPr>
-          <p:cNvPr id="14" name="Shape 12"/>
-          <p:cNvSpPr/>
-          <p:nvPr/>
-        </p:nvSpPr>
-        <p:spPr>
-          <a:xfrm>
-            <a:off x="3314700" y="2103120"/>
-            <a:ext cx="1188720" cy="1188720"/>
-          </a:xfrm>
-          <a:prstGeom prst="rect">
-            <a:avLst/>
-          </a:prstGeom>
-          <a:solidFill>
-            <a:srgbClr val="FFFFFF"/>
-          </a:solidFill>
-          <a:ln w="25400">
-            <a:solidFill>
-              <a:srgbClr val="6366F1"/>
-            </a:solidFill>
-            <a:prstDash val="solid"/>
-          </a:ln>
-        </p:spPr>
-      </p:sp>
-      <p:sp>
-        <p:nvSpPr>
-          <p:cNvPr id="15" name="Shape 13"/>
-          <p:cNvSpPr/>
-          <p:nvPr/>
-        </p:nvSpPr>
-        <p:spPr>
-          <a:xfrm>
-            <a:off x="3726180" y="2286000"/>
-            <a:ext cx="365760" cy="365760"/>
-          </a:xfrm>
-          <a:prstGeom prst="ellipse">
-            <a:avLst/>
-          </a:prstGeom>
-          <a:solidFill>
-            <a:srgbClr val="6366F1"/>
-          </a:solidFill>
-          <a:ln w="12700">
-            <a:solidFill>
-              <a:srgbClr val="6366F1"/>
-            </a:solidFill>
-            <a:prstDash val="solid"/>
-          </a:ln>
-        </p:spPr>
-      </p:sp>
-      <p:sp>
-        <p:nvSpPr>
-          <p:cNvPr id="16" name="Text 14"/>
-          <p:cNvSpPr/>
-          <p:nvPr/>
-        </p:nvSpPr>
-        <p:spPr>
-          <a:xfrm>
-            <a:off x="3726180" y="2286000"/>
-            <a:ext cx="365760" cy="365760"/>
-          </a:xfrm>
-          <a:prstGeom prst="rect">
-            <a:avLst/>
-          </a:prstGeom>
-          <a:noFill/>
-          <a:ln/>
-        </p:spPr>
-        <p:txBody>
-          <a:bodyPr wrap="square" lIns="0" tIns="0" rIns="0" bIns="0" rtlCol="0" anchor="ctr"/>
-          <a:lstStyle/>
-          <a:p>
-            <a:pPr algn="ctr" indent="0" marL="0">
-              <a:buNone/>
-            </a:pPr>
-            <a:r>
-              <a:rPr lang="en-US" sz="1400" b="1" dirty="0">
-                <a:solidFill>
-                  <a:srgbClr val="FFFFFF"/>
-                </a:solidFill>
-                <a:latin typeface="Calibri" pitchFamily="34" charset="0"/>
-                <a:ea typeface="Calibri" pitchFamily="34" charset="-122"/>
-                <a:cs typeface="Calibri" pitchFamily="34" charset="-120"/>
-              </a:rPr>
-              <a:t>▦</a:t>
-            </a:r>
-            <a:endParaRPr lang="en-US" sz="1400" dirty="0"/>
-          </a:p>
-        </p:txBody>
-      </p:sp>
-      <p:sp>
-        <p:nvSpPr>
-          <p:cNvPr id="17" name="Text 15"/>
-          <p:cNvSpPr/>
-          <p:nvPr/>
-        </p:nvSpPr>
-        <p:spPr>
-          <a:xfrm>
-            <a:off x="3314700" y="2743200"/>
-            <a:ext cx="1188720" cy="548640"/>
-          </a:xfrm>
-          <a:prstGeom prst="rect">
-            <a:avLst/>
-          </a:prstGeom>
-          <a:noFill/>
-          <a:ln/>
-        </p:spPr>
-        <p:txBody>
-          <a:bodyPr wrap="square" lIns="0" tIns="0" rIns="0" bIns="0" rtlCol="0" anchor="ctr"/>
-          <a:lstStyle/>
-          <a:p>
-            <a:pPr algn="ctr" indent="0" marL="0">
-              <a:buNone/>
-            </a:pPr>
-            <a:r>
-              <a:rPr lang="en-US" sz="1100" b="1" dirty="0">
-                <a:solidFill>
-                  <a:srgbClr val="1A1A2E"/>
-                </a:solidFill>
-                <a:latin typeface="Calibri" pitchFamily="34" charset="0"/>
-                <a:ea typeface="Calibri" pitchFamily="34" charset="-122"/>
-                <a:cs typeface="Calibri" pitchFamily="34" charset="-120"/>
-              </a:rPr>
-              <a:t>Vector DB</a:t>
-            </a:r>
-            <a:endParaRPr lang="en-US" sz="1100" dirty="0"/>
-          </a:p>
-          <a:p>
-            <a:pPr algn="ctr" indent="0" marL="0">
-              <a:buNone/>
-            </a:pPr>
-            <a:r>
-              <a:rPr lang="en-US" sz="1100" b="1" dirty="0">
-                <a:solidFill>
-                  <a:srgbClr val="1A1A2E"/>
-                </a:solidFill>
-                <a:latin typeface="Calibri" pitchFamily="34" charset="0"/>
-                <a:ea typeface="Calibri" pitchFamily="34" charset="-122"/>
-                <a:cs typeface="Calibri" pitchFamily="34" charset="-120"/>
-              </a:rPr>
-              <a:t>(Top-K)</a:t>
-            </a:r>
-            <a:endParaRPr lang="en-US" sz="1100" dirty="0"/>
-          </a:p>
-        </p:txBody>
-      </p:sp>
-      <p:sp>
-        <p:nvSpPr>
-          <p:cNvPr id="18" name="Shape 16"/>
-          <p:cNvSpPr/>
-          <p:nvPr/>
-        </p:nvSpPr>
-        <p:spPr>
-          <a:xfrm>
-            <a:off x="4512564" y="2697480"/>
-            <a:ext cx="118872" cy="0"/>
-          </a:xfrm>
-          <a:prstGeom prst="line">
-            <a:avLst/>
-          </a:prstGeom>
-          <a:noFill/>
-          <a:ln w="19050">
-            <a:solidFill>
-              <a:srgbClr val="6B7280"/>
-            </a:solidFill>
-            <a:prstDash val="solid"/>
-            <a:tailEnd type="triangle"/>
-          </a:ln>
-        </p:spPr>
-      </p:sp>
-      <p:sp>
-        <p:nvSpPr>
-          <p:cNvPr id="19" name="Shape 17"/>
-          <p:cNvSpPr/>
-          <p:nvPr/>
-        </p:nvSpPr>
-        <p:spPr>
-          <a:xfrm>
-            <a:off x="4640580" y="2103120"/>
-            <a:ext cx="1188720" cy="1188720"/>
-          </a:xfrm>
-          <a:prstGeom prst="rect">
-            <a:avLst/>
-          </a:prstGeom>
-          <a:solidFill>
-            <a:srgbClr val="FFFFFF"/>
-          </a:solidFill>
-          <a:ln w="25400">
-            <a:solidFill>
-              <a:srgbClr val="C9184A"/>
-            </a:solidFill>
-            <a:prstDash val="solid"/>
-          </a:ln>
-        </p:spPr>
-      </p:sp>
-      <p:sp>
-        <p:nvSpPr>
-          <p:cNvPr id="20" name="Shape 18"/>
-          <p:cNvSpPr/>
-          <p:nvPr/>
-        </p:nvSpPr>
-        <p:spPr>
-          <a:xfrm>
-            <a:off x="5052060" y="2286000"/>
-            <a:ext cx="365760" cy="365760"/>
-          </a:xfrm>
-          <a:prstGeom prst="ellipse">
-            <a:avLst/>
-          </a:prstGeom>
-          <a:solidFill>
-            <a:srgbClr val="C9184A"/>
-          </a:solidFill>
-          <a:ln w="12700">
-            <a:solidFill>
-              <a:srgbClr val="C9184A"/>
-            </a:solidFill>
-            <a:prstDash val="solid"/>
-          </a:ln>
-        </p:spPr>
-      </p:sp>
-      <p:sp>
-        <p:nvSpPr>
-          <p:cNvPr id="21" name="Text 19"/>
-          <p:cNvSpPr/>
-          <p:nvPr/>
-        </p:nvSpPr>
-        <p:spPr>
-          <a:xfrm>
-            <a:off x="5052060" y="2286000"/>
-            <a:ext cx="365760" cy="365760"/>
-          </a:xfrm>
-          <a:prstGeom prst="rect">
-            <a:avLst/>
-          </a:prstGeom>
-          <a:noFill/>
-          <a:ln/>
-        </p:spPr>
-        <p:txBody>
-          <a:bodyPr wrap="square" lIns="0" tIns="0" rIns="0" bIns="0" rtlCol="0" anchor="ctr"/>
-          <a:lstStyle/>
-          <a:p>
-            <a:pPr algn="ctr" indent="0" marL="0">
-              <a:buNone/>
-            </a:pPr>
-            <a:r>
-              <a:rPr lang="en-US" sz="1400" b="1" dirty="0">
-                <a:solidFill>
-                  <a:srgbClr val="FFFFFF"/>
-                </a:solidFill>
-                <a:latin typeface="Calibri" pitchFamily="34" charset="0"/>
-                <a:ea typeface="Calibri" pitchFamily="34" charset="-122"/>
-                <a:cs typeface="Calibri" pitchFamily="34" charset="-120"/>
-              </a:rPr>
-              <a:t>+</a:t>
-            </a:r>
-            <a:endParaRPr lang="en-US" sz="1400" dirty="0"/>
-          </a:p>
-        </p:txBody>
-      </p:sp>
-      <p:sp>
-        <p:nvSpPr>
-          <p:cNvPr id="22" name="Text 20"/>
-          <p:cNvSpPr/>
-          <p:nvPr/>
-        </p:nvSpPr>
-        <p:spPr>
-          <a:xfrm>
-            <a:off x="4640580" y="2743200"/>
-            <a:ext cx="1188720" cy="548640"/>
-          </a:xfrm>
-          <a:prstGeom prst="rect">
-            <a:avLst/>
-          </a:prstGeom>
-          <a:noFill/>
-          <a:ln/>
-        </p:spPr>
-        <p:txBody>
-          <a:bodyPr wrap="square" lIns="0" tIns="0" rIns="0" bIns="0" rtlCol="0" anchor="ctr"/>
-          <a:lstStyle/>
-          <a:p>
-            <a:pPr algn="ctr" indent="0" marL="0">
-              <a:buNone/>
-            </a:pPr>
-            <a:r>
-              <a:rPr lang="en-US" sz="1100" b="1" dirty="0">
-                <a:solidFill>
-                  <a:srgbClr val="1A1A2E"/>
-                </a:solidFill>
-                <a:latin typeface="Calibri" pitchFamily="34" charset="0"/>
-                <a:ea typeface="Calibri" pitchFamily="34" charset="-122"/>
-                <a:cs typeface="Calibri" pitchFamily="34" charset="-120"/>
-              </a:rPr>
-              <a:t>Augmented</a:t>
-            </a:r>
-            <a:endParaRPr lang="en-US" sz="1100" dirty="0"/>
-          </a:p>
-          <a:p>
-            <a:pPr algn="ctr" indent="0" marL="0">
-              <a:buNone/>
-            </a:pPr>
-            <a:r>
-              <a:rPr lang="en-US" sz="1100" b="1" dirty="0">
-                <a:solidFill>
-                  <a:srgbClr val="1A1A2E"/>
-                </a:solidFill>
-                <a:latin typeface="Calibri" pitchFamily="34" charset="0"/>
-                <a:ea typeface="Calibri" pitchFamily="34" charset="-122"/>
-                <a:cs typeface="Calibri" pitchFamily="34" charset="-120"/>
-              </a:rPr>
-              <a:t>Prompt</a:t>
-            </a:r>
-            <a:endParaRPr lang="en-US" sz="1100" dirty="0"/>
-          </a:p>
-        </p:txBody>
-      </p:sp>
-      <p:sp>
-        <p:nvSpPr>
-          <p:cNvPr id="23" name="Shape 21"/>
-          <p:cNvSpPr/>
-          <p:nvPr/>
-        </p:nvSpPr>
-        <p:spPr>
-          <a:xfrm>
-            <a:off x="5838444" y="2697480"/>
-            <a:ext cx="118872" cy="0"/>
-          </a:xfrm>
-          <a:prstGeom prst="line">
-            <a:avLst/>
-          </a:prstGeom>
-          <a:noFill/>
-          <a:ln w="19050">
-            <a:solidFill>
-              <a:srgbClr val="6B7280"/>
-            </a:solidFill>
-            <a:prstDash val="solid"/>
-            <a:tailEnd type="triangle"/>
-          </a:ln>
-        </p:spPr>
-      </p:sp>
-      <p:sp>
-        <p:nvSpPr>
-          <p:cNvPr id="24" name="Shape 22"/>
-          <p:cNvSpPr/>
-          <p:nvPr/>
-        </p:nvSpPr>
-        <p:spPr>
-          <a:xfrm>
-            <a:off x="5966460" y="2103120"/>
-            <a:ext cx="1188720" cy="1188720"/>
-          </a:xfrm>
-          <a:prstGeom prst="rect">
-            <a:avLst/>
-          </a:prstGeom>
-          <a:solidFill>
-            <a:srgbClr val="FFFFFF"/>
-          </a:solidFill>
-          <a:ln w="25400">
-            <a:solidFill>
-              <a:srgbClr val="C9184A"/>
-            </a:solidFill>
-            <a:prstDash val="solid"/>
-          </a:ln>
-        </p:spPr>
-      </p:sp>
-      <p:sp>
-        <p:nvSpPr>
-          <p:cNvPr id="25" name="Shape 23"/>
-          <p:cNvSpPr/>
-          <p:nvPr/>
-        </p:nvSpPr>
-        <p:spPr>
-          <a:xfrm>
-            <a:off x="6377940" y="2286000"/>
-            <a:ext cx="365760" cy="365760"/>
-          </a:xfrm>
-          <a:prstGeom prst="ellipse">
-            <a:avLst/>
-          </a:prstGeom>
-          <a:solidFill>
-            <a:srgbClr val="C9184A"/>
-          </a:solidFill>
-          <a:ln w="12700">
-            <a:solidFill>
-              <a:srgbClr val="C9184A"/>
-            </a:solidFill>
-            <a:prstDash val="solid"/>
-          </a:ln>
-        </p:spPr>
-      </p:sp>
-      <p:sp>
-        <p:nvSpPr>
-          <p:cNvPr id="26" name="Text 24"/>
-          <p:cNvSpPr/>
-          <p:nvPr/>
-        </p:nvSpPr>
-        <p:spPr>
-          <a:xfrm>
-            <a:off x="6377940" y="2286000"/>
-            <a:ext cx="365760" cy="365760"/>
-          </a:xfrm>
-          <a:prstGeom prst="rect">
-            <a:avLst/>
-          </a:prstGeom>
-          <a:noFill/>
-          <a:ln/>
-        </p:spPr>
-        <p:txBody>
-          <a:bodyPr wrap="square" lIns="0" tIns="0" rIns="0" bIns="0" rtlCol="0" anchor="ctr"/>
-          <a:lstStyle/>
-          <a:p>
-            <a:pPr algn="ctr" indent="0" marL="0">
-              <a:buNone/>
-            </a:pPr>
-            <a:r>
-              <a:rPr lang="en-US" sz="1400" b="1" dirty="0">
-                <a:solidFill>
-                  <a:srgbClr val="FFFFFF"/>
-                </a:solidFill>
-                <a:latin typeface="Calibri" pitchFamily="34" charset="0"/>
-                <a:ea typeface="Calibri" pitchFamily="34" charset="-122"/>
-                <a:cs typeface="Calibri" pitchFamily="34" charset="-120"/>
-              </a:rPr>
-              <a:t>★</a:t>
-            </a:r>
-            <a:endParaRPr lang="en-US" sz="1400" dirty="0"/>
-          </a:p>
-        </p:txBody>
-      </p:sp>
-      <p:sp>
-        <p:nvSpPr>
-          <p:cNvPr id="27" name="Text 25"/>
-          <p:cNvSpPr/>
-          <p:nvPr/>
-        </p:nvSpPr>
-        <p:spPr>
-          <a:xfrm>
-            <a:off x="5966460" y="2743200"/>
-            <a:ext cx="1188720" cy="548640"/>
-          </a:xfrm>
-          <a:prstGeom prst="rect">
-            <a:avLst/>
-          </a:prstGeom>
-          <a:noFill/>
-          <a:ln/>
-        </p:spPr>
-        <p:txBody>
-          <a:bodyPr wrap="square" lIns="0" tIns="0" rIns="0" bIns="0" rtlCol="0" anchor="ctr"/>
-          <a:lstStyle/>
-          <a:p>
-            <a:pPr algn="ctr" indent="0" marL="0">
-              <a:buNone/>
-            </a:pPr>
-            <a:r>
-              <a:rPr lang="en-US" sz="1100" b="1" dirty="0">
-                <a:solidFill>
-                  <a:srgbClr val="1A1A2E"/>
-                </a:solidFill>
-                <a:latin typeface="Calibri" pitchFamily="34" charset="0"/>
-                <a:ea typeface="Calibri" pitchFamily="34" charset="-122"/>
-                <a:cs typeface="Calibri" pitchFamily="34" charset="-120"/>
-              </a:rPr>
-              <a:t>LLM</a:t>
-            </a:r>
-            <a:endParaRPr lang="en-US" sz="1100" dirty="0"/>
-          </a:p>
-        </p:txBody>
-      </p:sp>
-      <p:sp>
-        <p:nvSpPr>
-          <p:cNvPr id="28" name="Shape 26"/>
-          <p:cNvSpPr/>
-          <p:nvPr/>
-        </p:nvSpPr>
-        <p:spPr>
-          <a:xfrm>
-            <a:off x="7164324" y="2697480"/>
-            <a:ext cx="118872" cy="0"/>
-          </a:xfrm>
-          <a:prstGeom prst="line">
-            <a:avLst/>
-          </a:prstGeom>
-          <a:noFill/>
-          <a:ln w="19050">
-            <a:solidFill>
-              <a:srgbClr val="6B7280"/>
-            </a:solidFill>
-            <a:prstDash val="solid"/>
-            <a:tailEnd type="triangle"/>
-          </a:ln>
-        </p:spPr>
-      </p:sp>
-      <p:sp>
-        <p:nvSpPr>
-          <p:cNvPr id="29" name="Shape 27"/>
-          <p:cNvSpPr/>
-          <p:nvPr/>
-        </p:nvSpPr>
-        <p:spPr>
-          <a:xfrm>
-            <a:off x="7292340" y="2103120"/>
-            <a:ext cx="1188720" cy="1188720"/>
-          </a:xfrm>
-          <a:prstGeom prst="rect">
-            <a:avLst/>
-          </a:prstGeom>
-          <a:solidFill>
-            <a:srgbClr val="FFFFFF"/>
-          </a:solidFill>
-          <a:ln w="25400">
-            <a:solidFill>
-              <a:srgbClr val="059669"/>
-            </a:solidFill>
-            <a:prstDash val="solid"/>
-          </a:ln>
-        </p:spPr>
-      </p:sp>
-      <p:sp>
-        <p:nvSpPr>
-          <p:cNvPr id="30" name="Shape 28"/>
-          <p:cNvSpPr/>
-          <p:nvPr/>
-        </p:nvSpPr>
-        <p:spPr>
-          <a:xfrm>
-            <a:off x="7703820" y="2286000"/>
-            <a:ext cx="365760" cy="365760"/>
-          </a:xfrm>
-          <a:prstGeom prst="ellipse">
-            <a:avLst/>
-          </a:prstGeom>
-          <a:solidFill>
-            <a:srgbClr val="059669"/>
-          </a:solidFill>
-          <a:ln w="12700">
-            <a:solidFill>
-              <a:srgbClr val="059669"/>
-            </a:solidFill>
-            <a:prstDash val="solid"/>
-          </a:ln>
-        </p:spPr>
-      </p:sp>
-      <p:sp>
-        <p:nvSpPr>
-          <p:cNvPr id="31" name="Text 29"/>
-          <p:cNvSpPr/>
-          <p:nvPr/>
-        </p:nvSpPr>
-        <p:spPr>
-          <a:xfrm>
-            <a:off x="7703820" y="2286000"/>
-            <a:ext cx="365760" cy="365760"/>
-          </a:xfrm>
-          <a:prstGeom prst="rect">
-            <a:avLst/>
-          </a:prstGeom>
-          <a:noFill/>
-          <a:ln/>
-        </p:spPr>
-        <p:txBody>
-          <a:bodyPr wrap="square" lIns="0" tIns="0" rIns="0" bIns="0" rtlCol="0" anchor="ctr"/>
-          <a:lstStyle/>
-          <a:p>
-            <a:pPr algn="ctr" indent="0" marL="0">
-              <a:buNone/>
-            </a:pPr>
-            <a:r>
-              <a:rPr lang="en-US" sz="1400" b="1" dirty="0">
-                <a:solidFill>
-                  <a:srgbClr val="FFFFFF"/>
-                </a:solidFill>
-                <a:latin typeface="Calibri" pitchFamily="34" charset="0"/>
-                <a:ea typeface="Calibri" pitchFamily="34" charset="-122"/>
-                <a:cs typeface="Calibri" pitchFamily="34" charset="-120"/>
-              </a:rPr>
-              <a:t>✓</a:t>
-            </a:r>
-            <a:endParaRPr lang="en-US" sz="1400" dirty="0"/>
-          </a:p>
-        </p:txBody>
-      </p:sp>
-      <p:sp>
-        <p:nvSpPr>
-          <p:cNvPr id="32" name="Text 30"/>
-          <p:cNvSpPr/>
-          <p:nvPr/>
-        </p:nvSpPr>
-        <p:spPr>
-          <a:xfrm>
-            <a:off x="7292340" y="2743200"/>
-            <a:ext cx="1188720" cy="548640"/>
-          </a:xfrm>
-          <a:prstGeom prst="rect">
-            <a:avLst/>
-          </a:prstGeom>
-          <a:noFill/>
-          <a:ln/>
-        </p:spPr>
-        <p:txBody>
-          <a:bodyPr wrap="square" lIns="0" tIns="0" rIns="0" bIns="0" rtlCol="0" anchor="ctr"/>
-          <a:lstStyle/>
-          <a:p>
-            <a:pPr algn="ctr" indent="0" marL="0">
-              <a:buNone/>
-            </a:pPr>
-            <a:r>
-              <a:rPr lang="en-US" sz="1100" b="1" dirty="0">
-                <a:solidFill>
-                  <a:srgbClr val="1A1A2E"/>
-                </a:solidFill>
-                <a:latin typeface="Calibri" pitchFamily="34" charset="0"/>
-                <a:ea typeface="Calibri" pitchFamily="34" charset="-122"/>
-                <a:cs typeface="Calibri" pitchFamily="34" charset="-120"/>
-              </a:rPr>
-              <a:t>Grounded</a:t>
-            </a:r>
-            <a:endParaRPr lang="en-US" sz="1100" dirty="0"/>
-          </a:p>
-          <a:p>
-            <a:pPr algn="ctr" indent="0" marL="0">
-              <a:buNone/>
-            </a:pPr>
-            <a:r>
-              <a:rPr lang="en-US" sz="1100" b="1" dirty="0">
-                <a:solidFill>
-                  <a:srgbClr val="1A1A2E"/>
-                </a:solidFill>
-                <a:latin typeface="Calibri" pitchFamily="34" charset="0"/>
-                <a:ea typeface="Calibri" pitchFamily="34" charset="-122"/>
-                <a:cs typeface="Calibri" pitchFamily="34" charset="-120"/>
-              </a:rPr>
-              <a:t>Answer</a:t>
-            </a:r>
-            <a:endParaRPr lang="en-US" sz="1100" dirty="0"/>
-          </a:p>
-        </p:txBody>
-      </p:sp>
-      <p:sp>
-        <p:nvSpPr>
-          <p:cNvPr id="33" name="Text 31"/>
-          <p:cNvSpPr/>
-          <p:nvPr/>
-        </p:nvSpPr>
-        <p:spPr>
-          <a:xfrm>
-            <a:off x="731520" y="3840480"/>
-            <a:ext cx="7680960" cy="640080"/>
-          </a:xfrm>
-          <a:prstGeom prst="rect">
-            <a:avLst/>
-          </a:prstGeom>
-          <a:noFill/>
-          <a:ln/>
-        </p:spPr>
-        <p:txBody>
-          <a:bodyPr wrap="square" lIns="0" tIns="0" rIns="0" bIns="0" rtlCol="0" anchor="ctr"/>
-          <a:lstStyle/>
-          <a:p>
-            <a:pPr algn="ctr" indent="0" marL="0">
-              <a:buNone/>
-            </a:pPr>
-            <a:r>
-              <a:rPr lang="en-US" sz="1400" i="1" dirty="0">
-                <a:solidFill>
-                  <a:srgbClr val="6B7280"/>
-                </a:solidFill>
-                <a:latin typeface="Calibri" pitchFamily="34" charset="0"/>
-                <a:ea typeface="Calibri" pitchFamily="34" charset="-122"/>
-                <a:cs typeface="Calibri" pitchFamily="34" charset="-120"/>
-              </a:rPr>
-              <a:t>Retrieve the most relevant chunks → stuff them into the prompt → let the LLM generate an answer grounded in actual text.</a:t>
-            </a:r>
-            <a:endParaRPr lang="en-US" sz="1400" dirty="0"/>
-          </a:p>
-        </p:txBody>
-      </p:sp>
-      <p:sp>
-        <p:nvSpPr>
           <p:cNvPr id="34" name="Text 32"/>
           <p:cNvSpPr/>
           <p:nvPr/>
@@ -7754,7 +9546,7 @@
           <a:bodyPr wrap="square" lIns="0" tIns="0" rIns="0" bIns="0" rtlCol="0" anchor="ctr"/>
           <a:lstStyle/>
           <a:p>
-            <a:pPr algn="l" indent="0" marL="0">
+            <a:pPr marL="0" indent="0" algn="l">
               <a:buNone/>
             </a:pPr>
             <a:r>
@@ -7772,6 +9564,30 @@
           </a:p>
         </p:txBody>
       </p:sp>
+      <p:pic>
+        <p:nvPicPr>
+          <p:cNvPr id="35" name="Picture 34" descr="rag-pipeline.png"/>
+          <p:cNvPicPr>
+            <a:picLocks noChangeAspect="1"/>
+          </p:cNvPicPr>
+          <p:nvPr/>
+        </p:nvPicPr>
+        <p:blipFill>
+          <a:blip r:embed="rId3"/>
+          <a:stretch>
+            <a:fillRect/>
+          </a:stretch>
+        </p:blipFill>
+        <p:spPr>
+          <a:xfrm>
+            <a:off x="365760" y="1417320"/>
+            <a:ext cx="8412480" cy="3200400"/>
+          </a:xfrm>
+          <a:prstGeom prst="rect">
+            <a:avLst/>
+          </a:prstGeom>
+        </p:spPr>
+      </p:pic>
     </p:spTree>
   </p:cSld>
   <p:clrMapOvr>
@@ -7788,6 +9604,7 @@
         <a:solidFill>
           <a:srgbClr val="FFFFFF"/>
         </a:solidFill>
+        <a:effectLst/>
       </p:bgPr>
     </p:bg>
     <p:spTree>
@@ -7825,11 +9642,11 @@
           <a:bodyPr wrap="square" lIns="0" tIns="0" rIns="0" bIns="0" rtlCol="0" anchor="ctr"/>
           <a:lstStyle/>
           <a:p>
-            <a:pPr indent="0" marL="0">
-              <a:buNone/>
-            </a:pPr>
-            <a:r>
-              <a:rPr lang="en-US" sz="1000" b="1" spc="200" kern="0" dirty="0">
+            <a:pPr marL="0" indent="0">
+              <a:buNone/>
+            </a:pPr>
+            <a:r>
+              <a:rPr lang="en-US" sz="1000" b="1" kern="0" spc="200" dirty="0">
                 <a:solidFill>
                   <a:srgbClr val="C9184A"/>
                 </a:solidFill>
@@ -7839,11 +9656,8 @@
               </a:rPr>
               <a:t>06</a:t>
             </a:r>
-            <a:pPr indent="0" marL="0">
-              <a:buNone/>
-            </a:pPr>
-            <a:r>
-              <a:rPr lang="en-US" sz="1000" spc="200" kern="0" dirty="0">
+            <a:r>
+              <a:rPr lang="en-US" sz="1000" kern="0" spc="200" dirty="0">
                 <a:solidFill>
                   <a:srgbClr val="6B7280"/>
                 </a:solidFill>
@@ -7878,7 +9692,7 @@
           <a:bodyPr wrap="square" lIns="0" tIns="0" rIns="0" bIns="0" rtlCol="0" anchor="ctr"/>
           <a:lstStyle/>
           <a:p>
-            <a:pPr algn="l" indent="0" marL="0">
+            <a:pPr marL="0" indent="0" algn="l">
               <a:buNone/>
             </a:pPr>
             <a:r>
@@ -7917,11 +9731,11 @@
           <a:bodyPr wrap="square" lIns="0" tIns="0" rIns="0" bIns="0" rtlCol="0" anchor="ctr"/>
           <a:lstStyle/>
           <a:p>
-            <a:pPr indent="0" marL="0">
-              <a:buNone/>
-            </a:pPr>
-            <a:r>
-              <a:rPr lang="en-US" sz="1000" b="1" spc="300" kern="0" dirty="0">
+            <a:pPr marL="0" indent="0">
+              <a:buNone/>
+            </a:pPr>
+            <a:r>
+              <a:rPr lang="en-US" sz="1000" b="1" kern="0" spc="300" dirty="0">
                 <a:solidFill>
                   <a:srgbClr val="C9184A"/>
                 </a:solidFill>
@@ -7956,7 +9770,7 @@
           <a:bodyPr wrap="square" lIns="0" tIns="0" rIns="0" bIns="0" rtlCol="0" anchor="ctr"/>
           <a:lstStyle/>
           <a:p>
-            <a:pPr indent="0" marL="0">
+            <a:pPr marL="0" indent="0">
               <a:buNone/>
             </a:pPr>
             <a:r>
@@ -7973,7 +9787,7 @@
             <a:endParaRPr lang="en-US" sz="2400" dirty="0"/>
           </a:p>
           <a:p>
-            <a:pPr indent="0" marL="0">
+            <a:pPr marL="0" indent="0">
               <a:buNone/>
             </a:pPr>
             <a:r>
@@ -8012,7 +9826,7 @@
           <a:bodyPr wrap="square" lIns="0" tIns="0" rIns="0" bIns="0" rtlCol="0" anchor="t"/>
           <a:lstStyle/>
           <a:p>
-            <a:pPr indent="0" marL="0">
+            <a:pPr marL="0" indent="0">
               <a:buNone/>
             </a:pPr>
             <a:r>
@@ -8029,7 +9843,7 @@
             <a:endParaRPr lang="en-US" sz="1200" dirty="0"/>
           </a:p>
           <a:p>
-            <a:pPr indent="0" marL="0">
+            <a:pPr marL="0" indent="0">
               <a:buNone/>
             </a:pPr>
             <a:r>
@@ -8046,7 +9860,7 @@
             <a:endParaRPr lang="en-US" sz="1200" dirty="0"/>
           </a:p>
           <a:p>
-            <a:pPr indent="0" marL="0">
+            <a:pPr marL="0" indent="0">
               <a:buNone/>
             </a:pPr>
             <a:r>
@@ -8063,7 +9877,7 @@
             <a:endParaRPr lang="en-US" sz="1200" dirty="0"/>
           </a:p>
           <a:p>
-            <a:pPr indent="0" marL="0">
+            <a:pPr marL="0" indent="0">
               <a:buNone/>
             </a:pPr>
             <a:r>
@@ -8080,7 +9894,7 @@
             <a:endParaRPr lang="en-US" sz="1200" dirty="0"/>
           </a:p>
           <a:p>
-            <a:pPr indent="0" marL="0">
+            <a:pPr marL="0" indent="0">
               <a:buNone/>
             </a:pPr>
             <a:r>
@@ -8122,6 +9936,13 @@
             <a:prstDash val="solid"/>
           </a:ln>
         </p:spPr>
+        <p:txBody>
+          <a:bodyPr/>
+          <a:lstStyle/>
+          <a:p>
+            <a:endParaRPr lang="en-US"/>
+          </a:p>
+        </p:txBody>
       </p:sp>
       <p:sp>
         <p:nvSpPr>
@@ -8145,6 +9966,13 @@
             <a:prstDash val="solid"/>
           </a:ln>
         </p:spPr>
+        <p:txBody>
+          <a:bodyPr/>
+          <a:lstStyle/>
+          <a:p>
+            <a:endParaRPr lang="en-US"/>
+          </a:p>
+        </p:txBody>
       </p:sp>
       <p:sp>
         <p:nvSpPr>
@@ -8168,6 +9996,13 @@
             <a:prstDash val="solid"/>
           </a:ln>
         </p:spPr>
+        <p:txBody>
+          <a:bodyPr/>
+          <a:lstStyle/>
+          <a:p>
+            <a:endParaRPr lang="en-US"/>
+          </a:p>
+        </p:txBody>
       </p:sp>
       <p:sp>
         <p:nvSpPr>
@@ -8193,6 +10028,13 @@
             <a:prstDash val="solid"/>
           </a:ln>
         </p:spPr>
+        <p:txBody>
+          <a:bodyPr/>
+          <a:lstStyle/>
+          <a:p>
+            <a:endParaRPr lang="en-US"/>
+          </a:p>
+        </p:txBody>
       </p:sp>
       <p:sp>
         <p:nvSpPr>
@@ -8215,7 +10057,7 @@
           <a:bodyPr wrap="square" lIns="0" tIns="0" rIns="0" bIns="0" rtlCol="0" anchor="ctr"/>
           <a:lstStyle/>
           <a:p>
-            <a:pPr indent="0" marL="0">
+            <a:pPr marL="0" indent="0">
               <a:buNone/>
             </a:pPr>
             <a:r>
@@ -8257,6 +10099,13 @@
             <a:prstDash val="solid"/>
           </a:ln>
         </p:spPr>
+        <p:txBody>
+          <a:bodyPr/>
+          <a:lstStyle/>
+          <a:p>
+            <a:endParaRPr lang="en-US"/>
+          </a:p>
+        </p:txBody>
       </p:sp>
       <p:sp>
         <p:nvSpPr>
@@ -8279,7 +10128,7 @@
           <a:bodyPr wrap="square" lIns="0" tIns="0" rIns="0" bIns="0" rtlCol="0" anchor="ctr"/>
           <a:lstStyle/>
           <a:p>
-            <a:pPr indent="0" marL="0">
+            <a:pPr marL="0" indent="0">
               <a:buNone/>
             </a:pPr>
             <a:r>
@@ -8321,6 +10170,13 @@
             <a:prstDash val="solid"/>
           </a:ln>
         </p:spPr>
+        <p:txBody>
+          <a:bodyPr/>
+          <a:lstStyle/>
+          <a:p>
+            <a:endParaRPr lang="en-US"/>
+          </a:p>
+        </p:txBody>
       </p:sp>
       <p:sp>
         <p:nvSpPr>
@@ -8343,7 +10199,7 @@
           <a:bodyPr wrap="square" lIns="0" tIns="0" rIns="0" bIns="0" rtlCol="0" anchor="ctr"/>
           <a:lstStyle/>
           <a:p>
-            <a:pPr indent="0" marL="0">
+            <a:pPr marL="0" indent="0">
               <a:buNone/>
             </a:pPr>
             <a:r>
@@ -8385,6 +10241,13 @@
             <a:prstDash val="solid"/>
           </a:ln>
         </p:spPr>
+        <p:txBody>
+          <a:bodyPr/>
+          <a:lstStyle/>
+          <a:p>
+            <a:endParaRPr lang="en-US"/>
+          </a:p>
+        </p:txBody>
       </p:sp>
       <p:sp>
         <p:nvSpPr>
@@ -8407,7 +10270,7 @@
           <a:bodyPr wrap="square" lIns="0" tIns="0" rIns="0" bIns="0" rtlCol="0" anchor="ctr"/>
           <a:lstStyle/>
           <a:p>
-            <a:pPr indent="0" marL="0">
+            <a:pPr marL="0" indent="0">
               <a:buNone/>
             </a:pPr>
             <a:r>
@@ -8449,6 +10312,13 @@
             <a:prstDash val="solid"/>
           </a:ln>
         </p:spPr>
+        <p:txBody>
+          <a:bodyPr/>
+          <a:lstStyle/>
+          <a:p>
+            <a:endParaRPr lang="en-US"/>
+          </a:p>
+        </p:txBody>
       </p:sp>
       <p:sp>
         <p:nvSpPr>
@@ -8471,7 +10341,7 @@
           <a:bodyPr wrap="square" lIns="0" tIns="0" rIns="0" bIns="0" rtlCol="0" anchor="ctr"/>
           <a:lstStyle/>
           <a:p>
-            <a:pPr indent="0" marL="0">
+            <a:pPr marL="0" indent="0">
               <a:buNone/>
             </a:pPr>
             <a:r>
@@ -8513,6 +10383,13 @@
             <a:prstDash val="solid"/>
           </a:ln>
         </p:spPr>
+        <p:txBody>
+          <a:bodyPr/>
+          <a:lstStyle/>
+          <a:p>
+            <a:endParaRPr lang="en-US"/>
+          </a:p>
+        </p:txBody>
       </p:sp>
       <p:sp>
         <p:nvSpPr>
@@ -8535,7 +10412,7 @@
           <a:bodyPr wrap="square" lIns="0" tIns="0" rIns="0" bIns="0" rtlCol="0" anchor="ctr"/>
           <a:lstStyle/>
           <a:p>
-            <a:pPr indent="0" marL="0">
+            <a:pPr marL="0" indent="0">
               <a:buNone/>
             </a:pPr>
             <a:r>
@@ -8574,7 +10451,7 @@
           <a:bodyPr wrap="square" lIns="0" tIns="0" rIns="0" bIns="0" rtlCol="0" anchor="ctr"/>
           <a:lstStyle/>
           <a:p>
-            <a:pPr algn="ctr" indent="0" marL="0">
+            <a:pPr marL="0" indent="0" algn="ctr">
               <a:buNone/>
             </a:pPr>
             <a:r>
@@ -8613,7 +10490,7 @@
           <a:bodyPr wrap="square" lIns="0" tIns="0" rIns="0" bIns="0" rtlCol="0" anchor="ctr"/>
           <a:lstStyle/>
           <a:p>
-            <a:pPr algn="l" indent="0" marL="0">
+            <a:pPr marL="0" indent="0" algn="l">
               <a:buNone/>
             </a:pPr>
             <a:r>
@@ -8647,6 +10524,7 @@
         <a:solidFill>
           <a:srgbClr val="FFFFFF"/>
         </a:solidFill>
+        <a:effectLst/>
       </p:bgPr>
     </p:bg>
     <p:spTree>
@@ -8684,11 +10562,11 @@
           <a:bodyPr wrap="square" lIns="0" tIns="0" rIns="0" bIns="0" rtlCol="0" anchor="ctr"/>
           <a:lstStyle/>
           <a:p>
-            <a:pPr indent="0" marL="0">
-              <a:buNone/>
-            </a:pPr>
-            <a:r>
-              <a:rPr lang="en-US" sz="1000" b="1" spc="200" kern="0" dirty="0">
+            <a:pPr marL="0" indent="0">
+              <a:buNone/>
+            </a:pPr>
+            <a:r>
+              <a:rPr lang="en-US" sz="1000" b="1" kern="0" spc="200" dirty="0">
                 <a:solidFill>
                   <a:srgbClr val="C9184A"/>
                 </a:solidFill>
@@ -8698,11 +10576,8 @@
               </a:rPr>
               <a:t>07</a:t>
             </a:r>
-            <a:pPr indent="0" marL="0">
-              <a:buNone/>
-            </a:pPr>
-            <a:r>
-              <a:rPr lang="en-US" sz="1000" spc="200" kern="0" dirty="0">
+            <a:r>
+              <a:rPr lang="en-US" sz="1000" kern="0" spc="200" dirty="0">
                 <a:solidFill>
                   <a:srgbClr val="6B7280"/>
                 </a:solidFill>
@@ -8737,7 +10612,7 @@
           <a:bodyPr wrap="square" lIns="0" tIns="0" rIns="0" bIns="0" rtlCol="0" anchor="ctr"/>
           <a:lstStyle/>
           <a:p>
-            <a:pPr algn="l" indent="0" marL="0">
+            <a:pPr marL="0" indent="0" algn="l">
               <a:buNone/>
             </a:pPr>
             <a:r>
@@ -8776,11 +10651,11 @@
           <a:bodyPr wrap="square" lIns="0" tIns="0" rIns="0" bIns="0" rtlCol="0" anchor="ctr"/>
           <a:lstStyle/>
           <a:p>
-            <a:pPr indent="0" marL="0">
-              <a:buNone/>
-            </a:pPr>
-            <a:r>
-              <a:rPr lang="en-US" sz="1000" b="1" spc="300" kern="0" dirty="0">
+            <a:pPr marL="0" indent="0">
+              <a:buNone/>
+            </a:pPr>
+            <a:r>
+              <a:rPr lang="en-US" sz="1000" b="1" kern="0" spc="300" dirty="0">
                 <a:solidFill>
                   <a:srgbClr val="C9184A"/>
                 </a:solidFill>
@@ -8818,6 +10693,13 @@
             <a:prstDash val="solid"/>
           </a:ln>
         </p:spPr>
+        <p:txBody>
+          <a:bodyPr/>
+          <a:lstStyle/>
+          <a:p>
+            <a:endParaRPr lang="en-US"/>
+          </a:p>
+        </p:txBody>
       </p:sp>
       <p:sp>
         <p:nvSpPr>
@@ -8840,7 +10722,7 @@
           <a:bodyPr wrap="square" lIns="0" tIns="0" rIns="0" bIns="0" rtlCol="0" anchor="ctr"/>
           <a:lstStyle/>
           <a:p>
-            <a:pPr indent="0" marL="0">
+            <a:pPr marL="0" indent="0">
               <a:buNone/>
             </a:pPr>
             <a:r>
@@ -8879,7 +10761,7 @@
           <a:bodyPr wrap="square" lIns="0" tIns="0" rIns="0" bIns="0" rtlCol="0" anchor="ctr"/>
           <a:lstStyle/>
           <a:p>
-            <a:pPr indent="0" marL="0">
+            <a:pPr marL="0" indent="0">
               <a:buNone/>
             </a:pPr>
             <a:r>
@@ -8921,6 +10803,13 @@
             <a:prstDash val="solid"/>
           </a:ln>
         </p:spPr>
+        <p:txBody>
+          <a:bodyPr/>
+          <a:lstStyle/>
+          <a:p>
+            <a:endParaRPr lang="en-US"/>
+          </a:p>
+        </p:txBody>
       </p:sp>
       <p:sp>
         <p:nvSpPr>
@@ -8943,7 +10832,7 @@
           <a:bodyPr wrap="square" lIns="0" tIns="0" rIns="0" bIns="0" rtlCol="0" anchor="ctr"/>
           <a:lstStyle/>
           <a:p>
-            <a:pPr indent="0" marL="0">
+            <a:pPr marL="0" indent="0">
               <a:buNone/>
             </a:pPr>
             <a:r>
@@ -8982,7 +10871,7 @@
           <a:bodyPr wrap="square" lIns="0" tIns="0" rIns="0" bIns="0" rtlCol="0" anchor="ctr"/>
           <a:lstStyle/>
           <a:p>
-            <a:pPr indent="0" marL="0">
+            <a:pPr marL="0" indent="0">
               <a:buNone/>
             </a:pPr>
             <a:r>
@@ -9024,6 +10913,13 @@
             <a:prstDash val="solid"/>
           </a:ln>
         </p:spPr>
+        <p:txBody>
+          <a:bodyPr/>
+          <a:lstStyle/>
+          <a:p>
+            <a:endParaRPr lang="en-US"/>
+          </a:p>
+        </p:txBody>
       </p:sp>
       <p:sp>
         <p:nvSpPr>
@@ -9046,7 +10942,7 @@
           <a:bodyPr wrap="square" lIns="0" tIns="0" rIns="0" bIns="0" rtlCol="0" anchor="ctr"/>
           <a:lstStyle/>
           <a:p>
-            <a:pPr indent="0" marL="0">
+            <a:pPr marL="0" indent="0">
               <a:buNone/>
             </a:pPr>
             <a:r>
@@ -9085,7 +10981,7 @@
           <a:bodyPr wrap="square" lIns="0" tIns="0" rIns="0" bIns="0" rtlCol="0" anchor="ctr"/>
           <a:lstStyle/>
           <a:p>
-            <a:pPr indent="0" marL="0">
+            <a:pPr marL="0" indent="0">
               <a:buNone/>
             </a:pPr>
             <a:r>
@@ -9127,6 +11023,13 @@
             <a:prstDash val="solid"/>
           </a:ln>
         </p:spPr>
+        <p:txBody>
+          <a:bodyPr/>
+          <a:lstStyle/>
+          <a:p>
+            <a:endParaRPr lang="en-US"/>
+          </a:p>
+        </p:txBody>
       </p:sp>
       <p:sp>
         <p:nvSpPr>
@@ -9149,7 +11052,7 @@
           <a:bodyPr wrap="square" lIns="0" tIns="0" rIns="0" bIns="0" rtlCol="0" anchor="ctr"/>
           <a:lstStyle/>
           <a:p>
-            <a:pPr indent="0" marL="0">
+            <a:pPr marL="0" indent="0">
               <a:buNone/>
             </a:pPr>
             <a:r>
@@ -9188,7 +11091,7 @@
           <a:bodyPr wrap="square" lIns="0" tIns="0" rIns="0" bIns="0" rtlCol="0" anchor="ctr"/>
           <a:lstStyle/>
           <a:p>
-            <a:pPr indent="0" marL="0">
+            <a:pPr marL="0" indent="0">
               <a:buNone/>
             </a:pPr>
             <a:r>
@@ -9227,11 +11130,11 @@
           <a:bodyPr wrap="square" lIns="0" tIns="0" rIns="0" bIns="0" rtlCol="0" anchor="ctr"/>
           <a:lstStyle/>
           <a:p>
-            <a:pPr indent="0" marL="0">
-              <a:buNone/>
-            </a:pPr>
-            <a:r>
-              <a:rPr lang="en-US" sz="1000" b="1" spc="300" kern="0" dirty="0">
+            <a:pPr marL="0" indent="0">
+              <a:buNone/>
+            </a:pPr>
+            <a:r>
+              <a:rPr lang="en-US" sz="1000" b="1" kern="0" spc="300" dirty="0">
                 <a:solidFill>
                   <a:srgbClr val="C9184A"/>
                 </a:solidFill>
@@ -9264,6 +11167,13 @@
           </a:solidFill>
           <a:ln/>
         </p:spPr>
+        <p:txBody>
+          <a:bodyPr/>
+          <a:lstStyle/>
+          <a:p>
+            <a:endParaRPr lang="en-US"/>
+          </a:p>
+        </p:txBody>
       </p:sp>
       <p:sp>
         <p:nvSpPr>
@@ -9286,7 +11196,7 @@
           <a:bodyPr wrap="square" lIns="0" tIns="0" rIns="0" bIns="0" rtlCol="0" anchor="ctr"/>
           <a:lstStyle/>
           <a:p>
-            <a:pPr algn="ctr" indent="0" marL="0">
+            <a:pPr marL="0" indent="0" algn="ctr">
               <a:buNone/>
             </a:pPr>
             <a:r>
@@ -9325,7 +11235,7 @@
           <a:bodyPr wrap="square" lIns="0" tIns="0" rIns="0" bIns="0" rtlCol="0" anchor="ctr"/>
           <a:lstStyle/>
           <a:p>
-            <a:pPr algn="ctr" indent="0" marL="0">
+            <a:pPr marL="0" indent="0" algn="ctr">
               <a:buNone/>
             </a:pPr>
             <a:r>
@@ -9362,6 +11272,13 @@
           </a:solidFill>
           <a:ln/>
         </p:spPr>
+        <p:txBody>
+          <a:bodyPr/>
+          <a:lstStyle/>
+          <a:p>
+            <a:endParaRPr lang="en-US"/>
+          </a:p>
+        </p:txBody>
       </p:sp>
       <p:sp>
         <p:nvSpPr>
@@ -9384,7 +11301,7 @@
           <a:bodyPr wrap="square" lIns="0" tIns="0" rIns="0" bIns="0" rtlCol="0" anchor="ctr"/>
           <a:lstStyle/>
           <a:p>
-            <a:pPr algn="ctr" indent="0" marL="0">
+            <a:pPr marL="0" indent="0" algn="ctr">
               <a:buNone/>
             </a:pPr>
             <a:r>
@@ -9423,7 +11340,7 @@
           <a:bodyPr wrap="square" lIns="0" tIns="0" rIns="0" bIns="0" rtlCol="0" anchor="ctr"/>
           <a:lstStyle/>
           <a:p>
-            <a:pPr algn="ctr" indent="0" marL="0">
+            <a:pPr marL="0" indent="0" algn="ctr">
               <a:buNone/>
             </a:pPr>
             <a:r>
@@ -9462,7 +11379,7 @@
           <a:bodyPr wrap="square" lIns="0" tIns="0" rIns="0" bIns="0" rtlCol="0" anchor="ctr"/>
           <a:lstStyle/>
           <a:p>
-            <a:pPr algn="l" indent="0" marL="0">
+            <a:pPr marL="0" indent="0" algn="l">
               <a:buNone/>
             </a:pPr>
             <a:r>
@@ -9496,6 +11413,7 @@
         <a:solidFill>
           <a:srgbClr val="FFFFFF"/>
         </a:solidFill>
+        <a:effectLst/>
       </p:bgPr>
     </p:bg>
     <p:spTree>
@@ -9533,11 +11451,11 @@
           <a:bodyPr wrap="square" lIns="0" tIns="0" rIns="0" bIns="0" rtlCol="0" anchor="ctr"/>
           <a:lstStyle/>
           <a:p>
-            <a:pPr indent="0" marL="0">
-              <a:buNone/>
-            </a:pPr>
-            <a:r>
-              <a:rPr lang="en-US" sz="1000" b="1" spc="200" kern="0" dirty="0">
+            <a:pPr marL="0" indent="0">
+              <a:buNone/>
+            </a:pPr>
+            <a:r>
+              <a:rPr lang="en-US" sz="1000" b="1" kern="0" spc="200" dirty="0">
                 <a:solidFill>
                   <a:srgbClr val="C9184A"/>
                 </a:solidFill>
@@ -9547,11 +11465,8 @@
               </a:rPr>
               <a:t>08</a:t>
             </a:r>
-            <a:pPr indent="0" marL="0">
-              <a:buNone/>
-            </a:pPr>
-            <a:r>
-              <a:rPr lang="en-US" sz="1000" spc="200" kern="0" dirty="0">
+            <a:r>
+              <a:rPr lang="en-US" sz="1000" kern="0" spc="200" dirty="0">
                 <a:solidFill>
                   <a:srgbClr val="6B7280"/>
                 </a:solidFill>
@@ -9586,7 +11501,7 @@
           <a:bodyPr wrap="square" lIns="0" tIns="0" rIns="0" bIns="0" rtlCol="0" anchor="ctr"/>
           <a:lstStyle/>
           <a:p>
-            <a:pPr algn="l" indent="0" marL="0">
+            <a:pPr marL="0" indent="0" algn="l">
               <a:buNone/>
             </a:pPr>
             <a:r>
@@ -9606,797 +11521,6 @@
       </p:sp>
       <p:sp>
         <p:nvSpPr>
-          <p:cNvPr id="4" name="Text 2"/>
-          <p:cNvSpPr/>
-          <p:nvPr/>
-        </p:nvSpPr>
-        <p:spPr>
-          <a:xfrm>
-            <a:off x="365760" y="1600200"/>
-            <a:ext cx="4023360" cy="274320"/>
-          </a:xfrm>
-          <a:prstGeom prst="rect">
-            <a:avLst/>
-          </a:prstGeom>
-          <a:noFill/>
-          <a:ln/>
-        </p:spPr>
-        <p:txBody>
-          <a:bodyPr wrap="square" lIns="0" tIns="0" rIns="0" bIns="0" rtlCol="0" anchor="ctr"/>
-          <a:lstStyle/>
-          <a:p>
-            <a:pPr indent="0" marL="0">
-              <a:buNone/>
-            </a:pPr>
-            <a:r>
-              <a:rPr lang="en-US" sz="1000" b="1" spc="300" kern="0" dirty="0">
-                <a:solidFill>
-                  <a:srgbClr val="6B7280"/>
-                </a:solidFill>
-                <a:latin typeface="Calibri" pitchFamily="34" charset="0"/>
-                <a:ea typeface="Calibri" pitchFamily="34" charset="-122"/>
-                <a:cs typeface="Calibri" pitchFamily="34" charset="-120"/>
-              </a:rPr>
-              <a:t>SIMPLE RAG</a:t>
-            </a:r>
-            <a:endParaRPr lang="en-US" sz="1000" dirty="0"/>
-          </a:p>
-        </p:txBody>
-      </p:sp>
-      <p:sp>
-        <p:nvSpPr>
-          <p:cNvPr id="5" name="Shape 3"/>
-          <p:cNvSpPr/>
-          <p:nvPr/>
-        </p:nvSpPr>
-        <p:spPr>
-          <a:xfrm>
-            <a:off x="1097280" y="1920240"/>
-            <a:ext cx="2560320" cy="457200"/>
-          </a:xfrm>
-          <a:prstGeom prst="rect">
-            <a:avLst/>
-          </a:prstGeom>
-          <a:solidFill>
-            <a:srgbClr val="F8F9FB"/>
-          </a:solidFill>
-          <a:ln w="12700">
-            <a:solidFill>
-              <a:srgbClr val="E5E7EB"/>
-            </a:solidFill>
-            <a:prstDash val="solid"/>
-          </a:ln>
-        </p:spPr>
-      </p:sp>
-      <p:sp>
-        <p:nvSpPr>
-          <p:cNvPr id="6" name="Text 4"/>
-          <p:cNvSpPr/>
-          <p:nvPr/>
-        </p:nvSpPr>
-        <p:spPr>
-          <a:xfrm>
-            <a:off x="1097280" y="1920240"/>
-            <a:ext cx="2560320" cy="457200"/>
-          </a:xfrm>
-          <a:prstGeom prst="rect">
-            <a:avLst/>
-          </a:prstGeom>
-          <a:noFill/>
-          <a:ln/>
-        </p:spPr>
-        <p:txBody>
-          <a:bodyPr wrap="square" lIns="0" tIns="0" rIns="0" bIns="0" rtlCol="0" anchor="ctr"/>
-          <a:lstStyle/>
-          <a:p>
-            <a:pPr algn="ctr" indent="0" marL="0">
-              <a:buNone/>
-            </a:pPr>
-            <a:r>
-              <a:rPr lang="en-US" sz="1300" b="1" dirty="0">
-                <a:solidFill>
-                  <a:srgbClr val="1A1A2E"/>
-                </a:solidFill>
-                <a:latin typeface="Calibri" pitchFamily="34" charset="0"/>
-                <a:ea typeface="Calibri" pitchFamily="34" charset="-122"/>
-                <a:cs typeface="Calibri" pitchFamily="34" charset="-120"/>
-              </a:rPr>
-              <a:t>Question</a:t>
-            </a:r>
-            <a:endParaRPr lang="en-US" sz="1300" dirty="0"/>
-          </a:p>
-        </p:txBody>
-      </p:sp>
-      <p:sp>
-        <p:nvSpPr>
-          <p:cNvPr id="7" name="Shape 5"/>
-          <p:cNvSpPr/>
-          <p:nvPr/>
-        </p:nvSpPr>
-        <p:spPr>
-          <a:xfrm>
-            <a:off x="2377440" y="2395728"/>
-            <a:ext cx="0" cy="118872"/>
-          </a:xfrm>
-          <a:prstGeom prst="line">
-            <a:avLst/>
-          </a:prstGeom>
-          <a:noFill/>
-          <a:ln w="19050">
-            <a:solidFill>
-              <a:srgbClr val="6B7280"/>
-            </a:solidFill>
-            <a:prstDash val="solid"/>
-            <a:tailEnd type="triangle"/>
-          </a:ln>
-        </p:spPr>
-      </p:sp>
-      <p:sp>
-        <p:nvSpPr>
-          <p:cNvPr id="8" name="Shape 6"/>
-          <p:cNvSpPr/>
-          <p:nvPr/>
-        </p:nvSpPr>
-        <p:spPr>
-          <a:xfrm>
-            <a:off x="1097280" y="2514600"/>
-            <a:ext cx="2560320" cy="457200"/>
-          </a:xfrm>
-          <a:prstGeom prst="rect">
-            <a:avLst/>
-          </a:prstGeom>
-          <a:solidFill>
-            <a:srgbClr val="F8F9FB"/>
-          </a:solidFill>
-          <a:ln w="12700">
-            <a:solidFill>
-              <a:srgbClr val="E5E7EB"/>
-            </a:solidFill>
-            <a:prstDash val="solid"/>
-          </a:ln>
-        </p:spPr>
-      </p:sp>
-      <p:sp>
-        <p:nvSpPr>
-          <p:cNvPr id="9" name="Text 7"/>
-          <p:cNvSpPr/>
-          <p:nvPr/>
-        </p:nvSpPr>
-        <p:spPr>
-          <a:xfrm>
-            <a:off x="1097280" y="2514600"/>
-            <a:ext cx="2560320" cy="457200"/>
-          </a:xfrm>
-          <a:prstGeom prst="rect">
-            <a:avLst/>
-          </a:prstGeom>
-          <a:noFill/>
-          <a:ln/>
-        </p:spPr>
-        <p:txBody>
-          <a:bodyPr wrap="square" lIns="0" tIns="0" rIns="0" bIns="0" rtlCol="0" anchor="ctr"/>
-          <a:lstStyle/>
-          <a:p>
-            <a:pPr algn="ctr" indent="0" marL="0">
-              <a:buNone/>
-            </a:pPr>
-            <a:r>
-              <a:rPr lang="en-US" sz="1300" b="1" dirty="0">
-                <a:solidFill>
-                  <a:srgbClr val="1A1A2E"/>
-                </a:solidFill>
-                <a:latin typeface="Calibri" pitchFamily="34" charset="0"/>
-                <a:ea typeface="Calibri" pitchFamily="34" charset="-122"/>
-                <a:cs typeface="Calibri" pitchFamily="34" charset="-120"/>
-              </a:rPr>
-              <a:t>Retrieve</a:t>
-            </a:r>
-            <a:endParaRPr lang="en-US" sz="1300" dirty="0"/>
-          </a:p>
-        </p:txBody>
-      </p:sp>
-      <p:sp>
-        <p:nvSpPr>
-          <p:cNvPr id="10" name="Shape 8"/>
-          <p:cNvSpPr/>
-          <p:nvPr/>
-        </p:nvSpPr>
-        <p:spPr>
-          <a:xfrm>
-            <a:off x="2377440" y="2990088"/>
-            <a:ext cx="0" cy="118872"/>
-          </a:xfrm>
-          <a:prstGeom prst="line">
-            <a:avLst/>
-          </a:prstGeom>
-          <a:noFill/>
-          <a:ln w="19050">
-            <a:solidFill>
-              <a:srgbClr val="6B7280"/>
-            </a:solidFill>
-            <a:prstDash val="solid"/>
-            <a:tailEnd type="triangle"/>
-          </a:ln>
-        </p:spPr>
-      </p:sp>
-      <p:sp>
-        <p:nvSpPr>
-          <p:cNvPr id="11" name="Shape 9"/>
-          <p:cNvSpPr/>
-          <p:nvPr/>
-        </p:nvSpPr>
-        <p:spPr>
-          <a:xfrm>
-            <a:off x="1097280" y="3108960"/>
-            <a:ext cx="2560320" cy="457200"/>
-          </a:xfrm>
-          <a:prstGeom prst="rect">
-            <a:avLst/>
-          </a:prstGeom>
-          <a:solidFill>
-            <a:srgbClr val="F8F9FB"/>
-          </a:solidFill>
-          <a:ln w="12700">
-            <a:solidFill>
-              <a:srgbClr val="E5E7EB"/>
-            </a:solidFill>
-            <a:prstDash val="solid"/>
-          </a:ln>
-        </p:spPr>
-      </p:sp>
-      <p:sp>
-        <p:nvSpPr>
-          <p:cNvPr id="12" name="Text 10"/>
-          <p:cNvSpPr/>
-          <p:nvPr/>
-        </p:nvSpPr>
-        <p:spPr>
-          <a:xfrm>
-            <a:off x="1097280" y="3108960"/>
-            <a:ext cx="2560320" cy="457200"/>
-          </a:xfrm>
-          <a:prstGeom prst="rect">
-            <a:avLst/>
-          </a:prstGeom>
-          <a:noFill/>
-          <a:ln/>
-        </p:spPr>
-        <p:txBody>
-          <a:bodyPr wrap="square" lIns="0" tIns="0" rIns="0" bIns="0" rtlCol="0" anchor="ctr"/>
-          <a:lstStyle/>
-          <a:p>
-            <a:pPr algn="ctr" indent="0" marL="0">
-              <a:buNone/>
-            </a:pPr>
-            <a:r>
-              <a:rPr lang="en-US" sz="1300" b="1" dirty="0">
-                <a:solidFill>
-                  <a:srgbClr val="1A1A2E"/>
-                </a:solidFill>
-                <a:latin typeface="Calibri" pitchFamily="34" charset="0"/>
-                <a:ea typeface="Calibri" pitchFamily="34" charset="-122"/>
-                <a:cs typeface="Calibri" pitchFamily="34" charset="-120"/>
-              </a:rPr>
-              <a:t>Generate</a:t>
-            </a:r>
-            <a:endParaRPr lang="en-US" sz="1300" dirty="0"/>
-          </a:p>
-        </p:txBody>
-      </p:sp>
-      <p:sp>
-        <p:nvSpPr>
-          <p:cNvPr id="13" name="Shape 11"/>
-          <p:cNvSpPr/>
-          <p:nvPr/>
-        </p:nvSpPr>
-        <p:spPr>
-          <a:xfrm>
-            <a:off x="2377440" y="3584448"/>
-            <a:ext cx="0" cy="118872"/>
-          </a:xfrm>
-          <a:prstGeom prst="line">
-            <a:avLst/>
-          </a:prstGeom>
-          <a:noFill/>
-          <a:ln w="19050">
-            <a:solidFill>
-              <a:srgbClr val="6B7280"/>
-            </a:solidFill>
-            <a:prstDash val="solid"/>
-            <a:tailEnd type="triangle"/>
-          </a:ln>
-        </p:spPr>
-      </p:sp>
-      <p:sp>
-        <p:nvSpPr>
-          <p:cNvPr id="14" name="Shape 12"/>
-          <p:cNvSpPr/>
-          <p:nvPr/>
-        </p:nvSpPr>
-        <p:spPr>
-          <a:xfrm>
-            <a:off x="1097280" y="3703320"/>
-            <a:ext cx="2560320" cy="457200"/>
-          </a:xfrm>
-          <a:prstGeom prst="rect">
-            <a:avLst/>
-          </a:prstGeom>
-          <a:solidFill>
-            <a:srgbClr val="F8F9FB"/>
-          </a:solidFill>
-          <a:ln w="12700">
-            <a:solidFill>
-              <a:srgbClr val="E5E7EB"/>
-            </a:solidFill>
-            <a:prstDash val="solid"/>
-          </a:ln>
-        </p:spPr>
-      </p:sp>
-      <p:sp>
-        <p:nvSpPr>
-          <p:cNvPr id="15" name="Text 13"/>
-          <p:cNvSpPr/>
-          <p:nvPr/>
-        </p:nvSpPr>
-        <p:spPr>
-          <a:xfrm>
-            <a:off x="1097280" y="3703320"/>
-            <a:ext cx="2560320" cy="457200"/>
-          </a:xfrm>
-          <a:prstGeom prst="rect">
-            <a:avLst/>
-          </a:prstGeom>
-          <a:noFill/>
-          <a:ln/>
-        </p:spPr>
-        <p:txBody>
-          <a:bodyPr wrap="square" lIns="0" tIns="0" rIns="0" bIns="0" rtlCol="0" anchor="ctr"/>
-          <a:lstStyle/>
-          <a:p>
-            <a:pPr algn="ctr" indent="0" marL="0">
-              <a:buNone/>
-            </a:pPr>
-            <a:r>
-              <a:rPr lang="en-US" sz="1300" b="1" dirty="0">
-                <a:solidFill>
-                  <a:srgbClr val="1A1A2E"/>
-                </a:solidFill>
-                <a:latin typeface="Calibri" pitchFamily="34" charset="0"/>
-                <a:ea typeface="Calibri" pitchFamily="34" charset="-122"/>
-                <a:cs typeface="Calibri" pitchFamily="34" charset="-120"/>
-              </a:rPr>
-              <a:t>Answer</a:t>
-            </a:r>
-            <a:endParaRPr lang="en-US" sz="1300" dirty="0"/>
-          </a:p>
-        </p:txBody>
-      </p:sp>
-      <p:sp>
-        <p:nvSpPr>
-          <p:cNvPr id="16" name="Shape 14"/>
-          <p:cNvSpPr/>
-          <p:nvPr/>
-        </p:nvSpPr>
-        <p:spPr>
-          <a:xfrm>
-            <a:off x="4572000" y="1600200"/>
-            <a:ext cx="0" cy="2926080"/>
-          </a:xfrm>
-          <a:prstGeom prst="line">
-            <a:avLst/>
-          </a:prstGeom>
-          <a:noFill/>
-          <a:ln w="12700">
-            <a:solidFill>
-              <a:srgbClr val="E5E7EB"/>
-            </a:solidFill>
-            <a:prstDash val="solid"/>
-          </a:ln>
-        </p:spPr>
-      </p:sp>
-      <p:sp>
-        <p:nvSpPr>
-          <p:cNvPr id="17" name="Text 15"/>
-          <p:cNvSpPr/>
-          <p:nvPr/>
-        </p:nvSpPr>
-        <p:spPr>
-          <a:xfrm>
-            <a:off x="4754880" y="1600200"/>
-            <a:ext cx="4023360" cy="274320"/>
-          </a:xfrm>
-          <a:prstGeom prst="rect">
-            <a:avLst/>
-          </a:prstGeom>
-          <a:noFill/>
-          <a:ln/>
-        </p:spPr>
-        <p:txBody>
-          <a:bodyPr wrap="square" lIns="0" tIns="0" rIns="0" bIns="0" rtlCol="0" anchor="ctr"/>
-          <a:lstStyle/>
-          <a:p>
-            <a:pPr indent="0" marL="0">
-              <a:buNone/>
-            </a:pPr>
-            <a:r>
-              <a:rPr lang="en-US" sz="1000" b="1" spc="300" kern="0" dirty="0">
-                <a:solidFill>
-                  <a:srgbClr val="C9184A"/>
-                </a:solidFill>
-                <a:latin typeface="Calibri" pitchFamily="34" charset="0"/>
-                <a:ea typeface="Calibri" pitchFamily="34" charset="-122"/>
-                <a:cs typeface="Calibri" pitchFamily="34" charset="-120"/>
-              </a:rPr>
-              <a:t>AGENTIC RAG  (what we'll build)</a:t>
-            </a:r>
-            <a:endParaRPr lang="en-US" sz="1000" dirty="0"/>
-          </a:p>
-        </p:txBody>
-      </p:sp>
-      <p:sp>
-        <p:nvSpPr>
-          <p:cNvPr id="18" name="Shape 16"/>
-          <p:cNvSpPr/>
-          <p:nvPr/>
-        </p:nvSpPr>
-        <p:spPr>
-          <a:xfrm>
-            <a:off x="5303520" y="1920240"/>
-            <a:ext cx="3291840" cy="457200"/>
-          </a:xfrm>
-          <a:prstGeom prst="rect">
-            <a:avLst/>
-          </a:prstGeom>
-          <a:solidFill>
-            <a:srgbClr val="F8F9FB"/>
-          </a:solidFill>
-          <a:ln w="12700">
-            <a:solidFill>
-              <a:srgbClr val="E5E7EB"/>
-            </a:solidFill>
-            <a:prstDash val="solid"/>
-          </a:ln>
-        </p:spPr>
-      </p:sp>
-      <p:sp>
-        <p:nvSpPr>
-          <p:cNvPr id="19" name="Text 17"/>
-          <p:cNvSpPr/>
-          <p:nvPr/>
-        </p:nvSpPr>
-        <p:spPr>
-          <a:xfrm>
-            <a:off x="5303520" y="1920240"/>
-            <a:ext cx="3291840" cy="457200"/>
-          </a:xfrm>
-          <a:prstGeom prst="rect">
-            <a:avLst/>
-          </a:prstGeom>
-          <a:noFill/>
-          <a:ln/>
-        </p:spPr>
-        <p:txBody>
-          <a:bodyPr wrap="square" lIns="0" tIns="0" rIns="0" bIns="0" rtlCol="0" anchor="ctr"/>
-          <a:lstStyle/>
-          <a:p>
-            <a:pPr algn="ctr" indent="0" marL="0">
-              <a:buNone/>
-            </a:pPr>
-            <a:r>
-              <a:rPr lang="en-US" sz="1100" b="1" dirty="0">
-                <a:solidFill>
-                  <a:srgbClr val="1A1A2E"/>
-                </a:solidFill>
-                <a:latin typeface="Calibri" pitchFamily="34" charset="0"/>
-                <a:ea typeface="Calibri" pitchFamily="34" charset="-122"/>
-                <a:cs typeface="Calibri" pitchFamily="34" charset="-120"/>
-              </a:rPr>
-              <a:t>Question</a:t>
-            </a:r>
-            <a:endParaRPr lang="en-US" sz="1100" dirty="0"/>
-          </a:p>
-        </p:txBody>
-      </p:sp>
-      <p:sp>
-        <p:nvSpPr>
-          <p:cNvPr id="20" name="Shape 18"/>
-          <p:cNvSpPr/>
-          <p:nvPr/>
-        </p:nvSpPr>
-        <p:spPr>
-          <a:xfrm>
-            <a:off x="6949440" y="2395728"/>
-            <a:ext cx="0" cy="118872"/>
-          </a:xfrm>
-          <a:prstGeom prst="line">
-            <a:avLst/>
-          </a:prstGeom>
-          <a:noFill/>
-          <a:ln w="19050">
-            <a:solidFill>
-              <a:srgbClr val="6B7280"/>
-            </a:solidFill>
-            <a:prstDash val="solid"/>
-            <a:tailEnd type="triangle"/>
-          </a:ln>
-        </p:spPr>
-      </p:sp>
-      <p:sp>
-        <p:nvSpPr>
-          <p:cNvPr id="21" name="Shape 19"/>
-          <p:cNvSpPr/>
-          <p:nvPr/>
-        </p:nvSpPr>
-        <p:spPr>
-          <a:xfrm>
-            <a:off x="5303520" y="2514600"/>
-            <a:ext cx="3291840" cy="457200"/>
-          </a:xfrm>
-          <a:prstGeom prst="rect">
-            <a:avLst/>
-          </a:prstGeom>
-          <a:solidFill>
-            <a:srgbClr val="FFFFFF"/>
-          </a:solidFill>
-          <a:ln w="12700">
-            <a:solidFill>
-              <a:srgbClr val="C9184A"/>
-            </a:solidFill>
-            <a:prstDash val="solid"/>
-          </a:ln>
-        </p:spPr>
-      </p:sp>
-      <p:sp>
-        <p:nvSpPr>
-          <p:cNvPr id="22" name="Text 20"/>
-          <p:cNvSpPr/>
-          <p:nvPr/>
-        </p:nvSpPr>
-        <p:spPr>
-          <a:xfrm>
-            <a:off x="5303520" y="2514600"/>
-            <a:ext cx="3291840" cy="457200"/>
-          </a:xfrm>
-          <a:prstGeom prst="rect">
-            <a:avLst/>
-          </a:prstGeom>
-          <a:noFill/>
-          <a:ln/>
-        </p:spPr>
-        <p:txBody>
-          <a:bodyPr wrap="square" lIns="0" tIns="0" rIns="0" bIns="0" rtlCol="0" anchor="ctr"/>
-          <a:lstStyle/>
-          <a:p>
-            <a:pPr algn="ctr" indent="0" marL="0">
-              <a:buNone/>
-            </a:pPr>
-            <a:r>
-              <a:rPr lang="en-US" sz="1100" b="1" dirty="0">
-                <a:solidFill>
-                  <a:srgbClr val="1A1A2E"/>
-                </a:solidFill>
-                <a:latin typeface="Calibri" pitchFamily="34" charset="0"/>
-                <a:ea typeface="Calibri" pitchFamily="34" charset="-122"/>
-                <a:cs typeface="Calibri" pitchFamily="34" charset="-120"/>
-              </a:rPr>
-              <a:t>🔍 Retriever Agent</a:t>
-            </a:r>
-            <a:endParaRPr lang="en-US" sz="1100" dirty="0"/>
-          </a:p>
-          <a:p>
-            <a:pPr algn="ctr" indent="0" marL="0">
-              <a:buNone/>
-            </a:pPr>
-            <a:r>
-              <a:rPr lang="en-US" sz="1100" b="1" dirty="0">
-                <a:solidFill>
-                  <a:srgbClr val="1A1A2E"/>
-                </a:solidFill>
-                <a:latin typeface="Calibri" pitchFamily="34" charset="0"/>
-                <a:ea typeface="Calibri" pitchFamily="34" charset="-122"/>
-                <a:cs typeface="Calibri" pitchFamily="34" charset="-120"/>
-              </a:rPr>
-              <a:t>searches + drafts answer</a:t>
-            </a:r>
-            <a:endParaRPr lang="en-US" sz="1100" dirty="0"/>
-          </a:p>
-        </p:txBody>
-      </p:sp>
-      <p:sp>
-        <p:nvSpPr>
-          <p:cNvPr id="23" name="Shape 21"/>
-          <p:cNvSpPr/>
-          <p:nvPr/>
-        </p:nvSpPr>
-        <p:spPr>
-          <a:xfrm>
-            <a:off x="6949440" y="2990088"/>
-            <a:ext cx="0" cy="118872"/>
-          </a:xfrm>
-          <a:prstGeom prst="line">
-            <a:avLst/>
-          </a:prstGeom>
-          <a:noFill/>
-          <a:ln w="19050">
-            <a:solidFill>
-              <a:srgbClr val="6B7280"/>
-            </a:solidFill>
-            <a:prstDash val="solid"/>
-            <a:tailEnd type="triangle"/>
-          </a:ln>
-        </p:spPr>
-      </p:sp>
-      <p:sp>
-        <p:nvSpPr>
-          <p:cNvPr id="24" name="Shape 22"/>
-          <p:cNvSpPr/>
-          <p:nvPr/>
-        </p:nvSpPr>
-        <p:spPr>
-          <a:xfrm>
-            <a:off x="5303520" y="3108960"/>
-            <a:ext cx="3291840" cy="457200"/>
-          </a:xfrm>
-          <a:prstGeom prst="rect">
-            <a:avLst/>
-          </a:prstGeom>
-          <a:solidFill>
-            <a:srgbClr val="FFFFFF"/>
-          </a:solidFill>
-          <a:ln w="12700">
-            <a:solidFill>
-              <a:srgbClr val="C9184A"/>
-            </a:solidFill>
-            <a:prstDash val="solid"/>
-          </a:ln>
-        </p:spPr>
-      </p:sp>
-      <p:sp>
-        <p:nvSpPr>
-          <p:cNvPr id="25" name="Text 23"/>
-          <p:cNvSpPr/>
-          <p:nvPr/>
-        </p:nvSpPr>
-        <p:spPr>
-          <a:xfrm>
-            <a:off x="5303520" y="3108960"/>
-            <a:ext cx="3291840" cy="457200"/>
-          </a:xfrm>
-          <a:prstGeom prst="rect">
-            <a:avLst/>
-          </a:prstGeom>
-          <a:noFill/>
-          <a:ln/>
-        </p:spPr>
-        <p:txBody>
-          <a:bodyPr wrap="square" lIns="0" tIns="0" rIns="0" bIns="0" rtlCol="0" anchor="ctr"/>
-          <a:lstStyle/>
-          <a:p>
-            <a:pPr algn="ctr" indent="0" marL="0">
-              <a:buNone/>
-            </a:pPr>
-            <a:r>
-              <a:rPr lang="en-US" sz="1100" b="1" dirty="0">
-                <a:solidFill>
-                  <a:srgbClr val="1A1A2E"/>
-                </a:solidFill>
-                <a:latin typeface="Calibri" pitchFamily="34" charset="0"/>
-                <a:ea typeface="Calibri" pitchFamily="34" charset="-122"/>
-                <a:cs typeface="Calibri" pitchFamily="34" charset="-120"/>
-              </a:rPr>
-              <a:t>✅ Verifier Agent</a:t>
-            </a:r>
-            <a:endParaRPr lang="en-US" sz="1100" dirty="0"/>
-          </a:p>
-          <a:p>
-            <a:pPr algn="ctr" indent="0" marL="0">
-              <a:buNone/>
-            </a:pPr>
-            <a:r>
-              <a:rPr lang="en-US" sz="1100" b="1" dirty="0">
-                <a:solidFill>
-                  <a:srgbClr val="1A1A2E"/>
-                </a:solidFill>
-                <a:latin typeface="Calibri" pitchFamily="34" charset="0"/>
-                <a:ea typeface="Calibri" pitchFamily="34" charset="-122"/>
-                <a:cs typeface="Calibri" pitchFamily="34" charset="-120"/>
-              </a:rPr>
-              <a:t>checks every claim</a:t>
-            </a:r>
-            <a:endParaRPr lang="en-US" sz="1100" dirty="0"/>
-          </a:p>
-        </p:txBody>
-      </p:sp>
-      <p:sp>
-        <p:nvSpPr>
-          <p:cNvPr id="26" name="Shape 24"/>
-          <p:cNvSpPr/>
-          <p:nvPr/>
-        </p:nvSpPr>
-        <p:spPr>
-          <a:xfrm>
-            <a:off x="6949440" y="3584448"/>
-            <a:ext cx="0" cy="118872"/>
-          </a:xfrm>
-          <a:prstGeom prst="line">
-            <a:avLst/>
-          </a:prstGeom>
-          <a:noFill/>
-          <a:ln w="19050">
-            <a:solidFill>
-              <a:srgbClr val="6B7280"/>
-            </a:solidFill>
-            <a:prstDash val="solid"/>
-            <a:tailEnd type="triangle"/>
-          </a:ln>
-        </p:spPr>
-      </p:sp>
-      <p:sp>
-        <p:nvSpPr>
-          <p:cNvPr id="27" name="Shape 25"/>
-          <p:cNvSpPr/>
-          <p:nvPr/>
-        </p:nvSpPr>
-        <p:spPr>
-          <a:xfrm>
-            <a:off x="5303520" y="3703320"/>
-            <a:ext cx="3291840" cy="457200"/>
-          </a:xfrm>
-          <a:prstGeom prst="rect">
-            <a:avLst/>
-          </a:prstGeom>
-          <a:solidFill>
-            <a:srgbClr val="F8F9FB"/>
-          </a:solidFill>
-          <a:ln w="12700">
-            <a:solidFill>
-              <a:srgbClr val="E5E7EB"/>
-            </a:solidFill>
-            <a:prstDash val="solid"/>
-          </a:ln>
-        </p:spPr>
-      </p:sp>
-      <p:sp>
-        <p:nvSpPr>
-          <p:cNvPr id="28" name="Text 26"/>
-          <p:cNvSpPr/>
-          <p:nvPr/>
-        </p:nvSpPr>
-        <p:spPr>
-          <a:xfrm>
-            <a:off x="5303520" y="3703320"/>
-            <a:ext cx="3291840" cy="457200"/>
-          </a:xfrm>
-          <a:prstGeom prst="rect">
-            <a:avLst/>
-          </a:prstGeom>
-          <a:noFill/>
-          <a:ln/>
-        </p:spPr>
-        <p:txBody>
-          <a:bodyPr wrap="square" lIns="0" tIns="0" rIns="0" bIns="0" rtlCol="0" anchor="ctr"/>
-          <a:lstStyle/>
-          <a:p>
-            <a:pPr algn="ctr" indent="0" marL="0">
-              <a:buNone/>
-            </a:pPr>
-            <a:r>
-              <a:rPr lang="en-US" sz="1100" b="1" dirty="0">
-                <a:solidFill>
-                  <a:srgbClr val="1A1A2E"/>
-                </a:solidFill>
-                <a:latin typeface="Calibri" pitchFamily="34" charset="0"/>
-                <a:ea typeface="Calibri" pitchFamily="34" charset="-122"/>
-                <a:cs typeface="Calibri" pitchFamily="34" charset="-120"/>
-              </a:rPr>
-              <a:t>Verified Answer</a:t>
-            </a:r>
-            <a:endParaRPr lang="en-US" sz="1100" dirty="0"/>
-          </a:p>
-        </p:txBody>
-      </p:sp>
-      <p:sp>
-        <p:nvSpPr>
           <p:cNvPr id="29" name="Text 27"/>
           <p:cNvSpPr/>
           <p:nvPr/>
@@ -10416,7 +11540,7 @@
           <a:bodyPr wrap="square" lIns="0" tIns="0" rIns="0" bIns="0" rtlCol="0" anchor="ctr"/>
           <a:lstStyle/>
           <a:p>
-            <a:pPr algn="l" indent="0" marL="0">
+            <a:pPr marL="0" indent="0" algn="l">
               <a:buNone/>
             </a:pPr>
             <a:r>
@@ -10434,6 +11558,30 @@
           </a:p>
         </p:txBody>
       </p:sp>
+      <p:pic>
+        <p:nvPicPr>
+          <p:cNvPr id="30" name="Picture 29" descr="simple-vs-agentic.png"/>
+          <p:cNvPicPr>
+            <a:picLocks noChangeAspect="1"/>
+          </p:cNvPicPr>
+          <p:nvPr/>
+        </p:nvPicPr>
+        <p:blipFill>
+          <a:blip r:embed="rId3"/>
+          <a:stretch>
+            <a:fillRect/>
+          </a:stretch>
+        </p:blipFill>
+        <p:spPr>
+          <a:xfrm>
+            <a:off x="365760" y="1417320"/>
+            <a:ext cx="8412480" cy="3200400"/>
+          </a:xfrm>
+          <a:prstGeom prst="rect">
+            <a:avLst/>
+          </a:prstGeom>
+        </p:spPr>
+      </p:pic>
     </p:spTree>
   </p:cSld>
   <p:clrMapOvr>
@@ -10450,6 +11598,7 @@
         <a:solidFill>
           <a:srgbClr val="FFFFFF"/>
         </a:solidFill>
+        <a:effectLst/>
       </p:bgPr>
     </p:bg>
     <p:spTree>
@@ -10487,11 +11636,11 @@
           <a:bodyPr wrap="square" lIns="0" tIns="0" rIns="0" bIns="0" rtlCol="0" anchor="ctr"/>
           <a:lstStyle/>
           <a:p>
-            <a:pPr indent="0" marL="0">
-              <a:buNone/>
-            </a:pPr>
-            <a:r>
-              <a:rPr lang="en-US" sz="1000" b="1" spc="200" kern="0" dirty="0">
+            <a:pPr marL="0" indent="0">
+              <a:buNone/>
+            </a:pPr>
+            <a:r>
+              <a:rPr lang="en-US" sz="1000" b="1" kern="0" spc="200" dirty="0">
                 <a:solidFill>
                   <a:srgbClr val="C9184A"/>
                 </a:solidFill>
@@ -10501,11 +11650,8 @@
               </a:rPr>
               <a:t>09</a:t>
             </a:r>
-            <a:pPr indent="0" marL="0">
-              <a:buNone/>
-            </a:pPr>
-            <a:r>
-              <a:rPr lang="en-US" sz="1000" spc="200" kern="0" dirty="0">
+            <a:r>
+              <a:rPr lang="en-US" sz="1000" kern="0" spc="200" dirty="0">
                 <a:solidFill>
                   <a:srgbClr val="6B7280"/>
                 </a:solidFill>
@@ -10540,7 +11686,7 @@
           <a:bodyPr wrap="square" lIns="0" tIns="0" rIns="0" bIns="0" rtlCol="0" anchor="ctr"/>
           <a:lstStyle/>
           <a:p>
-            <a:pPr algn="l" indent="0" marL="0">
+            <a:pPr marL="0" indent="0" algn="l">
               <a:buNone/>
             </a:pPr>
             <a:r>
@@ -10582,6 +11728,13 @@
             <a:prstDash val="solid"/>
           </a:ln>
         </p:spPr>
+        <p:txBody>
+          <a:bodyPr/>
+          <a:lstStyle/>
+          <a:p>
+            <a:endParaRPr lang="en-US"/>
+          </a:p>
+        </p:txBody>
       </p:sp>
       <p:sp>
         <p:nvSpPr>
@@ -10607,6 +11760,13 @@
             <a:prstDash val="solid"/>
           </a:ln>
         </p:spPr>
+        <p:txBody>
+          <a:bodyPr/>
+          <a:lstStyle/>
+          <a:p>
+            <a:endParaRPr lang="en-US"/>
+          </a:p>
+        </p:txBody>
       </p:sp>
       <p:sp>
         <p:nvSpPr>
@@ -10629,7 +11789,7 @@
           <a:bodyPr wrap="square" lIns="0" tIns="0" rIns="0" bIns="0" rtlCol="0" anchor="ctr"/>
           <a:lstStyle/>
           <a:p>
-            <a:pPr indent="0" marL="0">
+            <a:pPr marL="0" indent="0">
               <a:buNone/>
             </a:pPr>
             <a:r>
@@ -10668,7 +11828,7 @@
           <a:bodyPr wrap="square" lIns="0" tIns="0" rIns="0" bIns="0" rtlCol="0" anchor="ctr"/>
           <a:lstStyle/>
           <a:p>
-            <a:pPr indent="0" marL="0">
+            <a:pPr marL="0" indent="0">
               <a:buNone/>
             </a:pPr>
             <a:r>
@@ -10710,6 +11870,13 @@
             <a:prstDash val="solid"/>
           </a:ln>
         </p:spPr>
+        <p:txBody>
+          <a:bodyPr/>
+          <a:lstStyle/>
+          <a:p>
+            <a:endParaRPr lang="en-US"/>
+          </a:p>
+        </p:txBody>
       </p:sp>
       <p:sp>
         <p:nvSpPr>
@@ -10735,6 +11902,13 @@
             <a:prstDash val="solid"/>
           </a:ln>
         </p:spPr>
+        <p:txBody>
+          <a:bodyPr/>
+          <a:lstStyle/>
+          <a:p>
+            <a:endParaRPr lang="en-US"/>
+          </a:p>
+        </p:txBody>
       </p:sp>
       <p:sp>
         <p:nvSpPr>
@@ -10757,7 +11931,7 @@
           <a:bodyPr wrap="square" lIns="0" tIns="0" rIns="0" bIns="0" rtlCol="0" anchor="ctr"/>
           <a:lstStyle/>
           <a:p>
-            <a:pPr indent="0" marL="0">
+            <a:pPr marL="0" indent="0">
               <a:buNone/>
             </a:pPr>
             <a:r>
@@ -10796,7 +11970,7 @@
           <a:bodyPr wrap="square" lIns="0" tIns="0" rIns="0" bIns="0" rtlCol="0" anchor="ctr"/>
           <a:lstStyle/>
           <a:p>
-            <a:pPr indent="0" marL="0">
+            <a:pPr marL="0" indent="0">
               <a:buNone/>
             </a:pPr>
             <a:r>
@@ -10838,6 +12012,13 @@
             <a:prstDash val="solid"/>
           </a:ln>
         </p:spPr>
+        <p:txBody>
+          <a:bodyPr/>
+          <a:lstStyle/>
+          <a:p>
+            <a:endParaRPr lang="en-US"/>
+          </a:p>
+        </p:txBody>
       </p:sp>
       <p:sp>
         <p:nvSpPr>
@@ -10863,6 +12044,13 @@
             <a:prstDash val="solid"/>
           </a:ln>
         </p:spPr>
+        <p:txBody>
+          <a:bodyPr/>
+          <a:lstStyle/>
+          <a:p>
+            <a:endParaRPr lang="en-US"/>
+          </a:p>
+        </p:txBody>
       </p:sp>
       <p:sp>
         <p:nvSpPr>
@@ -10885,7 +12073,7 @@
           <a:bodyPr wrap="square" lIns="0" tIns="0" rIns="0" bIns="0" rtlCol="0" anchor="ctr"/>
           <a:lstStyle/>
           <a:p>
-            <a:pPr indent="0" marL="0">
+            <a:pPr marL="0" indent="0">
               <a:buNone/>
             </a:pPr>
             <a:r>
@@ -10924,7 +12112,7 @@
           <a:bodyPr wrap="square" lIns="0" tIns="0" rIns="0" bIns="0" rtlCol="0" anchor="ctr"/>
           <a:lstStyle/>
           <a:p>
-            <a:pPr indent="0" marL="0">
+            <a:pPr marL="0" indent="0">
               <a:buNone/>
             </a:pPr>
             <a:r>
@@ -10966,6 +12154,13 @@
             <a:prstDash val="solid"/>
           </a:ln>
         </p:spPr>
+        <p:txBody>
+          <a:bodyPr/>
+          <a:lstStyle/>
+          <a:p>
+            <a:endParaRPr lang="en-US"/>
+          </a:p>
+        </p:txBody>
       </p:sp>
       <p:sp>
         <p:nvSpPr>
@@ -10991,6 +12186,13 @@
             <a:prstDash val="solid"/>
           </a:ln>
         </p:spPr>
+        <p:txBody>
+          <a:bodyPr/>
+          <a:lstStyle/>
+          <a:p>
+            <a:endParaRPr lang="en-US"/>
+          </a:p>
+        </p:txBody>
       </p:sp>
       <p:sp>
         <p:nvSpPr>
@@ -11013,7 +12215,7 @@
           <a:bodyPr wrap="square" lIns="0" tIns="0" rIns="0" bIns="0" rtlCol="0" anchor="ctr"/>
           <a:lstStyle/>
           <a:p>
-            <a:pPr indent="0" marL="0">
+            <a:pPr marL="0" indent="0">
               <a:buNone/>
             </a:pPr>
             <a:r>
@@ -11052,7 +12254,7 @@
           <a:bodyPr wrap="square" lIns="0" tIns="0" rIns="0" bIns="0" rtlCol="0" anchor="ctr"/>
           <a:lstStyle/>
           <a:p>
-            <a:pPr indent="0" marL="0">
+            <a:pPr marL="0" indent="0">
               <a:buNone/>
             </a:pPr>
             <a:r>
@@ -11094,6 +12296,13 @@
             <a:prstDash val="solid"/>
           </a:ln>
         </p:spPr>
+        <p:txBody>
+          <a:bodyPr/>
+          <a:lstStyle/>
+          <a:p>
+            <a:endParaRPr lang="en-US"/>
+          </a:p>
+        </p:txBody>
       </p:sp>
       <p:sp>
         <p:nvSpPr>
@@ -11119,6 +12328,13 @@
             <a:prstDash val="solid"/>
           </a:ln>
         </p:spPr>
+        <p:txBody>
+          <a:bodyPr/>
+          <a:lstStyle/>
+          <a:p>
+            <a:endParaRPr lang="en-US"/>
+          </a:p>
+        </p:txBody>
       </p:sp>
       <p:sp>
         <p:nvSpPr>
@@ -11141,7 +12357,7 @@
           <a:bodyPr wrap="square" lIns="0" tIns="0" rIns="0" bIns="0" rtlCol="0" anchor="ctr"/>
           <a:lstStyle/>
           <a:p>
-            <a:pPr indent="0" marL="0">
+            <a:pPr marL="0" indent="0">
               <a:buNone/>
             </a:pPr>
             <a:r>
@@ -11180,7 +12396,7 @@
           <a:bodyPr wrap="square" lIns="0" tIns="0" rIns="0" bIns="0" rtlCol="0" anchor="ctr"/>
           <a:lstStyle/>
           <a:p>
-            <a:pPr indent="0" marL="0">
+            <a:pPr marL="0" indent="0">
               <a:buNone/>
             </a:pPr>
             <a:r>
@@ -11222,6 +12438,13 @@
             <a:prstDash val="solid"/>
           </a:ln>
         </p:spPr>
+        <p:txBody>
+          <a:bodyPr/>
+          <a:lstStyle/>
+          <a:p>
+            <a:endParaRPr lang="en-US"/>
+          </a:p>
+        </p:txBody>
       </p:sp>
       <p:sp>
         <p:nvSpPr>
@@ -11247,6 +12470,13 @@
             <a:prstDash val="solid"/>
           </a:ln>
         </p:spPr>
+        <p:txBody>
+          <a:bodyPr/>
+          <a:lstStyle/>
+          <a:p>
+            <a:endParaRPr lang="en-US"/>
+          </a:p>
+        </p:txBody>
       </p:sp>
       <p:sp>
         <p:nvSpPr>
@@ -11269,7 +12499,7 @@
           <a:bodyPr wrap="square" lIns="0" tIns="0" rIns="0" bIns="0" rtlCol="0" anchor="ctr"/>
           <a:lstStyle/>
           <a:p>
-            <a:pPr indent="0" marL="0">
+            <a:pPr marL="0" indent="0">
               <a:buNone/>
             </a:pPr>
             <a:r>
@@ -11308,7 +12538,7 @@
           <a:bodyPr wrap="square" lIns="0" tIns="0" rIns="0" bIns="0" rtlCol="0" anchor="ctr"/>
           <a:lstStyle/>
           <a:p>
-            <a:pPr indent="0" marL="0">
+            <a:pPr marL="0" indent="0">
               <a:buNone/>
             </a:pPr>
             <a:r>
@@ -11347,7 +12577,7 @@
           <a:bodyPr wrap="square" lIns="0" tIns="0" rIns="0" bIns="0" rtlCol="0" anchor="ctr"/>
           <a:lstStyle/>
           <a:p>
-            <a:pPr algn="l" indent="0" marL="0">
+            <a:pPr marL="0" indent="0" algn="l">
               <a:buNone/>
             </a:pPr>
             <a:r>
@@ -11666,4 +12896,319 @@
     </a:ext>
   </a:extLst>
 </a:theme>
+</file>
+
+<file path=ppt/theme/theme2.xml><?xml version="1.0" encoding="utf-8"?>
+<a:theme xmlns:a="http://schemas.openxmlformats.org/drawingml/2006/main" name="Office Theme">
+  <a:themeElements>
+    <a:clrScheme name="Office">
+      <a:dk1>
+        <a:sysClr val="windowText" lastClr="000000"/>
+      </a:dk1>
+      <a:lt1>
+        <a:sysClr val="window" lastClr="FFFFFF"/>
+      </a:lt1>
+      <a:dk2>
+        <a:srgbClr val="0E2841"/>
+      </a:dk2>
+      <a:lt2>
+        <a:srgbClr val="E8E8E8"/>
+      </a:lt2>
+      <a:accent1>
+        <a:srgbClr val="156082"/>
+      </a:accent1>
+      <a:accent2>
+        <a:srgbClr val="E97132"/>
+      </a:accent2>
+      <a:accent3>
+        <a:srgbClr val="196B24"/>
+      </a:accent3>
+      <a:accent4>
+        <a:srgbClr val="0F9ED5"/>
+      </a:accent4>
+      <a:accent5>
+        <a:srgbClr val="A02B93"/>
+      </a:accent5>
+      <a:accent6>
+        <a:srgbClr val="4EA72E"/>
+      </a:accent6>
+      <a:hlink>
+        <a:srgbClr val="467886"/>
+      </a:hlink>
+      <a:folHlink>
+        <a:srgbClr val="96607D"/>
+      </a:folHlink>
+    </a:clrScheme>
+    <a:fontScheme name="Office">
+      <a:majorFont>
+        <a:latin typeface="Aptos Display" panose="02110004020202020204"/>
+        <a:ea typeface=""/>
+        <a:cs typeface=""/>
+        <a:font script="Jpan" typeface="游ゴシック Light"/>
+        <a:font script="Hang" typeface="맑은 고딕"/>
+        <a:font script="Hans" typeface="等线 Light"/>
+        <a:font script="Hant" typeface="新細明體"/>
+        <a:font script="Arab" typeface="Times New Roman"/>
+        <a:font script="Hebr" typeface="Times New Roman"/>
+        <a:font script="Thai" typeface="Angsana New"/>
+        <a:font script="Ethi" typeface="Nyala"/>
+        <a:font script="Beng" typeface="Vrinda"/>
+        <a:font script="Gujr" typeface="Shruti"/>
+        <a:font script="Khmr" typeface="MoolBoran"/>
+        <a:font script="Knda" typeface="Tunga"/>
+        <a:font script="Guru" typeface="Raavi"/>
+        <a:font script="Cans" typeface="Euphemia"/>
+        <a:font script="Cher" typeface="Plantagenet Cherokee"/>
+        <a:font script="Yiii" typeface="Microsoft Yi Baiti"/>
+        <a:font script="Tibt" typeface="Microsoft Himalaya"/>
+        <a:font script="Thaa" typeface="MV Boli"/>
+        <a:font script="Deva" typeface="Mangal"/>
+        <a:font script="Telu" typeface="Gautami"/>
+        <a:font script="Taml" typeface="Latha"/>
+        <a:font script="Syrc" typeface="Estrangelo Edessa"/>
+        <a:font script="Orya" typeface="Kalinga"/>
+        <a:font script="Mlym" typeface="Kartika"/>
+        <a:font script="Laoo" typeface="DokChampa"/>
+        <a:font script="Sinh" typeface="Iskoola Pota"/>
+        <a:font script="Mong" typeface="Mongolian Baiti"/>
+        <a:font script="Viet" typeface="Times New Roman"/>
+        <a:font script="Uigh" typeface="Microsoft Uighur"/>
+        <a:font script="Geor" typeface="Sylfaen"/>
+        <a:font script="Armn" typeface="Arial"/>
+        <a:font script="Bugi" typeface="Leelawadee UI"/>
+        <a:font script="Bopo" typeface="Microsoft JhengHei"/>
+        <a:font script="Java" typeface="Javanese Text"/>
+        <a:font script="Lisu" typeface="Segoe UI"/>
+        <a:font script="Mymr" typeface="Myanmar Text"/>
+        <a:font script="Nkoo" typeface="Ebrima"/>
+        <a:font script="Olck" typeface="Nirmala UI"/>
+        <a:font script="Osma" typeface="Ebrima"/>
+        <a:font script="Phag" typeface="Phagspa"/>
+        <a:font script="Syrn" typeface="Estrangelo Edessa"/>
+        <a:font script="Syrj" typeface="Estrangelo Edessa"/>
+        <a:font script="Syre" typeface="Estrangelo Edessa"/>
+        <a:font script="Sora" typeface="Nirmala UI"/>
+        <a:font script="Tale" typeface="Microsoft Tai Le"/>
+        <a:font script="Talu" typeface="Microsoft New Tai Lue"/>
+        <a:font script="Tfng" typeface="Ebrima"/>
+      </a:majorFont>
+      <a:minorFont>
+        <a:latin typeface="Aptos" panose="02110004020202020204"/>
+        <a:ea typeface=""/>
+        <a:cs typeface=""/>
+        <a:font script="Jpan" typeface="游ゴシック"/>
+        <a:font script="Hang" typeface="맑은 고딕"/>
+        <a:font script="Hans" typeface="等线"/>
+        <a:font script="Hant" typeface="新細明體"/>
+        <a:font script="Arab" typeface="Arial"/>
+        <a:font script="Hebr" typeface="Arial"/>
+        <a:font script="Thai" typeface="Cordia New"/>
+        <a:font script="Ethi" typeface="Nyala"/>
+        <a:font script="Beng" typeface="Vrinda"/>
+        <a:font script="Gujr" typeface="Shruti"/>
+        <a:font script="Khmr" typeface="DaunPenh"/>
+        <a:font script="Knda" typeface="Tunga"/>
+        <a:font script="Guru" typeface="Raavi"/>
+        <a:font script="Cans" typeface="Euphemia"/>
+        <a:font script="Cher" typeface="Plantagenet Cherokee"/>
+        <a:font script="Yiii" typeface="Microsoft Yi Baiti"/>
+        <a:font script="Tibt" typeface="Microsoft Himalaya"/>
+        <a:font script="Thaa" typeface="MV Boli"/>
+        <a:font script="Deva" typeface="Mangal"/>
+        <a:font script="Telu" typeface="Gautami"/>
+        <a:font script="Taml" typeface="Latha"/>
+        <a:font script="Syrc" typeface="Estrangelo Edessa"/>
+        <a:font script="Orya" typeface="Kalinga"/>
+        <a:font script="Mlym" typeface="Kartika"/>
+        <a:font script="Laoo" typeface="DokChampa"/>
+        <a:font script="Sinh" typeface="Iskoola Pota"/>
+        <a:font script="Mong" typeface="Mongolian Baiti"/>
+        <a:font script="Viet" typeface="Arial"/>
+        <a:font script="Uigh" typeface="Microsoft Uighur"/>
+        <a:font script="Geor" typeface="Sylfaen"/>
+        <a:font script="Armn" typeface="Arial"/>
+        <a:font script="Bugi" typeface="Leelawadee UI"/>
+        <a:font script="Bopo" typeface="Microsoft JhengHei"/>
+        <a:font script="Java" typeface="Javanese Text"/>
+        <a:font script="Lisu" typeface="Segoe UI"/>
+        <a:font script="Mymr" typeface="Myanmar Text"/>
+        <a:font script="Nkoo" typeface="Ebrima"/>
+        <a:font script="Olck" typeface="Nirmala UI"/>
+        <a:font script="Osma" typeface="Ebrima"/>
+        <a:font script="Phag" typeface="Phagspa"/>
+        <a:font script="Syrn" typeface="Estrangelo Edessa"/>
+        <a:font script="Syrj" typeface="Estrangelo Edessa"/>
+        <a:font script="Syre" typeface="Estrangelo Edessa"/>
+        <a:font script="Sora" typeface="Nirmala UI"/>
+        <a:font script="Tale" typeface="Microsoft Tai Le"/>
+        <a:font script="Talu" typeface="Microsoft New Tai Lue"/>
+        <a:font script="Tfng" typeface="Ebrima"/>
+      </a:minorFont>
+    </a:fontScheme>
+    <a:fmtScheme name="Office">
+      <a:fillStyleLst>
+        <a:solidFill>
+          <a:schemeClr val="phClr"/>
+        </a:solidFill>
+        <a:gradFill rotWithShape="1">
+          <a:gsLst>
+            <a:gs pos="0">
+              <a:schemeClr val="phClr">
+                <a:lumMod val="110000"/>
+                <a:satMod val="105000"/>
+                <a:tint val="67000"/>
+              </a:schemeClr>
+            </a:gs>
+            <a:gs pos="50000">
+              <a:schemeClr val="phClr">
+                <a:lumMod val="105000"/>
+                <a:satMod val="103000"/>
+                <a:tint val="73000"/>
+              </a:schemeClr>
+            </a:gs>
+            <a:gs pos="100000">
+              <a:schemeClr val="phClr">
+                <a:lumMod val="105000"/>
+                <a:satMod val="109000"/>
+                <a:tint val="81000"/>
+              </a:schemeClr>
+            </a:gs>
+          </a:gsLst>
+          <a:lin ang="5400000" scaled="0"/>
+        </a:gradFill>
+        <a:gradFill rotWithShape="1">
+          <a:gsLst>
+            <a:gs pos="0">
+              <a:schemeClr val="phClr">
+                <a:satMod val="103000"/>
+                <a:lumMod val="102000"/>
+                <a:tint val="94000"/>
+              </a:schemeClr>
+            </a:gs>
+            <a:gs pos="50000">
+              <a:schemeClr val="phClr">
+                <a:satMod val="110000"/>
+                <a:lumMod val="100000"/>
+                <a:shade val="100000"/>
+              </a:schemeClr>
+            </a:gs>
+            <a:gs pos="100000">
+              <a:schemeClr val="phClr">
+                <a:lumMod val="99000"/>
+                <a:satMod val="120000"/>
+                <a:shade val="78000"/>
+              </a:schemeClr>
+            </a:gs>
+          </a:gsLst>
+          <a:lin ang="5400000" scaled="0"/>
+        </a:gradFill>
+      </a:fillStyleLst>
+      <a:lnStyleLst>
+        <a:ln w="12700" cap="flat" cmpd="sng" algn="ctr">
+          <a:solidFill>
+            <a:schemeClr val="phClr"/>
+          </a:solidFill>
+          <a:prstDash val="solid"/>
+          <a:miter lim="800000"/>
+        </a:ln>
+        <a:ln w="19050" cap="flat" cmpd="sng" algn="ctr">
+          <a:solidFill>
+            <a:schemeClr val="phClr"/>
+          </a:solidFill>
+          <a:prstDash val="solid"/>
+          <a:miter lim="800000"/>
+        </a:ln>
+        <a:ln w="25400" cap="flat" cmpd="sng" algn="ctr">
+          <a:solidFill>
+            <a:schemeClr val="phClr"/>
+          </a:solidFill>
+          <a:prstDash val="solid"/>
+          <a:miter lim="800000"/>
+        </a:ln>
+      </a:lnStyleLst>
+      <a:effectStyleLst>
+        <a:effectStyle>
+          <a:effectLst/>
+        </a:effectStyle>
+        <a:effectStyle>
+          <a:effectLst/>
+        </a:effectStyle>
+        <a:effectStyle>
+          <a:effectLst>
+            <a:outerShdw blurRad="57150" dist="19050" dir="5400000" algn="ctr" rotWithShape="0">
+              <a:srgbClr val="000000">
+                <a:alpha val="63000"/>
+              </a:srgbClr>
+            </a:outerShdw>
+          </a:effectLst>
+        </a:effectStyle>
+      </a:effectStyleLst>
+      <a:bgFillStyleLst>
+        <a:solidFill>
+          <a:schemeClr val="phClr"/>
+        </a:solidFill>
+        <a:solidFill>
+          <a:schemeClr val="phClr">
+            <a:tint val="95000"/>
+            <a:satMod val="170000"/>
+          </a:schemeClr>
+        </a:solidFill>
+        <a:gradFill rotWithShape="1">
+          <a:gsLst>
+            <a:gs pos="0">
+              <a:schemeClr val="phClr">
+                <a:tint val="93000"/>
+                <a:satMod val="150000"/>
+                <a:shade val="98000"/>
+                <a:lumMod val="102000"/>
+              </a:schemeClr>
+            </a:gs>
+            <a:gs pos="50000">
+              <a:schemeClr val="phClr">
+                <a:tint val="98000"/>
+                <a:satMod val="130000"/>
+                <a:shade val="90000"/>
+                <a:lumMod val="103000"/>
+              </a:schemeClr>
+            </a:gs>
+            <a:gs pos="100000">
+              <a:schemeClr val="phClr">
+                <a:shade val="63000"/>
+                <a:satMod val="120000"/>
+              </a:schemeClr>
+            </a:gs>
+          </a:gsLst>
+          <a:lin ang="5400000" scaled="0"/>
+        </a:gradFill>
+      </a:bgFillStyleLst>
+    </a:fmtScheme>
+  </a:themeElements>
+  <a:objectDefaults>
+    <a:lnDef>
+      <a:spPr/>
+      <a:bodyPr/>
+      <a:lstStyle/>
+      <a:style>
+        <a:lnRef idx="2">
+          <a:schemeClr val="accent1"/>
+        </a:lnRef>
+        <a:fillRef idx="0">
+          <a:schemeClr val="accent1"/>
+        </a:fillRef>
+        <a:effectRef idx="1">
+          <a:schemeClr val="accent1"/>
+        </a:effectRef>
+        <a:fontRef idx="minor">
+          <a:schemeClr val="tx1"/>
+        </a:fontRef>
+      </a:style>
+    </a:lnDef>
+  </a:objectDefaults>
+  <a:extraClrSchemeLst/>
+  <a:extLst>
+    <a:ext uri="{05A4C25C-085E-4340-85A3-A5531E510DB2}">
+      <thm15:themeFamily xmlns:thm15="http://schemas.microsoft.com/office/thememl/2012/main" name="Office Theme" id="{2E142A2C-CD16-42D6-873A-C26D2A0506FA}" vid="{1BDDFF52-6CD6-40A5-AB3C-68EB2F1E4D0A}"/>
+    </a:ext>
+  </a:extLst>
+</a:theme>
 </file>
--- a/workshop_slides.pptx
+++ b/workshop_slides.pptx
@@ -5,7 +5,7 @@
     <p:sldMasterId id="2147483648" r:id="rId1"/>
   </p:sldMasterIdLst>
   <p:notesMasterIdLst>
-    <p:notesMasterId r:id="rId14"/>
+    <p:notesMasterId r:id="rId17"/>
   </p:notesMasterIdLst>
   <p:sldIdLst>
     <p:sldId id="256" r:id="rId2"/>
@@ -13,13 +13,16 @@
     <p:sldId id="258" r:id="rId4"/>
     <p:sldId id="259" r:id="rId5"/>
     <p:sldId id="260" r:id="rId6"/>
-    <p:sldId id="261" r:id="rId7"/>
-    <p:sldId id="262" r:id="rId8"/>
-    <p:sldId id="263" r:id="rId9"/>
-    <p:sldId id="264" r:id="rId10"/>
-    <p:sldId id="265" r:id="rId11"/>
-    <p:sldId id="266" r:id="rId12"/>
-    <p:sldId id="267" r:id="rId13"/>
+    <p:sldId id="268" r:id="rId7"/>
+    <p:sldId id="261" r:id="rId8"/>
+    <p:sldId id="262" r:id="rId9"/>
+    <p:sldId id="263" r:id="rId10"/>
+    <p:sldId id="264" r:id="rId11"/>
+    <p:sldId id="265" r:id="rId12"/>
+    <p:sldId id="269" r:id="rId13"/>
+    <p:sldId id="270" r:id="rId14"/>
+    <p:sldId id="266" r:id="rId15"/>
+    <p:sldId id="267" r:id="rId16"/>
   </p:sldIdLst>
   <p:sldSz cx="9144000" cy="5143500" type="screen16x9"/>
   <p:notesSz cx="5143500" cy="9144000"/>
@@ -841,7 +844,7 @@
           <a:p>
             <a:fld id="{F7021451-1387-4CA6-816F-3879F97B5CBC}" type="slidenum">
               <a:rPr lang="en-US"/>
-              <a:t>10</a:t>
+              <a:t>11</a:t>
             </a:fld>
             <a:endParaRPr lang="en-US"/>
           </a:p>
@@ -1347,7 +1350,7 @@
           <a:p>
             <a:fld id="{F7021451-1387-4CA6-816F-3879F97B5CBC}" type="slidenum">
               <a:rPr lang="en-US"/>
-              <a:t>11</a:t>
+              <a:t>14</a:t>
             </a:fld>
             <a:endParaRPr lang="en-US"/>
           </a:p>
@@ -1633,7 +1636,7 @@
           </a:p>
           <a:p>
             <a:br>
-              <a:rPr lang="en-US" sz="1200" b="0" kern="1200">
+              <a:rPr lang="en-US" sz="1200" b="0" kern="1200" dirty="0">
                 <a:solidFill>
                   <a:schemeClr val="tx1"/>
                 </a:solidFill>
@@ -1643,7 +1646,7 @@
                 <a:cs typeface="+mn-cs"/>
               </a:rPr>
             </a:br>
-            <a:endParaRPr lang="en-US" sz="1200" b="0" kern="1200">
+            <a:endParaRPr lang="en-US" sz="1200" b="0" kern="1200" dirty="0">
               <a:solidFill>
                 <a:schemeClr val="tx1"/>
               </a:solidFill>
@@ -1675,7 +1678,7 @@
           <a:p>
             <a:fld id="{F7021451-1387-4CA6-816F-3879F97B5CBC}" type="slidenum">
               <a:rPr lang="en-US"/>
-              <a:t>12</a:t>
+              <a:t>15</a:t>
             </a:fld>
             <a:endParaRPr lang="en-US"/>
           </a:p>
@@ -3115,7 +3118,7 @@
           <a:p>
             <a:fld id="{F7021451-1387-4CA6-816F-3879F97B5CBC}" type="slidenum">
               <a:rPr lang="en-US"/>
-              <a:t>6</a:t>
+              <a:t>7</a:t>
             </a:fld>
             <a:endParaRPr lang="en-US"/>
           </a:p>
@@ -3399,7 +3402,7 @@
           <a:p>
             <a:fld id="{F7021451-1387-4CA6-816F-3879F97B5CBC}" type="slidenum">
               <a:rPr lang="en-US"/>
-              <a:t>7</a:t>
+              <a:t>8</a:t>
             </a:fld>
             <a:endParaRPr lang="en-US"/>
           </a:p>
@@ -3697,7 +3700,7 @@
           <a:p>
             <a:fld id="{F7021451-1387-4CA6-816F-3879F97B5CBC}" type="slidenum">
               <a:rPr lang="en-US"/>
-              <a:t>8</a:t>
+              <a:t>9</a:t>
             </a:fld>
             <a:endParaRPr lang="en-US"/>
           </a:p>
@@ -4125,7 +4128,7 @@
           <a:p>
             <a:fld id="{F7021451-1387-4CA6-816F-3879F97B5CBC}" type="slidenum">
               <a:rPr lang="en-US"/>
-              <a:t>9</a:t>
+              <a:t>10</a:t>
             </a:fld>
             <a:endParaRPr lang="en-US"/>
           </a:p>
@@ -4760,6 +4763,1019 @@
 
 <file path=ppt/slides/slide10.xml><?xml version="1.0" encoding="utf-8"?>
 <p:sld xmlns:a="http://schemas.openxmlformats.org/drawingml/2006/main" xmlns:r="http://schemas.openxmlformats.org/officeDocument/2006/relationships" xmlns:p="http://schemas.openxmlformats.org/presentationml/2006/main">
+  <p:cSld name="Slide 9">
+    <p:bg>
+      <p:bgPr>
+        <a:solidFill>
+          <a:srgbClr val="FFFFFF"/>
+        </a:solidFill>
+        <a:effectLst/>
+      </p:bgPr>
+    </p:bg>
+    <p:spTree>
+      <p:nvGrpSpPr>
+        <p:cNvPr id="1" name=""/>
+        <p:cNvGrpSpPr/>
+        <p:nvPr/>
+      </p:nvGrpSpPr>
+      <p:grpSpPr>
+        <a:xfrm>
+          <a:off x="0" y="0"/>
+          <a:ext cx="0" cy="0"/>
+          <a:chOff x="0" y="0"/>
+          <a:chExt cx="0" cy="0"/>
+        </a:xfrm>
+      </p:grpSpPr>
+      <p:sp>
+        <p:nvSpPr>
+          <p:cNvPr id="2" name="Text 0"/>
+          <p:cNvSpPr/>
+          <p:nvPr/>
+        </p:nvSpPr>
+        <p:spPr>
+          <a:xfrm>
+            <a:off x="365760" y="228600"/>
+            <a:ext cx="1371600" cy="274320"/>
+          </a:xfrm>
+          <a:prstGeom prst="rect">
+            <a:avLst/>
+          </a:prstGeom>
+          <a:noFill/>
+          <a:ln/>
+        </p:spPr>
+        <p:txBody>
+          <a:bodyPr wrap="square" lIns="0" tIns="0" rIns="0" bIns="0" rtlCol="0" anchor="ctr"/>
+          <a:lstStyle/>
+          <a:p>
+            <a:pPr marL="0" indent="0">
+              <a:buNone/>
+            </a:pPr>
+            <a:r>
+              <a:rPr lang="en-US" sz="1000" b="1" kern="0" spc="200" dirty="0">
+                <a:solidFill>
+                  <a:srgbClr val="C9184A"/>
+                </a:solidFill>
+                <a:latin typeface="Calibri" pitchFamily="34" charset="0"/>
+                <a:ea typeface="Calibri" pitchFamily="34" charset="-122"/>
+                <a:cs typeface="Calibri" pitchFamily="34" charset="-120"/>
+              </a:rPr>
+              <a:t>10</a:t>
+            </a:r>
+            <a:r>
+              <a:rPr lang="en-US" sz="1000" kern="0" spc="200" dirty="0">
+                <a:solidFill>
+                  <a:srgbClr val="6B7280"/>
+                </a:solidFill>
+                <a:latin typeface="Calibri" pitchFamily="34" charset="0"/>
+                <a:ea typeface="Calibri" pitchFamily="34" charset="-122"/>
+                <a:cs typeface="Calibri" pitchFamily="34" charset="-120"/>
+              </a:rPr>
+              <a:t> / 15</a:t>
+            </a:r>
+            <a:endParaRPr lang="en-US" sz="1000" dirty="0"/>
+          </a:p>
+        </p:txBody>
+      </p:sp>
+      <p:sp>
+        <p:nvSpPr>
+          <p:cNvPr id="3" name="Text 1"/>
+          <p:cNvSpPr/>
+          <p:nvPr/>
+        </p:nvSpPr>
+        <p:spPr>
+          <a:xfrm>
+            <a:off x="365760" y="502920"/>
+            <a:ext cx="8412480" cy="822960"/>
+          </a:xfrm>
+          <a:prstGeom prst="rect">
+            <a:avLst/>
+          </a:prstGeom>
+          <a:noFill/>
+          <a:ln/>
+        </p:spPr>
+        <p:txBody>
+          <a:bodyPr wrap="square" lIns="0" tIns="0" rIns="0" bIns="0" rtlCol="0" anchor="ctr"/>
+          <a:lstStyle/>
+          <a:p>
+            <a:pPr marL="0" indent="0" algn="l">
+              <a:buNone/>
+            </a:pPr>
+            <a:r>
+              <a:rPr lang="en-US" sz="3200" b="1" dirty="0">
+                <a:solidFill>
+                  <a:srgbClr val="1A1A2E"/>
+                </a:solidFill>
+                <a:latin typeface="Georgia" pitchFamily="34" charset="0"/>
+                <a:ea typeface="Georgia" pitchFamily="34" charset="-122"/>
+                <a:cs typeface="Georgia" pitchFamily="34" charset="-120"/>
+              </a:rPr>
+              <a:t>Our tech stack</a:t>
+            </a:r>
+            <a:endParaRPr lang="en-US" sz="3200" dirty="0"/>
+          </a:p>
+        </p:txBody>
+      </p:sp>
+      <p:sp>
+        <p:nvSpPr>
+          <p:cNvPr id="4" name="Shape 2"/>
+          <p:cNvSpPr/>
+          <p:nvPr/>
+        </p:nvSpPr>
+        <p:spPr>
+          <a:xfrm>
+            <a:off x="365760" y="1600200"/>
+            <a:ext cx="2743200" cy="1417320"/>
+          </a:xfrm>
+          <a:prstGeom prst="rect">
+            <a:avLst/>
+          </a:prstGeom>
+          <a:solidFill>
+            <a:srgbClr val="FFFFFF"/>
+          </a:solidFill>
+          <a:ln w="12700">
+            <a:solidFill>
+              <a:srgbClr val="E5E7EB"/>
+            </a:solidFill>
+            <a:prstDash val="solid"/>
+          </a:ln>
+        </p:spPr>
+        <p:txBody>
+          <a:bodyPr/>
+          <a:lstStyle/>
+          <a:p>
+            <a:endParaRPr lang="en-US"/>
+          </a:p>
+        </p:txBody>
+      </p:sp>
+      <p:sp>
+        <p:nvSpPr>
+          <p:cNvPr id="5" name="Shape 3"/>
+          <p:cNvSpPr/>
+          <p:nvPr/>
+        </p:nvSpPr>
+        <p:spPr>
+          <a:xfrm>
+            <a:off x="365760" y="1600200"/>
+            <a:ext cx="73152" cy="1417320"/>
+          </a:xfrm>
+          <a:prstGeom prst="rect">
+            <a:avLst/>
+          </a:prstGeom>
+          <a:solidFill>
+            <a:srgbClr val="000000"/>
+          </a:solidFill>
+          <a:ln w="12700">
+            <a:solidFill>
+              <a:srgbClr val="000000"/>
+            </a:solidFill>
+            <a:prstDash val="solid"/>
+          </a:ln>
+        </p:spPr>
+        <p:txBody>
+          <a:bodyPr/>
+          <a:lstStyle/>
+          <a:p>
+            <a:endParaRPr lang="en-US"/>
+          </a:p>
+        </p:txBody>
+      </p:sp>
+      <p:sp>
+        <p:nvSpPr>
+          <p:cNvPr id="6" name="Text 4"/>
+          <p:cNvSpPr/>
+          <p:nvPr/>
+        </p:nvSpPr>
+        <p:spPr>
+          <a:xfrm>
+            <a:off x="640080" y="1828800"/>
+            <a:ext cx="2286000" cy="457200"/>
+          </a:xfrm>
+          <a:prstGeom prst="rect">
+            <a:avLst/>
+          </a:prstGeom>
+          <a:noFill/>
+          <a:ln/>
+        </p:spPr>
+        <p:txBody>
+          <a:bodyPr wrap="square" lIns="0" tIns="0" rIns="0" bIns="0" rtlCol="0" anchor="ctr"/>
+          <a:lstStyle/>
+          <a:p>
+            <a:pPr marL="0" indent="0">
+              <a:buNone/>
+            </a:pPr>
+            <a:r>
+              <a:rPr lang="en-US" sz="2200" b="1" dirty="0">
+                <a:solidFill>
+                  <a:srgbClr val="1A1A2E"/>
+                </a:solidFill>
+                <a:latin typeface="Georgia" pitchFamily="34" charset="0"/>
+                <a:ea typeface="Georgia" pitchFamily="34" charset="-122"/>
+                <a:cs typeface="Georgia" pitchFamily="34" charset="-120"/>
+              </a:rPr>
+              <a:t>Ollama</a:t>
+            </a:r>
+            <a:endParaRPr lang="en-US" sz="2200" dirty="0"/>
+          </a:p>
+        </p:txBody>
+      </p:sp>
+      <p:sp>
+        <p:nvSpPr>
+          <p:cNvPr id="7" name="Text 5"/>
+          <p:cNvSpPr/>
+          <p:nvPr/>
+        </p:nvSpPr>
+        <p:spPr>
+          <a:xfrm>
+            <a:off x="640080" y="2377440"/>
+            <a:ext cx="2286000" cy="457200"/>
+          </a:xfrm>
+          <a:prstGeom prst="rect">
+            <a:avLst/>
+          </a:prstGeom>
+          <a:noFill/>
+          <a:ln/>
+        </p:spPr>
+        <p:txBody>
+          <a:bodyPr wrap="square" lIns="0" tIns="0" rIns="0" bIns="0" rtlCol="0" anchor="ctr"/>
+          <a:lstStyle/>
+          <a:p>
+            <a:pPr marL="0" indent="0">
+              <a:buNone/>
+            </a:pPr>
+            <a:r>
+              <a:rPr lang="en-US" sz="1200" dirty="0">
+                <a:solidFill>
+                  <a:srgbClr val="6B7280"/>
+                </a:solidFill>
+                <a:latin typeface="Calibri" pitchFamily="34" charset="0"/>
+                <a:ea typeface="Calibri" pitchFamily="34" charset="-122"/>
+                <a:cs typeface="Calibri" pitchFamily="34" charset="-120"/>
+              </a:rPr>
+              <a:t>Local LLM runtime</a:t>
+            </a:r>
+            <a:endParaRPr lang="en-US" sz="1200" dirty="0"/>
+          </a:p>
+        </p:txBody>
+      </p:sp>
+      <p:sp>
+        <p:nvSpPr>
+          <p:cNvPr id="8" name="Shape 6"/>
+          <p:cNvSpPr/>
+          <p:nvPr/>
+        </p:nvSpPr>
+        <p:spPr>
+          <a:xfrm>
+            <a:off x="3246120" y="1600200"/>
+            <a:ext cx="2743200" cy="1417320"/>
+          </a:xfrm>
+          <a:prstGeom prst="rect">
+            <a:avLst/>
+          </a:prstGeom>
+          <a:solidFill>
+            <a:srgbClr val="FFFFFF"/>
+          </a:solidFill>
+          <a:ln w="12700">
+            <a:solidFill>
+              <a:srgbClr val="E5E7EB"/>
+            </a:solidFill>
+            <a:prstDash val="solid"/>
+          </a:ln>
+        </p:spPr>
+        <p:txBody>
+          <a:bodyPr/>
+          <a:lstStyle/>
+          <a:p>
+            <a:endParaRPr lang="en-US"/>
+          </a:p>
+        </p:txBody>
+      </p:sp>
+      <p:sp>
+        <p:nvSpPr>
+          <p:cNvPr id="9" name="Shape 7"/>
+          <p:cNvSpPr/>
+          <p:nvPr/>
+        </p:nvSpPr>
+        <p:spPr>
+          <a:xfrm>
+            <a:off x="3246120" y="1600200"/>
+            <a:ext cx="73152" cy="1417320"/>
+          </a:xfrm>
+          <a:prstGeom prst="rect">
+            <a:avLst/>
+          </a:prstGeom>
+          <a:solidFill>
+            <a:srgbClr val="6366F1"/>
+          </a:solidFill>
+          <a:ln w="12700">
+            <a:solidFill>
+              <a:srgbClr val="6366F1"/>
+            </a:solidFill>
+            <a:prstDash val="solid"/>
+          </a:ln>
+        </p:spPr>
+        <p:txBody>
+          <a:bodyPr/>
+          <a:lstStyle/>
+          <a:p>
+            <a:endParaRPr lang="en-US"/>
+          </a:p>
+        </p:txBody>
+      </p:sp>
+      <p:sp>
+        <p:nvSpPr>
+          <p:cNvPr id="10" name="Text 8"/>
+          <p:cNvSpPr/>
+          <p:nvPr/>
+        </p:nvSpPr>
+        <p:spPr>
+          <a:xfrm>
+            <a:off x="3520440" y="1828800"/>
+            <a:ext cx="2286000" cy="457200"/>
+          </a:xfrm>
+          <a:prstGeom prst="rect">
+            <a:avLst/>
+          </a:prstGeom>
+          <a:noFill/>
+          <a:ln/>
+        </p:spPr>
+        <p:txBody>
+          <a:bodyPr wrap="square" lIns="0" tIns="0" rIns="0" bIns="0" rtlCol="0" anchor="ctr"/>
+          <a:lstStyle/>
+          <a:p>
+            <a:pPr marL="0" indent="0">
+              <a:buNone/>
+            </a:pPr>
+            <a:r>
+              <a:rPr lang="en-US" sz="2200" b="1" dirty="0">
+                <a:solidFill>
+                  <a:srgbClr val="1A1A2E"/>
+                </a:solidFill>
+                <a:latin typeface="Georgia" pitchFamily="34" charset="0"/>
+                <a:ea typeface="Georgia" pitchFamily="34" charset="-122"/>
+                <a:cs typeface="Georgia" pitchFamily="34" charset="-120"/>
+              </a:rPr>
+              <a:t>LangChain</a:t>
+            </a:r>
+            <a:endParaRPr lang="en-US" sz="2200" dirty="0"/>
+          </a:p>
+        </p:txBody>
+      </p:sp>
+      <p:sp>
+        <p:nvSpPr>
+          <p:cNvPr id="11" name="Text 9"/>
+          <p:cNvSpPr/>
+          <p:nvPr/>
+        </p:nvSpPr>
+        <p:spPr>
+          <a:xfrm>
+            <a:off x="3520440" y="2377440"/>
+            <a:ext cx="2286000" cy="457200"/>
+          </a:xfrm>
+          <a:prstGeom prst="rect">
+            <a:avLst/>
+          </a:prstGeom>
+          <a:noFill/>
+          <a:ln/>
+        </p:spPr>
+        <p:txBody>
+          <a:bodyPr wrap="square" lIns="0" tIns="0" rIns="0" bIns="0" rtlCol="0" anchor="ctr"/>
+          <a:lstStyle/>
+          <a:p>
+            <a:pPr marL="0" indent="0">
+              <a:buNone/>
+            </a:pPr>
+            <a:r>
+              <a:rPr lang="en-US" sz="1200" dirty="0">
+                <a:solidFill>
+                  <a:srgbClr val="6B7280"/>
+                </a:solidFill>
+                <a:latin typeface="Calibri" pitchFamily="34" charset="0"/>
+                <a:ea typeface="Calibri" pitchFamily="34" charset="-122"/>
+                <a:cs typeface="Calibri" pitchFamily="34" charset="-120"/>
+              </a:rPr>
+              <a:t>RAG primitives &amp; glue</a:t>
+            </a:r>
+            <a:endParaRPr lang="en-US" sz="1200" dirty="0"/>
+          </a:p>
+        </p:txBody>
+      </p:sp>
+      <p:sp>
+        <p:nvSpPr>
+          <p:cNvPr id="12" name="Shape 10"/>
+          <p:cNvSpPr/>
+          <p:nvPr/>
+        </p:nvSpPr>
+        <p:spPr>
+          <a:xfrm>
+            <a:off x="6126480" y="1600200"/>
+            <a:ext cx="2743200" cy="1417320"/>
+          </a:xfrm>
+          <a:prstGeom prst="rect">
+            <a:avLst/>
+          </a:prstGeom>
+          <a:solidFill>
+            <a:srgbClr val="FFFFFF"/>
+          </a:solidFill>
+          <a:ln w="12700">
+            <a:solidFill>
+              <a:srgbClr val="E5E7EB"/>
+            </a:solidFill>
+            <a:prstDash val="solid"/>
+          </a:ln>
+        </p:spPr>
+        <p:txBody>
+          <a:bodyPr/>
+          <a:lstStyle/>
+          <a:p>
+            <a:endParaRPr lang="en-US"/>
+          </a:p>
+        </p:txBody>
+      </p:sp>
+      <p:sp>
+        <p:nvSpPr>
+          <p:cNvPr id="13" name="Shape 11"/>
+          <p:cNvSpPr/>
+          <p:nvPr/>
+        </p:nvSpPr>
+        <p:spPr>
+          <a:xfrm>
+            <a:off x="6126480" y="1600200"/>
+            <a:ext cx="73152" cy="1417320"/>
+          </a:xfrm>
+          <a:prstGeom prst="rect">
+            <a:avLst/>
+          </a:prstGeom>
+          <a:solidFill>
+            <a:srgbClr val="0EA5E9"/>
+          </a:solidFill>
+          <a:ln w="12700">
+            <a:solidFill>
+              <a:srgbClr val="0EA5E9"/>
+            </a:solidFill>
+            <a:prstDash val="solid"/>
+          </a:ln>
+        </p:spPr>
+        <p:txBody>
+          <a:bodyPr/>
+          <a:lstStyle/>
+          <a:p>
+            <a:endParaRPr lang="en-US"/>
+          </a:p>
+        </p:txBody>
+      </p:sp>
+      <p:sp>
+        <p:nvSpPr>
+          <p:cNvPr id="14" name="Text 12"/>
+          <p:cNvSpPr/>
+          <p:nvPr/>
+        </p:nvSpPr>
+        <p:spPr>
+          <a:xfrm>
+            <a:off x="6400800" y="1828800"/>
+            <a:ext cx="2286000" cy="457200"/>
+          </a:xfrm>
+          <a:prstGeom prst="rect">
+            <a:avLst/>
+          </a:prstGeom>
+          <a:noFill/>
+          <a:ln/>
+        </p:spPr>
+        <p:txBody>
+          <a:bodyPr wrap="square" lIns="0" tIns="0" rIns="0" bIns="0" rtlCol="0" anchor="ctr"/>
+          <a:lstStyle/>
+          <a:p>
+            <a:pPr marL="0" indent="0">
+              <a:buNone/>
+            </a:pPr>
+            <a:r>
+              <a:rPr lang="en-US" sz="2200" b="1" dirty="0">
+                <a:solidFill>
+                  <a:srgbClr val="1A1A2E"/>
+                </a:solidFill>
+                <a:latin typeface="Georgia" pitchFamily="34" charset="0"/>
+                <a:ea typeface="Georgia" pitchFamily="34" charset="-122"/>
+                <a:cs typeface="Georgia" pitchFamily="34" charset="-120"/>
+              </a:rPr>
+              <a:t>ChromaDB</a:t>
+            </a:r>
+            <a:endParaRPr lang="en-US" sz="2200" dirty="0"/>
+          </a:p>
+        </p:txBody>
+      </p:sp>
+      <p:sp>
+        <p:nvSpPr>
+          <p:cNvPr id="15" name="Text 13"/>
+          <p:cNvSpPr/>
+          <p:nvPr/>
+        </p:nvSpPr>
+        <p:spPr>
+          <a:xfrm>
+            <a:off x="6400800" y="2377440"/>
+            <a:ext cx="2286000" cy="457200"/>
+          </a:xfrm>
+          <a:prstGeom prst="rect">
+            <a:avLst/>
+          </a:prstGeom>
+          <a:noFill/>
+          <a:ln/>
+        </p:spPr>
+        <p:txBody>
+          <a:bodyPr wrap="square" lIns="0" tIns="0" rIns="0" bIns="0" rtlCol="0" anchor="ctr"/>
+          <a:lstStyle/>
+          <a:p>
+            <a:pPr marL="0" indent="0">
+              <a:buNone/>
+            </a:pPr>
+            <a:r>
+              <a:rPr lang="en-US" sz="1200" dirty="0">
+                <a:solidFill>
+                  <a:srgbClr val="6B7280"/>
+                </a:solidFill>
+                <a:latin typeface="Calibri" pitchFamily="34" charset="0"/>
+                <a:ea typeface="Calibri" pitchFamily="34" charset="-122"/>
+                <a:cs typeface="Calibri" pitchFamily="34" charset="-120"/>
+              </a:rPr>
+              <a:t>Vector database</a:t>
+            </a:r>
+            <a:endParaRPr lang="en-US" sz="1200" dirty="0"/>
+          </a:p>
+        </p:txBody>
+      </p:sp>
+      <p:sp>
+        <p:nvSpPr>
+          <p:cNvPr id="16" name="Shape 14"/>
+          <p:cNvSpPr/>
+          <p:nvPr/>
+        </p:nvSpPr>
+        <p:spPr>
+          <a:xfrm>
+            <a:off x="365760" y="3154680"/>
+            <a:ext cx="2743200" cy="1417320"/>
+          </a:xfrm>
+          <a:prstGeom prst="rect">
+            <a:avLst/>
+          </a:prstGeom>
+          <a:solidFill>
+            <a:srgbClr val="FFFFFF"/>
+          </a:solidFill>
+          <a:ln w="12700">
+            <a:solidFill>
+              <a:srgbClr val="E5E7EB"/>
+            </a:solidFill>
+            <a:prstDash val="solid"/>
+          </a:ln>
+        </p:spPr>
+        <p:txBody>
+          <a:bodyPr/>
+          <a:lstStyle/>
+          <a:p>
+            <a:endParaRPr lang="en-US"/>
+          </a:p>
+        </p:txBody>
+      </p:sp>
+      <p:sp>
+        <p:nvSpPr>
+          <p:cNvPr id="17" name="Shape 15"/>
+          <p:cNvSpPr/>
+          <p:nvPr/>
+        </p:nvSpPr>
+        <p:spPr>
+          <a:xfrm>
+            <a:off x="365760" y="3154680"/>
+            <a:ext cx="73152" cy="1417320"/>
+          </a:xfrm>
+          <a:prstGeom prst="rect">
+            <a:avLst/>
+          </a:prstGeom>
+          <a:solidFill>
+            <a:srgbClr val="C9184A"/>
+          </a:solidFill>
+          <a:ln w="12700">
+            <a:solidFill>
+              <a:srgbClr val="C9184A"/>
+            </a:solidFill>
+            <a:prstDash val="solid"/>
+          </a:ln>
+        </p:spPr>
+        <p:txBody>
+          <a:bodyPr/>
+          <a:lstStyle/>
+          <a:p>
+            <a:endParaRPr lang="en-US"/>
+          </a:p>
+        </p:txBody>
+      </p:sp>
+      <p:sp>
+        <p:nvSpPr>
+          <p:cNvPr id="18" name="Text 16"/>
+          <p:cNvSpPr/>
+          <p:nvPr/>
+        </p:nvSpPr>
+        <p:spPr>
+          <a:xfrm>
+            <a:off x="640080" y="3383280"/>
+            <a:ext cx="2286000" cy="457200"/>
+          </a:xfrm>
+          <a:prstGeom prst="rect">
+            <a:avLst/>
+          </a:prstGeom>
+          <a:noFill/>
+          <a:ln/>
+        </p:spPr>
+        <p:txBody>
+          <a:bodyPr wrap="square" lIns="0" tIns="0" rIns="0" bIns="0" rtlCol="0" anchor="ctr"/>
+          <a:lstStyle/>
+          <a:p>
+            <a:pPr marL="0" indent="0">
+              <a:buNone/>
+            </a:pPr>
+            <a:r>
+              <a:rPr lang="en-US" sz="2200" b="1" dirty="0">
+                <a:solidFill>
+                  <a:srgbClr val="1A1A2E"/>
+                </a:solidFill>
+                <a:latin typeface="Georgia" pitchFamily="34" charset="0"/>
+                <a:ea typeface="Georgia" pitchFamily="34" charset="-122"/>
+                <a:cs typeface="Georgia" pitchFamily="34" charset="-120"/>
+              </a:rPr>
+              <a:t>CrewAI</a:t>
+            </a:r>
+            <a:endParaRPr lang="en-US" sz="2200" dirty="0"/>
+          </a:p>
+        </p:txBody>
+      </p:sp>
+      <p:sp>
+        <p:nvSpPr>
+          <p:cNvPr id="19" name="Text 17"/>
+          <p:cNvSpPr/>
+          <p:nvPr/>
+        </p:nvSpPr>
+        <p:spPr>
+          <a:xfrm>
+            <a:off x="640080" y="3931920"/>
+            <a:ext cx="2286000" cy="457200"/>
+          </a:xfrm>
+          <a:prstGeom prst="rect">
+            <a:avLst/>
+          </a:prstGeom>
+          <a:noFill/>
+          <a:ln/>
+        </p:spPr>
+        <p:txBody>
+          <a:bodyPr wrap="square" lIns="0" tIns="0" rIns="0" bIns="0" rtlCol="0" anchor="ctr"/>
+          <a:lstStyle/>
+          <a:p>
+            <a:pPr marL="0" indent="0">
+              <a:buNone/>
+            </a:pPr>
+            <a:r>
+              <a:rPr lang="en-US" sz="1200" dirty="0">
+                <a:solidFill>
+                  <a:srgbClr val="6B7280"/>
+                </a:solidFill>
+                <a:latin typeface="Calibri" pitchFamily="34" charset="0"/>
+                <a:ea typeface="Calibri" pitchFamily="34" charset="-122"/>
+                <a:cs typeface="Calibri" pitchFamily="34" charset="-120"/>
+              </a:rPr>
+              <a:t>Multi-agent orchestration</a:t>
+            </a:r>
+            <a:endParaRPr lang="en-US" sz="1200" dirty="0"/>
+          </a:p>
+        </p:txBody>
+      </p:sp>
+      <p:sp>
+        <p:nvSpPr>
+          <p:cNvPr id="20" name="Shape 18"/>
+          <p:cNvSpPr/>
+          <p:nvPr/>
+        </p:nvSpPr>
+        <p:spPr>
+          <a:xfrm>
+            <a:off x="3246120" y="3154680"/>
+            <a:ext cx="2743200" cy="1417320"/>
+          </a:xfrm>
+          <a:prstGeom prst="rect">
+            <a:avLst/>
+          </a:prstGeom>
+          <a:solidFill>
+            <a:srgbClr val="FFFFFF"/>
+          </a:solidFill>
+          <a:ln w="12700">
+            <a:solidFill>
+              <a:srgbClr val="E5E7EB"/>
+            </a:solidFill>
+            <a:prstDash val="solid"/>
+          </a:ln>
+        </p:spPr>
+        <p:txBody>
+          <a:bodyPr/>
+          <a:lstStyle/>
+          <a:p>
+            <a:endParaRPr lang="en-US"/>
+          </a:p>
+        </p:txBody>
+      </p:sp>
+      <p:sp>
+        <p:nvSpPr>
+          <p:cNvPr id="21" name="Shape 19"/>
+          <p:cNvSpPr/>
+          <p:nvPr/>
+        </p:nvSpPr>
+        <p:spPr>
+          <a:xfrm>
+            <a:off x="3246120" y="3154680"/>
+            <a:ext cx="73152" cy="1417320"/>
+          </a:xfrm>
+          <a:prstGeom prst="rect">
+            <a:avLst/>
+          </a:prstGeom>
+          <a:solidFill>
+            <a:srgbClr val="F97316"/>
+          </a:solidFill>
+          <a:ln w="12700">
+            <a:solidFill>
+              <a:srgbClr val="F97316"/>
+            </a:solidFill>
+            <a:prstDash val="solid"/>
+          </a:ln>
+        </p:spPr>
+        <p:txBody>
+          <a:bodyPr/>
+          <a:lstStyle/>
+          <a:p>
+            <a:endParaRPr lang="en-US"/>
+          </a:p>
+        </p:txBody>
+      </p:sp>
+      <p:sp>
+        <p:nvSpPr>
+          <p:cNvPr id="22" name="Text 20"/>
+          <p:cNvSpPr/>
+          <p:nvPr/>
+        </p:nvSpPr>
+        <p:spPr>
+          <a:xfrm>
+            <a:off x="3520440" y="3383280"/>
+            <a:ext cx="2286000" cy="457200"/>
+          </a:xfrm>
+          <a:prstGeom prst="rect">
+            <a:avLst/>
+          </a:prstGeom>
+          <a:noFill/>
+          <a:ln/>
+        </p:spPr>
+        <p:txBody>
+          <a:bodyPr wrap="square" lIns="0" tIns="0" rIns="0" bIns="0" rtlCol="0" anchor="ctr"/>
+          <a:lstStyle/>
+          <a:p>
+            <a:pPr marL="0" indent="0">
+              <a:buNone/>
+            </a:pPr>
+            <a:r>
+              <a:rPr lang="en-US" sz="2200" b="1" dirty="0">
+                <a:solidFill>
+                  <a:srgbClr val="1A1A2E"/>
+                </a:solidFill>
+                <a:latin typeface="Georgia" pitchFamily="34" charset="0"/>
+                <a:ea typeface="Georgia" pitchFamily="34" charset="-122"/>
+                <a:cs typeface="Georgia" pitchFamily="34" charset="-120"/>
+              </a:rPr>
+              <a:t>Gradio</a:t>
+            </a:r>
+            <a:endParaRPr lang="en-US" sz="2200" dirty="0"/>
+          </a:p>
+        </p:txBody>
+      </p:sp>
+      <p:sp>
+        <p:nvSpPr>
+          <p:cNvPr id="23" name="Text 21"/>
+          <p:cNvSpPr/>
+          <p:nvPr/>
+        </p:nvSpPr>
+        <p:spPr>
+          <a:xfrm>
+            <a:off x="3520440" y="3931920"/>
+            <a:ext cx="2286000" cy="457200"/>
+          </a:xfrm>
+          <a:prstGeom prst="rect">
+            <a:avLst/>
+          </a:prstGeom>
+          <a:noFill/>
+          <a:ln/>
+        </p:spPr>
+        <p:txBody>
+          <a:bodyPr wrap="square" lIns="0" tIns="0" rIns="0" bIns="0" rtlCol="0" anchor="ctr"/>
+          <a:lstStyle/>
+          <a:p>
+            <a:pPr marL="0" indent="0">
+              <a:buNone/>
+            </a:pPr>
+            <a:r>
+              <a:rPr lang="en-US" sz="1200" dirty="0">
+                <a:solidFill>
+                  <a:srgbClr val="6B7280"/>
+                </a:solidFill>
+                <a:latin typeface="Calibri" pitchFamily="34" charset="0"/>
+                <a:ea typeface="Calibri" pitchFamily="34" charset="-122"/>
+                <a:cs typeface="Calibri" pitchFamily="34" charset="-120"/>
+              </a:rPr>
+              <a:t>Chat UI (3 lines of code)</a:t>
+            </a:r>
+            <a:endParaRPr lang="en-US" sz="1200" dirty="0"/>
+          </a:p>
+        </p:txBody>
+      </p:sp>
+      <p:sp>
+        <p:nvSpPr>
+          <p:cNvPr id="24" name="Shape 22"/>
+          <p:cNvSpPr/>
+          <p:nvPr/>
+        </p:nvSpPr>
+        <p:spPr>
+          <a:xfrm>
+            <a:off x="6126480" y="3154680"/>
+            <a:ext cx="2743200" cy="1417320"/>
+          </a:xfrm>
+          <a:prstGeom prst="rect">
+            <a:avLst/>
+          </a:prstGeom>
+          <a:solidFill>
+            <a:srgbClr val="FFFFFF"/>
+          </a:solidFill>
+          <a:ln w="12700">
+            <a:solidFill>
+              <a:srgbClr val="E5E7EB"/>
+            </a:solidFill>
+            <a:prstDash val="solid"/>
+          </a:ln>
+        </p:spPr>
+        <p:txBody>
+          <a:bodyPr/>
+          <a:lstStyle/>
+          <a:p>
+            <a:endParaRPr lang="en-US"/>
+          </a:p>
+        </p:txBody>
+      </p:sp>
+      <p:sp>
+        <p:nvSpPr>
+          <p:cNvPr id="25" name="Shape 23"/>
+          <p:cNvSpPr/>
+          <p:nvPr/>
+        </p:nvSpPr>
+        <p:spPr>
+          <a:xfrm>
+            <a:off x="6126480" y="3154680"/>
+            <a:ext cx="73152" cy="1417320"/>
+          </a:xfrm>
+          <a:prstGeom prst="rect">
+            <a:avLst/>
+          </a:prstGeom>
+          <a:solidFill>
+            <a:srgbClr val="059669"/>
+          </a:solidFill>
+          <a:ln w="12700">
+            <a:solidFill>
+              <a:srgbClr val="059669"/>
+            </a:solidFill>
+            <a:prstDash val="solid"/>
+          </a:ln>
+        </p:spPr>
+        <p:txBody>
+          <a:bodyPr/>
+          <a:lstStyle/>
+          <a:p>
+            <a:endParaRPr lang="en-US"/>
+          </a:p>
+        </p:txBody>
+      </p:sp>
+      <p:sp>
+        <p:nvSpPr>
+          <p:cNvPr id="26" name="Text 24"/>
+          <p:cNvSpPr/>
+          <p:nvPr/>
+        </p:nvSpPr>
+        <p:spPr>
+          <a:xfrm>
+            <a:off x="6400800" y="3383280"/>
+            <a:ext cx="2286000" cy="457200"/>
+          </a:xfrm>
+          <a:prstGeom prst="rect">
+            <a:avLst/>
+          </a:prstGeom>
+          <a:noFill/>
+          <a:ln/>
+        </p:spPr>
+        <p:txBody>
+          <a:bodyPr wrap="square" lIns="0" tIns="0" rIns="0" bIns="0" rtlCol="0" anchor="ctr"/>
+          <a:lstStyle/>
+          <a:p>
+            <a:pPr marL="0" indent="0">
+              <a:buNone/>
+            </a:pPr>
+            <a:r>
+              <a:rPr lang="en-US" sz="2200" b="1" dirty="0">
+                <a:solidFill>
+                  <a:srgbClr val="1A1A2E"/>
+                </a:solidFill>
+                <a:latin typeface="Georgia" pitchFamily="34" charset="0"/>
+                <a:ea typeface="Georgia" pitchFamily="34" charset="-122"/>
+                <a:cs typeface="Georgia" pitchFamily="34" charset="-120"/>
+              </a:rPr>
+              <a:t>Ragas</a:t>
+            </a:r>
+            <a:endParaRPr lang="en-US" sz="2200" dirty="0"/>
+          </a:p>
+        </p:txBody>
+      </p:sp>
+      <p:sp>
+        <p:nvSpPr>
+          <p:cNvPr id="27" name="Text 25"/>
+          <p:cNvSpPr/>
+          <p:nvPr/>
+        </p:nvSpPr>
+        <p:spPr>
+          <a:xfrm>
+            <a:off x="6400800" y="3931920"/>
+            <a:ext cx="2286000" cy="457200"/>
+          </a:xfrm>
+          <a:prstGeom prst="rect">
+            <a:avLst/>
+          </a:prstGeom>
+          <a:noFill/>
+          <a:ln/>
+        </p:spPr>
+        <p:txBody>
+          <a:bodyPr wrap="square" lIns="0" tIns="0" rIns="0" bIns="0" rtlCol="0" anchor="ctr"/>
+          <a:lstStyle/>
+          <a:p>
+            <a:pPr marL="0" indent="0">
+              <a:buNone/>
+            </a:pPr>
+            <a:r>
+              <a:rPr lang="en-US" sz="1200" dirty="0">
+                <a:solidFill>
+                  <a:srgbClr val="6B7280"/>
+                </a:solidFill>
+                <a:latin typeface="Calibri" pitchFamily="34" charset="0"/>
+                <a:ea typeface="Calibri" pitchFamily="34" charset="-122"/>
+                <a:cs typeface="Calibri" pitchFamily="34" charset="-120"/>
+              </a:rPr>
+              <a:t>Evaluation metrics</a:t>
+            </a:r>
+            <a:endParaRPr lang="en-US" sz="1200" dirty="0"/>
+          </a:p>
+        </p:txBody>
+      </p:sp>
+      <p:sp>
+        <p:nvSpPr>
+          <p:cNvPr id="28" name="Text 26"/>
+          <p:cNvSpPr/>
+          <p:nvPr/>
+        </p:nvSpPr>
+        <p:spPr>
+          <a:xfrm>
+            <a:off x="365760" y="4846320"/>
+            <a:ext cx="8412480" cy="228600"/>
+          </a:xfrm>
+          <a:prstGeom prst="rect">
+            <a:avLst/>
+          </a:prstGeom>
+          <a:noFill/>
+          <a:ln/>
+        </p:spPr>
+        <p:txBody>
+          <a:bodyPr wrap="square" lIns="0" tIns="0" rIns="0" bIns="0" rtlCol="0" anchor="ctr"/>
+          <a:lstStyle/>
+          <a:p>
+            <a:pPr marL="0" indent="0" algn="l">
+              <a:buNone/>
+            </a:pPr>
+            <a:r>
+              <a:rPr lang="en-US" sz="900" i="1" dirty="0">
+                <a:solidFill>
+                  <a:srgbClr val="6B7280"/>
+                </a:solidFill>
+                <a:latin typeface="Calibri" pitchFamily="34" charset="0"/>
+                <a:ea typeface="Calibri" pitchFamily="34" charset="-122"/>
+                <a:cs typeface="Calibri" pitchFamily="34" charset="-120"/>
+              </a:rPr>
+              <a:t>Everything open-source. Everything runs on a free Colab tier.</a:t>
+            </a:r>
+            <a:endParaRPr lang="en-US" sz="900" dirty="0"/>
+          </a:p>
+        </p:txBody>
+      </p:sp>
+    </p:spTree>
+  </p:cSld>
+  <p:clrMapOvr>
+    <a:masterClrMapping/>
+  </p:clrMapOvr>
+</p:sld>
+</file>
+
+<file path=ppt/slides/slide11.xml><?xml version="1.0" encoding="utf-8"?>
+<p:sld xmlns:a="http://schemas.openxmlformats.org/drawingml/2006/main" xmlns:r="http://schemas.openxmlformats.org/officeDocument/2006/relationships" xmlns:p="http://schemas.openxmlformats.org/presentationml/2006/main">
   <p:cSld name="Slide 10">
     <p:bg>
       <p:bgPr>
@@ -4816,7 +5832,7 @@
                 <a:ea typeface="Calibri" pitchFamily="34" charset="-122"/>
                 <a:cs typeface="Calibri" pitchFamily="34" charset="-120"/>
               </a:rPr>
-              <a:t>10</a:t>
+              <a:t>11</a:t>
             </a:r>
             <a:r>
               <a:rPr lang="en-US" sz="1000" kern="0" spc="200" dirty="0">
@@ -4827,7 +5843,7 @@
                 <a:ea typeface="Calibri" pitchFamily="34" charset="-122"/>
                 <a:cs typeface="Calibri" pitchFamily="34" charset="-120"/>
               </a:rPr>
-              <a:t> / 12</a:t>
+              <a:t> / 15</a:t>
             </a:r>
             <a:endParaRPr lang="en-US" sz="1000" dirty="0"/>
           </a:p>
@@ -5574,7 +6590,2109 @@
 </p:sld>
 </file>
 
-<file path=ppt/slides/slide11.xml><?xml version="1.0" encoding="utf-8"?>
+<file path=ppt/slides/slide12.xml><?xml version="1.0" encoding="utf-8"?>
+<p:sld xmlns:a="http://schemas.openxmlformats.org/drawingml/2006/main" xmlns:r="http://schemas.openxmlformats.org/officeDocument/2006/relationships" xmlns:p="http://schemas.openxmlformats.org/presentationml/2006/main">
+  <p:cSld>
+    <p:spTree>
+      <p:nvGrpSpPr>
+        <p:cNvPr id="1" name=""/>
+        <p:cNvGrpSpPr/>
+        <p:nvPr/>
+      </p:nvGrpSpPr>
+      <p:grpSpPr>
+        <a:xfrm>
+          <a:off x="0" y="0"/>
+          <a:ext cx="0" cy="0"/>
+          <a:chOff x="0" y="0"/>
+          <a:chExt cx="0" cy="0"/>
+        </a:xfrm>
+      </p:grpSpPr>
+      <p:sp>
+        <p:nvSpPr>
+          <p:cNvPr id="2" name="TextBox 1"/>
+          <p:cNvSpPr txBox="1"/>
+          <p:nvPr/>
+        </p:nvSpPr>
+        <p:spPr>
+          <a:xfrm>
+            <a:off x="365760" y="228600"/>
+            <a:ext cx="1371600" cy="274320"/>
+          </a:xfrm>
+          <a:prstGeom prst="rect">
+            <a:avLst/>
+          </a:prstGeom>
+          <a:noFill/>
+        </p:spPr>
+        <p:txBody>
+          <a:bodyPr wrap="none" lIns="0" tIns="0">
+            <a:spAutoFit/>
+          </a:bodyPr>
+          <a:lstStyle/>
+          <a:p>
+            <a:r>
+              <a:rPr sz="1000" b="1">
+                <a:solidFill>
+                  <a:srgbClr val="C9184A"/>
+                </a:solidFill>
+                <a:latin typeface="Calibri"/>
+              </a:rPr>
+              <a:t>12</a:t>
+            </a:r>
+            <a:r>
+              <a:rPr sz="1000">
+                <a:solidFill>
+                  <a:srgbClr val="6B7280"/>
+                </a:solidFill>
+                <a:latin typeface="Calibri"/>
+              </a:rPr>
+              <a:t> / 15</a:t>
+            </a:r>
+          </a:p>
+        </p:txBody>
+      </p:sp>
+      <p:sp>
+        <p:nvSpPr>
+          <p:cNvPr id="3" name="TextBox 2"/>
+          <p:cNvSpPr txBox="1"/>
+          <p:nvPr/>
+        </p:nvSpPr>
+        <p:spPr>
+          <a:xfrm>
+            <a:off x="365760" y="502920"/>
+            <a:ext cx="8412480" cy="822960"/>
+          </a:xfrm>
+          <a:prstGeom prst="rect">
+            <a:avLst/>
+          </a:prstGeom>
+          <a:noFill/>
+        </p:spPr>
+        <p:txBody>
+          <a:bodyPr wrap="square" lIns="0" tIns="0" rIns="0" bIns="0">
+            <a:spAutoFit/>
+          </a:bodyPr>
+          <a:lstStyle/>
+          <a:p>
+            <a:r>
+              <a:rPr sz="3200" b="1" i="0">
+                <a:solidFill>
+                  <a:srgbClr val="1A1A2E"/>
+                </a:solidFill>
+                <a:latin typeface="Georgia"/>
+              </a:rPr>
+              <a:t>When RAG isn't the answer</a:t>
+            </a:r>
+          </a:p>
+        </p:txBody>
+      </p:sp>
+      <p:sp>
+        <p:nvSpPr>
+          <p:cNvPr id="4" name="TextBox 3"/>
+          <p:cNvSpPr txBox="1"/>
+          <p:nvPr/>
+        </p:nvSpPr>
+        <p:spPr>
+          <a:xfrm>
+            <a:off x="365760" y="1417320"/>
+            <a:ext cx="5486400" cy="274320"/>
+          </a:xfrm>
+          <a:prstGeom prst="rect">
+            <a:avLst/>
+          </a:prstGeom>
+          <a:noFill/>
+        </p:spPr>
+        <p:txBody>
+          <a:bodyPr wrap="square" lIns="0" tIns="0" rIns="0" bIns="0">
+            <a:spAutoFit/>
+          </a:bodyPr>
+          <a:lstStyle/>
+          <a:p>
+            <a:r>
+              <a:rPr sz="1000" b="1" i="0">
+                <a:solidFill>
+                  <a:srgbClr val="C9184A"/>
+                </a:solidFill>
+                <a:latin typeface="Calibri"/>
+              </a:rPr>
+              <a:t>KNOW THE LIMITS</a:t>
+            </a:r>
+          </a:p>
+        </p:txBody>
+      </p:sp>
+      <p:sp>
+        <p:nvSpPr>
+          <p:cNvPr id="5" name="Rounded Rectangle 4"/>
+          <p:cNvSpPr/>
+          <p:nvPr/>
+        </p:nvSpPr>
+        <p:spPr>
+          <a:xfrm>
+            <a:off x="365760" y="1783080"/>
+            <a:ext cx="2011680" cy="1051560"/>
+          </a:xfrm>
+          <a:prstGeom prst="roundRect">
+            <a:avLst>
+              <a:gd name="adj" fmla="val 8000"/>
+            </a:avLst>
+          </a:prstGeom>
+          <a:solidFill>
+            <a:srgbClr val="F8F9FB"/>
+          </a:solidFill>
+          <a:ln>
+            <a:noFill/>
+          </a:ln>
+        </p:spPr>
+        <p:style>
+          <a:lnRef idx="1">
+            <a:schemeClr val="accent1"/>
+          </a:lnRef>
+          <a:fillRef idx="3">
+            <a:schemeClr val="accent1"/>
+          </a:fillRef>
+          <a:effectRef idx="2">
+            <a:schemeClr val="accent1"/>
+          </a:effectRef>
+          <a:fontRef idx="minor">
+            <a:schemeClr val="lt1"/>
+          </a:fontRef>
+        </p:style>
+        <p:txBody>
+          <a:bodyPr rtlCol="0" anchor="ctr"/>
+          <a:lstStyle/>
+          <a:p>
+            <a:pPr algn="ctr"/>
+            <a:endParaRPr/>
+          </a:p>
+        </p:txBody>
+      </p:sp>
+      <p:sp>
+        <p:nvSpPr>
+          <p:cNvPr id="6" name="TextBox 5"/>
+          <p:cNvSpPr txBox="1"/>
+          <p:nvPr/>
+        </p:nvSpPr>
+        <p:spPr>
+          <a:xfrm>
+            <a:off x="502920" y="1874519"/>
+            <a:ext cx="1737360" cy="320040"/>
+          </a:xfrm>
+          <a:prstGeom prst="rect">
+            <a:avLst/>
+          </a:prstGeom>
+          <a:noFill/>
+        </p:spPr>
+        <p:txBody>
+          <a:bodyPr wrap="square" lIns="0" tIns="0" rIns="0" bIns="0">
+            <a:spAutoFit/>
+          </a:bodyPr>
+          <a:lstStyle/>
+          <a:p>
+            <a:r>
+              <a:rPr sz="1300" b="1" i="0">
+                <a:solidFill>
+                  <a:srgbClr val="C9184A"/>
+                </a:solidFill>
+                <a:latin typeface="Calibri"/>
+              </a:rPr>
+              <a:t>Multi-hop reasoning</a:t>
+            </a:r>
+          </a:p>
+        </p:txBody>
+      </p:sp>
+      <p:sp>
+        <p:nvSpPr>
+          <p:cNvPr id="7" name="TextBox 6"/>
+          <p:cNvSpPr txBox="1"/>
+          <p:nvPr/>
+        </p:nvSpPr>
+        <p:spPr>
+          <a:xfrm>
+            <a:off x="502920" y="2194560"/>
+            <a:ext cx="1737360" cy="646331"/>
+          </a:xfrm>
+          <a:prstGeom prst="rect">
+            <a:avLst/>
+          </a:prstGeom>
+          <a:noFill/>
+        </p:spPr>
+        <p:txBody>
+          <a:bodyPr wrap="square" lIns="0" tIns="0" rIns="0" bIns="0">
+            <a:spAutoFit/>
+          </a:bodyPr>
+          <a:lstStyle/>
+          <a:p>
+            <a:r>
+              <a:rPr sz="1050" b="0" i="0" dirty="0">
+                <a:solidFill>
+                  <a:srgbClr val="6B7280"/>
+                </a:solidFill>
+                <a:latin typeface="Calibri"/>
+              </a:rPr>
+              <a:t>Questions that require chaining facts across many chunks. Top-K retrieval returns documents, not reasoning.</a:t>
+            </a:r>
+          </a:p>
+        </p:txBody>
+      </p:sp>
+      <p:sp>
+        <p:nvSpPr>
+          <p:cNvPr id="8" name="Rounded Rectangle 7"/>
+          <p:cNvSpPr/>
+          <p:nvPr/>
+        </p:nvSpPr>
+        <p:spPr>
+          <a:xfrm>
+            <a:off x="2560320" y="1783080"/>
+            <a:ext cx="2011680" cy="1051560"/>
+          </a:xfrm>
+          <a:prstGeom prst="roundRect">
+            <a:avLst>
+              <a:gd name="adj" fmla="val 8000"/>
+            </a:avLst>
+          </a:prstGeom>
+          <a:solidFill>
+            <a:srgbClr val="F8F9FB"/>
+          </a:solidFill>
+          <a:ln>
+            <a:noFill/>
+          </a:ln>
+        </p:spPr>
+        <p:style>
+          <a:lnRef idx="1">
+            <a:schemeClr val="accent1"/>
+          </a:lnRef>
+          <a:fillRef idx="3">
+            <a:schemeClr val="accent1"/>
+          </a:fillRef>
+          <a:effectRef idx="2">
+            <a:schemeClr val="accent1"/>
+          </a:effectRef>
+          <a:fontRef idx="minor">
+            <a:schemeClr val="lt1"/>
+          </a:fontRef>
+        </p:style>
+        <p:txBody>
+          <a:bodyPr rtlCol="0" anchor="ctr"/>
+          <a:lstStyle/>
+          <a:p>
+            <a:pPr algn="ctr"/>
+            <a:endParaRPr/>
+          </a:p>
+        </p:txBody>
+      </p:sp>
+      <p:sp>
+        <p:nvSpPr>
+          <p:cNvPr id="9" name="TextBox 8"/>
+          <p:cNvSpPr txBox="1"/>
+          <p:nvPr/>
+        </p:nvSpPr>
+        <p:spPr>
+          <a:xfrm>
+            <a:off x="2697480" y="1874519"/>
+            <a:ext cx="1737360" cy="320040"/>
+          </a:xfrm>
+          <a:prstGeom prst="rect">
+            <a:avLst/>
+          </a:prstGeom>
+          <a:noFill/>
+        </p:spPr>
+        <p:txBody>
+          <a:bodyPr wrap="square" lIns="0" tIns="0" rIns="0" bIns="0">
+            <a:spAutoFit/>
+          </a:bodyPr>
+          <a:lstStyle/>
+          <a:p>
+            <a:r>
+              <a:rPr sz="1300" b="1" i="0">
+                <a:solidFill>
+                  <a:srgbClr val="C9184A"/>
+                </a:solidFill>
+                <a:latin typeface="Calibri"/>
+              </a:rPr>
+              <a:t>Aggregation &amp; counting</a:t>
+            </a:r>
+          </a:p>
+        </p:txBody>
+      </p:sp>
+      <p:sp>
+        <p:nvSpPr>
+          <p:cNvPr id="10" name="TextBox 9"/>
+          <p:cNvSpPr txBox="1"/>
+          <p:nvPr/>
+        </p:nvSpPr>
+        <p:spPr>
+          <a:xfrm>
+            <a:off x="2697480" y="2194560"/>
+            <a:ext cx="1737360" cy="484748"/>
+          </a:xfrm>
+          <a:prstGeom prst="rect">
+            <a:avLst/>
+          </a:prstGeom>
+          <a:noFill/>
+        </p:spPr>
+        <p:txBody>
+          <a:bodyPr wrap="square" lIns="0" tIns="0" rIns="0" bIns="0">
+            <a:spAutoFit/>
+          </a:bodyPr>
+          <a:lstStyle/>
+          <a:p>
+            <a:r>
+              <a:rPr sz="1050" b="0" i="0" dirty="0">
+                <a:solidFill>
+                  <a:srgbClr val="6B7280"/>
+                </a:solidFill>
+                <a:latin typeface="Calibri"/>
+              </a:rPr>
+              <a:t>"How many chapters mention X?" That's a database query, not a similarity search.</a:t>
+            </a:r>
+          </a:p>
+        </p:txBody>
+      </p:sp>
+      <p:sp>
+        <p:nvSpPr>
+          <p:cNvPr id="11" name="Rounded Rectangle 10"/>
+          <p:cNvSpPr/>
+          <p:nvPr/>
+        </p:nvSpPr>
+        <p:spPr>
+          <a:xfrm>
+            <a:off x="365760" y="2971800"/>
+            <a:ext cx="2011680" cy="1051560"/>
+          </a:xfrm>
+          <a:prstGeom prst="roundRect">
+            <a:avLst>
+              <a:gd name="adj" fmla="val 8000"/>
+            </a:avLst>
+          </a:prstGeom>
+          <a:solidFill>
+            <a:srgbClr val="F8F9FB"/>
+          </a:solidFill>
+          <a:ln>
+            <a:noFill/>
+          </a:ln>
+        </p:spPr>
+        <p:style>
+          <a:lnRef idx="1">
+            <a:schemeClr val="accent1"/>
+          </a:lnRef>
+          <a:fillRef idx="3">
+            <a:schemeClr val="accent1"/>
+          </a:fillRef>
+          <a:effectRef idx="2">
+            <a:schemeClr val="accent1"/>
+          </a:effectRef>
+          <a:fontRef idx="minor">
+            <a:schemeClr val="lt1"/>
+          </a:fontRef>
+        </p:style>
+        <p:txBody>
+          <a:bodyPr rtlCol="0" anchor="ctr"/>
+          <a:lstStyle/>
+          <a:p>
+            <a:pPr algn="ctr"/>
+            <a:endParaRPr/>
+          </a:p>
+        </p:txBody>
+      </p:sp>
+      <p:sp>
+        <p:nvSpPr>
+          <p:cNvPr id="12" name="TextBox 11"/>
+          <p:cNvSpPr txBox="1"/>
+          <p:nvPr/>
+        </p:nvSpPr>
+        <p:spPr>
+          <a:xfrm>
+            <a:off x="502920" y="3063240"/>
+            <a:ext cx="1737360" cy="320040"/>
+          </a:xfrm>
+          <a:prstGeom prst="rect">
+            <a:avLst/>
+          </a:prstGeom>
+          <a:noFill/>
+        </p:spPr>
+        <p:txBody>
+          <a:bodyPr wrap="square" lIns="0" tIns="0" rIns="0" bIns="0">
+            <a:spAutoFit/>
+          </a:bodyPr>
+          <a:lstStyle/>
+          <a:p>
+            <a:r>
+              <a:rPr sz="1300" b="1" i="0">
+                <a:solidFill>
+                  <a:srgbClr val="C9184A"/>
+                </a:solidFill>
+                <a:latin typeface="Calibri"/>
+              </a:rPr>
+              <a:t>Fresh news</a:t>
+            </a:r>
+          </a:p>
+        </p:txBody>
+      </p:sp>
+      <p:sp>
+        <p:nvSpPr>
+          <p:cNvPr id="13" name="TextBox 12"/>
+          <p:cNvSpPr txBox="1"/>
+          <p:nvPr/>
+        </p:nvSpPr>
+        <p:spPr>
+          <a:xfrm>
+            <a:off x="502920" y="3383280"/>
+            <a:ext cx="1737360" cy="646331"/>
+          </a:xfrm>
+          <a:prstGeom prst="rect">
+            <a:avLst/>
+          </a:prstGeom>
+          <a:noFill/>
+        </p:spPr>
+        <p:txBody>
+          <a:bodyPr wrap="square" lIns="0" tIns="0" rIns="0" bIns="0">
+            <a:spAutoFit/>
+          </a:bodyPr>
+          <a:lstStyle/>
+          <a:p>
+            <a:r>
+              <a:rPr sz="1050" b="0" i="0" dirty="0">
+                <a:solidFill>
+                  <a:srgbClr val="6B7280"/>
+                </a:solidFill>
+                <a:latin typeface="Calibri"/>
+              </a:rPr>
+              <a:t>Your index is only as fresh as your last re-index. No amount of retrieval invents tomorrow's headlines.</a:t>
+            </a:r>
+          </a:p>
+        </p:txBody>
+      </p:sp>
+      <p:sp>
+        <p:nvSpPr>
+          <p:cNvPr id="14" name="Rounded Rectangle 13"/>
+          <p:cNvSpPr/>
+          <p:nvPr/>
+        </p:nvSpPr>
+        <p:spPr>
+          <a:xfrm>
+            <a:off x="2560320" y="2971800"/>
+            <a:ext cx="2011680" cy="1051560"/>
+          </a:xfrm>
+          <a:prstGeom prst="roundRect">
+            <a:avLst>
+              <a:gd name="adj" fmla="val 8000"/>
+            </a:avLst>
+          </a:prstGeom>
+          <a:solidFill>
+            <a:srgbClr val="F8F9FB"/>
+          </a:solidFill>
+          <a:ln>
+            <a:noFill/>
+          </a:ln>
+        </p:spPr>
+        <p:style>
+          <a:lnRef idx="1">
+            <a:schemeClr val="accent1"/>
+          </a:lnRef>
+          <a:fillRef idx="3">
+            <a:schemeClr val="accent1"/>
+          </a:fillRef>
+          <a:effectRef idx="2">
+            <a:schemeClr val="accent1"/>
+          </a:effectRef>
+          <a:fontRef idx="minor">
+            <a:schemeClr val="lt1"/>
+          </a:fontRef>
+        </p:style>
+        <p:txBody>
+          <a:bodyPr rtlCol="0" anchor="ctr"/>
+          <a:lstStyle/>
+          <a:p>
+            <a:pPr algn="ctr"/>
+            <a:endParaRPr/>
+          </a:p>
+        </p:txBody>
+      </p:sp>
+      <p:sp>
+        <p:nvSpPr>
+          <p:cNvPr id="15" name="TextBox 14"/>
+          <p:cNvSpPr txBox="1"/>
+          <p:nvPr/>
+        </p:nvSpPr>
+        <p:spPr>
+          <a:xfrm>
+            <a:off x="2697480" y="3063240"/>
+            <a:ext cx="1737360" cy="320040"/>
+          </a:xfrm>
+          <a:prstGeom prst="rect">
+            <a:avLst/>
+          </a:prstGeom>
+          <a:noFill/>
+        </p:spPr>
+        <p:txBody>
+          <a:bodyPr wrap="square" lIns="0" tIns="0" rIns="0" bIns="0">
+            <a:spAutoFit/>
+          </a:bodyPr>
+          <a:lstStyle/>
+          <a:p>
+            <a:r>
+              <a:rPr sz="1300" b="1" i="0">
+                <a:solidFill>
+                  <a:srgbClr val="C9184A"/>
+                </a:solidFill>
+                <a:latin typeface="Calibri"/>
+              </a:rPr>
+              <a:t>Tiny corpora</a:t>
+            </a:r>
+          </a:p>
+        </p:txBody>
+      </p:sp>
+      <p:sp>
+        <p:nvSpPr>
+          <p:cNvPr id="16" name="TextBox 15"/>
+          <p:cNvSpPr txBox="1"/>
+          <p:nvPr/>
+        </p:nvSpPr>
+        <p:spPr>
+          <a:xfrm>
+            <a:off x="2697480" y="3383280"/>
+            <a:ext cx="1737360" cy="484748"/>
+          </a:xfrm>
+          <a:prstGeom prst="rect">
+            <a:avLst/>
+          </a:prstGeom>
+          <a:noFill/>
+        </p:spPr>
+        <p:txBody>
+          <a:bodyPr wrap="square" lIns="0" tIns="0" rIns="0" bIns="0">
+            <a:spAutoFit/>
+          </a:bodyPr>
+          <a:lstStyle/>
+          <a:p>
+            <a:r>
+              <a:rPr sz="1050" b="0" i="0" dirty="0">
+                <a:solidFill>
+                  <a:srgbClr val="6B7280"/>
+                </a:solidFill>
+                <a:latin typeface="Calibri"/>
+              </a:rPr>
+              <a:t>If all your docs fit in the prompt, just stuff them in. RAG adds overhead with no benefit.</a:t>
+            </a:r>
+          </a:p>
+        </p:txBody>
+      </p:sp>
+      <p:sp>
+        <p:nvSpPr>
+          <p:cNvPr id="17" name="Rectangle 16"/>
+          <p:cNvSpPr/>
+          <p:nvPr/>
+        </p:nvSpPr>
+        <p:spPr>
+          <a:xfrm>
+            <a:off x="4846320" y="1600200"/>
+            <a:ext cx="9144" cy="2926080"/>
+          </a:xfrm>
+          <a:prstGeom prst="rect">
+            <a:avLst/>
+          </a:prstGeom>
+          <a:solidFill>
+            <a:srgbClr val="E5E7EB"/>
+          </a:solidFill>
+          <a:ln>
+            <a:noFill/>
+          </a:ln>
+        </p:spPr>
+        <p:style>
+          <a:lnRef idx="1">
+            <a:schemeClr val="accent1"/>
+          </a:lnRef>
+          <a:fillRef idx="3">
+            <a:schemeClr val="accent1"/>
+          </a:fillRef>
+          <a:effectRef idx="2">
+            <a:schemeClr val="accent1"/>
+          </a:effectRef>
+          <a:fontRef idx="minor">
+            <a:schemeClr val="lt1"/>
+          </a:fontRef>
+        </p:style>
+        <p:txBody>
+          <a:bodyPr rtlCol="0" anchor="ctr"/>
+          <a:lstStyle/>
+          <a:p>
+            <a:pPr algn="ctr"/>
+            <a:endParaRPr/>
+          </a:p>
+        </p:txBody>
+      </p:sp>
+      <p:sp>
+        <p:nvSpPr>
+          <p:cNvPr id="18" name="TextBox 17"/>
+          <p:cNvSpPr txBox="1"/>
+          <p:nvPr/>
+        </p:nvSpPr>
+        <p:spPr>
+          <a:xfrm>
+            <a:off x="5029200" y="1600200"/>
+            <a:ext cx="3840480" cy="274320"/>
+          </a:xfrm>
+          <a:prstGeom prst="rect">
+            <a:avLst/>
+          </a:prstGeom>
+          <a:noFill/>
+        </p:spPr>
+        <p:txBody>
+          <a:bodyPr wrap="square" lIns="0" tIns="0" rIns="0" bIns="0">
+            <a:spAutoFit/>
+          </a:bodyPr>
+          <a:lstStyle/>
+          <a:p>
+            <a:r>
+              <a:rPr sz="1000" b="1" i="0">
+                <a:solidFill>
+                  <a:srgbClr val="C9184A"/>
+                </a:solidFill>
+                <a:latin typeface="Calibri"/>
+              </a:rPr>
+              <a:t>REACH FOR INSTEAD</a:t>
+            </a:r>
+          </a:p>
+        </p:txBody>
+      </p:sp>
+      <p:sp>
+        <p:nvSpPr>
+          <p:cNvPr id="19" name="TextBox 18"/>
+          <p:cNvSpPr txBox="1"/>
+          <p:nvPr/>
+        </p:nvSpPr>
+        <p:spPr>
+          <a:xfrm>
+            <a:off x="5029200" y="2011680"/>
+            <a:ext cx="1188720" cy="320040"/>
+          </a:xfrm>
+          <a:prstGeom prst="rect">
+            <a:avLst/>
+          </a:prstGeom>
+          <a:noFill/>
+        </p:spPr>
+        <p:txBody>
+          <a:bodyPr wrap="square" lIns="0" tIns="0" rIns="0" bIns="0">
+            <a:spAutoFit/>
+          </a:bodyPr>
+          <a:lstStyle/>
+          <a:p>
+            <a:r>
+              <a:rPr sz="1200" b="1" i="0">
+                <a:solidFill>
+                  <a:srgbClr val="1A1A2E"/>
+                </a:solidFill>
+                <a:latin typeface="Calibri"/>
+              </a:rPr>
+              <a:t>Multi-hop</a:t>
+            </a:r>
+          </a:p>
+        </p:txBody>
+      </p:sp>
+      <p:sp>
+        <p:nvSpPr>
+          <p:cNvPr id="20" name="TextBox 19"/>
+          <p:cNvSpPr txBox="1"/>
+          <p:nvPr/>
+        </p:nvSpPr>
+        <p:spPr>
+          <a:xfrm>
+            <a:off x="6217920" y="2011680"/>
+            <a:ext cx="2651760" cy="320040"/>
+          </a:xfrm>
+          <a:prstGeom prst="rect">
+            <a:avLst/>
+          </a:prstGeom>
+          <a:noFill/>
+        </p:spPr>
+        <p:txBody>
+          <a:bodyPr wrap="square" lIns="0" tIns="0" rIns="0" bIns="0">
+            <a:spAutoFit/>
+          </a:bodyPr>
+          <a:lstStyle/>
+          <a:p>
+            <a:r>
+              <a:rPr sz="1200" b="0" i="0">
+                <a:solidFill>
+                  <a:srgbClr val="6B7280"/>
+                </a:solidFill>
+                <a:latin typeface="Calibri"/>
+              </a:rPr>
+              <a:t>→ Query decomposition or agentic planners</a:t>
+            </a:r>
+          </a:p>
+        </p:txBody>
+      </p:sp>
+      <p:sp>
+        <p:nvSpPr>
+          <p:cNvPr id="21" name="TextBox 20"/>
+          <p:cNvSpPr txBox="1"/>
+          <p:nvPr/>
+        </p:nvSpPr>
+        <p:spPr>
+          <a:xfrm>
+            <a:off x="5029200" y="2423160"/>
+            <a:ext cx="1188720" cy="320040"/>
+          </a:xfrm>
+          <a:prstGeom prst="rect">
+            <a:avLst/>
+          </a:prstGeom>
+          <a:noFill/>
+        </p:spPr>
+        <p:txBody>
+          <a:bodyPr wrap="square" lIns="0" tIns="0" rIns="0" bIns="0">
+            <a:spAutoFit/>
+          </a:bodyPr>
+          <a:lstStyle/>
+          <a:p>
+            <a:r>
+              <a:rPr sz="1200" b="1" i="0">
+                <a:solidFill>
+                  <a:srgbClr val="1A1A2E"/>
+                </a:solidFill>
+                <a:latin typeface="Calibri"/>
+              </a:rPr>
+              <a:t>Aggregation</a:t>
+            </a:r>
+          </a:p>
+        </p:txBody>
+      </p:sp>
+      <p:sp>
+        <p:nvSpPr>
+          <p:cNvPr id="22" name="TextBox 21"/>
+          <p:cNvSpPr txBox="1"/>
+          <p:nvPr/>
+        </p:nvSpPr>
+        <p:spPr>
+          <a:xfrm>
+            <a:off x="6217920" y="2423160"/>
+            <a:ext cx="2651760" cy="320040"/>
+          </a:xfrm>
+          <a:prstGeom prst="rect">
+            <a:avLst/>
+          </a:prstGeom>
+          <a:noFill/>
+        </p:spPr>
+        <p:txBody>
+          <a:bodyPr wrap="square" lIns="0" tIns="0" rIns="0" bIns="0">
+            <a:spAutoFit/>
+          </a:bodyPr>
+          <a:lstStyle/>
+          <a:p>
+            <a:r>
+              <a:rPr sz="1200" b="0" i="0">
+                <a:solidFill>
+                  <a:srgbClr val="6B7280"/>
+                </a:solidFill>
+                <a:latin typeface="Calibri"/>
+              </a:rPr>
+              <a:t>→ Text-to-SQL or code interpreters</a:t>
+            </a:r>
+          </a:p>
+        </p:txBody>
+      </p:sp>
+      <p:sp>
+        <p:nvSpPr>
+          <p:cNvPr id="23" name="TextBox 22"/>
+          <p:cNvSpPr txBox="1"/>
+          <p:nvPr/>
+        </p:nvSpPr>
+        <p:spPr>
+          <a:xfrm>
+            <a:off x="5029200" y="2834640"/>
+            <a:ext cx="1188720" cy="320040"/>
+          </a:xfrm>
+          <a:prstGeom prst="rect">
+            <a:avLst/>
+          </a:prstGeom>
+          <a:noFill/>
+        </p:spPr>
+        <p:txBody>
+          <a:bodyPr wrap="square" lIns="0" tIns="0" rIns="0" bIns="0">
+            <a:spAutoFit/>
+          </a:bodyPr>
+          <a:lstStyle/>
+          <a:p>
+            <a:r>
+              <a:rPr sz="1200" b="1" i="0">
+                <a:solidFill>
+                  <a:srgbClr val="1A1A2E"/>
+                </a:solidFill>
+                <a:latin typeface="Calibri"/>
+              </a:rPr>
+              <a:t>Fresh news</a:t>
+            </a:r>
+          </a:p>
+        </p:txBody>
+      </p:sp>
+      <p:sp>
+        <p:nvSpPr>
+          <p:cNvPr id="24" name="TextBox 23"/>
+          <p:cNvSpPr txBox="1"/>
+          <p:nvPr/>
+        </p:nvSpPr>
+        <p:spPr>
+          <a:xfrm>
+            <a:off x="6217920" y="2834640"/>
+            <a:ext cx="2651760" cy="320040"/>
+          </a:xfrm>
+          <a:prstGeom prst="rect">
+            <a:avLst/>
+          </a:prstGeom>
+          <a:noFill/>
+        </p:spPr>
+        <p:txBody>
+          <a:bodyPr wrap="square" lIns="0" tIns="0" rIns="0" bIns="0">
+            <a:spAutoFit/>
+          </a:bodyPr>
+          <a:lstStyle/>
+          <a:p>
+            <a:r>
+              <a:rPr sz="1200" b="0" i="0">
+                <a:solidFill>
+                  <a:srgbClr val="6B7280"/>
+                </a:solidFill>
+                <a:latin typeface="Calibri"/>
+              </a:rPr>
+              <a:t>→ Web search tools + frequent re-indexing</a:t>
+            </a:r>
+          </a:p>
+        </p:txBody>
+      </p:sp>
+      <p:sp>
+        <p:nvSpPr>
+          <p:cNvPr id="25" name="TextBox 24"/>
+          <p:cNvSpPr txBox="1"/>
+          <p:nvPr/>
+        </p:nvSpPr>
+        <p:spPr>
+          <a:xfrm>
+            <a:off x="5029200" y="3246120"/>
+            <a:ext cx="1188720" cy="320040"/>
+          </a:xfrm>
+          <a:prstGeom prst="rect">
+            <a:avLst/>
+          </a:prstGeom>
+          <a:noFill/>
+        </p:spPr>
+        <p:txBody>
+          <a:bodyPr wrap="square" lIns="0" tIns="0" rIns="0" bIns="0">
+            <a:spAutoFit/>
+          </a:bodyPr>
+          <a:lstStyle/>
+          <a:p>
+            <a:r>
+              <a:rPr sz="1200" b="1" i="0">
+                <a:solidFill>
+                  <a:srgbClr val="1A1A2E"/>
+                </a:solidFill>
+                <a:latin typeface="Calibri"/>
+              </a:rPr>
+              <a:t>Tiny corpora</a:t>
+            </a:r>
+          </a:p>
+        </p:txBody>
+      </p:sp>
+      <p:sp>
+        <p:nvSpPr>
+          <p:cNvPr id="26" name="TextBox 25"/>
+          <p:cNvSpPr txBox="1"/>
+          <p:nvPr/>
+        </p:nvSpPr>
+        <p:spPr>
+          <a:xfrm>
+            <a:off x="6217920" y="3246120"/>
+            <a:ext cx="2651760" cy="320040"/>
+          </a:xfrm>
+          <a:prstGeom prst="rect">
+            <a:avLst/>
+          </a:prstGeom>
+          <a:noFill/>
+        </p:spPr>
+        <p:txBody>
+          <a:bodyPr wrap="square" lIns="0" tIns="0" rIns="0" bIns="0">
+            <a:spAutoFit/>
+          </a:bodyPr>
+          <a:lstStyle/>
+          <a:p>
+            <a:r>
+              <a:rPr sz="1200" b="0" i="0">
+                <a:solidFill>
+                  <a:srgbClr val="6B7280"/>
+                </a:solidFill>
+                <a:latin typeface="Calibri"/>
+              </a:rPr>
+              <a:t>→ Just use a long-context prompt</a:t>
+            </a:r>
+          </a:p>
+        </p:txBody>
+      </p:sp>
+      <p:sp>
+        <p:nvSpPr>
+          <p:cNvPr id="27" name="TextBox 26"/>
+          <p:cNvSpPr txBox="1"/>
+          <p:nvPr/>
+        </p:nvSpPr>
+        <p:spPr>
+          <a:xfrm>
+            <a:off x="5029200" y="3657600"/>
+            <a:ext cx="1188720" cy="320040"/>
+          </a:xfrm>
+          <a:prstGeom prst="rect">
+            <a:avLst/>
+          </a:prstGeom>
+          <a:noFill/>
+        </p:spPr>
+        <p:txBody>
+          <a:bodyPr wrap="square" lIns="0" tIns="0" rIns="0" bIns="0">
+            <a:spAutoFit/>
+          </a:bodyPr>
+          <a:lstStyle/>
+          <a:p>
+            <a:r>
+              <a:rPr sz="1200" b="1" i="0">
+                <a:solidFill>
+                  <a:srgbClr val="1A1A2E"/>
+                </a:solidFill>
+                <a:latin typeface="Calibri"/>
+              </a:rPr>
+              <a:t>Exact recall</a:t>
+            </a:r>
+          </a:p>
+        </p:txBody>
+      </p:sp>
+      <p:sp>
+        <p:nvSpPr>
+          <p:cNvPr id="28" name="TextBox 27"/>
+          <p:cNvSpPr txBox="1"/>
+          <p:nvPr/>
+        </p:nvSpPr>
+        <p:spPr>
+          <a:xfrm>
+            <a:off x="6217920" y="3657600"/>
+            <a:ext cx="2651760" cy="320040"/>
+          </a:xfrm>
+          <a:prstGeom prst="rect">
+            <a:avLst/>
+          </a:prstGeom>
+          <a:noFill/>
+        </p:spPr>
+        <p:txBody>
+          <a:bodyPr wrap="square" lIns="0" tIns="0" rIns="0" bIns="0">
+            <a:spAutoFit/>
+          </a:bodyPr>
+          <a:lstStyle/>
+          <a:p>
+            <a:r>
+              <a:rPr sz="1200" b="0" i="0">
+                <a:solidFill>
+                  <a:srgbClr val="6B7280"/>
+                </a:solidFill>
+                <a:latin typeface="Calibri"/>
+              </a:rPr>
+              <a:t>→ Keyword search (BM25) or hybrid retrieval</a:t>
+            </a:r>
+          </a:p>
+        </p:txBody>
+      </p:sp>
+      <p:sp>
+        <p:nvSpPr>
+          <p:cNvPr id="29" name="TextBox 28"/>
+          <p:cNvSpPr txBox="1"/>
+          <p:nvPr/>
+        </p:nvSpPr>
+        <p:spPr>
+          <a:xfrm>
+            <a:off x="365760" y="4846320"/>
+            <a:ext cx="8412480" cy="228600"/>
+          </a:xfrm>
+          <a:prstGeom prst="rect">
+            <a:avLst/>
+          </a:prstGeom>
+          <a:noFill/>
+        </p:spPr>
+        <p:txBody>
+          <a:bodyPr wrap="square" lIns="0" tIns="0" rIns="0" bIns="0">
+            <a:spAutoFit/>
+          </a:bodyPr>
+          <a:lstStyle/>
+          <a:p>
+            <a:r>
+              <a:rPr sz="900" b="0" i="1">
+                <a:solidFill>
+                  <a:srgbClr val="6B7280"/>
+                </a:solidFill>
+                <a:latin typeface="Calibri"/>
+              </a:rPr>
+              <a:t>RAG is the right tool most of the time. It's not the only tool.</a:t>
+            </a:r>
+          </a:p>
+        </p:txBody>
+      </p:sp>
+    </p:spTree>
+  </p:cSld>
+  <p:clrMapOvr>
+    <a:masterClrMapping/>
+  </p:clrMapOvr>
+</p:sld>
+</file>
+
+<file path=ppt/slides/slide13.xml><?xml version="1.0" encoding="utf-8"?>
+<p:sld xmlns:a="http://schemas.openxmlformats.org/drawingml/2006/main" xmlns:r="http://schemas.openxmlformats.org/officeDocument/2006/relationships" xmlns:p="http://schemas.openxmlformats.org/presentationml/2006/main">
+  <p:cSld>
+    <p:spTree>
+      <p:nvGrpSpPr>
+        <p:cNvPr id="1" name=""/>
+        <p:cNvGrpSpPr/>
+        <p:nvPr/>
+      </p:nvGrpSpPr>
+      <p:grpSpPr>
+        <a:xfrm>
+          <a:off x="0" y="0"/>
+          <a:ext cx="0" cy="0"/>
+          <a:chOff x="0" y="0"/>
+          <a:chExt cx="0" cy="0"/>
+        </a:xfrm>
+      </p:grpSpPr>
+      <p:sp>
+        <p:nvSpPr>
+          <p:cNvPr id="2" name="TextBox 1"/>
+          <p:cNvSpPr txBox="1"/>
+          <p:nvPr/>
+        </p:nvSpPr>
+        <p:spPr>
+          <a:xfrm>
+            <a:off x="365760" y="228600"/>
+            <a:ext cx="1371600" cy="274320"/>
+          </a:xfrm>
+          <a:prstGeom prst="rect">
+            <a:avLst/>
+          </a:prstGeom>
+          <a:noFill/>
+        </p:spPr>
+        <p:txBody>
+          <a:bodyPr wrap="none" lIns="0" tIns="0">
+            <a:spAutoFit/>
+          </a:bodyPr>
+          <a:lstStyle/>
+          <a:p>
+            <a:r>
+              <a:rPr sz="1000" b="1">
+                <a:solidFill>
+                  <a:srgbClr val="C9184A"/>
+                </a:solidFill>
+                <a:latin typeface="Calibri"/>
+              </a:rPr>
+              <a:t>13</a:t>
+            </a:r>
+            <a:r>
+              <a:rPr sz="1000">
+                <a:solidFill>
+                  <a:srgbClr val="6B7280"/>
+                </a:solidFill>
+                <a:latin typeface="Calibri"/>
+              </a:rPr>
+              <a:t> / 15</a:t>
+            </a:r>
+          </a:p>
+        </p:txBody>
+      </p:sp>
+      <p:sp>
+        <p:nvSpPr>
+          <p:cNvPr id="3" name="TextBox 2"/>
+          <p:cNvSpPr txBox="1"/>
+          <p:nvPr/>
+        </p:nvSpPr>
+        <p:spPr>
+          <a:xfrm>
+            <a:off x="365760" y="502920"/>
+            <a:ext cx="8412480" cy="822960"/>
+          </a:xfrm>
+          <a:prstGeom prst="rect">
+            <a:avLst/>
+          </a:prstGeom>
+          <a:noFill/>
+        </p:spPr>
+        <p:txBody>
+          <a:bodyPr wrap="square" lIns="0" tIns="0" rIns="0" bIns="0">
+            <a:spAutoFit/>
+          </a:bodyPr>
+          <a:lstStyle/>
+          <a:p>
+            <a:r>
+              <a:rPr sz="3200" b="1" i="0">
+                <a:solidFill>
+                  <a:srgbClr val="1A1A2E"/>
+                </a:solidFill>
+                <a:latin typeface="Georgia"/>
+              </a:rPr>
+              <a:t>RAG in the wild</a:t>
+            </a:r>
+          </a:p>
+        </p:txBody>
+      </p:sp>
+      <p:sp>
+        <p:nvSpPr>
+          <p:cNvPr id="4" name="TextBox 3"/>
+          <p:cNvSpPr txBox="1"/>
+          <p:nvPr/>
+        </p:nvSpPr>
+        <p:spPr>
+          <a:xfrm>
+            <a:off x="365760" y="1417320"/>
+            <a:ext cx="5486400" cy="274320"/>
+          </a:xfrm>
+          <a:prstGeom prst="rect">
+            <a:avLst/>
+          </a:prstGeom>
+          <a:noFill/>
+        </p:spPr>
+        <p:txBody>
+          <a:bodyPr wrap="square" lIns="0" tIns="0" rIns="0" bIns="0">
+            <a:spAutoFit/>
+          </a:bodyPr>
+          <a:lstStyle/>
+          <a:p>
+            <a:r>
+              <a:rPr sz="1000" b="1" i="0">
+                <a:solidFill>
+                  <a:srgbClr val="C9184A"/>
+                </a:solidFill>
+                <a:latin typeface="Calibri"/>
+              </a:rPr>
+              <a:t>WHERE TEAMS ARE SHIPPING THIS</a:t>
+            </a:r>
+          </a:p>
+        </p:txBody>
+      </p:sp>
+      <p:sp>
+        <p:nvSpPr>
+          <p:cNvPr id="5" name="Rounded Rectangle 4"/>
+          <p:cNvSpPr/>
+          <p:nvPr/>
+        </p:nvSpPr>
+        <p:spPr>
+          <a:xfrm>
+            <a:off x="365760" y="1783080"/>
+            <a:ext cx="2697480" cy="1325880"/>
+          </a:xfrm>
+          <a:prstGeom prst="roundRect">
+            <a:avLst>
+              <a:gd name="adj" fmla="val 8000"/>
+            </a:avLst>
+          </a:prstGeom>
+          <a:solidFill>
+            <a:srgbClr val="F8F9FB"/>
+          </a:solidFill>
+          <a:ln>
+            <a:noFill/>
+          </a:ln>
+        </p:spPr>
+        <p:style>
+          <a:lnRef idx="1">
+            <a:schemeClr val="accent1"/>
+          </a:lnRef>
+          <a:fillRef idx="3">
+            <a:schemeClr val="accent1"/>
+          </a:fillRef>
+          <a:effectRef idx="2">
+            <a:schemeClr val="accent1"/>
+          </a:effectRef>
+          <a:fontRef idx="minor">
+            <a:schemeClr val="lt1"/>
+          </a:fontRef>
+        </p:style>
+        <p:txBody>
+          <a:bodyPr rtlCol="0" anchor="ctr"/>
+          <a:lstStyle/>
+          <a:p>
+            <a:pPr algn="ctr"/>
+            <a:endParaRPr/>
+          </a:p>
+        </p:txBody>
+      </p:sp>
+      <p:sp>
+        <p:nvSpPr>
+          <p:cNvPr id="6" name="TextBox 5"/>
+          <p:cNvSpPr txBox="1"/>
+          <p:nvPr/>
+        </p:nvSpPr>
+        <p:spPr>
+          <a:xfrm>
+            <a:off x="502920" y="1892807"/>
+            <a:ext cx="2423160" cy="320040"/>
+          </a:xfrm>
+          <a:prstGeom prst="rect">
+            <a:avLst/>
+          </a:prstGeom>
+          <a:noFill/>
+        </p:spPr>
+        <p:txBody>
+          <a:bodyPr wrap="square" lIns="0" tIns="0" rIns="0" bIns="0">
+            <a:spAutoFit/>
+          </a:bodyPr>
+          <a:lstStyle/>
+          <a:p>
+            <a:r>
+              <a:rPr sz="1300" b="1" i="0">
+                <a:solidFill>
+                  <a:srgbClr val="C9184A"/>
+                </a:solidFill>
+                <a:latin typeface="Calibri"/>
+              </a:rPr>
+              <a:t>Customer Support</a:t>
+            </a:r>
+          </a:p>
+        </p:txBody>
+      </p:sp>
+      <p:sp>
+        <p:nvSpPr>
+          <p:cNvPr id="7" name="TextBox 6"/>
+          <p:cNvSpPr txBox="1"/>
+          <p:nvPr/>
+        </p:nvSpPr>
+        <p:spPr>
+          <a:xfrm>
+            <a:off x="502920" y="2194560"/>
+            <a:ext cx="2423160" cy="685800"/>
+          </a:xfrm>
+          <a:prstGeom prst="rect">
+            <a:avLst/>
+          </a:prstGeom>
+          <a:noFill/>
+        </p:spPr>
+        <p:txBody>
+          <a:bodyPr wrap="square" lIns="0" tIns="0" rIns="0" bIns="0">
+            <a:spAutoFit/>
+          </a:bodyPr>
+          <a:lstStyle/>
+          <a:p>
+            <a:r>
+              <a:rPr sz="1100" b="0" i="0">
+                <a:solidFill>
+                  <a:srgbClr val="1A1A2E"/>
+                </a:solidFill>
+                <a:latin typeface="Calibri"/>
+              </a:rPr>
+              <a:t>Product docs → chatbot that answers with citations and escalates only when it should.</a:t>
+            </a:r>
+          </a:p>
+        </p:txBody>
+      </p:sp>
+      <p:sp>
+        <p:nvSpPr>
+          <p:cNvPr id="8" name="TextBox 7"/>
+          <p:cNvSpPr txBox="1"/>
+          <p:nvPr/>
+        </p:nvSpPr>
+        <p:spPr>
+          <a:xfrm>
+            <a:off x="502920" y="2834640"/>
+            <a:ext cx="2423160" cy="228600"/>
+          </a:xfrm>
+          <a:prstGeom prst="rect">
+            <a:avLst/>
+          </a:prstGeom>
+          <a:noFill/>
+        </p:spPr>
+        <p:txBody>
+          <a:bodyPr wrap="square" lIns="0" tIns="0" rIns="0" bIns="0">
+            <a:spAutoFit/>
+          </a:bodyPr>
+          <a:lstStyle/>
+          <a:p>
+            <a:r>
+              <a:rPr sz="900" b="0" i="1">
+                <a:solidFill>
+                  <a:srgbClr val="6B7280"/>
+                </a:solidFill>
+                <a:latin typeface="Calibri"/>
+              </a:rPr>
+              <a:t>Intercom · Zendesk AI · Notion AI</a:t>
+            </a:r>
+          </a:p>
+        </p:txBody>
+      </p:sp>
+      <p:sp>
+        <p:nvSpPr>
+          <p:cNvPr id="9" name="Rounded Rectangle 8"/>
+          <p:cNvSpPr/>
+          <p:nvPr/>
+        </p:nvSpPr>
+        <p:spPr>
+          <a:xfrm>
+            <a:off x="3223260" y="1783080"/>
+            <a:ext cx="2697480" cy="1325880"/>
+          </a:xfrm>
+          <a:prstGeom prst="roundRect">
+            <a:avLst>
+              <a:gd name="adj" fmla="val 8000"/>
+            </a:avLst>
+          </a:prstGeom>
+          <a:solidFill>
+            <a:srgbClr val="F8F9FB"/>
+          </a:solidFill>
+          <a:ln>
+            <a:noFill/>
+          </a:ln>
+        </p:spPr>
+        <p:style>
+          <a:lnRef idx="1">
+            <a:schemeClr val="accent1"/>
+          </a:lnRef>
+          <a:fillRef idx="3">
+            <a:schemeClr val="accent1"/>
+          </a:fillRef>
+          <a:effectRef idx="2">
+            <a:schemeClr val="accent1"/>
+          </a:effectRef>
+          <a:fontRef idx="minor">
+            <a:schemeClr val="lt1"/>
+          </a:fontRef>
+        </p:style>
+        <p:txBody>
+          <a:bodyPr rtlCol="0" anchor="ctr"/>
+          <a:lstStyle/>
+          <a:p>
+            <a:pPr algn="ctr"/>
+            <a:endParaRPr/>
+          </a:p>
+        </p:txBody>
+      </p:sp>
+      <p:sp>
+        <p:nvSpPr>
+          <p:cNvPr id="10" name="TextBox 9"/>
+          <p:cNvSpPr txBox="1"/>
+          <p:nvPr/>
+        </p:nvSpPr>
+        <p:spPr>
+          <a:xfrm>
+            <a:off x="3360420" y="1892807"/>
+            <a:ext cx="2423160" cy="320040"/>
+          </a:xfrm>
+          <a:prstGeom prst="rect">
+            <a:avLst/>
+          </a:prstGeom>
+          <a:noFill/>
+        </p:spPr>
+        <p:txBody>
+          <a:bodyPr wrap="square" lIns="0" tIns="0" rIns="0" bIns="0">
+            <a:spAutoFit/>
+          </a:bodyPr>
+          <a:lstStyle/>
+          <a:p>
+            <a:r>
+              <a:rPr sz="1300" b="1" i="0">
+                <a:solidFill>
+                  <a:srgbClr val="C9184A"/>
+                </a:solidFill>
+                <a:latin typeface="Calibri"/>
+              </a:rPr>
+              <a:t>Internal Knowledge</a:t>
+            </a:r>
+          </a:p>
+        </p:txBody>
+      </p:sp>
+      <p:sp>
+        <p:nvSpPr>
+          <p:cNvPr id="11" name="TextBox 10"/>
+          <p:cNvSpPr txBox="1"/>
+          <p:nvPr/>
+        </p:nvSpPr>
+        <p:spPr>
+          <a:xfrm>
+            <a:off x="3360420" y="2194560"/>
+            <a:ext cx="2423160" cy="685800"/>
+          </a:xfrm>
+          <a:prstGeom prst="rect">
+            <a:avLst/>
+          </a:prstGeom>
+          <a:noFill/>
+        </p:spPr>
+        <p:txBody>
+          <a:bodyPr wrap="square" lIns="0" tIns="0" rIns="0" bIns="0">
+            <a:spAutoFit/>
+          </a:bodyPr>
+          <a:lstStyle/>
+          <a:p>
+            <a:r>
+              <a:rPr sz="1100" b="0" i="0">
+                <a:solidFill>
+                  <a:srgbClr val="1A1A2E"/>
+                </a:solidFill>
+                <a:latin typeface="Calibri"/>
+              </a:rPr>
+              <a:t>Wiki, Confluence, Slack — a search that actually answers instead of linking 20 pages.</a:t>
+            </a:r>
+          </a:p>
+        </p:txBody>
+      </p:sp>
+      <p:sp>
+        <p:nvSpPr>
+          <p:cNvPr id="12" name="TextBox 11"/>
+          <p:cNvSpPr txBox="1"/>
+          <p:nvPr/>
+        </p:nvSpPr>
+        <p:spPr>
+          <a:xfrm>
+            <a:off x="3360420" y="2834640"/>
+            <a:ext cx="2423160" cy="228600"/>
+          </a:xfrm>
+          <a:prstGeom prst="rect">
+            <a:avLst/>
+          </a:prstGeom>
+          <a:noFill/>
+        </p:spPr>
+        <p:txBody>
+          <a:bodyPr wrap="square" lIns="0" tIns="0" rIns="0" bIns="0">
+            <a:spAutoFit/>
+          </a:bodyPr>
+          <a:lstStyle/>
+          <a:p>
+            <a:r>
+              <a:rPr sz="900" b="0" i="1">
+                <a:solidFill>
+                  <a:srgbClr val="6B7280"/>
+                </a:solidFill>
+                <a:latin typeface="Calibri"/>
+              </a:rPr>
+              <a:t>Glean · Elastic · Copilot for M365</a:t>
+            </a:r>
+          </a:p>
+        </p:txBody>
+      </p:sp>
+      <p:sp>
+        <p:nvSpPr>
+          <p:cNvPr id="13" name="Rounded Rectangle 12"/>
+          <p:cNvSpPr/>
+          <p:nvPr/>
+        </p:nvSpPr>
+        <p:spPr>
+          <a:xfrm>
+            <a:off x="6080760" y="1783080"/>
+            <a:ext cx="2697480" cy="1325880"/>
+          </a:xfrm>
+          <a:prstGeom prst="roundRect">
+            <a:avLst>
+              <a:gd name="adj" fmla="val 8000"/>
+            </a:avLst>
+          </a:prstGeom>
+          <a:solidFill>
+            <a:srgbClr val="F8F9FB"/>
+          </a:solidFill>
+          <a:ln>
+            <a:noFill/>
+          </a:ln>
+        </p:spPr>
+        <p:style>
+          <a:lnRef idx="1">
+            <a:schemeClr val="accent1"/>
+          </a:lnRef>
+          <a:fillRef idx="3">
+            <a:schemeClr val="accent1"/>
+          </a:fillRef>
+          <a:effectRef idx="2">
+            <a:schemeClr val="accent1"/>
+          </a:effectRef>
+          <a:fontRef idx="minor">
+            <a:schemeClr val="lt1"/>
+          </a:fontRef>
+        </p:style>
+        <p:txBody>
+          <a:bodyPr rtlCol="0" anchor="ctr"/>
+          <a:lstStyle/>
+          <a:p>
+            <a:pPr algn="ctr"/>
+            <a:endParaRPr/>
+          </a:p>
+        </p:txBody>
+      </p:sp>
+      <p:sp>
+        <p:nvSpPr>
+          <p:cNvPr id="14" name="TextBox 13"/>
+          <p:cNvSpPr txBox="1"/>
+          <p:nvPr/>
+        </p:nvSpPr>
+        <p:spPr>
+          <a:xfrm>
+            <a:off x="6217920" y="1892807"/>
+            <a:ext cx="2423160" cy="320040"/>
+          </a:xfrm>
+          <a:prstGeom prst="rect">
+            <a:avLst/>
+          </a:prstGeom>
+          <a:noFill/>
+        </p:spPr>
+        <p:txBody>
+          <a:bodyPr wrap="square" lIns="0" tIns="0" rIns="0" bIns="0">
+            <a:spAutoFit/>
+          </a:bodyPr>
+          <a:lstStyle/>
+          <a:p>
+            <a:r>
+              <a:rPr sz="1300" b="1" i="0">
+                <a:solidFill>
+                  <a:srgbClr val="C9184A"/>
+                </a:solidFill>
+                <a:latin typeface="Calibri"/>
+              </a:rPr>
+              <a:t>Developer Tools</a:t>
+            </a:r>
+          </a:p>
+        </p:txBody>
+      </p:sp>
+      <p:sp>
+        <p:nvSpPr>
+          <p:cNvPr id="15" name="TextBox 14"/>
+          <p:cNvSpPr txBox="1"/>
+          <p:nvPr/>
+        </p:nvSpPr>
+        <p:spPr>
+          <a:xfrm>
+            <a:off x="6217920" y="2194560"/>
+            <a:ext cx="2423160" cy="685800"/>
+          </a:xfrm>
+          <a:prstGeom prst="rect">
+            <a:avLst/>
+          </a:prstGeom>
+          <a:noFill/>
+        </p:spPr>
+        <p:txBody>
+          <a:bodyPr wrap="square" lIns="0" tIns="0" rIns="0" bIns="0">
+            <a:spAutoFit/>
+          </a:bodyPr>
+          <a:lstStyle/>
+          <a:p>
+            <a:r>
+              <a:rPr sz="1100" b="0" i="0">
+                <a:solidFill>
+                  <a:srgbClr val="1A1A2E"/>
+                </a:solidFill>
+                <a:latin typeface="Calibri"/>
+              </a:rPr>
+              <a:t>Code and API docs that answer "how do I call this?" with the exact snippet and source file.</a:t>
+            </a:r>
+          </a:p>
+        </p:txBody>
+      </p:sp>
+      <p:sp>
+        <p:nvSpPr>
+          <p:cNvPr id="16" name="TextBox 15"/>
+          <p:cNvSpPr txBox="1"/>
+          <p:nvPr/>
+        </p:nvSpPr>
+        <p:spPr>
+          <a:xfrm>
+            <a:off x="6217920" y="2834640"/>
+            <a:ext cx="2423160" cy="228600"/>
+          </a:xfrm>
+          <a:prstGeom prst="rect">
+            <a:avLst/>
+          </a:prstGeom>
+          <a:noFill/>
+        </p:spPr>
+        <p:txBody>
+          <a:bodyPr wrap="square" lIns="0" tIns="0" rIns="0" bIns="0">
+            <a:spAutoFit/>
+          </a:bodyPr>
+          <a:lstStyle/>
+          <a:p>
+            <a:r>
+              <a:rPr sz="900" b="0" i="1">
+                <a:solidFill>
+                  <a:srgbClr val="6B7280"/>
+                </a:solidFill>
+                <a:latin typeface="Calibri"/>
+              </a:rPr>
+              <a:t>Cursor · Sourcegraph Cody · GitHub Copilot</a:t>
+            </a:r>
+          </a:p>
+        </p:txBody>
+      </p:sp>
+      <p:sp>
+        <p:nvSpPr>
+          <p:cNvPr id="17" name="Rounded Rectangle 16"/>
+          <p:cNvSpPr/>
+          <p:nvPr/>
+        </p:nvSpPr>
+        <p:spPr>
+          <a:xfrm>
+            <a:off x="365760" y="3291839"/>
+            <a:ext cx="2697480" cy="1325880"/>
+          </a:xfrm>
+          <a:prstGeom prst="roundRect">
+            <a:avLst>
+              <a:gd name="adj" fmla="val 8000"/>
+            </a:avLst>
+          </a:prstGeom>
+          <a:solidFill>
+            <a:srgbClr val="F8F9FB"/>
+          </a:solidFill>
+          <a:ln>
+            <a:noFill/>
+          </a:ln>
+        </p:spPr>
+        <p:style>
+          <a:lnRef idx="1">
+            <a:schemeClr val="accent1"/>
+          </a:lnRef>
+          <a:fillRef idx="3">
+            <a:schemeClr val="accent1"/>
+          </a:fillRef>
+          <a:effectRef idx="2">
+            <a:schemeClr val="accent1"/>
+          </a:effectRef>
+          <a:fontRef idx="minor">
+            <a:schemeClr val="lt1"/>
+          </a:fontRef>
+        </p:style>
+        <p:txBody>
+          <a:bodyPr rtlCol="0" anchor="ctr"/>
+          <a:lstStyle/>
+          <a:p>
+            <a:pPr algn="ctr"/>
+            <a:endParaRPr/>
+          </a:p>
+        </p:txBody>
+      </p:sp>
+      <p:sp>
+        <p:nvSpPr>
+          <p:cNvPr id="18" name="TextBox 17"/>
+          <p:cNvSpPr txBox="1"/>
+          <p:nvPr/>
+        </p:nvSpPr>
+        <p:spPr>
+          <a:xfrm>
+            <a:off x="502920" y="3401568"/>
+            <a:ext cx="2423160" cy="320040"/>
+          </a:xfrm>
+          <a:prstGeom prst="rect">
+            <a:avLst/>
+          </a:prstGeom>
+          <a:noFill/>
+        </p:spPr>
+        <p:txBody>
+          <a:bodyPr wrap="square" lIns="0" tIns="0" rIns="0" bIns="0">
+            <a:spAutoFit/>
+          </a:bodyPr>
+          <a:lstStyle/>
+          <a:p>
+            <a:r>
+              <a:rPr sz="1300" b="1" i="0">
+                <a:solidFill>
+                  <a:srgbClr val="C9184A"/>
+                </a:solidFill>
+                <a:latin typeface="Calibri"/>
+              </a:rPr>
+              <a:t>Research &amp; Legal</a:t>
+            </a:r>
+          </a:p>
+        </p:txBody>
+      </p:sp>
+      <p:sp>
+        <p:nvSpPr>
+          <p:cNvPr id="19" name="TextBox 18"/>
+          <p:cNvSpPr txBox="1"/>
+          <p:nvPr/>
+        </p:nvSpPr>
+        <p:spPr>
+          <a:xfrm>
+            <a:off x="502920" y="3703320"/>
+            <a:ext cx="2423160" cy="685800"/>
+          </a:xfrm>
+          <a:prstGeom prst="rect">
+            <a:avLst/>
+          </a:prstGeom>
+          <a:noFill/>
+        </p:spPr>
+        <p:txBody>
+          <a:bodyPr wrap="square" lIns="0" tIns="0" rIns="0" bIns="0">
+            <a:spAutoFit/>
+          </a:bodyPr>
+          <a:lstStyle/>
+          <a:p>
+            <a:r>
+              <a:rPr sz="1100" b="0" i="0">
+                <a:solidFill>
+                  <a:srgbClr val="1A1A2E"/>
+                </a:solidFill>
+                <a:latin typeface="Calibri"/>
+              </a:rPr>
+              <a:t>Papers, case law, regulations — answers with every claim traced back to a citation.</a:t>
+            </a:r>
+          </a:p>
+        </p:txBody>
+      </p:sp>
+      <p:sp>
+        <p:nvSpPr>
+          <p:cNvPr id="20" name="TextBox 19"/>
+          <p:cNvSpPr txBox="1"/>
+          <p:nvPr/>
+        </p:nvSpPr>
+        <p:spPr>
+          <a:xfrm>
+            <a:off x="502920" y="4343400"/>
+            <a:ext cx="2423160" cy="228600"/>
+          </a:xfrm>
+          <a:prstGeom prst="rect">
+            <a:avLst/>
+          </a:prstGeom>
+          <a:noFill/>
+        </p:spPr>
+        <p:txBody>
+          <a:bodyPr wrap="square" lIns="0" tIns="0" rIns="0" bIns="0">
+            <a:spAutoFit/>
+          </a:bodyPr>
+          <a:lstStyle/>
+          <a:p>
+            <a:r>
+              <a:rPr sz="900" b="0" i="1">
+                <a:solidFill>
+                  <a:srgbClr val="6B7280"/>
+                </a:solidFill>
+                <a:latin typeface="Calibri"/>
+              </a:rPr>
+              <a:t>Harvey · Elicit · Consensus</a:t>
+            </a:r>
+          </a:p>
+        </p:txBody>
+      </p:sp>
+      <p:sp>
+        <p:nvSpPr>
+          <p:cNvPr id="21" name="Rounded Rectangle 20"/>
+          <p:cNvSpPr/>
+          <p:nvPr/>
+        </p:nvSpPr>
+        <p:spPr>
+          <a:xfrm>
+            <a:off x="3223260" y="3291839"/>
+            <a:ext cx="2697480" cy="1325880"/>
+          </a:xfrm>
+          <a:prstGeom prst="roundRect">
+            <a:avLst>
+              <a:gd name="adj" fmla="val 8000"/>
+            </a:avLst>
+          </a:prstGeom>
+          <a:solidFill>
+            <a:srgbClr val="F8F9FB"/>
+          </a:solidFill>
+          <a:ln>
+            <a:noFill/>
+          </a:ln>
+        </p:spPr>
+        <p:style>
+          <a:lnRef idx="1">
+            <a:schemeClr val="accent1"/>
+          </a:lnRef>
+          <a:fillRef idx="3">
+            <a:schemeClr val="accent1"/>
+          </a:fillRef>
+          <a:effectRef idx="2">
+            <a:schemeClr val="accent1"/>
+          </a:effectRef>
+          <a:fontRef idx="minor">
+            <a:schemeClr val="lt1"/>
+          </a:fontRef>
+        </p:style>
+        <p:txBody>
+          <a:bodyPr rtlCol="0" anchor="ctr"/>
+          <a:lstStyle/>
+          <a:p>
+            <a:pPr algn="ctr"/>
+            <a:endParaRPr/>
+          </a:p>
+        </p:txBody>
+      </p:sp>
+      <p:sp>
+        <p:nvSpPr>
+          <p:cNvPr id="22" name="TextBox 21"/>
+          <p:cNvSpPr txBox="1"/>
+          <p:nvPr/>
+        </p:nvSpPr>
+        <p:spPr>
+          <a:xfrm>
+            <a:off x="3360420" y="3401568"/>
+            <a:ext cx="2423160" cy="320040"/>
+          </a:xfrm>
+          <a:prstGeom prst="rect">
+            <a:avLst/>
+          </a:prstGeom>
+          <a:noFill/>
+        </p:spPr>
+        <p:txBody>
+          <a:bodyPr wrap="square" lIns="0" tIns="0" rIns="0" bIns="0">
+            <a:spAutoFit/>
+          </a:bodyPr>
+          <a:lstStyle/>
+          <a:p>
+            <a:r>
+              <a:rPr sz="1300" b="1" i="0">
+                <a:solidFill>
+                  <a:srgbClr val="C9184A"/>
+                </a:solidFill>
+                <a:latin typeface="Calibri"/>
+              </a:rPr>
+              <a:t>Healthcare</a:t>
+            </a:r>
+          </a:p>
+        </p:txBody>
+      </p:sp>
+      <p:sp>
+        <p:nvSpPr>
+          <p:cNvPr id="23" name="TextBox 22"/>
+          <p:cNvSpPr txBox="1"/>
+          <p:nvPr/>
+        </p:nvSpPr>
+        <p:spPr>
+          <a:xfrm>
+            <a:off x="3360420" y="3703320"/>
+            <a:ext cx="2423160" cy="685800"/>
+          </a:xfrm>
+          <a:prstGeom prst="rect">
+            <a:avLst/>
+          </a:prstGeom>
+          <a:noFill/>
+        </p:spPr>
+        <p:txBody>
+          <a:bodyPr wrap="square" lIns="0" tIns="0" rIns="0" bIns="0">
+            <a:spAutoFit/>
+          </a:bodyPr>
+          <a:lstStyle/>
+          <a:p>
+            <a:r>
+              <a:rPr sz="1100" b="0" i="0">
+                <a:solidFill>
+                  <a:srgbClr val="1A1A2E"/>
+                </a:solidFill>
+                <a:latin typeface="Calibri"/>
+              </a:rPr>
+              <a:t>Clinical guidelines, drug interactions, internal protocols with mandatory provenance.</a:t>
+            </a:r>
+          </a:p>
+        </p:txBody>
+      </p:sp>
+      <p:sp>
+        <p:nvSpPr>
+          <p:cNvPr id="24" name="TextBox 23"/>
+          <p:cNvSpPr txBox="1"/>
+          <p:nvPr/>
+        </p:nvSpPr>
+        <p:spPr>
+          <a:xfrm>
+            <a:off x="3360420" y="4343400"/>
+            <a:ext cx="2423160" cy="228600"/>
+          </a:xfrm>
+          <a:prstGeom prst="rect">
+            <a:avLst/>
+          </a:prstGeom>
+          <a:noFill/>
+        </p:spPr>
+        <p:txBody>
+          <a:bodyPr wrap="square" lIns="0" tIns="0" rIns="0" bIns="0">
+            <a:spAutoFit/>
+          </a:bodyPr>
+          <a:lstStyle/>
+          <a:p>
+            <a:r>
+              <a:rPr sz="900" b="0" i="1">
+                <a:solidFill>
+                  <a:srgbClr val="6B7280"/>
+                </a:solidFill>
+                <a:latin typeface="Calibri"/>
+              </a:rPr>
+              <a:t>Abridge · Hippocratic AI · Nuance DAX</a:t>
+            </a:r>
+          </a:p>
+        </p:txBody>
+      </p:sp>
+      <p:sp>
+        <p:nvSpPr>
+          <p:cNvPr id="25" name="Rounded Rectangle 24"/>
+          <p:cNvSpPr/>
+          <p:nvPr/>
+        </p:nvSpPr>
+        <p:spPr>
+          <a:xfrm>
+            <a:off x="6080760" y="3291839"/>
+            <a:ext cx="2697480" cy="1325880"/>
+          </a:xfrm>
+          <a:prstGeom prst="roundRect">
+            <a:avLst>
+              <a:gd name="adj" fmla="val 8000"/>
+            </a:avLst>
+          </a:prstGeom>
+          <a:solidFill>
+            <a:srgbClr val="F8F9FB"/>
+          </a:solidFill>
+          <a:ln>
+            <a:noFill/>
+          </a:ln>
+        </p:spPr>
+        <p:style>
+          <a:lnRef idx="1">
+            <a:schemeClr val="accent1"/>
+          </a:lnRef>
+          <a:fillRef idx="3">
+            <a:schemeClr val="accent1"/>
+          </a:fillRef>
+          <a:effectRef idx="2">
+            <a:schemeClr val="accent1"/>
+          </a:effectRef>
+          <a:fontRef idx="minor">
+            <a:schemeClr val="lt1"/>
+          </a:fontRef>
+        </p:style>
+        <p:txBody>
+          <a:bodyPr rtlCol="0" anchor="ctr"/>
+          <a:lstStyle/>
+          <a:p>
+            <a:pPr algn="ctr"/>
+            <a:endParaRPr/>
+          </a:p>
+        </p:txBody>
+      </p:sp>
+      <p:sp>
+        <p:nvSpPr>
+          <p:cNvPr id="26" name="TextBox 25"/>
+          <p:cNvSpPr txBox="1"/>
+          <p:nvPr/>
+        </p:nvSpPr>
+        <p:spPr>
+          <a:xfrm>
+            <a:off x="6217920" y="3401568"/>
+            <a:ext cx="2423160" cy="320040"/>
+          </a:xfrm>
+          <a:prstGeom prst="rect">
+            <a:avLst/>
+          </a:prstGeom>
+          <a:noFill/>
+        </p:spPr>
+        <p:txBody>
+          <a:bodyPr wrap="square" lIns="0" tIns="0" rIns="0" bIns="0">
+            <a:spAutoFit/>
+          </a:bodyPr>
+          <a:lstStyle/>
+          <a:p>
+            <a:r>
+              <a:rPr sz="1300" b="1" i="0">
+                <a:solidFill>
+                  <a:srgbClr val="C9184A"/>
+                </a:solidFill>
+                <a:latin typeface="Calibri"/>
+              </a:rPr>
+              <a:t>Personal Knowledge</a:t>
+            </a:r>
+          </a:p>
+        </p:txBody>
+      </p:sp>
+      <p:sp>
+        <p:nvSpPr>
+          <p:cNvPr id="27" name="TextBox 26"/>
+          <p:cNvSpPr txBox="1"/>
+          <p:nvPr/>
+        </p:nvSpPr>
+        <p:spPr>
+          <a:xfrm>
+            <a:off x="6217920" y="3703320"/>
+            <a:ext cx="2423160" cy="685800"/>
+          </a:xfrm>
+          <a:prstGeom prst="rect">
+            <a:avLst/>
+          </a:prstGeom>
+          <a:noFill/>
+        </p:spPr>
+        <p:txBody>
+          <a:bodyPr wrap="square" lIns="0" tIns="0" rIns="0" bIns="0">
+            <a:spAutoFit/>
+          </a:bodyPr>
+          <a:lstStyle/>
+          <a:p>
+            <a:r>
+              <a:rPr sz="1100" b="0" i="0">
+                <a:solidFill>
+                  <a:srgbClr val="1A1A2E"/>
+                </a:solidFill>
+                <a:latin typeface="Calibri"/>
+              </a:rPr>
+              <a:t>Your notes, files, bookmarks as a second brain. Search across everything you've ever read.</a:t>
+            </a:r>
+          </a:p>
+        </p:txBody>
+      </p:sp>
+      <p:sp>
+        <p:nvSpPr>
+          <p:cNvPr id="28" name="TextBox 27"/>
+          <p:cNvSpPr txBox="1"/>
+          <p:nvPr/>
+        </p:nvSpPr>
+        <p:spPr>
+          <a:xfrm>
+            <a:off x="6217920" y="4343400"/>
+            <a:ext cx="2423160" cy="228600"/>
+          </a:xfrm>
+          <a:prstGeom prst="rect">
+            <a:avLst/>
+          </a:prstGeom>
+          <a:noFill/>
+        </p:spPr>
+        <p:txBody>
+          <a:bodyPr wrap="square" lIns="0" tIns="0" rIns="0" bIns="0">
+            <a:spAutoFit/>
+          </a:bodyPr>
+          <a:lstStyle/>
+          <a:p>
+            <a:r>
+              <a:rPr sz="900" b="0" i="1">
+                <a:solidFill>
+                  <a:srgbClr val="6B7280"/>
+                </a:solidFill>
+                <a:latin typeface="Calibri"/>
+              </a:rPr>
+              <a:t>Mem · Obsidian · Reflect</a:t>
+            </a:r>
+          </a:p>
+        </p:txBody>
+      </p:sp>
+      <p:sp>
+        <p:nvSpPr>
+          <p:cNvPr id="29" name="TextBox 28"/>
+          <p:cNvSpPr txBox="1"/>
+          <p:nvPr/>
+        </p:nvSpPr>
+        <p:spPr>
+          <a:xfrm>
+            <a:off x="365760" y="4846320"/>
+            <a:ext cx="8412480" cy="228600"/>
+          </a:xfrm>
+          <a:prstGeom prst="rect">
+            <a:avLst/>
+          </a:prstGeom>
+          <a:noFill/>
+        </p:spPr>
+        <p:txBody>
+          <a:bodyPr wrap="square" lIns="0" tIns="0" rIns="0" bIns="0">
+            <a:spAutoFit/>
+          </a:bodyPr>
+          <a:lstStyle/>
+          <a:p>
+            <a:r>
+              <a:rPr sz="900" b="0" i="1">
+                <a:solidFill>
+                  <a:srgbClr val="6B7280"/>
+                </a:solidFill>
+                <a:latin typeface="Calibri"/>
+              </a:rPr>
+              <a:t>Anywhere grounded, cited answers beat confident guesses — which is most places.</a:t>
+            </a:r>
+          </a:p>
+        </p:txBody>
+      </p:sp>
+    </p:spTree>
+  </p:cSld>
+  <p:clrMapOvr>
+    <a:masterClrMapping/>
+  </p:clrMapOvr>
+</p:sld>
+</file>
+
+<file path=ppt/slides/slide14.xml><?xml version="1.0" encoding="utf-8"?>
 <p:sld xmlns:a="http://schemas.openxmlformats.org/drawingml/2006/main" xmlns:r="http://schemas.openxmlformats.org/officeDocument/2006/relationships" xmlns:p="http://schemas.openxmlformats.org/presentationml/2006/main">
   <p:cSld name="Slide 11">
     <p:bg>
@@ -5632,7 +8750,7 @@
                 <a:ea typeface="Calibri" pitchFamily="34" charset="-122"/>
                 <a:cs typeface="Calibri" pitchFamily="34" charset="-120"/>
               </a:rPr>
-              <a:t>11</a:t>
+              <a:t>14</a:t>
             </a:r>
             <a:r>
               <a:rPr lang="en-US" sz="1000" kern="0" spc="200" dirty="0">
@@ -5643,7 +8761,7 @@
                 <a:ea typeface="Calibri" pitchFamily="34" charset="-122"/>
                 <a:cs typeface="Calibri" pitchFamily="34" charset="-120"/>
               </a:rPr>
-              <a:t> / 12</a:t>
+              <a:t> / 15</a:t>
             </a:r>
             <a:endParaRPr lang="en-US" sz="1000" dirty="0"/>
           </a:p>
@@ -6927,7 +10045,7 @@
 </p:sld>
 </file>
 
-<file path=ppt/slides/slide12.xml><?xml version="1.0" encoding="utf-8"?>
+<file path=ppt/slides/slide15.xml><?xml version="1.0" encoding="utf-8"?>
 <p:sld xmlns:a="http://schemas.openxmlformats.org/drawingml/2006/main" xmlns:r="http://schemas.openxmlformats.org/officeDocument/2006/relationships" xmlns:p="http://schemas.openxmlformats.org/presentationml/2006/main">
   <p:cSld name="Slide 12">
     <p:bg>
@@ -7087,7 +10205,7 @@
               <a:buNone/>
             </a:pPr>
             <a:r>
-              <a:rPr lang="en-US" sz="2200" dirty="0">
+              <a:rPr lang="en-US" sz="2400" dirty="0">
                 <a:solidFill>
                   <a:srgbClr val="CADCFC"/>
                 </a:solidFill>
@@ -7097,7 +10215,7 @@
               </a:rPr>
               <a:t>hakanotal.github.io/workshop-rag-chatbot</a:t>
             </a:r>
-            <a:endParaRPr lang="en-US" sz="2200" dirty="0"/>
+            <a:endParaRPr lang="en-US" sz="2400" dirty="0"/>
           </a:p>
         </p:txBody>
       </p:sp>
@@ -7292,7 +10410,7 @@
                 <a:ea typeface="Calibri" pitchFamily="34" charset="-122"/>
                 <a:cs typeface="Calibri" pitchFamily="34" charset="-120"/>
               </a:rPr>
-              <a:t> / 12</a:t>
+              <a:t> / 15</a:t>
             </a:r>
             <a:endParaRPr lang="en-US" sz="1000" dirty="0"/>
           </a:p>
@@ -8154,7 +11272,7 @@
                 <a:ea typeface="Calibri" pitchFamily="34" charset="-122"/>
                 <a:cs typeface="Calibri" pitchFamily="34" charset="-120"/>
               </a:rPr>
-              <a:t> / 12</a:t>
+              <a:t> / 15</a:t>
             </a:r>
             <a:endParaRPr lang="en-US" sz="1000" dirty="0"/>
           </a:p>
@@ -8659,7 +11777,7 @@
                 <a:ea typeface="Calibri" pitchFamily="34" charset="-122"/>
                 <a:cs typeface="Calibri" pitchFamily="34" charset="-120"/>
               </a:rPr>
-              <a:t> / 12</a:t>
+              <a:t> / 15</a:t>
             </a:r>
             <a:endParaRPr lang="en-US" sz="1000" dirty="0"/>
           </a:p>
@@ -9480,7 +12598,7 @@
                 <a:ea typeface="Calibri" pitchFamily="34" charset="-122"/>
                 <a:cs typeface="Calibri" pitchFamily="34" charset="-120"/>
               </a:rPr>
-              <a:t> / 12</a:t>
+              <a:t> / 15</a:t>
             </a:r>
             <a:endParaRPr lang="en-US" sz="1000" dirty="0"/>
           </a:p>
@@ -9597,6 +12715,1326 @@
 </file>
 
 <file path=ppt/slides/slide6.xml><?xml version="1.0" encoding="utf-8"?>
+<p:sld xmlns:a="http://schemas.openxmlformats.org/drawingml/2006/main" xmlns:r="http://schemas.openxmlformats.org/officeDocument/2006/relationships" xmlns:p="http://schemas.openxmlformats.org/presentationml/2006/main">
+  <p:cSld>
+    <p:spTree>
+      <p:nvGrpSpPr>
+        <p:cNvPr id="1" name=""/>
+        <p:cNvGrpSpPr/>
+        <p:nvPr/>
+      </p:nvGrpSpPr>
+      <p:grpSpPr>
+        <a:xfrm>
+          <a:off x="0" y="0"/>
+          <a:ext cx="0" cy="0"/>
+          <a:chOff x="0" y="0"/>
+          <a:chExt cx="0" cy="0"/>
+        </a:xfrm>
+      </p:grpSpPr>
+      <p:sp>
+        <p:nvSpPr>
+          <p:cNvPr id="2" name="TextBox 1"/>
+          <p:cNvSpPr txBox="1"/>
+          <p:nvPr/>
+        </p:nvSpPr>
+        <p:spPr>
+          <a:xfrm>
+            <a:off x="365760" y="228600"/>
+            <a:ext cx="1371600" cy="274320"/>
+          </a:xfrm>
+          <a:prstGeom prst="rect">
+            <a:avLst/>
+          </a:prstGeom>
+          <a:noFill/>
+        </p:spPr>
+        <p:txBody>
+          <a:bodyPr wrap="none" lIns="0" tIns="0">
+            <a:spAutoFit/>
+          </a:bodyPr>
+          <a:lstStyle/>
+          <a:p>
+            <a:r>
+              <a:rPr sz="1000" b="1">
+                <a:solidFill>
+                  <a:srgbClr val="C9184A"/>
+                </a:solidFill>
+                <a:latin typeface="Calibri"/>
+              </a:rPr>
+              <a:t>06</a:t>
+            </a:r>
+            <a:r>
+              <a:rPr sz="1000">
+                <a:solidFill>
+                  <a:srgbClr val="6B7280"/>
+                </a:solidFill>
+                <a:latin typeface="Calibri"/>
+              </a:rPr>
+              <a:t> / 15</a:t>
+            </a:r>
+          </a:p>
+        </p:txBody>
+      </p:sp>
+      <p:sp>
+        <p:nvSpPr>
+          <p:cNvPr id="3" name="TextBox 2"/>
+          <p:cNvSpPr txBox="1"/>
+          <p:nvPr/>
+        </p:nvSpPr>
+        <p:spPr>
+          <a:xfrm>
+            <a:off x="365760" y="502920"/>
+            <a:ext cx="8412480" cy="822960"/>
+          </a:xfrm>
+          <a:prstGeom prst="rect">
+            <a:avLst/>
+          </a:prstGeom>
+          <a:noFill/>
+        </p:spPr>
+        <p:txBody>
+          <a:bodyPr wrap="square" lIns="0" tIns="0" rIns="0" bIns="0">
+            <a:spAutoFit/>
+          </a:bodyPr>
+          <a:lstStyle/>
+          <a:p>
+            <a:r>
+              <a:rPr sz="3200" b="1" i="0">
+                <a:solidFill>
+                  <a:srgbClr val="1A1A2E"/>
+                </a:solidFill>
+                <a:latin typeface="Georgia"/>
+              </a:rPr>
+              <a:t>RAG in motion</a:t>
+            </a:r>
+          </a:p>
+        </p:txBody>
+      </p:sp>
+      <p:sp>
+        <p:nvSpPr>
+          <p:cNvPr id="4" name="TextBox 3"/>
+          <p:cNvSpPr txBox="1"/>
+          <p:nvPr/>
+        </p:nvSpPr>
+        <p:spPr>
+          <a:xfrm>
+            <a:off x="365760" y="1417320"/>
+            <a:ext cx="5486400" cy="274320"/>
+          </a:xfrm>
+          <a:prstGeom prst="rect">
+            <a:avLst/>
+          </a:prstGeom>
+          <a:noFill/>
+        </p:spPr>
+        <p:txBody>
+          <a:bodyPr wrap="square" lIns="0" tIns="0" rIns="0" bIns="0">
+            <a:spAutoFit/>
+          </a:bodyPr>
+          <a:lstStyle/>
+          <a:p>
+            <a:r>
+              <a:rPr sz="1000" b="1" i="0">
+                <a:solidFill>
+                  <a:srgbClr val="C9184A"/>
+                </a:solidFill>
+                <a:latin typeface="Calibri"/>
+              </a:rPr>
+              <a:t>ONE QUESTION, STEP BY STEP</a:t>
+            </a:r>
+          </a:p>
+        </p:txBody>
+      </p:sp>
+      <p:sp>
+        <p:nvSpPr>
+          <p:cNvPr id="5" name="Rounded Rectangle 4"/>
+          <p:cNvSpPr/>
+          <p:nvPr/>
+        </p:nvSpPr>
+        <p:spPr>
+          <a:xfrm>
+            <a:off x="365760" y="1783080"/>
+            <a:ext cx="2011680" cy="2926080"/>
+          </a:xfrm>
+          <a:prstGeom prst="roundRect">
+            <a:avLst>
+              <a:gd name="adj" fmla="val 8000"/>
+            </a:avLst>
+          </a:prstGeom>
+          <a:solidFill>
+            <a:srgbClr val="F8F9FB"/>
+          </a:solidFill>
+          <a:ln>
+            <a:noFill/>
+          </a:ln>
+        </p:spPr>
+        <p:style>
+          <a:lnRef idx="1">
+            <a:schemeClr val="accent1"/>
+          </a:lnRef>
+          <a:fillRef idx="3">
+            <a:schemeClr val="accent1"/>
+          </a:fillRef>
+          <a:effectRef idx="2">
+            <a:schemeClr val="accent1"/>
+          </a:effectRef>
+          <a:fontRef idx="minor">
+            <a:schemeClr val="lt1"/>
+          </a:fontRef>
+        </p:style>
+        <p:txBody>
+          <a:bodyPr rtlCol="0" anchor="ctr"/>
+          <a:lstStyle/>
+          <a:p>
+            <a:pPr algn="ctr"/>
+            <a:endParaRPr/>
+          </a:p>
+        </p:txBody>
+      </p:sp>
+      <p:sp>
+        <p:nvSpPr>
+          <p:cNvPr id="6" name="TextBox 5"/>
+          <p:cNvSpPr txBox="1"/>
+          <p:nvPr/>
+        </p:nvSpPr>
+        <p:spPr>
+          <a:xfrm>
+            <a:off x="502920" y="1892807"/>
+            <a:ext cx="457200" cy="502920"/>
+          </a:xfrm>
+          <a:prstGeom prst="rect">
+            <a:avLst/>
+          </a:prstGeom>
+          <a:noFill/>
+        </p:spPr>
+        <p:txBody>
+          <a:bodyPr wrap="square" lIns="0" tIns="0" rIns="0" bIns="0">
+            <a:spAutoFit/>
+          </a:bodyPr>
+          <a:lstStyle/>
+          <a:p>
+            <a:r>
+              <a:rPr sz="2800" b="1" i="0">
+                <a:solidFill>
+                  <a:srgbClr val="C9184A"/>
+                </a:solidFill>
+                <a:latin typeface="Georgia"/>
+              </a:rPr>
+              <a:t>1</a:t>
+            </a:r>
+          </a:p>
+        </p:txBody>
+      </p:sp>
+      <p:sp>
+        <p:nvSpPr>
+          <p:cNvPr id="7" name="TextBox 6"/>
+          <p:cNvSpPr txBox="1"/>
+          <p:nvPr/>
+        </p:nvSpPr>
+        <p:spPr>
+          <a:xfrm>
+            <a:off x="502920" y="2441448"/>
+            <a:ext cx="1737360" cy="320040"/>
+          </a:xfrm>
+          <a:prstGeom prst="rect">
+            <a:avLst/>
+          </a:prstGeom>
+          <a:noFill/>
+        </p:spPr>
+        <p:txBody>
+          <a:bodyPr wrap="square" lIns="0" tIns="0" rIns="0" bIns="0">
+            <a:spAutoFit/>
+          </a:bodyPr>
+          <a:lstStyle/>
+          <a:p>
+            <a:r>
+              <a:rPr sz="1300" b="1" i="0">
+                <a:solidFill>
+                  <a:srgbClr val="1A1A2E"/>
+                </a:solidFill>
+                <a:latin typeface="Calibri"/>
+              </a:rPr>
+              <a:t>Question arrives</a:t>
+            </a:r>
+          </a:p>
+        </p:txBody>
+      </p:sp>
+      <p:sp>
+        <p:nvSpPr>
+          <p:cNvPr id="8" name="TextBox 7"/>
+          <p:cNvSpPr txBox="1"/>
+          <p:nvPr/>
+        </p:nvSpPr>
+        <p:spPr>
+          <a:xfrm>
+            <a:off x="502920" y="2788920"/>
+            <a:ext cx="1737360" cy="228600"/>
+          </a:xfrm>
+          <a:prstGeom prst="rect">
+            <a:avLst/>
+          </a:prstGeom>
+          <a:noFill/>
+        </p:spPr>
+        <p:txBody>
+          <a:bodyPr wrap="square" lIns="0" tIns="0" rIns="0" bIns="0">
+            <a:spAutoFit/>
+          </a:bodyPr>
+          <a:lstStyle/>
+          <a:p>
+            <a:r>
+              <a:rPr sz="900" b="1" i="0">
+                <a:solidFill>
+                  <a:srgbClr val="C9184A"/>
+                </a:solidFill>
+                <a:latin typeface="Calibri"/>
+              </a:rPr>
+              <a:t>USER INPUT</a:t>
+            </a:r>
+          </a:p>
+        </p:txBody>
+      </p:sp>
+      <p:sp>
+        <p:nvSpPr>
+          <p:cNvPr id="9" name="TextBox 8"/>
+          <p:cNvSpPr txBox="1"/>
+          <p:nvPr/>
+        </p:nvSpPr>
+        <p:spPr>
+          <a:xfrm>
+            <a:off x="502920" y="3063239"/>
+            <a:ext cx="1737360" cy="1188720"/>
+          </a:xfrm>
+          <a:prstGeom prst="rect">
+            <a:avLst/>
+          </a:prstGeom>
+          <a:noFill/>
+        </p:spPr>
+        <p:txBody>
+          <a:bodyPr wrap="square" lIns="0" tIns="0" rIns="0" bIns="0">
+            <a:spAutoFit/>
+          </a:bodyPr>
+          <a:lstStyle/>
+          <a:p>
+            <a:r>
+              <a:rPr sz="1100" b="0" i="1">
+                <a:solidFill>
+                  <a:srgbClr val="1A1A2E"/>
+                </a:solidFill>
+                <a:latin typeface="Calibri"/>
+              </a:rPr>
+              <a:t>"Does the monster</a:t>
+            </a:r>
+          </a:p>
+          <a:p>
+            <a:r>
+              <a:rPr sz="1100" b="0" i="1">
+                <a:solidFill>
+                  <a:srgbClr val="1A1A2E"/>
+                </a:solidFill>
+                <a:latin typeface="Calibri"/>
+              </a:rPr>
+              <a:t>have a name?"</a:t>
+            </a:r>
+          </a:p>
+        </p:txBody>
+      </p:sp>
+      <p:sp>
+        <p:nvSpPr>
+          <p:cNvPr id="10" name="TextBox 9"/>
+          <p:cNvSpPr txBox="1"/>
+          <p:nvPr/>
+        </p:nvSpPr>
+        <p:spPr>
+          <a:xfrm>
+            <a:off x="502920" y="4160520"/>
+            <a:ext cx="1737360" cy="457200"/>
+          </a:xfrm>
+          <a:prstGeom prst="rect">
+            <a:avLst/>
+          </a:prstGeom>
+          <a:noFill/>
+        </p:spPr>
+        <p:txBody>
+          <a:bodyPr wrap="square" lIns="0" tIns="0" rIns="0" bIns="0">
+            <a:spAutoFit/>
+          </a:bodyPr>
+          <a:lstStyle/>
+          <a:p>
+            <a:r>
+              <a:rPr sz="900" b="0" i="1">
+                <a:solidFill>
+                  <a:srgbClr val="6B7280"/>
+                </a:solidFill>
+                <a:latin typeface="Calibri"/>
+              </a:rPr>
+              <a:t>plain text from</a:t>
+            </a:r>
+          </a:p>
+          <a:p>
+            <a:r>
+              <a:rPr sz="900" b="0" i="1">
+                <a:solidFill>
+                  <a:srgbClr val="6B7280"/>
+                </a:solidFill>
+                <a:latin typeface="Calibri"/>
+              </a:rPr>
+              <a:t>the user</a:t>
+            </a:r>
+          </a:p>
+        </p:txBody>
+      </p:sp>
+      <p:sp>
+        <p:nvSpPr>
+          <p:cNvPr id="11" name="Right Arrow 10"/>
+          <p:cNvSpPr/>
+          <p:nvPr/>
+        </p:nvSpPr>
+        <p:spPr>
+          <a:xfrm>
+            <a:off x="2382012" y="3191256"/>
+            <a:ext cx="109728" cy="109728"/>
+          </a:xfrm>
+          <a:prstGeom prst="rightArrow">
+            <a:avLst/>
+          </a:prstGeom>
+          <a:solidFill>
+            <a:srgbClr val="C9184A"/>
+          </a:solidFill>
+          <a:ln>
+            <a:noFill/>
+          </a:ln>
+        </p:spPr>
+        <p:style>
+          <a:lnRef idx="1">
+            <a:schemeClr val="accent1"/>
+          </a:lnRef>
+          <a:fillRef idx="3">
+            <a:schemeClr val="accent1"/>
+          </a:fillRef>
+          <a:effectRef idx="2">
+            <a:schemeClr val="accent1"/>
+          </a:effectRef>
+          <a:fontRef idx="minor">
+            <a:schemeClr val="lt1"/>
+          </a:fontRef>
+        </p:style>
+        <p:txBody>
+          <a:bodyPr rtlCol="0" anchor="ctr"/>
+          <a:lstStyle/>
+          <a:p>
+            <a:pPr algn="ctr"/>
+            <a:endParaRPr/>
+          </a:p>
+        </p:txBody>
+      </p:sp>
+      <p:sp>
+        <p:nvSpPr>
+          <p:cNvPr id="12" name="Rounded Rectangle 11"/>
+          <p:cNvSpPr/>
+          <p:nvPr/>
+        </p:nvSpPr>
+        <p:spPr>
+          <a:xfrm>
+            <a:off x="2496312" y="1783080"/>
+            <a:ext cx="2011680" cy="2926080"/>
+          </a:xfrm>
+          <a:prstGeom prst="roundRect">
+            <a:avLst>
+              <a:gd name="adj" fmla="val 8000"/>
+            </a:avLst>
+          </a:prstGeom>
+          <a:solidFill>
+            <a:srgbClr val="F8F9FB"/>
+          </a:solidFill>
+          <a:ln>
+            <a:noFill/>
+          </a:ln>
+        </p:spPr>
+        <p:style>
+          <a:lnRef idx="1">
+            <a:schemeClr val="accent1"/>
+          </a:lnRef>
+          <a:fillRef idx="3">
+            <a:schemeClr val="accent1"/>
+          </a:fillRef>
+          <a:effectRef idx="2">
+            <a:schemeClr val="accent1"/>
+          </a:effectRef>
+          <a:fontRef idx="minor">
+            <a:schemeClr val="lt1"/>
+          </a:fontRef>
+        </p:style>
+        <p:txBody>
+          <a:bodyPr rtlCol="0" anchor="ctr"/>
+          <a:lstStyle/>
+          <a:p>
+            <a:pPr algn="ctr"/>
+            <a:endParaRPr/>
+          </a:p>
+        </p:txBody>
+      </p:sp>
+      <p:sp>
+        <p:nvSpPr>
+          <p:cNvPr id="13" name="TextBox 12"/>
+          <p:cNvSpPr txBox="1"/>
+          <p:nvPr/>
+        </p:nvSpPr>
+        <p:spPr>
+          <a:xfrm>
+            <a:off x="2633472" y="1892807"/>
+            <a:ext cx="457200" cy="502920"/>
+          </a:xfrm>
+          <a:prstGeom prst="rect">
+            <a:avLst/>
+          </a:prstGeom>
+          <a:noFill/>
+        </p:spPr>
+        <p:txBody>
+          <a:bodyPr wrap="square" lIns="0" tIns="0" rIns="0" bIns="0">
+            <a:spAutoFit/>
+          </a:bodyPr>
+          <a:lstStyle/>
+          <a:p>
+            <a:r>
+              <a:rPr sz="2800" b="1" i="0">
+                <a:solidFill>
+                  <a:srgbClr val="C9184A"/>
+                </a:solidFill>
+                <a:latin typeface="Georgia"/>
+              </a:rPr>
+              <a:t>2</a:t>
+            </a:r>
+          </a:p>
+        </p:txBody>
+      </p:sp>
+      <p:sp>
+        <p:nvSpPr>
+          <p:cNvPr id="14" name="TextBox 13"/>
+          <p:cNvSpPr txBox="1"/>
+          <p:nvPr/>
+        </p:nvSpPr>
+        <p:spPr>
+          <a:xfrm>
+            <a:off x="2633472" y="2441448"/>
+            <a:ext cx="1737360" cy="320040"/>
+          </a:xfrm>
+          <a:prstGeom prst="rect">
+            <a:avLst/>
+          </a:prstGeom>
+          <a:noFill/>
+        </p:spPr>
+        <p:txBody>
+          <a:bodyPr wrap="square" lIns="0" tIns="0" rIns="0" bIns="0">
+            <a:spAutoFit/>
+          </a:bodyPr>
+          <a:lstStyle/>
+          <a:p>
+            <a:r>
+              <a:rPr sz="1300" b="1" i="0">
+                <a:solidFill>
+                  <a:srgbClr val="1A1A2E"/>
+                </a:solidFill>
+                <a:latin typeface="Calibri"/>
+              </a:rPr>
+              <a:t>Embed the query</a:t>
+            </a:r>
+          </a:p>
+        </p:txBody>
+      </p:sp>
+      <p:sp>
+        <p:nvSpPr>
+          <p:cNvPr id="15" name="TextBox 14"/>
+          <p:cNvSpPr txBox="1"/>
+          <p:nvPr/>
+        </p:nvSpPr>
+        <p:spPr>
+          <a:xfrm>
+            <a:off x="2633472" y="2788920"/>
+            <a:ext cx="1737360" cy="228600"/>
+          </a:xfrm>
+          <a:prstGeom prst="rect">
+            <a:avLst/>
+          </a:prstGeom>
+          <a:noFill/>
+        </p:spPr>
+        <p:txBody>
+          <a:bodyPr wrap="square" lIns="0" tIns="0" rIns="0" bIns="0">
+            <a:spAutoFit/>
+          </a:bodyPr>
+          <a:lstStyle/>
+          <a:p>
+            <a:r>
+              <a:rPr sz="900" b="1" i="0">
+                <a:solidFill>
+                  <a:srgbClr val="C9184A"/>
+                </a:solidFill>
+                <a:latin typeface="Calibri"/>
+              </a:rPr>
+              <a:t>768-DIM VECTOR</a:t>
+            </a:r>
+          </a:p>
+        </p:txBody>
+      </p:sp>
+      <p:sp>
+        <p:nvSpPr>
+          <p:cNvPr id="16" name="TextBox 15"/>
+          <p:cNvSpPr txBox="1"/>
+          <p:nvPr/>
+        </p:nvSpPr>
+        <p:spPr>
+          <a:xfrm>
+            <a:off x="2633472" y="3063239"/>
+            <a:ext cx="1737360" cy="1188720"/>
+          </a:xfrm>
+          <a:prstGeom prst="rect">
+            <a:avLst/>
+          </a:prstGeom>
+          <a:noFill/>
+        </p:spPr>
+        <p:txBody>
+          <a:bodyPr wrap="square" lIns="0" tIns="0" rIns="0" bIns="0">
+            <a:spAutoFit/>
+          </a:bodyPr>
+          <a:lstStyle/>
+          <a:p>
+            <a:r>
+              <a:rPr sz="1100" b="0" i="0">
+                <a:solidFill>
+                  <a:srgbClr val="1A1A2E"/>
+                </a:solidFill>
+                <a:latin typeface="Consolas"/>
+              </a:rPr>
+              <a:t>[ 0.08, -0.21,</a:t>
+            </a:r>
+          </a:p>
+          <a:p>
+            <a:r>
+              <a:rPr sz="1100" b="0" i="0">
+                <a:solidFill>
+                  <a:srgbClr val="1A1A2E"/>
+                </a:solidFill>
+                <a:latin typeface="Consolas"/>
+              </a:rPr>
+              <a:t>  0.44, -0.03,</a:t>
+            </a:r>
+          </a:p>
+          <a:p>
+            <a:r>
+              <a:rPr sz="1100" b="0" i="0">
+                <a:solidFill>
+                  <a:srgbClr val="1A1A2E"/>
+                </a:solidFill>
+                <a:latin typeface="Consolas"/>
+              </a:rPr>
+              <a:t>  0.17, ... ]</a:t>
+            </a:r>
+          </a:p>
+        </p:txBody>
+      </p:sp>
+      <p:sp>
+        <p:nvSpPr>
+          <p:cNvPr id="17" name="TextBox 16"/>
+          <p:cNvSpPr txBox="1"/>
+          <p:nvPr/>
+        </p:nvSpPr>
+        <p:spPr>
+          <a:xfrm>
+            <a:off x="2633472" y="4160520"/>
+            <a:ext cx="1737360" cy="457200"/>
+          </a:xfrm>
+          <a:prstGeom prst="rect">
+            <a:avLst/>
+          </a:prstGeom>
+          <a:noFill/>
+        </p:spPr>
+        <p:txBody>
+          <a:bodyPr wrap="square" lIns="0" tIns="0" rIns="0" bIns="0">
+            <a:spAutoFit/>
+          </a:bodyPr>
+          <a:lstStyle/>
+          <a:p>
+            <a:r>
+              <a:rPr sz="900" b="0" i="1">
+                <a:solidFill>
+                  <a:srgbClr val="6B7280"/>
+                </a:solidFill>
+                <a:latin typeface="Calibri"/>
+              </a:rPr>
+              <a:t>same model as</a:t>
+            </a:r>
+          </a:p>
+          <a:p>
+            <a:r>
+              <a:rPr sz="900" b="0" i="1">
+                <a:solidFill>
+                  <a:srgbClr val="6B7280"/>
+                </a:solidFill>
+                <a:latin typeface="Calibri"/>
+              </a:rPr>
+              <a:t>indexing phase</a:t>
+            </a:r>
+          </a:p>
+        </p:txBody>
+      </p:sp>
+      <p:sp>
+        <p:nvSpPr>
+          <p:cNvPr id="18" name="Right Arrow 17"/>
+          <p:cNvSpPr/>
+          <p:nvPr/>
+        </p:nvSpPr>
+        <p:spPr>
+          <a:xfrm>
+            <a:off x="4512564" y="3191256"/>
+            <a:ext cx="109728" cy="109728"/>
+          </a:xfrm>
+          <a:prstGeom prst="rightArrow">
+            <a:avLst/>
+          </a:prstGeom>
+          <a:solidFill>
+            <a:srgbClr val="C9184A"/>
+          </a:solidFill>
+          <a:ln>
+            <a:noFill/>
+          </a:ln>
+        </p:spPr>
+        <p:style>
+          <a:lnRef idx="1">
+            <a:schemeClr val="accent1"/>
+          </a:lnRef>
+          <a:fillRef idx="3">
+            <a:schemeClr val="accent1"/>
+          </a:fillRef>
+          <a:effectRef idx="2">
+            <a:schemeClr val="accent1"/>
+          </a:effectRef>
+          <a:fontRef idx="minor">
+            <a:schemeClr val="lt1"/>
+          </a:fontRef>
+        </p:style>
+        <p:txBody>
+          <a:bodyPr rtlCol="0" anchor="ctr"/>
+          <a:lstStyle/>
+          <a:p>
+            <a:pPr algn="ctr"/>
+            <a:endParaRPr/>
+          </a:p>
+        </p:txBody>
+      </p:sp>
+      <p:sp>
+        <p:nvSpPr>
+          <p:cNvPr id="19" name="Rounded Rectangle 18"/>
+          <p:cNvSpPr/>
+          <p:nvPr/>
+        </p:nvSpPr>
+        <p:spPr>
+          <a:xfrm>
+            <a:off x="4626864" y="1783080"/>
+            <a:ext cx="2011680" cy="2926080"/>
+          </a:xfrm>
+          <a:prstGeom prst="roundRect">
+            <a:avLst>
+              <a:gd name="adj" fmla="val 8000"/>
+            </a:avLst>
+          </a:prstGeom>
+          <a:solidFill>
+            <a:srgbClr val="F8F9FB"/>
+          </a:solidFill>
+          <a:ln>
+            <a:noFill/>
+          </a:ln>
+        </p:spPr>
+        <p:style>
+          <a:lnRef idx="1">
+            <a:schemeClr val="accent1"/>
+          </a:lnRef>
+          <a:fillRef idx="3">
+            <a:schemeClr val="accent1"/>
+          </a:fillRef>
+          <a:effectRef idx="2">
+            <a:schemeClr val="accent1"/>
+          </a:effectRef>
+          <a:fontRef idx="minor">
+            <a:schemeClr val="lt1"/>
+          </a:fontRef>
+        </p:style>
+        <p:txBody>
+          <a:bodyPr rtlCol="0" anchor="ctr"/>
+          <a:lstStyle/>
+          <a:p>
+            <a:pPr algn="ctr"/>
+            <a:endParaRPr/>
+          </a:p>
+        </p:txBody>
+      </p:sp>
+      <p:sp>
+        <p:nvSpPr>
+          <p:cNvPr id="20" name="TextBox 19"/>
+          <p:cNvSpPr txBox="1"/>
+          <p:nvPr/>
+        </p:nvSpPr>
+        <p:spPr>
+          <a:xfrm>
+            <a:off x="4764024" y="1892807"/>
+            <a:ext cx="457200" cy="502920"/>
+          </a:xfrm>
+          <a:prstGeom prst="rect">
+            <a:avLst/>
+          </a:prstGeom>
+          <a:noFill/>
+        </p:spPr>
+        <p:txBody>
+          <a:bodyPr wrap="square" lIns="0" tIns="0" rIns="0" bIns="0">
+            <a:spAutoFit/>
+          </a:bodyPr>
+          <a:lstStyle/>
+          <a:p>
+            <a:r>
+              <a:rPr sz="2800" b="1" i="0">
+                <a:solidFill>
+                  <a:srgbClr val="C9184A"/>
+                </a:solidFill>
+                <a:latin typeface="Georgia"/>
+              </a:rPr>
+              <a:t>3</a:t>
+            </a:r>
+          </a:p>
+        </p:txBody>
+      </p:sp>
+      <p:sp>
+        <p:nvSpPr>
+          <p:cNvPr id="21" name="TextBox 20"/>
+          <p:cNvSpPr txBox="1"/>
+          <p:nvPr/>
+        </p:nvSpPr>
+        <p:spPr>
+          <a:xfrm>
+            <a:off x="4764024" y="2441448"/>
+            <a:ext cx="1737360" cy="320040"/>
+          </a:xfrm>
+          <a:prstGeom prst="rect">
+            <a:avLst/>
+          </a:prstGeom>
+          <a:noFill/>
+        </p:spPr>
+        <p:txBody>
+          <a:bodyPr wrap="square" lIns="0" tIns="0" rIns="0" bIns="0">
+            <a:spAutoFit/>
+          </a:bodyPr>
+          <a:lstStyle/>
+          <a:p>
+            <a:r>
+              <a:rPr sz="1300" b="1" i="0">
+                <a:solidFill>
+                  <a:srgbClr val="1A1A2E"/>
+                </a:solidFill>
+                <a:latin typeface="Calibri"/>
+              </a:rPr>
+              <a:t>Retrieve top-K</a:t>
+            </a:r>
+          </a:p>
+        </p:txBody>
+      </p:sp>
+      <p:sp>
+        <p:nvSpPr>
+          <p:cNvPr id="22" name="TextBox 21"/>
+          <p:cNvSpPr txBox="1"/>
+          <p:nvPr/>
+        </p:nvSpPr>
+        <p:spPr>
+          <a:xfrm>
+            <a:off x="4764024" y="2788920"/>
+            <a:ext cx="1737360" cy="228600"/>
+          </a:xfrm>
+          <a:prstGeom prst="rect">
+            <a:avLst/>
+          </a:prstGeom>
+          <a:noFill/>
+        </p:spPr>
+        <p:txBody>
+          <a:bodyPr wrap="square" lIns="0" tIns="0" rIns="0" bIns="0">
+            <a:spAutoFit/>
+          </a:bodyPr>
+          <a:lstStyle/>
+          <a:p>
+            <a:r>
+              <a:rPr sz="900" b="1" i="0">
+                <a:solidFill>
+                  <a:srgbClr val="C9184A"/>
+                </a:solidFill>
+                <a:latin typeface="Calibri"/>
+              </a:rPr>
+              <a:t>TOP CHUNK (EXCERPT)</a:t>
+            </a:r>
+          </a:p>
+        </p:txBody>
+      </p:sp>
+      <p:sp>
+        <p:nvSpPr>
+          <p:cNvPr id="23" name="TextBox 22"/>
+          <p:cNvSpPr txBox="1"/>
+          <p:nvPr/>
+        </p:nvSpPr>
+        <p:spPr>
+          <a:xfrm>
+            <a:off x="4764024" y="3063239"/>
+            <a:ext cx="1737360" cy="1188720"/>
+          </a:xfrm>
+          <a:prstGeom prst="rect">
+            <a:avLst/>
+          </a:prstGeom>
+          <a:noFill/>
+        </p:spPr>
+        <p:txBody>
+          <a:bodyPr wrap="square" lIns="0" tIns="0" rIns="0" bIns="0">
+            <a:spAutoFit/>
+          </a:bodyPr>
+          <a:lstStyle/>
+          <a:p>
+            <a:r>
+              <a:rPr sz="1100" b="0" i="1">
+                <a:solidFill>
+                  <a:srgbClr val="1A1A2E"/>
+                </a:solidFill>
+                <a:latin typeface="Calibri"/>
+              </a:rPr>
+              <a:t>"...I had selected</a:t>
+            </a:r>
+          </a:p>
+          <a:p>
+            <a:r>
+              <a:rPr sz="1100" b="0" i="1">
+                <a:solidFill>
+                  <a:srgbClr val="1A1A2E"/>
+                </a:solidFill>
+                <a:latin typeface="Calibri"/>
+              </a:rPr>
+              <a:t>his features as</a:t>
+            </a:r>
+          </a:p>
+          <a:p>
+            <a:r>
+              <a:rPr sz="1100" b="0" i="1">
+                <a:solidFill>
+                  <a:srgbClr val="1A1A2E"/>
+                </a:solidFill>
+                <a:latin typeface="Calibri"/>
+              </a:rPr>
+              <a:t>beautiful. Beautiful!</a:t>
+            </a:r>
+          </a:p>
+          <a:p>
+            <a:r>
+              <a:rPr sz="1100" b="0" i="1">
+                <a:solidFill>
+                  <a:srgbClr val="1A1A2E"/>
+                </a:solidFill>
+                <a:latin typeface="Calibri"/>
+              </a:rPr>
+              <a:t>Great God!..."</a:t>
+            </a:r>
+          </a:p>
+        </p:txBody>
+      </p:sp>
+      <p:sp>
+        <p:nvSpPr>
+          <p:cNvPr id="24" name="TextBox 23"/>
+          <p:cNvSpPr txBox="1"/>
+          <p:nvPr/>
+        </p:nvSpPr>
+        <p:spPr>
+          <a:xfrm>
+            <a:off x="4764024" y="4160520"/>
+            <a:ext cx="1737360" cy="457200"/>
+          </a:xfrm>
+          <a:prstGeom prst="rect">
+            <a:avLst/>
+          </a:prstGeom>
+          <a:noFill/>
+        </p:spPr>
+        <p:txBody>
+          <a:bodyPr wrap="square" lIns="0" tIns="0" rIns="0" bIns="0">
+            <a:spAutoFit/>
+          </a:bodyPr>
+          <a:lstStyle/>
+          <a:p>
+            <a:r>
+              <a:rPr sz="900" b="0" i="1">
+                <a:solidFill>
+                  <a:srgbClr val="6B7280"/>
+                </a:solidFill>
+                <a:latin typeface="Calibri"/>
+              </a:rPr>
+              <a:t>cosine match</a:t>
+            </a:r>
+          </a:p>
+          <a:p>
+            <a:r>
+              <a:rPr sz="900" b="0" i="1">
+                <a:solidFill>
+                  <a:srgbClr val="6B7280"/>
+                </a:solidFill>
+                <a:latin typeface="Calibri"/>
+              </a:rPr>
+              <a:t>from Vector DB</a:t>
+            </a:r>
+          </a:p>
+        </p:txBody>
+      </p:sp>
+      <p:sp>
+        <p:nvSpPr>
+          <p:cNvPr id="25" name="Right Arrow 24"/>
+          <p:cNvSpPr/>
+          <p:nvPr/>
+        </p:nvSpPr>
+        <p:spPr>
+          <a:xfrm>
+            <a:off x="6643116" y="3191256"/>
+            <a:ext cx="109728" cy="109728"/>
+          </a:xfrm>
+          <a:prstGeom prst="rightArrow">
+            <a:avLst/>
+          </a:prstGeom>
+          <a:solidFill>
+            <a:srgbClr val="C9184A"/>
+          </a:solidFill>
+          <a:ln>
+            <a:noFill/>
+          </a:ln>
+        </p:spPr>
+        <p:style>
+          <a:lnRef idx="1">
+            <a:schemeClr val="accent1"/>
+          </a:lnRef>
+          <a:fillRef idx="3">
+            <a:schemeClr val="accent1"/>
+          </a:fillRef>
+          <a:effectRef idx="2">
+            <a:schemeClr val="accent1"/>
+          </a:effectRef>
+          <a:fontRef idx="minor">
+            <a:schemeClr val="lt1"/>
+          </a:fontRef>
+        </p:style>
+        <p:txBody>
+          <a:bodyPr rtlCol="0" anchor="ctr"/>
+          <a:lstStyle/>
+          <a:p>
+            <a:pPr algn="ctr"/>
+            <a:endParaRPr/>
+          </a:p>
+        </p:txBody>
+      </p:sp>
+      <p:sp>
+        <p:nvSpPr>
+          <p:cNvPr id="26" name="Rounded Rectangle 25"/>
+          <p:cNvSpPr/>
+          <p:nvPr/>
+        </p:nvSpPr>
+        <p:spPr>
+          <a:xfrm>
+            <a:off x="6757416" y="1783080"/>
+            <a:ext cx="2011680" cy="2926080"/>
+          </a:xfrm>
+          <a:prstGeom prst="roundRect">
+            <a:avLst>
+              <a:gd name="adj" fmla="val 8000"/>
+            </a:avLst>
+          </a:prstGeom>
+          <a:solidFill>
+            <a:srgbClr val="DCFCE7"/>
+          </a:solidFill>
+          <a:ln>
+            <a:noFill/>
+          </a:ln>
+        </p:spPr>
+        <p:style>
+          <a:lnRef idx="1">
+            <a:schemeClr val="accent1"/>
+          </a:lnRef>
+          <a:fillRef idx="3">
+            <a:schemeClr val="accent1"/>
+          </a:fillRef>
+          <a:effectRef idx="2">
+            <a:schemeClr val="accent1"/>
+          </a:effectRef>
+          <a:fontRef idx="minor">
+            <a:schemeClr val="lt1"/>
+          </a:fontRef>
+        </p:style>
+        <p:txBody>
+          <a:bodyPr rtlCol="0" anchor="ctr"/>
+          <a:lstStyle/>
+          <a:p>
+            <a:pPr algn="ctr"/>
+            <a:endParaRPr/>
+          </a:p>
+        </p:txBody>
+      </p:sp>
+      <p:sp>
+        <p:nvSpPr>
+          <p:cNvPr id="27" name="TextBox 26"/>
+          <p:cNvSpPr txBox="1"/>
+          <p:nvPr/>
+        </p:nvSpPr>
+        <p:spPr>
+          <a:xfrm>
+            <a:off x="6894576" y="1892807"/>
+            <a:ext cx="457200" cy="502920"/>
+          </a:xfrm>
+          <a:prstGeom prst="rect">
+            <a:avLst/>
+          </a:prstGeom>
+          <a:noFill/>
+        </p:spPr>
+        <p:txBody>
+          <a:bodyPr wrap="square" lIns="0" tIns="0" rIns="0" bIns="0">
+            <a:spAutoFit/>
+          </a:bodyPr>
+          <a:lstStyle/>
+          <a:p>
+            <a:r>
+              <a:rPr sz="2800" b="1" i="0">
+                <a:solidFill>
+                  <a:srgbClr val="C9184A"/>
+                </a:solidFill>
+                <a:latin typeface="Georgia"/>
+              </a:rPr>
+              <a:t>4</a:t>
+            </a:r>
+          </a:p>
+        </p:txBody>
+      </p:sp>
+      <p:sp>
+        <p:nvSpPr>
+          <p:cNvPr id="28" name="TextBox 27"/>
+          <p:cNvSpPr txBox="1"/>
+          <p:nvPr/>
+        </p:nvSpPr>
+        <p:spPr>
+          <a:xfrm>
+            <a:off x="6894576" y="2441448"/>
+            <a:ext cx="1737360" cy="320040"/>
+          </a:xfrm>
+          <a:prstGeom prst="rect">
+            <a:avLst/>
+          </a:prstGeom>
+          <a:noFill/>
+        </p:spPr>
+        <p:txBody>
+          <a:bodyPr wrap="square" lIns="0" tIns="0" rIns="0" bIns="0">
+            <a:spAutoFit/>
+          </a:bodyPr>
+          <a:lstStyle/>
+          <a:p>
+            <a:r>
+              <a:rPr sz="1300" b="1" i="0">
+                <a:solidFill>
+                  <a:srgbClr val="15803D"/>
+                </a:solidFill>
+                <a:latin typeface="Calibri"/>
+              </a:rPr>
+              <a:t>Grounded answer</a:t>
+            </a:r>
+          </a:p>
+        </p:txBody>
+      </p:sp>
+      <p:sp>
+        <p:nvSpPr>
+          <p:cNvPr id="29" name="TextBox 28"/>
+          <p:cNvSpPr txBox="1"/>
+          <p:nvPr/>
+        </p:nvSpPr>
+        <p:spPr>
+          <a:xfrm>
+            <a:off x="6894576" y="2788920"/>
+            <a:ext cx="1737360" cy="228600"/>
+          </a:xfrm>
+          <a:prstGeom prst="rect">
+            <a:avLst/>
+          </a:prstGeom>
+          <a:noFill/>
+        </p:spPr>
+        <p:txBody>
+          <a:bodyPr wrap="square" lIns="0" tIns="0" rIns="0" bIns="0">
+            <a:spAutoFit/>
+          </a:bodyPr>
+          <a:lstStyle/>
+          <a:p>
+            <a:r>
+              <a:rPr sz="900" b="1" i="0">
+                <a:solidFill>
+                  <a:srgbClr val="15803D"/>
+                </a:solidFill>
+                <a:latin typeface="Calibri"/>
+              </a:rPr>
+              <a:t>LLM OUTPUT</a:t>
+            </a:r>
+          </a:p>
+        </p:txBody>
+      </p:sp>
+      <p:sp>
+        <p:nvSpPr>
+          <p:cNvPr id="30" name="TextBox 29"/>
+          <p:cNvSpPr txBox="1"/>
+          <p:nvPr/>
+        </p:nvSpPr>
+        <p:spPr>
+          <a:xfrm>
+            <a:off x="6894576" y="3063239"/>
+            <a:ext cx="1737360" cy="1188720"/>
+          </a:xfrm>
+          <a:prstGeom prst="rect">
+            <a:avLst/>
+          </a:prstGeom>
+          <a:noFill/>
+        </p:spPr>
+        <p:txBody>
+          <a:bodyPr wrap="square" lIns="0" tIns="0" rIns="0" bIns="0">
+            <a:spAutoFit/>
+          </a:bodyPr>
+          <a:lstStyle/>
+          <a:p>
+            <a:r>
+              <a:rPr sz="1100" b="0" i="1">
+                <a:solidFill>
+                  <a:srgbClr val="1A1A2E"/>
+                </a:solidFill>
+                <a:latin typeface="Calibri"/>
+              </a:rPr>
+              <a:t>"No. Shelley never</a:t>
+            </a:r>
+          </a:p>
+          <a:p>
+            <a:r>
+              <a:rPr sz="1100" b="0" i="1">
+                <a:solidFill>
+                  <a:srgbClr val="1A1A2E"/>
+                </a:solidFill>
+                <a:latin typeface="Calibri"/>
+              </a:rPr>
+              <a:t>names him — he is</a:t>
+            </a:r>
+          </a:p>
+          <a:p>
+            <a:r>
+              <a:rPr sz="1100" b="0" i="1">
+                <a:solidFill>
+                  <a:srgbClr val="1A1A2E"/>
+                </a:solidFill>
+                <a:latin typeface="Calibri"/>
+              </a:rPr>
+              <a:t>referred to as 'the</a:t>
+            </a:r>
+          </a:p>
+          <a:p>
+            <a:r>
+              <a:rPr sz="1100" b="0" i="1">
+                <a:solidFill>
+                  <a:srgbClr val="1A1A2E"/>
+                </a:solidFill>
+                <a:latin typeface="Calibri"/>
+              </a:rPr>
+              <a:t>creature,' 'wretch,'</a:t>
+            </a:r>
+          </a:p>
+          <a:p>
+            <a:r>
+              <a:rPr sz="1100" b="0" i="1">
+                <a:solidFill>
+                  <a:srgbClr val="1A1A2E"/>
+                </a:solidFill>
+                <a:latin typeface="Calibri"/>
+              </a:rPr>
+              <a:t>'daemon.'"</a:t>
+            </a:r>
+          </a:p>
+        </p:txBody>
+      </p:sp>
+      <p:sp>
+        <p:nvSpPr>
+          <p:cNvPr id="31" name="TextBox 30"/>
+          <p:cNvSpPr txBox="1"/>
+          <p:nvPr/>
+        </p:nvSpPr>
+        <p:spPr>
+          <a:xfrm>
+            <a:off x="6894576" y="4160520"/>
+            <a:ext cx="1737360" cy="457200"/>
+          </a:xfrm>
+          <a:prstGeom prst="rect">
+            <a:avLst/>
+          </a:prstGeom>
+          <a:noFill/>
+        </p:spPr>
+        <p:txBody>
+          <a:bodyPr wrap="square" lIns="0" tIns="0" rIns="0" bIns="0">
+            <a:spAutoFit/>
+          </a:bodyPr>
+          <a:lstStyle/>
+          <a:p>
+            <a:r>
+              <a:rPr sz="900" b="0" i="1">
+                <a:solidFill>
+                  <a:srgbClr val="6B7280"/>
+                </a:solidFill>
+                <a:latin typeface="Calibri"/>
+              </a:rPr>
+              <a:t>cites the text,</a:t>
+            </a:r>
+          </a:p>
+          <a:p>
+            <a:r>
+              <a:rPr sz="900" b="0" i="1">
+                <a:solidFill>
+                  <a:srgbClr val="6B7280"/>
+                </a:solidFill>
+                <a:latin typeface="Calibri"/>
+              </a:rPr>
+              <a:t>refuses to invent</a:t>
+            </a:r>
+          </a:p>
+        </p:txBody>
+      </p:sp>
+      <p:sp>
+        <p:nvSpPr>
+          <p:cNvPr id="32" name="TextBox 31"/>
+          <p:cNvSpPr txBox="1"/>
+          <p:nvPr/>
+        </p:nvSpPr>
+        <p:spPr>
+          <a:xfrm>
+            <a:off x="365760" y="4846320"/>
+            <a:ext cx="8412480" cy="228600"/>
+          </a:xfrm>
+          <a:prstGeom prst="rect">
+            <a:avLst/>
+          </a:prstGeom>
+          <a:noFill/>
+        </p:spPr>
+        <p:txBody>
+          <a:bodyPr wrap="square" lIns="0" tIns="0" rIns="0" bIns="0">
+            <a:spAutoFit/>
+          </a:bodyPr>
+          <a:lstStyle/>
+          <a:p>
+            <a:r>
+              <a:rPr sz="900" b="0" i="1">
+                <a:solidFill>
+                  <a:srgbClr val="6B7280"/>
+                </a:solidFill>
+                <a:latin typeface="Calibri"/>
+              </a:rPr>
+              <a:t>The shape of every RAG call — regardless of framework, model, or corpus.</a:t>
+            </a:r>
+          </a:p>
+        </p:txBody>
+      </p:sp>
+    </p:spTree>
+  </p:cSld>
+  <p:clrMapOvr>
+    <a:masterClrMapping/>
+  </p:clrMapOvr>
+</p:sld>
+</file>
+
+<file path=ppt/slides/slide7.xml><?xml version="1.0" encoding="utf-8"?>
 <p:sld xmlns:a="http://schemas.openxmlformats.org/drawingml/2006/main" xmlns:r="http://schemas.openxmlformats.org/officeDocument/2006/relationships" xmlns:p="http://schemas.openxmlformats.org/presentationml/2006/main">
   <p:cSld name="Slide 6">
     <p:bg>
@@ -9654,7 +14092,7 @@
                 <a:ea typeface="Calibri" pitchFamily="34" charset="-122"/>
                 <a:cs typeface="Calibri" pitchFamily="34" charset="-120"/>
               </a:rPr>
-              <a:t>06</a:t>
+              <a:t>07</a:t>
             </a:r>
             <a:r>
               <a:rPr lang="en-US" sz="1000" kern="0" spc="200" dirty="0">
@@ -9665,7 +14103,7 @@
                 <a:ea typeface="Calibri" pitchFamily="34" charset="-122"/>
                 <a:cs typeface="Calibri" pitchFamily="34" charset="-120"/>
               </a:rPr>
-              <a:t> / 12</a:t>
+              <a:t> / 15</a:t>
             </a:r>
             <a:endParaRPr lang="en-US" sz="1000" dirty="0"/>
           </a:p>
@@ -10516,7 +14954,7 @@
 </p:sld>
 </file>
 
-<file path=ppt/slides/slide7.xml><?xml version="1.0" encoding="utf-8"?>
+<file path=ppt/slides/slide8.xml><?xml version="1.0" encoding="utf-8"?>
 <p:sld xmlns:a="http://schemas.openxmlformats.org/drawingml/2006/main" xmlns:r="http://schemas.openxmlformats.org/officeDocument/2006/relationships" xmlns:p="http://schemas.openxmlformats.org/presentationml/2006/main">
   <p:cSld name="Slide 7">
     <p:bg>
@@ -10574,7 +15012,7 @@
                 <a:ea typeface="Calibri" pitchFamily="34" charset="-122"/>
                 <a:cs typeface="Calibri" pitchFamily="34" charset="-120"/>
               </a:rPr>
-              <a:t>07</a:t>
+              <a:t>08</a:t>
             </a:r>
             <a:r>
               <a:rPr lang="en-US" sz="1000" kern="0" spc="200" dirty="0">
@@ -10585,7 +15023,7 @@
                 <a:ea typeface="Calibri" pitchFamily="34" charset="-122"/>
                 <a:cs typeface="Calibri" pitchFamily="34" charset="-120"/>
               </a:rPr>
-              <a:t> / 12</a:t>
+              <a:t> / 15</a:t>
             </a:r>
             <a:endParaRPr lang="en-US" sz="1000" dirty="0"/>
           </a:p>
@@ -11405,7 +15843,7 @@
 </p:sld>
 </file>
 
-<file path=ppt/slides/slide8.xml><?xml version="1.0" encoding="utf-8"?>
+<file path=ppt/slides/slide9.xml><?xml version="1.0" encoding="utf-8"?>
 <p:sld xmlns:a="http://schemas.openxmlformats.org/drawingml/2006/main" xmlns:r="http://schemas.openxmlformats.org/officeDocument/2006/relationships" xmlns:p="http://schemas.openxmlformats.org/presentationml/2006/main">
   <p:cSld name="Slide 8">
     <p:bg>
@@ -11463,7 +15901,7 @@
                 <a:ea typeface="Calibri" pitchFamily="34" charset="-122"/>
                 <a:cs typeface="Calibri" pitchFamily="34" charset="-120"/>
               </a:rPr>
-              <a:t>08</a:t>
+              <a:t>09</a:t>
             </a:r>
             <a:r>
               <a:rPr lang="en-US" sz="1000" kern="0" spc="200" dirty="0">
@@ -11474,7 +15912,7 @@
                 <a:ea typeface="Calibri" pitchFamily="34" charset="-122"/>
                 <a:cs typeface="Calibri" pitchFamily="34" charset="-120"/>
               </a:rPr>
-              <a:t> / 12</a:t>
+              <a:t> / 15</a:t>
             </a:r>
             <a:endParaRPr lang="en-US" sz="1000" dirty="0"/>
           </a:p>
@@ -11582,1019 +16020,6 @@
           </a:prstGeom>
         </p:spPr>
       </p:pic>
-    </p:spTree>
-  </p:cSld>
-  <p:clrMapOvr>
-    <a:masterClrMapping/>
-  </p:clrMapOvr>
-</p:sld>
-</file>
-
-<file path=ppt/slides/slide9.xml><?xml version="1.0" encoding="utf-8"?>
-<p:sld xmlns:a="http://schemas.openxmlformats.org/drawingml/2006/main" xmlns:r="http://schemas.openxmlformats.org/officeDocument/2006/relationships" xmlns:p="http://schemas.openxmlformats.org/presentationml/2006/main">
-  <p:cSld name="Slide 9">
-    <p:bg>
-      <p:bgPr>
-        <a:solidFill>
-          <a:srgbClr val="FFFFFF"/>
-        </a:solidFill>
-        <a:effectLst/>
-      </p:bgPr>
-    </p:bg>
-    <p:spTree>
-      <p:nvGrpSpPr>
-        <p:cNvPr id="1" name=""/>
-        <p:cNvGrpSpPr/>
-        <p:nvPr/>
-      </p:nvGrpSpPr>
-      <p:grpSpPr>
-        <a:xfrm>
-          <a:off x="0" y="0"/>
-          <a:ext cx="0" cy="0"/>
-          <a:chOff x="0" y="0"/>
-          <a:chExt cx="0" cy="0"/>
-        </a:xfrm>
-      </p:grpSpPr>
-      <p:sp>
-        <p:nvSpPr>
-          <p:cNvPr id="2" name="Text 0"/>
-          <p:cNvSpPr/>
-          <p:nvPr/>
-        </p:nvSpPr>
-        <p:spPr>
-          <a:xfrm>
-            <a:off x="365760" y="228600"/>
-            <a:ext cx="1371600" cy="274320"/>
-          </a:xfrm>
-          <a:prstGeom prst="rect">
-            <a:avLst/>
-          </a:prstGeom>
-          <a:noFill/>
-          <a:ln/>
-        </p:spPr>
-        <p:txBody>
-          <a:bodyPr wrap="square" lIns="0" tIns="0" rIns="0" bIns="0" rtlCol="0" anchor="ctr"/>
-          <a:lstStyle/>
-          <a:p>
-            <a:pPr marL="0" indent="0">
-              <a:buNone/>
-            </a:pPr>
-            <a:r>
-              <a:rPr lang="en-US" sz="1000" b="1" kern="0" spc="200" dirty="0">
-                <a:solidFill>
-                  <a:srgbClr val="C9184A"/>
-                </a:solidFill>
-                <a:latin typeface="Calibri" pitchFamily="34" charset="0"/>
-                <a:ea typeface="Calibri" pitchFamily="34" charset="-122"/>
-                <a:cs typeface="Calibri" pitchFamily="34" charset="-120"/>
-              </a:rPr>
-              <a:t>09</a:t>
-            </a:r>
-            <a:r>
-              <a:rPr lang="en-US" sz="1000" kern="0" spc="200" dirty="0">
-                <a:solidFill>
-                  <a:srgbClr val="6B7280"/>
-                </a:solidFill>
-                <a:latin typeface="Calibri" pitchFamily="34" charset="0"/>
-                <a:ea typeface="Calibri" pitchFamily="34" charset="-122"/>
-                <a:cs typeface="Calibri" pitchFamily="34" charset="-120"/>
-              </a:rPr>
-              <a:t> / 12</a:t>
-            </a:r>
-            <a:endParaRPr lang="en-US" sz="1000" dirty="0"/>
-          </a:p>
-        </p:txBody>
-      </p:sp>
-      <p:sp>
-        <p:nvSpPr>
-          <p:cNvPr id="3" name="Text 1"/>
-          <p:cNvSpPr/>
-          <p:nvPr/>
-        </p:nvSpPr>
-        <p:spPr>
-          <a:xfrm>
-            <a:off x="365760" y="502920"/>
-            <a:ext cx="8412480" cy="822960"/>
-          </a:xfrm>
-          <a:prstGeom prst="rect">
-            <a:avLst/>
-          </a:prstGeom>
-          <a:noFill/>
-          <a:ln/>
-        </p:spPr>
-        <p:txBody>
-          <a:bodyPr wrap="square" lIns="0" tIns="0" rIns="0" bIns="0" rtlCol="0" anchor="ctr"/>
-          <a:lstStyle/>
-          <a:p>
-            <a:pPr marL="0" indent="0" algn="l">
-              <a:buNone/>
-            </a:pPr>
-            <a:r>
-              <a:rPr lang="en-US" sz="3200" b="1" dirty="0">
-                <a:solidFill>
-                  <a:srgbClr val="1A1A2E"/>
-                </a:solidFill>
-                <a:latin typeface="Georgia" pitchFamily="34" charset="0"/>
-                <a:ea typeface="Georgia" pitchFamily="34" charset="-122"/>
-                <a:cs typeface="Georgia" pitchFamily="34" charset="-120"/>
-              </a:rPr>
-              <a:t>Our tech stack</a:t>
-            </a:r>
-            <a:endParaRPr lang="en-US" sz="3200" dirty="0"/>
-          </a:p>
-        </p:txBody>
-      </p:sp>
-      <p:sp>
-        <p:nvSpPr>
-          <p:cNvPr id="4" name="Shape 2"/>
-          <p:cNvSpPr/>
-          <p:nvPr/>
-        </p:nvSpPr>
-        <p:spPr>
-          <a:xfrm>
-            <a:off x="365760" y="1600200"/>
-            <a:ext cx="2743200" cy="1417320"/>
-          </a:xfrm>
-          <a:prstGeom prst="rect">
-            <a:avLst/>
-          </a:prstGeom>
-          <a:solidFill>
-            <a:srgbClr val="FFFFFF"/>
-          </a:solidFill>
-          <a:ln w="12700">
-            <a:solidFill>
-              <a:srgbClr val="E5E7EB"/>
-            </a:solidFill>
-            <a:prstDash val="solid"/>
-          </a:ln>
-        </p:spPr>
-        <p:txBody>
-          <a:bodyPr/>
-          <a:lstStyle/>
-          <a:p>
-            <a:endParaRPr lang="en-US"/>
-          </a:p>
-        </p:txBody>
-      </p:sp>
-      <p:sp>
-        <p:nvSpPr>
-          <p:cNvPr id="5" name="Shape 3"/>
-          <p:cNvSpPr/>
-          <p:nvPr/>
-        </p:nvSpPr>
-        <p:spPr>
-          <a:xfrm>
-            <a:off x="365760" y="1600200"/>
-            <a:ext cx="73152" cy="1417320"/>
-          </a:xfrm>
-          <a:prstGeom prst="rect">
-            <a:avLst/>
-          </a:prstGeom>
-          <a:solidFill>
-            <a:srgbClr val="000000"/>
-          </a:solidFill>
-          <a:ln w="12700">
-            <a:solidFill>
-              <a:srgbClr val="000000"/>
-            </a:solidFill>
-            <a:prstDash val="solid"/>
-          </a:ln>
-        </p:spPr>
-        <p:txBody>
-          <a:bodyPr/>
-          <a:lstStyle/>
-          <a:p>
-            <a:endParaRPr lang="en-US"/>
-          </a:p>
-        </p:txBody>
-      </p:sp>
-      <p:sp>
-        <p:nvSpPr>
-          <p:cNvPr id="6" name="Text 4"/>
-          <p:cNvSpPr/>
-          <p:nvPr/>
-        </p:nvSpPr>
-        <p:spPr>
-          <a:xfrm>
-            <a:off x="640080" y="1828800"/>
-            <a:ext cx="2286000" cy="457200"/>
-          </a:xfrm>
-          <a:prstGeom prst="rect">
-            <a:avLst/>
-          </a:prstGeom>
-          <a:noFill/>
-          <a:ln/>
-        </p:spPr>
-        <p:txBody>
-          <a:bodyPr wrap="square" lIns="0" tIns="0" rIns="0" bIns="0" rtlCol="0" anchor="ctr"/>
-          <a:lstStyle/>
-          <a:p>
-            <a:pPr marL="0" indent="0">
-              <a:buNone/>
-            </a:pPr>
-            <a:r>
-              <a:rPr lang="en-US" sz="2200" b="1" dirty="0">
-                <a:solidFill>
-                  <a:srgbClr val="1A1A2E"/>
-                </a:solidFill>
-                <a:latin typeface="Georgia" pitchFamily="34" charset="0"/>
-                <a:ea typeface="Georgia" pitchFamily="34" charset="-122"/>
-                <a:cs typeface="Georgia" pitchFamily="34" charset="-120"/>
-              </a:rPr>
-              <a:t>Ollama</a:t>
-            </a:r>
-            <a:endParaRPr lang="en-US" sz="2200" dirty="0"/>
-          </a:p>
-        </p:txBody>
-      </p:sp>
-      <p:sp>
-        <p:nvSpPr>
-          <p:cNvPr id="7" name="Text 5"/>
-          <p:cNvSpPr/>
-          <p:nvPr/>
-        </p:nvSpPr>
-        <p:spPr>
-          <a:xfrm>
-            <a:off x="640080" y="2377440"/>
-            <a:ext cx="2286000" cy="457200"/>
-          </a:xfrm>
-          <a:prstGeom prst="rect">
-            <a:avLst/>
-          </a:prstGeom>
-          <a:noFill/>
-          <a:ln/>
-        </p:spPr>
-        <p:txBody>
-          <a:bodyPr wrap="square" lIns="0" tIns="0" rIns="0" bIns="0" rtlCol="0" anchor="ctr"/>
-          <a:lstStyle/>
-          <a:p>
-            <a:pPr marL="0" indent="0">
-              <a:buNone/>
-            </a:pPr>
-            <a:r>
-              <a:rPr lang="en-US" sz="1200" dirty="0">
-                <a:solidFill>
-                  <a:srgbClr val="6B7280"/>
-                </a:solidFill>
-                <a:latin typeface="Calibri" pitchFamily="34" charset="0"/>
-                <a:ea typeface="Calibri" pitchFamily="34" charset="-122"/>
-                <a:cs typeface="Calibri" pitchFamily="34" charset="-120"/>
-              </a:rPr>
-              <a:t>Local LLM runtime</a:t>
-            </a:r>
-            <a:endParaRPr lang="en-US" sz="1200" dirty="0"/>
-          </a:p>
-        </p:txBody>
-      </p:sp>
-      <p:sp>
-        <p:nvSpPr>
-          <p:cNvPr id="8" name="Shape 6"/>
-          <p:cNvSpPr/>
-          <p:nvPr/>
-        </p:nvSpPr>
-        <p:spPr>
-          <a:xfrm>
-            <a:off x="3246120" y="1600200"/>
-            <a:ext cx="2743200" cy="1417320"/>
-          </a:xfrm>
-          <a:prstGeom prst="rect">
-            <a:avLst/>
-          </a:prstGeom>
-          <a:solidFill>
-            <a:srgbClr val="FFFFFF"/>
-          </a:solidFill>
-          <a:ln w="12700">
-            <a:solidFill>
-              <a:srgbClr val="E5E7EB"/>
-            </a:solidFill>
-            <a:prstDash val="solid"/>
-          </a:ln>
-        </p:spPr>
-        <p:txBody>
-          <a:bodyPr/>
-          <a:lstStyle/>
-          <a:p>
-            <a:endParaRPr lang="en-US"/>
-          </a:p>
-        </p:txBody>
-      </p:sp>
-      <p:sp>
-        <p:nvSpPr>
-          <p:cNvPr id="9" name="Shape 7"/>
-          <p:cNvSpPr/>
-          <p:nvPr/>
-        </p:nvSpPr>
-        <p:spPr>
-          <a:xfrm>
-            <a:off x="3246120" y="1600200"/>
-            <a:ext cx="73152" cy="1417320"/>
-          </a:xfrm>
-          <a:prstGeom prst="rect">
-            <a:avLst/>
-          </a:prstGeom>
-          <a:solidFill>
-            <a:srgbClr val="6366F1"/>
-          </a:solidFill>
-          <a:ln w="12700">
-            <a:solidFill>
-              <a:srgbClr val="6366F1"/>
-            </a:solidFill>
-            <a:prstDash val="solid"/>
-          </a:ln>
-        </p:spPr>
-        <p:txBody>
-          <a:bodyPr/>
-          <a:lstStyle/>
-          <a:p>
-            <a:endParaRPr lang="en-US"/>
-          </a:p>
-        </p:txBody>
-      </p:sp>
-      <p:sp>
-        <p:nvSpPr>
-          <p:cNvPr id="10" name="Text 8"/>
-          <p:cNvSpPr/>
-          <p:nvPr/>
-        </p:nvSpPr>
-        <p:spPr>
-          <a:xfrm>
-            <a:off x="3520440" y="1828800"/>
-            <a:ext cx="2286000" cy="457200"/>
-          </a:xfrm>
-          <a:prstGeom prst="rect">
-            <a:avLst/>
-          </a:prstGeom>
-          <a:noFill/>
-          <a:ln/>
-        </p:spPr>
-        <p:txBody>
-          <a:bodyPr wrap="square" lIns="0" tIns="0" rIns="0" bIns="0" rtlCol="0" anchor="ctr"/>
-          <a:lstStyle/>
-          <a:p>
-            <a:pPr marL="0" indent="0">
-              <a:buNone/>
-            </a:pPr>
-            <a:r>
-              <a:rPr lang="en-US" sz="2200" b="1" dirty="0">
-                <a:solidFill>
-                  <a:srgbClr val="1A1A2E"/>
-                </a:solidFill>
-                <a:latin typeface="Georgia" pitchFamily="34" charset="0"/>
-                <a:ea typeface="Georgia" pitchFamily="34" charset="-122"/>
-                <a:cs typeface="Georgia" pitchFamily="34" charset="-120"/>
-              </a:rPr>
-              <a:t>LangChain</a:t>
-            </a:r>
-            <a:endParaRPr lang="en-US" sz="2200" dirty="0"/>
-          </a:p>
-        </p:txBody>
-      </p:sp>
-      <p:sp>
-        <p:nvSpPr>
-          <p:cNvPr id="11" name="Text 9"/>
-          <p:cNvSpPr/>
-          <p:nvPr/>
-        </p:nvSpPr>
-        <p:spPr>
-          <a:xfrm>
-            <a:off x="3520440" y="2377440"/>
-            <a:ext cx="2286000" cy="457200"/>
-          </a:xfrm>
-          <a:prstGeom prst="rect">
-            <a:avLst/>
-          </a:prstGeom>
-          <a:noFill/>
-          <a:ln/>
-        </p:spPr>
-        <p:txBody>
-          <a:bodyPr wrap="square" lIns="0" tIns="0" rIns="0" bIns="0" rtlCol="0" anchor="ctr"/>
-          <a:lstStyle/>
-          <a:p>
-            <a:pPr marL="0" indent="0">
-              <a:buNone/>
-            </a:pPr>
-            <a:r>
-              <a:rPr lang="en-US" sz="1200" dirty="0">
-                <a:solidFill>
-                  <a:srgbClr val="6B7280"/>
-                </a:solidFill>
-                <a:latin typeface="Calibri" pitchFamily="34" charset="0"/>
-                <a:ea typeface="Calibri" pitchFamily="34" charset="-122"/>
-                <a:cs typeface="Calibri" pitchFamily="34" charset="-120"/>
-              </a:rPr>
-              <a:t>RAG primitives &amp; glue</a:t>
-            </a:r>
-            <a:endParaRPr lang="en-US" sz="1200" dirty="0"/>
-          </a:p>
-        </p:txBody>
-      </p:sp>
-      <p:sp>
-        <p:nvSpPr>
-          <p:cNvPr id="12" name="Shape 10"/>
-          <p:cNvSpPr/>
-          <p:nvPr/>
-        </p:nvSpPr>
-        <p:spPr>
-          <a:xfrm>
-            <a:off x="6126480" y="1600200"/>
-            <a:ext cx="2743200" cy="1417320"/>
-          </a:xfrm>
-          <a:prstGeom prst="rect">
-            <a:avLst/>
-          </a:prstGeom>
-          <a:solidFill>
-            <a:srgbClr val="FFFFFF"/>
-          </a:solidFill>
-          <a:ln w="12700">
-            <a:solidFill>
-              <a:srgbClr val="E5E7EB"/>
-            </a:solidFill>
-            <a:prstDash val="solid"/>
-          </a:ln>
-        </p:spPr>
-        <p:txBody>
-          <a:bodyPr/>
-          <a:lstStyle/>
-          <a:p>
-            <a:endParaRPr lang="en-US"/>
-          </a:p>
-        </p:txBody>
-      </p:sp>
-      <p:sp>
-        <p:nvSpPr>
-          <p:cNvPr id="13" name="Shape 11"/>
-          <p:cNvSpPr/>
-          <p:nvPr/>
-        </p:nvSpPr>
-        <p:spPr>
-          <a:xfrm>
-            <a:off x="6126480" y="1600200"/>
-            <a:ext cx="73152" cy="1417320"/>
-          </a:xfrm>
-          <a:prstGeom prst="rect">
-            <a:avLst/>
-          </a:prstGeom>
-          <a:solidFill>
-            <a:srgbClr val="0EA5E9"/>
-          </a:solidFill>
-          <a:ln w="12700">
-            <a:solidFill>
-              <a:srgbClr val="0EA5E9"/>
-            </a:solidFill>
-            <a:prstDash val="solid"/>
-          </a:ln>
-        </p:spPr>
-        <p:txBody>
-          <a:bodyPr/>
-          <a:lstStyle/>
-          <a:p>
-            <a:endParaRPr lang="en-US"/>
-          </a:p>
-        </p:txBody>
-      </p:sp>
-      <p:sp>
-        <p:nvSpPr>
-          <p:cNvPr id="14" name="Text 12"/>
-          <p:cNvSpPr/>
-          <p:nvPr/>
-        </p:nvSpPr>
-        <p:spPr>
-          <a:xfrm>
-            <a:off x="6400800" y="1828800"/>
-            <a:ext cx="2286000" cy="457200"/>
-          </a:xfrm>
-          <a:prstGeom prst="rect">
-            <a:avLst/>
-          </a:prstGeom>
-          <a:noFill/>
-          <a:ln/>
-        </p:spPr>
-        <p:txBody>
-          <a:bodyPr wrap="square" lIns="0" tIns="0" rIns="0" bIns="0" rtlCol="0" anchor="ctr"/>
-          <a:lstStyle/>
-          <a:p>
-            <a:pPr marL="0" indent="0">
-              <a:buNone/>
-            </a:pPr>
-            <a:r>
-              <a:rPr lang="en-US" sz="2200" b="1" dirty="0">
-                <a:solidFill>
-                  <a:srgbClr val="1A1A2E"/>
-                </a:solidFill>
-                <a:latin typeface="Georgia" pitchFamily="34" charset="0"/>
-                <a:ea typeface="Georgia" pitchFamily="34" charset="-122"/>
-                <a:cs typeface="Georgia" pitchFamily="34" charset="-120"/>
-              </a:rPr>
-              <a:t>ChromaDB</a:t>
-            </a:r>
-            <a:endParaRPr lang="en-US" sz="2200" dirty="0"/>
-          </a:p>
-        </p:txBody>
-      </p:sp>
-      <p:sp>
-        <p:nvSpPr>
-          <p:cNvPr id="15" name="Text 13"/>
-          <p:cNvSpPr/>
-          <p:nvPr/>
-        </p:nvSpPr>
-        <p:spPr>
-          <a:xfrm>
-            <a:off x="6400800" y="2377440"/>
-            <a:ext cx="2286000" cy="457200"/>
-          </a:xfrm>
-          <a:prstGeom prst="rect">
-            <a:avLst/>
-          </a:prstGeom>
-          <a:noFill/>
-          <a:ln/>
-        </p:spPr>
-        <p:txBody>
-          <a:bodyPr wrap="square" lIns="0" tIns="0" rIns="0" bIns="0" rtlCol="0" anchor="ctr"/>
-          <a:lstStyle/>
-          <a:p>
-            <a:pPr marL="0" indent="0">
-              <a:buNone/>
-            </a:pPr>
-            <a:r>
-              <a:rPr lang="en-US" sz="1200" dirty="0">
-                <a:solidFill>
-                  <a:srgbClr val="6B7280"/>
-                </a:solidFill>
-                <a:latin typeface="Calibri" pitchFamily="34" charset="0"/>
-                <a:ea typeface="Calibri" pitchFamily="34" charset="-122"/>
-                <a:cs typeface="Calibri" pitchFamily="34" charset="-120"/>
-              </a:rPr>
-              <a:t>Vector database</a:t>
-            </a:r>
-            <a:endParaRPr lang="en-US" sz="1200" dirty="0"/>
-          </a:p>
-        </p:txBody>
-      </p:sp>
-      <p:sp>
-        <p:nvSpPr>
-          <p:cNvPr id="16" name="Shape 14"/>
-          <p:cNvSpPr/>
-          <p:nvPr/>
-        </p:nvSpPr>
-        <p:spPr>
-          <a:xfrm>
-            <a:off x="365760" y="3154680"/>
-            <a:ext cx="2743200" cy="1417320"/>
-          </a:xfrm>
-          <a:prstGeom prst="rect">
-            <a:avLst/>
-          </a:prstGeom>
-          <a:solidFill>
-            <a:srgbClr val="FFFFFF"/>
-          </a:solidFill>
-          <a:ln w="12700">
-            <a:solidFill>
-              <a:srgbClr val="E5E7EB"/>
-            </a:solidFill>
-            <a:prstDash val="solid"/>
-          </a:ln>
-        </p:spPr>
-        <p:txBody>
-          <a:bodyPr/>
-          <a:lstStyle/>
-          <a:p>
-            <a:endParaRPr lang="en-US"/>
-          </a:p>
-        </p:txBody>
-      </p:sp>
-      <p:sp>
-        <p:nvSpPr>
-          <p:cNvPr id="17" name="Shape 15"/>
-          <p:cNvSpPr/>
-          <p:nvPr/>
-        </p:nvSpPr>
-        <p:spPr>
-          <a:xfrm>
-            <a:off x="365760" y="3154680"/>
-            <a:ext cx="73152" cy="1417320"/>
-          </a:xfrm>
-          <a:prstGeom prst="rect">
-            <a:avLst/>
-          </a:prstGeom>
-          <a:solidFill>
-            <a:srgbClr val="C9184A"/>
-          </a:solidFill>
-          <a:ln w="12700">
-            <a:solidFill>
-              <a:srgbClr val="C9184A"/>
-            </a:solidFill>
-            <a:prstDash val="solid"/>
-          </a:ln>
-        </p:spPr>
-        <p:txBody>
-          <a:bodyPr/>
-          <a:lstStyle/>
-          <a:p>
-            <a:endParaRPr lang="en-US"/>
-          </a:p>
-        </p:txBody>
-      </p:sp>
-      <p:sp>
-        <p:nvSpPr>
-          <p:cNvPr id="18" name="Text 16"/>
-          <p:cNvSpPr/>
-          <p:nvPr/>
-        </p:nvSpPr>
-        <p:spPr>
-          <a:xfrm>
-            <a:off x="640080" y="3383280"/>
-            <a:ext cx="2286000" cy="457200"/>
-          </a:xfrm>
-          <a:prstGeom prst="rect">
-            <a:avLst/>
-          </a:prstGeom>
-          <a:noFill/>
-          <a:ln/>
-        </p:spPr>
-        <p:txBody>
-          <a:bodyPr wrap="square" lIns="0" tIns="0" rIns="0" bIns="0" rtlCol="0" anchor="ctr"/>
-          <a:lstStyle/>
-          <a:p>
-            <a:pPr marL="0" indent="0">
-              <a:buNone/>
-            </a:pPr>
-            <a:r>
-              <a:rPr lang="en-US" sz="2200" b="1" dirty="0">
-                <a:solidFill>
-                  <a:srgbClr val="1A1A2E"/>
-                </a:solidFill>
-                <a:latin typeface="Georgia" pitchFamily="34" charset="0"/>
-                <a:ea typeface="Georgia" pitchFamily="34" charset="-122"/>
-                <a:cs typeface="Georgia" pitchFamily="34" charset="-120"/>
-              </a:rPr>
-              <a:t>CrewAI</a:t>
-            </a:r>
-            <a:endParaRPr lang="en-US" sz="2200" dirty="0"/>
-          </a:p>
-        </p:txBody>
-      </p:sp>
-      <p:sp>
-        <p:nvSpPr>
-          <p:cNvPr id="19" name="Text 17"/>
-          <p:cNvSpPr/>
-          <p:nvPr/>
-        </p:nvSpPr>
-        <p:spPr>
-          <a:xfrm>
-            <a:off x="640080" y="3931920"/>
-            <a:ext cx="2286000" cy="457200"/>
-          </a:xfrm>
-          <a:prstGeom prst="rect">
-            <a:avLst/>
-          </a:prstGeom>
-          <a:noFill/>
-          <a:ln/>
-        </p:spPr>
-        <p:txBody>
-          <a:bodyPr wrap="square" lIns="0" tIns="0" rIns="0" bIns="0" rtlCol="0" anchor="ctr"/>
-          <a:lstStyle/>
-          <a:p>
-            <a:pPr marL="0" indent="0">
-              <a:buNone/>
-            </a:pPr>
-            <a:r>
-              <a:rPr lang="en-US" sz="1200" dirty="0">
-                <a:solidFill>
-                  <a:srgbClr val="6B7280"/>
-                </a:solidFill>
-                <a:latin typeface="Calibri" pitchFamily="34" charset="0"/>
-                <a:ea typeface="Calibri" pitchFamily="34" charset="-122"/>
-                <a:cs typeface="Calibri" pitchFamily="34" charset="-120"/>
-              </a:rPr>
-              <a:t>Multi-agent orchestration</a:t>
-            </a:r>
-            <a:endParaRPr lang="en-US" sz="1200" dirty="0"/>
-          </a:p>
-        </p:txBody>
-      </p:sp>
-      <p:sp>
-        <p:nvSpPr>
-          <p:cNvPr id="20" name="Shape 18"/>
-          <p:cNvSpPr/>
-          <p:nvPr/>
-        </p:nvSpPr>
-        <p:spPr>
-          <a:xfrm>
-            <a:off x="3246120" y="3154680"/>
-            <a:ext cx="2743200" cy="1417320"/>
-          </a:xfrm>
-          <a:prstGeom prst="rect">
-            <a:avLst/>
-          </a:prstGeom>
-          <a:solidFill>
-            <a:srgbClr val="FFFFFF"/>
-          </a:solidFill>
-          <a:ln w="12700">
-            <a:solidFill>
-              <a:srgbClr val="E5E7EB"/>
-            </a:solidFill>
-            <a:prstDash val="solid"/>
-          </a:ln>
-        </p:spPr>
-        <p:txBody>
-          <a:bodyPr/>
-          <a:lstStyle/>
-          <a:p>
-            <a:endParaRPr lang="en-US"/>
-          </a:p>
-        </p:txBody>
-      </p:sp>
-      <p:sp>
-        <p:nvSpPr>
-          <p:cNvPr id="21" name="Shape 19"/>
-          <p:cNvSpPr/>
-          <p:nvPr/>
-        </p:nvSpPr>
-        <p:spPr>
-          <a:xfrm>
-            <a:off x="3246120" y="3154680"/>
-            <a:ext cx="73152" cy="1417320"/>
-          </a:xfrm>
-          <a:prstGeom prst="rect">
-            <a:avLst/>
-          </a:prstGeom>
-          <a:solidFill>
-            <a:srgbClr val="F97316"/>
-          </a:solidFill>
-          <a:ln w="12700">
-            <a:solidFill>
-              <a:srgbClr val="F97316"/>
-            </a:solidFill>
-            <a:prstDash val="solid"/>
-          </a:ln>
-        </p:spPr>
-        <p:txBody>
-          <a:bodyPr/>
-          <a:lstStyle/>
-          <a:p>
-            <a:endParaRPr lang="en-US"/>
-          </a:p>
-        </p:txBody>
-      </p:sp>
-      <p:sp>
-        <p:nvSpPr>
-          <p:cNvPr id="22" name="Text 20"/>
-          <p:cNvSpPr/>
-          <p:nvPr/>
-        </p:nvSpPr>
-        <p:spPr>
-          <a:xfrm>
-            <a:off x="3520440" y="3383280"/>
-            <a:ext cx="2286000" cy="457200"/>
-          </a:xfrm>
-          <a:prstGeom prst="rect">
-            <a:avLst/>
-          </a:prstGeom>
-          <a:noFill/>
-          <a:ln/>
-        </p:spPr>
-        <p:txBody>
-          <a:bodyPr wrap="square" lIns="0" tIns="0" rIns="0" bIns="0" rtlCol="0" anchor="ctr"/>
-          <a:lstStyle/>
-          <a:p>
-            <a:pPr marL="0" indent="0">
-              <a:buNone/>
-            </a:pPr>
-            <a:r>
-              <a:rPr lang="en-US" sz="2200" b="1" dirty="0">
-                <a:solidFill>
-                  <a:srgbClr val="1A1A2E"/>
-                </a:solidFill>
-                <a:latin typeface="Georgia" pitchFamily="34" charset="0"/>
-                <a:ea typeface="Georgia" pitchFamily="34" charset="-122"/>
-                <a:cs typeface="Georgia" pitchFamily="34" charset="-120"/>
-              </a:rPr>
-              <a:t>Gradio</a:t>
-            </a:r>
-            <a:endParaRPr lang="en-US" sz="2200" dirty="0"/>
-          </a:p>
-        </p:txBody>
-      </p:sp>
-      <p:sp>
-        <p:nvSpPr>
-          <p:cNvPr id="23" name="Text 21"/>
-          <p:cNvSpPr/>
-          <p:nvPr/>
-        </p:nvSpPr>
-        <p:spPr>
-          <a:xfrm>
-            <a:off x="3520440" y="3931920"/>
-            <a:ext cx="2286000" cy="457200"/>
-          </a:xfrm>
-          <a:prstGeom prst="rect">
-            <a:avLst/>
-          </a:prstGeom>
-          <a:noFill/>
-          <a:ln/>
-        </p:spPr>
-        <p:txBody>
-          <a:bodyPr wrap="square" lIns="0" tIns="0" rIns="0" bIns="0" rtlCol="0" anchor="ctr"/>
-          <a:lstStyle/>
-          <a:p>
-            <a:pPr marL="0" indent="0">
-              <a:buNone/>
-            </a:pPr>
-            <a:r>
-              <a:rPr lang="en-US" sz="1200" dirty="0">
-                <a:solidFill>
-                  <a:srgbClr val="6B7280"/>
-                </a:solidFill>
-                <a:latin typeface="Calibri" pitchFamily="34" charset="0"/>
-                <a:ea typeface="Calibri" pitchFamily="34" charset="-122"/>
-                <a:cs typeface="Calibri" pitchFamily="34" charset="-120"/>
-              </a:rPr>
-              <a:t>Chat UI (3 lines of code)</a:t>
-            </a:r>
-            <a:endParaRPr lang="en-US" sz="1200" dirty="0"/>
-          </a:p>
-        </p:txBody>
-      </p:sp>
-      <p:sp>
-        <p:nvSpPr>
-          <p:cNvPr id="24" name="Shape 22"/>
-          <p:cNvSpPr/>
-          <p:nvPr/>
-        </p:nvSpPr>
-        <p:spPr>
-          <a:xfrm>
-            <a:off x="6126480" y="3154680"/>
-            <a:ext cx="2743200" cy="1417320"/>
-          </a:xfrm>
-          <a:prstGeom prst="rect">
-            <a:avLst/>
-          </a:prstGeom>
-          <a:solidFill>
-            <a:srgbClr val="FFFFFF"/>
-          </a:solidFill>
-          <a:ln w="12700">
-            <a:solidFill>
-              <a:srgbClr val="E5E7EB"/>
-            </a:solidFill>
-            <a:prstDash val="solid"/>
-          </a:ln>
-        </p:spPr>
-        <p:txBody>
-          <a:bodyPr/>
-          <a:lstStyle/>
-          <a:p>
-            <a:endParaRPr lang="en-US"/>
-          </a:p>
-        </p:txBody>
-      </p:sp>
-      <p:sp>
-        <p:nvSpPr>
-          <p:cNvPr id="25" name="Shape 23"/>
-          <p:cNvSpPr/>
-          <p:nvPr/>
-        </p:nvSpPr>
-        <p:spPr>
-          <a:xfrm>
-            <a:off x="6126480" y="3154680"/>
-            <a:ext cx="73152" cy="1417320"/>
-          </a:xfrm>
-          <a:prstGeom prst="rect">
-            <a:avLst/>
-          </a:prstGeom>
-          <a:solidFill>
-            <a:srgbClr val="059669"/>
-          </a:solidFill>
-          <a:ln w="12700">
-            <a:solidFill>
-              <a:srgbClr val="059669"/>
-            </a:solidFill>
-            <a:prstDash val="solid"/>
-          </a:ln>
-        </p:spPr>
-        <p:txBody>
-          <a:bodyPr/>
-          <a:lstStyle/>
-          <a:p>
-            <a:endParaRPr lang="en-US"/>
-          </a:p>
-        </p:txBody>
-      </p:sp>
-      <p:sp>
-        <p:nvSpPr>
-          <p:cNvPr id="26" name="Text 24"/>
-          <p:cNvSpPr/>
-          <p:nvPr/>
-        </p:nvSpPr>
-        <p:spPr>
-          <a:xfrm>
-            <a:off x="6400800" y="3383280"/>
-            <a:ext cx="2286000" cy="457200"/>
-          </a:xfrm>
-          <a:prstGeom prst="rect">
-            <a:avLst/>
-          </a:prstGeom>
-          <a:noFill/>
-          <a:ln/>
-        </p:spPr>
-        <p:txBody>
-          <a:bodyPr wrap="square" lIns="0" tIns="0" rIns="0" bIns="0" rtlCol="0" anchor="ctr"/>
-          <a:lstStyle/>
-          <a:p>
-            <a:pPr marL="0" indent="0">
-              <a:buNone/>
-            </a:pPr>
-            <a:r>
-              <a:rPr lang="en-US" sz="2200" b="1" dirty="0">
-                <a:solidFill>
-                  <a:srgbClr val="1A1A2E"/>
-                </a:solidFill>
-                <a:latin typeface="Georgia" pitchFamily="34" charset="0"/>
-                <a:ea typeface="Georgia" pitchFamily="34" charset="-122"/>
-                <a:cs typeface="Georgia" pitchFamily="34" charset="-120"/>
-              </a:rPr>
-              <a:t>Ragas</a:t>
-            </a:r>
-            <a:endParaRPr lang="en-US" sz="2200" dirty="0"/>
-          </a:p>
-        </p:txBody>
-      </p:sp>
-      <p:sp>
-        <p:nvSpPr>
-          <p:cNvPr id="27" name="Text 25"/>
-          <p:cNvSpPr/>
-          <p:nvPr/>
-        </p:nvSpPr>
-        <p:spPr>
-          <a:xfrm>
-            <a:off x="6400800" y="3931920"/>
-            <a:ext cx="2286000" cy="457200"/>
-          </a:xfrm>
-          <a:prstGeom prst="rect">
-            <a:avLst/>
-          </a:prstGeom>
-          <a:noFill/>
-          <a:ln/>
-        </p:spPr>
-        <p:txBody>
-          <a:bodyPr wrap="square" lIns="0" tIns="0" rIns="0" bIns="0" rtlCol="0" anchor="ctr"/>
-          <a:lstStyle/>
-          <a:p>
-            <a:pPr marL="0" indent="0">
-              <a:buNone/>
-            </a:pPr>
-            <a:r>
-              <a:rPr lang="en-US" sz="1200" dirty="0">
-                <a:solidFill>
-                  <a:srgbClr val="6B7280"/>
-                </a:solidFill>
-                <a:latin typeface="Calibri" pitchFamily="34" charset="0"/>
-                <a:ea typeface="Calibri" pitchFamily="34" charset="-122"/>
-                <a:cs typeface="Calibri" pitchFamily="34" charset="-120"/>
-              </a:rPr>
-              <a:t>Evaluation metrics</a:t>
-            </a:r>
-            <a:endParaRPr lang="en-US" sz="1200" dirty="0"/>
-          </a:p>
-        </p:txBody>
-      </p:sp>
-      <p:sp>
-        <p:nvSpPr>
-          <p:cNvPr id="28" name="Text 26"/>
-          <p:cNvSpPr/>
-          <p:nvPr/>
-        </p:nvSpPr>
-        <p:spPr>
-          <a:xfrm>
-            <a:off x="365760" y="4846320"/>
-            <a:ext cx="8412480" cy="228600"/>
-          </a:xfrm>
-          <a:prstGeom prst="rect">
-            <a:avLst/>
-          </a:prstGeom>
-          <a:noFill/>
-          <a:ln/>
-        </p:spPr>
-        <p:txBody>
-          <a:bodyPr wrap="square" lIns="0" tIns="0" rIns="0" bIns="0" rtlCol="0" anchor="ctr"/>
-          <a:lstStyle/>
-          <a:p>
-            <a:pPr marL="0" indent="0" algn="l">
-              <a:buNone/>
-            </a:pPr>
-            <a:r>
-              <a:rPr lang="en-US" sz="900" i="1" dirty="0">
-                <a:solidFill>
-                  <a:srgbClr val="6B7280"/>
-                </a:solidFill>
-                <a:latin typeface="Calibri" pitchFamily="34" charset="0"/>
-                <a:ea typeface="Calibri" pitchFamily="34" charset="-122"/>
-                <a:cs typeface="Calibri" pitchFamily="34" charset="-120"/>
-              </a:rPr>
-              <a:t>Everything open-source. Everything runs on a free Colab tier.</a:t>
-            </a:r>
-            <a:endParaRPr lang="en-US" sz="900" dirty="0"/>
-          </a:p>
-        </p:txBody>
-      </p:sp>
     </p:spTree>
   </p:cSld>
   <p:clrMapOvr>
